--- a/Curso Gas B/03 - ITC-ICG 05-06 - Estaciones de servicio y envases GLP uso propio/03 - ITC-ICG 05-06 - Estaciones de servicio y envases GLP uso propio - Vídeo 2.pptx
+++ b/Curso Gas B/03 - ITC-ICG 05-06 - Estaciones de servicio y envases GLP uso propio/03 - ITC-ICG 05-06 - Estaciones de servicio y envases GLP uso propio - Vídeo 2.pptx
@@ -20,6 +20,12 @@
     <p:sldId id="268" r:id="rId20"/>
     <p:sldId id="269" r:id="rId21"/>
     <p:sldId id="270" r:id="rId22"/>
+    <p:sldId id="271" r:id="rId23"/>
+    <p:sldId id="272" r:id="rId24"/>
+    <p:sldId id="273" r:id="rId25"/>
+    <p:sldId id="274" r:id="rId26"/>
+    <p:sldId id="275" r:id="rId27"/>
+    <p:sldId id="276" r:id="rId28"/>
   </p:sldIdLst>
   <p:sldSz cx="12191695" cy="6858000" type="screen4x3"/>
   <p:notesSz cx="6858000" cy="9144000"/>
@@ -516,12 +522,12 @@
           <a:lstStyle/>
           <a:p>
             <a:r>
-              <a:t>N1: ¿Qué reglas hay que cumplir cuando montas una batería de bombonas que alimenta una vivienda o un negocio?</a:t>
-            </a:r>
-          </a:p>
-          <a:p>
-            <a:r>
-              <a:t>N2: Esta es la instrucción cero seis, la de los envases de gas licuado del petróleo, butano y propano, para uso propio. Aquí aparecen los números que más caen en el examen: las capacidades máximas de almacenamiento, las distancias de seguridad a hogares y enchufes, las condiciones de armarios y casetas, y la prueba de estanquidad. La instrucción parte en dos según el tamaño del envase: hasta quince kilos, la bombona doméstica típica, y más de quince kilos, la instalación grande. Domina las dos tablas de distancias y tendrás medio vídeo ganado.</a:t>
+              <a:t>N1: ¿Esto va de las bombonas de butano de casa? Eso parece muy sencillo, ¿no?</a:t>
+            </a:r>
+          </a:p>
+          <a:p>
+            <a:r>
+              <a:t>N2: Va de eso, sí, pero verás que de sencillo tiene poco cuando lo montas bien. Esta instrucción, la cero seis, regula las instalaciones de envases de gas licuado del petróleo, butano y propano, que alimentan una instalación receptora para uso propio, es decir, para una vivienda o un negocio. Y te aviso de una cosa: este es el vídeo de los números. Aquí salen las capacidades máximas, las distancias de seguridad a fuegos y enchufes, las condiciones de los armarios y las casetas, y la famosa prueba de estanquidad. Son datos muy preguntables. La instrucción parte en dos según el tamaño del envase: hasta quince kilos, la bombona doméstica típica, y más de quince kilos, los envases grandes. Domina esas dos tablas de distancias y tendrás medio vídeo ganado.</a:t>
             </a:r>
           </a:p>
         </p:txBody>
@@ -591,12 +597,12 @@
           <a:lstStyle/>
           <a:p>
             <a:r>
-              <a:t>N1: ¿Cómo tiene que ser la caseta que protege los envases grandes?</a:t>
-            </a:r>
-          </a:p>
-          <a:p>
-            <a:r>
-              <a:t>N2: Construida con material prácticamente incombustible, y ventila arriba y abajo, con los huecos a menos de quince centímetros del suelo y de la parte superior. Arriba salen los vapores ligeros, y abajo escapa el gas licuado que se posa. La amplitud mínima de esa ventilación es uno entre diez de la superficie de la caseta, y aquí ojo, no lo confundas con el uno entre cien del armario del apartado anterior. El suelo va ligeramente inclinado hacia fuera, para que el gas pesado resbale al exterior en vez de acumularse dentro. Y si la caseta se pega a la fachada del edificio, hay que duplicar la superficie de ventilación.</a:t>
+              <a:t>N1: El cuadro de distancias me agobia. ¿Hay forma de memorizarlo?</a:t>
+            </a:r>
+          </a:p>
+          <a:p>
+            <a:r>
+              <a:t>N2: Sí, ordénalo de más peligro a menos, que es de más distancia a menos. Lo que da fuego de verdad, los hogares y otras fuentes de calor, es lo más peligroso, así que lo más lejos: un metro y medio. Luego, las tomas de corriente, los enchufes, a medio metro, porque un enchufe puede chispear justo al conectar o desconectar algo. Y lo más cerca que se permite, treinta centímetros, para los hornillos, los interruptores y los conductores eléctricos. Uno y medio, medio, treinta centímetros. Y dos trampillas de reducción que caen: si pones una protección contra la radiación, una pantalla sólida y eficaz de material casi incombustible, el hogar puede acercarse de un metro y medio a medio metro, y el hornillo de treinta a diez centímetros. Ese material de la pantalla tiene una clase concreta de reacción al fuego, prácticamente incombustible.</a:t>
             </a:r>
           </a:p>
         </p:txBody>
@@ -666,12 +672,12 @@
           <a:lstStyle/>
           <a:p>
             <a:r>
-              <a:t>N1: ¿Cómo se leen las distancias del cuadro dos sin agobiarse?</a:t>
-            </a:r>
-          </a:p>
-          <a:p>
-            <a:r>
-              <a:t>N2: La lógica es doble. Primero, cuanto más gas, más distancia: hasta setenta kilos, los hogares quedan a más de un metro y medio; por encima de setenta kilos, a más de tres metros. Segundo, la caseta protege, así que a veces la distancia baja: fíjate en alcantarillas y aberturas a sótanos, que sin caseta piden un metro y medio, pero con caseta basta medio metro, porque la caseta ya hace de barrera. En cambio, para hogares y motores, la caseta no rebaja nada. Y cuidado con dos números de extintores que se confunden: en el interior del local hacían falta dos extintores siempre; en la caseta, esos dos extintores entran cuando el contenido sobrepasa los trescientos cincuenta kilos. Mismo extintor, distinto disparador.</a:t>
+              <a:t>N1: Con los envases grandes, ¿qué cambia respecto a las bombonas pequeñas?</a:t>
+            </a:r>
+          </a:p>
+          <a:p>
+            <a:r>
+              <a:t>N2: Sube el listón. Con envases de más de quince kilos, el almacenamiento total ya no es trescientos, sino mil kilos como máximo. Y la instalación se monta normalmente en baterías: un grupo de envases en servicio, dando gas, y otro grupo en reserva, esperando. ¿Y quién gestiona ese relevo? Un aparato llamado inversor. El inversor es listo: cuando la batería que está dando gas se vacía, cambia solo a la de reserva sin que te quedes sin suministro, y de paso hace la primera etapa de regulación de presión. Si no hay envases de reserva, ese papel de primera regulación lo hace un simple regulador. Y en el colector, el tubo donde se juntan los envases, va una válvula antirretorno, que impide que el gas se vaya para atrás hacia los envases vacíos. Además, un envase que se pueda llenar en su propio sitio pasa a regirse por la instrucción de los depósitos fijos de GLP.</a:t>
             </a:r>
           </a:p>
         </p:txBody>
@@ -741,12 +747,12 @@
           <a:lstStyle/>
           <a:p>
             <a:r>
-              <a:t>N1: ¿Cuál es el momento más peligroso de toda la instalación?</a:t>
-            </a:r>
-          </a:p>
-          <a:p>
-            <a:r>
-              <a:t>N2: El cambio de bombona. Al desacoplar siempre hay un pequeño escape de gas, así que la regla es firme: nada de fuego encendido, ni tocar ningún interruptor eléctrico, ni motores en marcha. Esta precaución se relaja si hay mucha distancia: más de veinte metros si los envases están dentro de un local, o más de diez metros si están fuera. Dentro se pide más porque el gas no se dispersa igual. Y las dos precauciones eléctricas, interruptores y motores, ya no hacen falta si esos aparatos son antiexplosivos. Truco: cambiar bombona es apagarlo todo, salvo que esté muy lejos o sea material antichispa. Este gesto es el que evita el fogonazo en la cara de quien cambia el envase.</a:t>
+              <a:t>N1: ¿Los envases grandes también pueden ir dentro de casa?</a:t>
+            </a:r>
+          </a:p>
+          <a:p>
+            <a:r>
+              <a:t>N2: Por norma general, no: los envases de más de quince kilos van siempre en el exterior de las edificaciones, protegidos por una caseta que cumple unas condiciones que veremos enseguida. Y siguen valiendo las prohibiciones de siempre: nada de sótanos, semisótanos, cajas de escalera ni pasillos, por lo del gas que pesa y se embolsa. Además, aparece una prohibición nueva: tampoco se permiten en locales con ventilación forzada, esos que llevan extractores metiendo y sacando aire, salvo que se tomen medidas especiales, como que la ventilación sea antiexplosiva y sus conductos no pasen por otros locales, o que haya un sistema de detección de fugas que corte el gas y active los extractores. ¿Por qué? Porque un extractor moviendo una atmósfera con gas puede repartir la fuga o incluso provocar la chispa. Por defecto, quédate con: envases grandes, fuera y en caseta.</a:t>
             </a:r>
           </a:p>
         </p:txBody>
@@ -816,12 +822,12 @@
           <a:lstStyle/>
           <a:p>
             <a:r>
-              <a:t>N1: ¿Qué papeleo hay que hacer para poner en marcha estos envases?</a:t>
-            </a:r>
-          </a:p>
-          <a:p>
-            <a:r>
-              <a:t>N2: Aquí es ligero, pero obligatorio. La instalación no precisa autorización previa ni, a diferencia de la estación de servicio del vídeo anterior, ninguna comunicación a la Administración: basta con que titular y empresa instaladora guarden el certificado de instalación por si lo piden. Antes de la puesta en servicio, la empresa instaladora hace la prueba de estanquidad, y aquí van los tres números de examen: una vez y media la presión de operación, durante diez minutos, con aire, gas inerte o gas licuado del petróleo en fase gaseosa. Con resultado positivo, emite el certificado de instalación, y la puesta en servicio se hace conjuntamente con la instalación receptora. Y antes de abrir cualquier tubo para reparar, purgar y soplar: nunca metas herramienta en una canalización que puede tener gas dentro.</a:t>
+              <a:t>N1: ¿Y la única forma de tenerlos dentro cuál es?</a:t>
+            </a:r>
+          </a:p>
+          <a:p>
+            <a:r>
+              <a:t>N2: Hay una sola puerta, y es estrecha. Los envases grandes pueden ir en el interior del local únicamente si el contenido total de GLP no pasa de setenta kilos, y además el local es grande y está muy bien ventilado. En concreto: volumen superior a mil metros cúbicos, superficie mínima de ciento cincuenta metros cuadrados, huecos de ventilación con una superficie libre de al menos una quinceava parte de la superficie del local, y sirviendo cualquier abertura permanente, puertas o ventanas, que llegue a ras de suelo, otra vez porque el gas se posa abajo. Y encima, protección contra incendios: dos extintores de una eficacia concreta, veintiuno A, ciento trece B, cerca de los envases y en sitio de fácil acceso. Memoriza los setenta kilos como la frontera dentro o fuera para los envases de más de quince kilos. Si se pasa de setenta, fuera sí o sí.</a:t>
             </a:r>
           </a:p>
         </p:txBody>
@@ -891,12 +897,12 @@
           <a:lstStyle/>
           <a:p>
             <a:r>
-              <a:t>N1: ¿Cómo se controla esta instalación con el tiempo, y por qué se llama revisión?</a:t>
-            </a:r>
-          </a:p>
-          <a:p>
-            <a:r>
-              <a:t>N2: Fíjate en la palabra: aquí se habla de revisión periódica, no de inspección. Es coherente con la regla general del curso: los envases de gas licuado del petróleo no están conectados a una red de distribución, así que su control se llama revisión, no inspección. El titular encarga a una empresa instaladora esa revisión de los envases, y va de la mano de la revisión periódica de la instalación receptora a la que alimentan, según la instrucción cero siete, para no hacer dos visitas. Y se libra otra vez el clásico: un único envase de menos de quince kilos conectado por tubo flexible o acoplado directamente a un solo aparato de gas móvil, es decir la bombona con la estufa.</a:t>
+              <a:t>N1: ¿Y cómo tiene que ser esa caseta por dentro?</a:t>
+            </a:r>
+          </a:p>
+          <a:p>
+            <a:r>
+              <a:t>N2: La caseta se construye con material casi incombustible, una clase de reacción al fuego alta. Y su secreto son dos rejillas, no una: ventila arriba y abajo. Los huecos van a menos de quince centímetros del suelo y a menos de quince centímetros del techo. ¿Por qué las dos? Abajo escapa el GLP que se posa, que es lo más importante; y arriba salen los vapores más ligeros y se favorece la corriente de aire. La superficie de esas aberturas es de al menos una décima parte de la superficie de la caseta, y de nuevo casi cuadradas, sin que una dimensión pase del doble de la otra. Y un detalle bonito: el suelo de la caseta va ligeramente inclinado hacia el exterior, para que el gas pesado resbale afuera en vez de quedarse dentro. Cuidado con un lío típico de examen: la ventilación de la caseta es una décima parte, y la del armario de las bombonas pequeñas era una centésima. No confundas la décima de la caseta con la centésima del armario. Y si la caseta se pega a la fachada, se duplica la ventilación.</a:t>
             </a:r>
           </a:p>
         </p:txBody>
@@ -966,12 +972,312 @@
           <a:lstStyle/>
           <a:p>
             <a:r>
-              <a:t>N1: Si te quedas con tres ideas de este vídeo, que sean estas.</a:t>
-            </a:r>
-          </a:p>
-          <a:p>
-            <a:r>
-              <a:t>N2: Primera, la física que lo explica todo: el propano y el butano pesan más que el aire, caen y se embolsan abajo; por eso nada de sótanos ni pasillos, y por eso la ventilación va abajo en el armario y arriba y abajo en la caseta, con el suelo inclinado hacia fuera. Segunda, los tres topes que caen fijo: trescientos kilos para envases de hasta quince, mil kilos para envases mayores, y setenta kilos como frontera para poder tenerlos dentro del local; y recuerda que los vacíos cuentan. Y tercera, el gesto que salva la cara: al cambiar la bombona, apágalo todo, ni fuego, ni interruptores, ni motores, salvo mucha distancia o material antiexplosivo. Esa costumbre es la que evita el fogonazo.</a:t>
+              <a:t>N1: El segundo cuadro de distancias tiene muchas columnas. ¿Cómo lo leo sin agobio?</a:t>
+            </a:r>
+          </a:p>
+          <a:p>
+            <a:r>
+              <a:t>N2: Con dos ideas y ya está. Idea una: cuanto más gas, más distancia. Por eso el cuadro separa según el contenido total, hasta setenta kilos o por encima, y cuando pasas de setenta las distancias crecen. Por ejemplo, a un hogar se está a más de metro y medio hasta setenta kilos, pero a más de tres metros por encima. Idea dos: la caseta protege, así que a veces la distancia baja. Fíjate en las alcantarillas, desagües y aberturas a sótanos: sin caseta necesitas metro y medio, pero con caseta te basta medio metro, porque la caseta ya hace de barrera y evita que el gas se cuele por esos huecos hacia abajo. En cambio, para los hogares y los motores, la caseta no rebaja nada, siguen lejos. La chuleta: más kilos, más metros; y la caseta recorta hacia desagües y sótanos, pero no hacia fuegos ni motores.</a:t>
+            </a:r>
+          </a:p>
+        </p:txBody>
+      </p:sp>
+      <p:sp>
+        <p:nvSpPr>
+          <p:cNvPr id="4" name="Slide Number Placeholder 3"/>
+          <p:cNvSpPr>
+            <a:spLocks noGrp="1"/>
+          </p:cNvSpPr>
+          <p:nvPr>
+            <p:ph type="sldNum" idx="5" sz="quarter"/>
+          </p:nvPr>
+        </p:nvSpPr>
+        <p:spPr/>
+      </p:sp>
+    </p:spTree>
+  </p:cSld>
+  <p:clrMapOvr>
+    <a:masterClrMapping/>
+  </p:clrMapOvr>
+</p:notes>
+</file>
+
+<file path=ppt/notesSlides/notesSlide16.xml><?xml version="1.0" encoding="utf-8"?>
+<p:notes xmlns:a="http://schemas.openxmlformats.org/drawingml/2006/main" xmlns:p="http://schemas.openxmlformats.org/presentationml/2006/main" xmlns:r="http://schemas.openxmlformats.org/officeDocument/2006/relationships">
+  <p:cSld>
+    <p:spTree>
+      <p:nvGrpSpPr>
+        <p:cNvPr id="1" name=""/>
+        <p:cNvGrpSpPr/>
+        <p:nvPr/>
+      </p:nvGrpSpPr>
+      <p:grpSpPr>
+        <a:xfrm>
+          <a:off x="0" y="0"/>
+          <a:ext cx="0" cy="0"/>
+          <a:chOff x="0" y="0"/>
+          <a:chExt cx="0" cy="0"/>
+        </a:xfrm>
+      </p:grpSpPr>
+      <p:sp>
+        <p:nvSpPr>
+          <p:cNvPr id="2" name="Slide Image Placeholder 1"/>
+          <p:cNvSpPr>
+            <a:spLocks noGrp="1"/>
+          </p:cNvSpPr>
+          <p:nvPr>
+            <p:ph type="sldImg" idx="2"/>
+          </p:nvPr>
+        </p:nvSpPr>
+        <p:spPr/>
+      </p:sp>
+      <p:sp>
+        <p:nvSpPr>
+          <p:cNvPr id="3" name="Notes Placeholder 2"/>
+          <p:cNvSpPr>
+            <a:spLocks noGrp="1"/>
+          </p:cNvSpPr>
+          <p:nvPr>
+            <p:ph type="body" idx="3" sz="quarter"/>
+          </p:nvPr>
+        </p:nvSpPr>
+        <p:spPr/>
+        <p:txBody>
+          <a:bodyPr/>
+          <a:lstStyle/>
+          <a:p>
+            <a:r>
+              <a:t>N1: Lo de los extintores me lía. ¿Cuándo hacen falta?</a:t>
+            </a:r>
+          </a:p>
+          <a:p>
+            <a:r>
+              <a:t>N2: Es fácil si separas los dos casos, porque el extintor es el mismo pero el motivo por el que se pone cambia. El extintor siempre es el mismo modelo de eficacia, veintiuno A, ciento trece B, y siempre son dos. Caso uno: cuando metes los envases en el interior del local, esa excepción de los setenta kilos que vimos, los dos extintores son obligatorios siempre, por el simple hecho de tener gas dentro. Caso dos: cuando los envases están en la caseta, los dos extintores solo hacen falta si el contenido total sobrepasa los trescientos cincuenta kilos, y se colocan en el exterior de la caseta, a mano. Resumen para no fallar: mismo extintor, distinto disparador. Interior, siempre; caseta, a partir de trescientos cincuenta kilos.</a:t>
+            </a:r>
+          </a:p>
+        </p:txBody>
+      </p:sp>
+      <p:sp>
+        <p:nvSpPr>
+          <p:cNvPr id="4" name="Slide Number Placeholder 3"/>
+          <p:cNvSpPr>
+            <a:spLocks noGrp="1"/>
+          </p:cNvSpPr>
+          <p:nvPr>
+            <p:ph type="sldNum" idx="5" sz="quarter"/>
+          </p:nvPr>
+        </p:nvSpPr>
+        <p:spPr/>
+      </p:sp>
+    </p:spTree>
+  </p:cSld>
+  <p:clrMapOvr>
+    <a:masterClrMapping/>
+  </p:clrMapOvr>
+</p:notes>
+</file>
+
+<file path=ppt/notesSlides/notesSlide17.xml><?xml version="1.0" encoding="utf-8"?>
+<p:notes xmlns:a="http://schemas.openxmlformats.org/drawingml/2006/main" xmlns:p="http://schemas.openxmlformats.org/presentationml/2006/main" xmlns:r="http://schemas.openxmlformats.org/officeDocument/2006/relationships">
+  <p:cSld>
+    <p:spTree>
+      <p:nvGrpSpPr>
+        <p:cNvPr id="1" name=""/>
+        <p:cNvGrpSpPr/>
+        <p:nvPr/>
+      </p:nvGrpSpPr>
+      <p:grpSpPr>
+        <a:xfrm>
+          <a:off x="0" y="0"/>
+          <a:ext cx="0" cy="0"/>
+          <a:chOff x="0" y="0"/>
+          <a:chExt cx="0" cy="0"/>
+        </a:xfrm>
+      </p:grpSpPr>
+      <p:sp>
+        <p:nvSpPr>
+          <p:cNvPr id="2" name="Slide Image Placeholder 1"/>
+          <p:cNvSpPr>
+            <a:spLocks noGrp="1"/>
+          </p:cNvSpPr>
+          <p:nvPr>
+            <p:ph type="sldImg" idx="2"/>
+          </p:nvPr>
+        </p:nvSpPr>
+        <p:spPr/>
+      </p:sp>
+      <p:sp>
+        <p:nvSpPr>
+          <p:cNvPr id="3" name="Notes Placeholder 2"/>
+          <p:cNvSpPr>
+            <a:spLocks noGrp="1"/>
+          </p:cNvSpPr>
+          <p:nvPr>
+            <p:ph type="body" idx="3" sz="quarter"/>
+          </p:nvPr>
+        </p:nvSpPr>
+        <p:spPr/>
+        <p:txBody>
+          <a:bodyPr/>
+          <a:lstStyle/>
+          <a:p>
+            <a:r>
+              <a:t>N1: ¿Cambiar una bombona tiene tanto riesgo como para venir en la norma?</a:t>
+            </a:r>
+          </a:p>
+          <a:p>
+            <a:r>
+              <a:t>N2: Es el momento más peligroso de toda la instalación, y por eso tiene reglas propias. Al desacoplar un envase siempre se escapa un poquito de gas, es inevitable. Así que durante el cambio: nada de encender ni mantener ningún punto de fuego, no accionar ningún interruptor eléctrico, y ningún motor en marcha. ¿Por qué tan estricto? Porque cualquier chispa, la de un interruptor o la de un motor, con ese gas suelto en el aire, puede prender. Ahora bien, la norma se relaja si hay distancia de sobra: no hace falta tanta precaución si entre los envases y esos elementos median más de veinte metros cuando están dentro de un local, o más de diez metros cuando están fuera. Dentro se pide más distancia porque el gas no se dispersa igual. Y si los aparatos eléctricos son antiexplosivos, de esos que no dan chispa al aire, las dos precauciones eléctricas ya no hacen falta. Truco: cambiar bombona es apagarlo todo, salvo que estés muy lejos o el material sea antichispa.</a:t>
+            </a:r>
+          </a:p>
+        </p:txBody>
+      </p:sp>
+      <p:sp>
+        <p:nvSpPr>
+          <p:cNvPr id="4" name="Slide Number Placeholder 3"/>
+          <p:cNvSpPr>
+            <a:spLocks noGrp="1"/>
+          </p:cNvSpPr>
+          <p:nvPr>
+            <p:ph type="sldNum" idx="5" sz="quarter"/>
+          </p:nvPr>
+        </p:nvSpPr>
+        <p:spPr/>
+      </p:sp>
+    </p:spTree>
+  </p:cSld>
+  <p:clrMapOvr>
+    <a:masterClrMapping/>
+  </p:clrMapOvr>
+</p:notes>
+</file>
+
+<file path=ppt/notesSlides/notesSlide18.xml><?xml version="1.0" encoding="utf-8"?>
+<p:notes xmlns:a="http://schemas.openxmlformats.org/drawingml/2006/main" xmlns:p="http://schemas.openxmlformats.org/presentationml/2006/main" xmlns:r="http://schemas.openxmlformats.org/officeDocument/2006/relationships">
+  <p:cSld>
+    <p:spTree>
+      <p:nvGrpSpPr>
+        <p:cNvPr id="1" name=""/>
+        <p:cNvGrpSpPr/>
+        <p:nvPr/>
+      </p:nvGrpSpPr>
+      <p:grpSpPr>
+        <a:xfrm>
+          <a:off x="0" y="0"/>
+          <a:ext cx="0" cy="0"/>
+          <a:chOff x="0" y="0"/>
+          <a:chExt cx="0" cy="0"/>
+        </a:xfrm>
+      </p:grpSpPr>
+      <p:sp>
+        <p:nvSpPr>
+          <p:cNvPr id="2" name="Slide Image Placeholder 1"/>
+          <p:cNvSpPr>
+            <a:spLocks noGrp="1"/>
+          </p:cNvSpPr>
+          <p:nvPr>
+            <p:ph type="sldImg" idx="2"/>
+          </p:nvPr>
+        </p:nvSpPr>
+        <p:spPr/>
+      </p:sp>
+      <p:sp>
+        <p:nvSpPr>
+          <p:cNvPr id="3" name="Notes Placeholder 2"/>
+          <p:cNvSpPr>
+            <a:spLocks noGrp="1"/>
+          </p:cNvSpPr>
+          <p:nvPr>
+            <p:ph type="body" idx="3" sz="quarter"/>
+          </p:nvPr>
+        </p:nvSpPr>
+        <p:spPr/>
+        <p:txBody>
+          <a:bodyPr/>
+          <a:lstStyle/>
+          <a:p>
+            <a:r>
+              <a:t>N1: La estufa de butano con su bombona, ¿también lleva todo este papeleo?</a:t>
+            </a:r>
+          </a:p>
+          <a:p>
+            <a:r>
+              <a:t>N2: No, y esa es la primera exclusión que tienes que conocer. Queda fuera del papeleo de puesta en servicio la instalación más sencilla que existe: un único envase de GLP de contenido igual o menor a quince kilos, conectado por tubería flexible o acoplado directamente a un solo aparato de gas móvil. Es el clásico bombona de butano más estufa móvil, o la bombona con el infiernillo. Eso se libra. Pero en cuanto haya más de un envase, o tubería fija, o varios aparatos, ya deja de estar excluido y entra el papeleo. Este límite, un envase de hasta quince kilos a un solo aparato móvil, aparece una y otra vez en el reglamento; apréndetelo como la frontera del cacharro suelto. Y para el resto, igual que la estación de servicio: las instalaciones de envases de GLP no precisan autorización administrativa previa.</a:t>
+            </a:r>
+          </a:p>
+        </p:txBody>
+      </p:sp>
+      <p:sp>
+        <p:nvSpPr>
+          <p:cNvPr id="4" name="Slide Number Placeholder 3"/>
+          <p:cNvSpPr>
+            <a:spLocks noGrp="1"/>
+          </p:cNvSpPr>
+          <p:nvPr>
+            <p:ph type="sldNum" idx="5" sz="quarter"/>
+          </p:nvPr>
+        </p:nvSpPr>
+        <p:spPr/>
+      </p:sp>
+    </p:spTree>
+  </p:cSld>
+  <p:clrMapOvr>
+    <a:masterClrMapping/>
+  </p:clrMapOvr>
+</p:notes>
+</file>
+
+<file path=ppt/notesSlides/notesSlide19.xml><?xml version="1.0" encoding="utf-8"?>
+<p:notes xmlns:a="http://schemas.openxmlformats.org/drawingml/2006/main" xmlns:p="http://schemas.openxmlformats.org/presentationml/2006/main" xmlns:r="http://schemas.openxmlformats.org/officeDocument/2006/relationships">
+  <p:cSld>
+    <p:spTree>
+      <p:nvGrpSpPr>
+        <p:cNvPr id="1" name=""/>
+        <p:cNvGrpSpPr/>
+        <p:nvPr/>
+      </p:nvGrpSpPr>
+      <p:grpSpPr>
+        <a:xfrm>
+          <a:off x="0" y="0"/>
+          <a:ext cx="0" cy="0"/>
+          <a:chOff x="0" y="0"/>
+          <a:chExt cx="0" cy="0"/>
+        </a:xfrm>
+      </p:grpSpPr>
+      <p:sp>
+        <p:nvSpPr>
+          <p:cNvPr id="2" name="Slide Image Placeholder 1"/>
+          <p:cNvSpPr>
+            <a:spLocks noGrp="1"/>
+          </p:cNvSpPr>
+          <p:nvPr>
+            <p:ph type="sldImg" idx="2"/>
+          </p:nvPr>
+        </p:nvSpPr>
+        <p:spPr/>
+      </p:sp>
+      <p:sp>
+        <p:nvSpPr>
+          <p:cNvPr id="3" name="Notes Placeholder 2"/>
+          <p:cNvSpPr>
+            <a:spLocks noGrp="1"/>
+          </p:cNvSpPr>
+          <p:nvPr>
+            <p:ph type="body" idx="3" sz="quarter"/>
+          </p:nvPr>
+        </p:nvSpPr>
+        <p:spPr/>
+        <p:txBody>
+          <a:bodyPr/>
+          <a:lstStyle/>
+          <a:p>
+            <a:r>
+              <a:t>N1: ¿Qué es eso de la prueba de estanquidad y qué números lleva?</a:t>
+            </a:r>
+          </a:p>
+          <a:p>
+            <a:r>
+              <a:t>N2: Estanquidad significa que no se escape ni una burbuja de gas por ningún lado. Y antes de dar servicio, la empresa instaladora comprueba justo eso en las canalizaciones. Los tres números que caen fijo: se prueba a una presión de una vez y media la presión de operación, es decir, la presión normal de trabajo multiplicada por uno coma cinco, para tener margen de seguridad; se mantiene durante diez minutos; y se hace con aire, con gas inerte o con GLP en fase gaseosa. Si te dan dos veces la presión, o media hora, es falso: aquí es una vez y media y diez minutos. Además, si la prueba se hace con GLP, hay precauciones extra: prohibido fumar, evitar puntos de ignición, y algo muy de oficio, purgar y soplar las canalizaciones antes de reparar, o sea sacar todo el gas y limpiar con aire o inerte para que no quede GLP dentro cuando entre la herramienta. Con resultado positivo, la empresa instaladora emite el certificado de instalación.</a:t>
             </a:r>
           </a:p>
         </p:txBody>
@@ -1041,12 +1347,172 @@
           <a:lstStyle/>
           <a:p>
             <a:r>
-              <a:t>N1: Tres cifras para orientarte antes de empezar.</a:t>
-            </a:r>
-          </a:p>
-          <a:p>
-            <a:r>
-              <a:t>N2: Trescientos kilos es el tope de almacenamiento cuando trabajas con envases pequeños, de hasta quince kilos cada uno. Mil kilos es el tope cuando los envases pasan de quince kilos. Y setenta kilos es la frontera mágica que decide si los envases grandes pueden ir dentro del local o tienen que ir fuera, en caseta. Fíjate en el escalón: bombona pequeña, instalación pequeña; bombona grande, instalación grande. Y en las dos sumas, algo que cae siempre: los envases vacíos cuentan igual que los llenos.</a:t>
+              <a:t>N1: Dame los tres números que mandan en este vídeo.</a:t>
+            </a:r>
+          </a:p>
+          <a:p>
+            <a:r>
+              <a:t>N2: Toma nota, porque estos tres son puro examen. El primero, trescientos: con bombonas pequeñas, de hasta quince kilos, el almacenamiento total no puede pasar de trescientos kilos. El segundo, mil: con envases grandes, de más de quince kilos, el tope sube a mil kilos. Y el tercero, setenta: setenta kilos es la frontera que decide si los envases grandes pueden ir dentro del local o tienen que ir fuera, en caseta. Trescientos, mil, setenta. Fíjate en la lógica: bombona pequeña, instalación pequeña; bombona grande, instalación grande; y setenta es la línea de dentro o fuera. Con esos tres números ya tienes el esqueleto del vídeo.</a:t>
+            </a:r>
+          </a:p>
+        </p:txBody>
+      </p:sp>
+      <p:sp>
+        <p:nvSpPr>
+          <p:cNvPr id="4" name="Slide Number Placeholder 3"/>
+          <p:cNvSpPr>
+            <a:spLocks noGrp="1"/>
+          </p:cNvSpPr>
+          <p:nvPr>
+            <p:ph type="sldNum" idx="5" sz="quarter"/>
+          </p:nvPr>
+        </p:nvSpPr>
+        <p:spPr/>
+      </p:sp>
+    </p:spTree>
+  </p:cSld>
+  <p:clrMapOvr>
+    <a:masterClrMapping/>
+  </p:clrMapOvr>
+</p:notes>
+</file>
+
+<file path=ppt/notesSlides/notesSlide20.xml><?xml version="1.0" encoding="utf-8"?>
+<p:notes xmlns:a="http://schemas.openxmlformats.org/drawingml/2006/main" xmlns:p="http://schemas.openxmlformats.org/presentationml/2006/main" xmlns:r="http://schemas.openxmlformats.org/officeDocument/2006/relationships">
+  <p:cSld>
+    <p:spTree>
+      <p:nvGrpSpPr>
+        <p:cNvPr id="1" name=""/>
+        <p:cNvGrpSpPr/>
+        <p:nvPr/>
+      </p:nvGrpSpPr>
+      <p:grpSpPr>
+        <a:xfrm>
+          <a:off x="0" y="0"/>
+          <a:ext cx="0" cy="0"/>
+          <a:chOff x="0" y="0"/>
+          <a:chExt cx="0" cy="0"/>
+        </a:xfrm>
+      </p:grpSpPr>
+      <p:sp>
+        <p:nvSpPr>
+          <p:cNvPr id="2" name="Slide Image Placeholder 1"/>
+          <p:cNvSpPr>
+            <a:spLocks noGrp="1"/>
+          </p:cNvSpPr>
+          <p:nvPr>
+            <p:ph type="sldImg" idx="2"/>
+          </p:nvPr>
+        </p:nvSpPr>
+        <p:spPr/>
+      </p:sp>
+      <p:sp>
+        <p:nvSpPr>
+          <p:cNvPr id="3" name="Notes Placeholder 2"/>
+          <p:cNvSpPr>
+            <a:spLocks noGrp="1"/>
+          </p:cNvSpPr>
+          <p:nvPr>
+            <p:ph type="body" idx="3" sz="quarter"/>
+          </p:nvPr>
+        </p:nvSpPr>
+        <p:spPr/>
+        <p:txBody>
+          <a:bodyPr/>
+          <a:lstStyle/>
+          <a:p>
+            <a:r>
+              <a:t>N1: ¿Y aquí también hay que avisar a la Administración en quince días como en la estación?</a:t>
+            </a:r>
+          </a:p>
+          <a:p>
+            <a:r>
+              <a:t>N2: Pues no, y es una diferencia fuerte que conviene tener clarísima. En la estación de servicio del vídeo anterior sí se comunicaba, en quince días hábiles. Aquí, en los envases de GLP, no es precisa ninguna comunicación a la Administración. Basta con que tanto el titular como la empresa instaladora conserven el certificado de instalación y lo tengan a mano por si la Administración lo pide. La idea: envases de GLP, ni autorización ni comunicación, pero certificado guardado. La puesta en servicio, además, se hace conjuntamente con la instalación receptora a la que alimentan. Y una última pieza, la del mantenimiento: fíjate en la palabra, aquí se habla de revisión, no de inspección. Es coherente con lo que aprendiste: como los envases no cuelgan de una red de distribución, el control se llama revisión. El titular la encarga a una empresa instaladora, coincidiendo con la revisión periódica de la instalación receptora, para no hacer dos visitas. Y otra vez se libra el único envase de menos de quince kilos con su aparato móvil.</a:t>
+            </a:r>
+          </a:p>
+        </p:txBody>
+      </p:sp>
+      <p:sp>
+        <p:nvSpPr>
+          <p:cNvPr id="4" name="Slide Number Placeholder 3"/>
+          <p:cNvSpPr>
+            <a:spLocks noGrp="1"/>
+          </p:cNvSpPr>
+          <p:nvPr>
+            <p:ph type="sldNum" idx="5" sz="quarter"/>
+          </p:nvPr>
+        </p:nvSpPr>
+        <p:spPr/>
+      </p:sp>
+    </p:spTree>
+  </p:cSld>
+  <p:clrMapOvr>
+    <a:masterClrMapping/>
+  </p:clrMapOvr>
+</p:notes>
+</file>
+
+<file path=ppt/notesSlides/notesSlide21.xml><?xml version="1.0" encoding="utf-8"?>
+<p:notes xmlns:a="http://schemas.openxmlformats.org/drawingml/2006/main" xmlns:p="http://schemas.openxmlformats.org/presentationml/2006/main" xmlns:r="http://schemas.openxmlformats.org/officeDocument/2006/relationships">
+  <p:cSld>
+    <p:spTree>
+      <p:nvGrpSpPr>
+        <p:cNvPr id="1" name=""/>
+        <p:cNvGrpSpPr/>
+        <p:nvPr/>
+      </p:nvGrpSpPr>
+      <p:grpSpPr>
+        <a:xfrm>
+          <a:off x="0" y="0"/>
+          <a:ext cx="0" cy="0"/>
+          <a:chOff x="0" y="0"/>
+          <a:chExt cx="0" cy="0"/>
+        </a:xfrm>
+      </p:grpSpPr>
+      <p:sp>
+        <p:nvSpPr>
+          <p:cNvPr id="2" name="Slide Image Placeholder 1"/>
+          <p:cNvSpPr>
+            <a:spLocks noGrp="1"/>
+          </p:cNvSpPr>
+          <p:nvPr>
+            <p:ph type="sldImg" idx="2"/>
+          </p:nvPr>
+        </p:nvSpPr>
+        <p:spPr/>
+      </p:sp>
+      <p:sp>
+        <p:nvSpPr>
+          <p:cNvPr id="3" name="Notes Placeholder 2"/>
+          <p:cNvSpPr>
+            <a:spLocks noGrp="1"/>
+          </p:cNvSpPr>
+          <p:nvPr>
+            <p:ph type="body" idx="3" sz="quarter"/>
+          </p:nvPr>
+        </p:nvSpPr>
+        <p:spPr/>
+        <p:txBody>
+          <a:bodyPr/>
+          <a:lstStyle/>
+          <a:p>
+            <a:r>
+              <a:t>N1: Cierre del vídeo y del tema. ¿Me reconstruyes el hilo entero?</a:t>
+            </a:r>
+          </a:p>
+          <a:p>
+            <a:r>
+              <a:t>N2: Con mucho gusto, porque si entiendes el porqué, los números se quedan solos. Todo nace de una sola idea física: el GLP pesa más que el aire, así que si fuga, cae y se embolsa abajo. De ahí sale casi todo: la prohibición de sótanos, semisótanos, escaleras y pasillos; la ventilación siempre por abajo, una centésima parte en el armario de las bombonas pequeñas y una décima en la caseta de las grandes; y el suelo de la caseta inclinado hacia fuera para que el gas resbale. Luego, los números de capacidad: bombonas de hasta quince kilos, tope trescientos; envases de más de quince, tope mil, contando siempre llenos y vacíos; y setenta kilos como la frontera para poder tenerlos dentro. Entre bombona y aparato, regulador siempre, porque la bombona da presión alta y variable y el aparato la necesita baja y estable.</a:t>
+            </a:r>
+          </a:p>
+          <a:p>
+            <a:r>
+              <a:t>N1: ¿Y la parte de papeles y seguridad?</a:t>
+            </a:r>
+          </a:p>
+          <a:p>
+            <a:r>
+              <a:t>N2: Ahí, tres cosas que caen. Una, la prueba de estanquidad: una vez y media la presión de operación, diez minutos, con aire, inerte o GLP en gas. Dos, el papeleo ligero: ni autorización ni comunicación, pero titular e instalador guardan el certificado de instalación; y el control periódico se llama revisión, no inspección, y va de la mano de la receptora. Y tres, el momento crítico, el cambio de bombona: apágalo todo salvo que haya mucha distancia o material antiexplosivo. En el examen esto se pregunta cruzando las dos tablas de distancias y los extintores; en la obra, es lo que decide si esa batería de bombonas es segura o es un susto esperando. Con esto has cerrado el Tema cero tres entero: de la gasolinera de gas del vídeo anterior a las bombonas de uso propio de este. Enhorabuena, hoy ya eres bastante más gasista que ayer.</a:t>
             </a:r>
           </a:p>
         </p:txBody>
@@ -1116,12 +1582,12 @@
           <a:lstStyle/>
           <a:p>
             <a:r>
-              <a:t>N1: ¿Qué envases entran en esta instrucción y cuáles no?</a:t>
-            </a:r>
-          </a:p>
-          <a:p>
-            <a:r>
-              <a:t>N2: Establece los criterios técnicos y los requisitos de seguridad para el diseño, la construcción y la explotación de las instalaciones de almacenamiento para uso propio de gas licuado del petróleo en envases, siempre que la carga unitaria de cada envase sea superior a tres kilos, y que sirvan para alimentar a una instalación receptora. El umbral de entrada es esa carga unitaria superior a tres kilos. Por debajo, los cartuchos de camping y las bombonas de menos de tres kilos, esta instrucción ni los mira. Piensa: bombona de butano de doce kilos y medio o de propano de treinta y cinco kilos, dentro; cartuchito de dos kilos, fuera.</a:t>
+              <a:t>N1: ¿Cualquier bombona entra en esta instrucción, hasta el cartucho de camping?</a:t>
+            </a:r>
+          </a:p>
+          <a:p>
+            <a:r>
+              <a:t>N2: No, y aquí está el primer filtro, el umbral de entrada. Esta instrucción se ocupa de los envases de gas licuado del petróleo, o sea butano y propano, cuya carga unitaria sea superior a tres kilos, y que sirvan para alimentar una instalación receptora, la de una vivienda o un negocio. La palabra clave es superior a tres kilos por envase. Por debajo de eso, los cartuchos de camping-gas o las bombonitas de menos de tres kilos, esta instrucción ni los mira. La regla mental: bombona de butano de doce kilos y medio o de propano de treinta y cinco kilos, están dentro; el cartuchito de dos kilos, fuera. Fija ese tres como la puerta de entrada.</a:t>
             </a:r>
           </a:p>
         </p:txBody>
@@ -1191,12 +1657,12 @@
           <a:lstStyle/>
           <a:p>
             <a:r>
-              <a:t>N1: ¿Por qué se divide la instrucción en dos mundos?</a:t>
-            </a:r>
-          </a:p>
-          <a:p>
-            <a:r>
-              <a:t>N2: Porque el tamaño del envase lo cambia todo. Si la capacidad unitaria no pasa de quince kilos, la capacidad total de almacenamiento no puede superar los trescientos kilos. Si el envase pasa de quince kilos, el tope sube a mil kilos. Y ojo a cómo se cuenta esa capacidad total: se suman todos los envases, llenos y vacíos. Un envase vacío también cuenta, porque puede tener restos de gas y porque se va a rellenar. Truco de examen: si te dan una batería de bombonas y te preguntan si cumple, suma las capacidades unitarias de todo lo que haya, no solo lo lleno.</a:t>
+              <a:t>N1: ¿Y por qué se separa según el tamaño de la bombona?</a:t>
+            </a:r>
+          </a:p>
+          <a:p>
+            <a:r>
+              <a:t>N2: Porque no es lo mismo montar cuatro bombonas de butano en un patio que una batería de envases grandes de propano detrás de un restaurante. El riesgo cambia, y por eso la instrucción divide en dos mundos según la capacidad unitaria del envase, es decir, según lo que pesa cada envase por separado. Mundo uno: envases de hasta quince kilos, la bombona doméstica clásica; ahí el almacenamiento total no puede pasar de trescientos kilos. Mundo dos: envases de más de quince kilos, los industriales; ahí el tope sube a mil kilos. No mezcles nunca los dos límites: pequeño va con trescientos, grande va con mil. A partir de aquí, cada mundo tiene sus propias reglas de ubicación, ventilación y distancias, y las vamos a ver una a una.</a:t>
             </a:r>
           </a:p>
         </p:txBody>
@@ -1266,12 +1732,12 @@
           <a:lstStyle/>
           <a:p>
             <a:r>
-              <a:t>N1: ¿Dónde no se puede poner una bombona, y por qué?</a:t>
-            </a:r>
-          </a:p>
-          <a:p>
-            <a:r>
-              <a:t>N2: La regla de oro del gas licuado del petróleo es que pesa más que el aire: si fuga, cae al suelo y se acumula en lo más bajo. Por eso se prohíbe instalar envases en viviendas o locales cuyo piso esté más bajo que el nivel del suelo, es decir sótanos y semisótanos, y también en cajas de escalera y en pasillos, salvo autorización expresa de la comunidad autónoma. Son trampas donde el gas se embolsa. Además, dentro de la vivienda no puede haber más de dos envases conectados en batería, para descarga o en reserva. Poner una bombona en un sótano porque cabía es fabricar una atmósfera explosiva que solo espera una chispa.</a:t>
+              <a:t>N1: Ese tope de trescientos kilos, ¿cómo se cuenta exactamente?</a:t>
+            </a:r>
+          </a:p>
+          <a:p>
+            <a:r>
+              <a:t>N2: Con cuidado, porque aquí se cae mucha gente. La capacidad total de almacenamiento es la suma de las capacidades de todos los envases que haya, y ojo al detalle: cuentan tanto los llenos como los vacíos. ¿Por qué un vacío cuenta si no tiene gas? Por dos motivos: uno, porque un envase vacío casi nunca está del todo vacío, siempre le quedan restos de gas dentro; y dos, porque ese envase se va a rellenar, forma parte de la instalación. Así que si en un examen te dan una batería de bombonas, unas llenas y otras vacías, y te preguntan si cumple, sumas las capacidades de todas, llenas y vacías, y compruebas que no pasa de trescientos kilos. Sumar solo las llenas es el error típico.</a:t>
             </a:r>
           </a:p>
         </p:txBody>
@@ -1341,12 +1807,12 @@
           <a:lstStyle/>
           <a:p>
             <a:r>
-              <a:t>N1: ¿Cómo tiene que ventilar el armario y por qué siempre hace falta regulador?</a:t>
-            </a:r>
-          </a:p>
-          <a:p>
-            <a:r>
-              <a:t>N2: La rejilla del armario va abajo, en la base, precisamente porque el gas pesa y se va al fondo: la fuga tiene que poder escapar por abajo. La superficie libre mínima es uno entre cien de la pared o fondo del armario, y más o menos cuadrada, no una ranura larga y fina; y nunca la tapes con un envase. Los envases con válvula de seguridad, llenos o vacíos, se colocan siempre en posición vertical. Y entre la bombona y el aparato va siempre un regulador, salvo aparatos aprobados para presión directa, y entonces con tubo rígido. ¿Por qué? La bombona da presión alta y variable; el aparato necesita presión baja y estable. Conectar a pelo es peligrosísimo: llama descontrolada, mala combustión y monóxido de carbono.</a:t>
+              <a:t>N1: ¿Por qué tanta manía con los sótanos?</a:t>
+            </a:r>
+          </a:p>
+          <a:p>
+            <a:r>
+              <a:t>N2: Por una propiedad física del GLP que tienes que llevar tatuada: el butano y el propano pesan más que el aire. Eso significa que si hay una fuga, el gas no sube ni se dispersa, sino que cae y se va al punto más bajo, donde se acumula formando una bolsa. Ahora piensa qué es un sótano: precisamente el punto más bajo, un agujero donde el gas se embolsa y solo espera una chispa. Por eso la instrucción prohíbe los envases en sótanos, en semisótanos, en cajas de escalera y en pasillos: son trampas para el gas pesado. La regla de oro del GLP: el gas cae, así que nada de meterlo en agujeros. Solo con autorización expresa de la Comunidad Autónoma se puede saltar esta prohibición, y no es lo normal.</a:t>
             </a:r>
           </a:p>
         </p:txBody>
@@ -1416,12 +1882,12 @@
           <a:lstStyle/>
           <a:p>
             <a:r>
-              <a:t>N1: ¿A qué distancia hay que separar la bombona de un fuego o de un enchufe?</a:t>
-            </a:r>
-          </a:p>
-          <a:p>
-            <a:r>
-              <a:t>N2: Memorízalo de más peligro, más distancia, a menos. Lo que da fuego de verdad, hogares y fuentes de calor, lo más lejos: un metro y medio. Las tomas de corriente, que pueden chispear al conectar, medio metro. Y lo más cerca permitido, treinta centímetros, para hornillos, interruptores y conductores eléctricos. Además hay dos trampillas de reducción: con una protección contra la radiación, sólida y prácticamente incombustible, el hogar baja de un metro y medio a medio metro, y el hornillo baja de treinta a diez centímetros. No es burocracia: es el margen para que un foco de calor o una chispa no prendan una fuga. Y recuerda: si los envases van fuera y los aparatos dentro, hace falta una llave general de corte accesible dentro de la vivienda.</a:t>
+              <a:t>N1: Si los envases van fuera y la cocina dentro, ¿hay algo especial que poner?</a:t>
+            </a:r>
+          </a:p>
+          <a:p>
+            <a:r>
+              <a:t>N2: Sí, tres detalles que se preguntan. Primero: cuando los envases están en el exterior, en una terraza o un patio, y los aparatos de consumo están en el interior, tiene que haber, dentro de la vivienda, una llave general de corte de gas fácilmente accesible. ¿Por qué dentro? Para que, si hueles a gas, puedas cortarlo sin salir a la terraza, que es justo donde no quieres ir si hay fuga. Segundo: dentro de la vivienda no puede haber más de dos envases conectados en batería, ni en servicio ni en reserva; cuantos más envases dentro, más gas acumulado en caso de fuga. Y tercero: los envases que llevan válvula de seguridad, estén llenos o vacíos, se colocan siempre en posición vertical, para que esa válvula funcione como debe y no suelte líquido.</a:t>
             </a:r>
           </a:p>
         </p:txBody>
@@ -1491,12 +1957,12 @@
           <a:lstStyle/>
           <a:p>
             <a:r>
-              <a:t>N1: ¿Cómo cambia la instalación cuando los envases son grandes?</a:t>
-            </a:r>
-          </a:p>
-          <a:p>
-            <a:r>
-              <a:t>N2: El tope de almacenamiento sube a mil kilos, y la instalación se monta normalmente en dos baterías: una en servicio, dando gas, y otra en reserva, esperando. El inversor es el aparato listo que, cuando se vacía la batería en servicio, cambia solo a la de reserva sin que te quedes sin gas, y de paso hace la primera etapa de regulación de presión. Si no hay envases de reserva, ese papel lo hace un simple regulador. Y en las conexiones al colector debe existir una válvula antirretorno, que impide que el gas se vaya para atrás hacia los envases vacíos. No mezcles los dos topes: bombona pequeña, trescientos kilos; bombona grande, mil kilos.</a:t>
+              <a:t>N1: En los armarios de bombonas veo rejillas abajo. ¿Por qué ahí y no arriba?</a:t>
+            </a:r>
+          </a:p>
+          <a:p>
+            <a:r>
+              <a:t>N2: Otra vez la misma lógica: el GLP pesa y se va al fondo. Si la fuga se acumula en la parte baja del armario, la rejilla tiene que estar abajo para que ese gas pueda escapar por su propio peso. Por eso la ventilación permanente va en la base o suelo del armario. ¿Y de qué tamaño? La superficie libre de paso tiene que ser mayor de una centésima parte, es decir, más de un uno por ciento de la superficie de la pared o el fondo del armario. Y hay una condición de forma: una dimensión no puede ser mayor del doble de la otra, lo que en cristiano significa que la rejilla debe ser más o menos cuadrada, no una ranura larguísima y finísima. Y una advertencia de obra: ningún envase puede tapar, ni siquiera en parte, esa rejilla. Una ventilación tapada es gas acumulado esperando.</a:t>
             </a:r>
           </a:p>
         </p:txBody>
@@ -1566,12 +2032,12 @@
           <a:lstStyle/>
           <a:p>
             <a:r>
-              <a:t>N1: ¿Pueden ir los envases grandes dentro del local?</a:t>
-            </a:r>
-          </a:p>
-          <a:p>
-            <a:r>
-              <a:t>N2: Por defecto, no: van siempre en el exterior de las edificaciones, protegidos por una caseta. La única puerta para tenerlos dentro es que el contenido total sea de setenta kilos o menos, y además que el local sea grande y bien ventilado: volumen superior a mil metros cúbicos, superficie mínima de ciento cincuenta metros cuadrados, huecos de ventilación de uno entre quince de la superficie del local sirviendo cualquier abertura que llegue a ras de suelo, y dos extintores de eficacia veintiuno A ciento trece B. Tampoco se permiten en sótanos, ni en locales con ventilación forzada salvo protecciones especiales. Memoriza los setenta kilos como la frontera dentro o fuera para envases de más de quince kilos.</a:t>
+              <a:t>N1: ¿Puedo conectar la bombona directa al aparato para ahorrarme piezas?</a:t>
+            </a:r>
+          </a:p>
+          <a:p>
+            <a:r>
+              <a:t>N2: No, y esto es de los que hay que tener grabado. Entre la bombona y el aparato siempre va un regulador. ¿Por qué? Porque la bombona da una presión alta y variable, que además cambia según lo llena que esté y la temperatura, mientras que el aparato necesita una presión baja y estable para dar una llama controlada. El regulador es el que traduce esa presión alta y caprichosa en presión baja y constante. Conectar a pelo, sin regulador, es peligrosísimo: mandas al quemador una presión que no controla. La única excepción son los aparatos aprobados expresamente para funcionar a presión directa, y en ese caso la conexión se hace con canalización rígida, con tubo rígido, no flexible. Así que si alguna vez ves escrito que se pueden conectar aparatos sin regulador, es falso, salvo ese caso concreto de presión directa con tubo rígido.</a:t>
             </a:r>
           </a:p>
         </p:txBody>
@@ -4695,7 +5161,7 @@
                 </a:solidFill>
                 <a:latin typeface="Montserrat"/>
               </a:rPr>
-              <a:t>Las bombonas, con normativa: topes, distancias y casetas</a:t>
+              <a:t>ITC-ICG 06 · Las bombonas «de verdad», con normativa</a:t>
             </a:r>
           </a:p>
         </p:txBody>
@@ -4729,7 +5195,7 @@
                 </a:solidFill>
                 <a:latin typeface="Montserrat"/>
               </a:rPr>
-              <a:t>Tema 03 · Reglamento · ITC-ICG 06</a:t>
+              <a:t>Tema 03 · Reglamento · ITC-ICG 05/06</a:t>
             </a:r>
           </a:p>
         </p:txBody>
@@ -4826,7 +5292,7 @@
                 </a:solidFill>
                 <a:latin typeface="Montserrat"/>
               </a:rPr>
-              <a:t>010 / 015</a:t>
+              <a:t>010 / 021</a:t>
             </a:r>
           </a:p>
         </p:txBody>
@@ -4860,7 +5326,7 @@
                 </a:solidFill>
                 <a:latin typeface="Montserrat"/>
               </a:rPr>
-              <a:t>Curso Gas B · Tema 03 · Envases de GLP uso propio</a:t>
+              <a:t>Curso Gas B · Tema 03 · ITC-ICG 06 · Envases de GLP para uso propio</a:t>
             </a:r>
           </a:p>
         </p:txBody>
@@ -4894,7 +5360,7 @@
                 </a:solidFill>
                 <a:latin typeface="Montserrat"/>
               </a:rPr>
-              <a:t>APARTADO 2.2.3 · LA CASETA</a:t>
+              <a:t>APARTADO 2.1 · CUADRO 1</a:t>
             </a:r>
           </a:p>
         </p:txBody>
@@ -4928,7 +5394,7 @@
                 </a:solidFill>
                 <a:latin typeface="Montserrat"/>
               </a:rPr>
-              <a:t>La caseta: dos rejillas</a:t>
+              <a:t>Distancias con envases ≤ 15 kg</a:t>
             </a:r>
           </a:p>
         </p:txBody>
@@ -4976,7 +5442,7 @@
                 </a:solidFill>
                 <a:latin typeface="Montserrat"/>
               </a:rPr>
-              <a:t>Material clase A2-s3,d0</a:t>
+              <a:t>Hogares y fuentes de calor: 1,5 m</a:t>
             </a:r>
           </a:p>
           <a:p>
@@ -5001,7 +5467,7 @@
                 </a:solidFill>
                 <a:latin typeface="Montserrat"/>
               </a:rPr>
-              <a:t>Ventilación arriba y abajo (&lt; 15 cm)</a:t>
+              <a:t>Tomas de corriente: 0,5 m</a:t>
             </a:r>
           </a:p>
           <a:p>
@@ -5026,7 +5492,7 @@
                 </a:solidFill>
                 <a:latin typeface="Montserrat"/>
               </a:rPr>
-              <a:t>Amplitud mínima 1/10</a:t>
+              <a:t>Hornillos, interruptores, conductores: 0,3 m</a:t>
             </a:r>
           </a:p>
           <a:p>
@@ -5051,14 +5517,14 @@
                 </a:solidFill>
                 <a:latin typeface="Montserrat"/>
               </a:rPr>
-              <a:t>Suelo inclinado hacia el exterior</a:t>
-            </a:r>
-          </a:p>
-        </p:txBody>
-      </p:sp>
-      <p:sp>
-        <p:nvSpPr>
-          <p:cNvPr id="8" name="imgph" descr="IMGQ:gas cylinder storage shed outdoor"/>
+              <a:t>Con protección antirradiación, se reducen</a:t>
+            </a:r>
+          </a:p>
+        </p:txBody>
+      </p:sp>
+      <p:sp>
+        <p:nvSpPr>
+          <p:cNvPr id="8" name="imgph" descr="IMGQ:gas cylinder near kitchen stove distance"/>
           <p:cNvSpPr/>
           <p:nvPr/>
         </p:nvSpPr>
@@ -5144,7 +5610,7 @@
                 </a:solidFill>
                 <a:latin typeface="Montserrat"/>
               </a:rPr>
-              <a:t>gas cylinder storage shed outdoor</a:t>
+              <a:t>gas cylinder near kitchen stove distance</a:t>
             </a:r>
           </a:p>
         </p:txBody>
@@ -5241,7 +5707,7 @@
                 </a:solidFill>
                 <a:latin typeface="Montserrat"/>
               </a:rPr>
-              <a:t>011 / 015</a:t>
+              <a:t>011 / 021</a:t>
             </a:r>
           </a:p>
         </p:txBody>
@@ -5275,7 +5741,7 @@
                 </a:solidFill>
                 <a:latin typeface="Montserrat"/>
               </a:rPr>
-              <a:t>Curso Gas B · Tema 03 · Envases de GLP uso propio</a:t>
+              <a:t>Curso Gas B · Tema 03 · ITC-ICG 06 · Envases de GLP para uso propio</a:t>
             </a:r>
           </a:p>
         </p:txBody>
@@ -5309,7 +5775,7 @@
                 </a:solidFill>
                 <a:latin typeface="Montserrat"/>
               </a:rPr>
-              <a:t>CUADRO 2 · DISTANCIAS (&gt; 15 KG)</a:t>
+              <a:t>APARTADO 2.2 · MÁS DE 15 KG</a:t>
             </a:r>
           </a:p>
         </p:txBody>
@@ -5343,7 +5809,7 @@
                 </a:solidFill>
                 <a:latin typeface="Montserrat"/>
               </a:rPr>
-              <a:t>Más kilos, más metros</a:t>
+              <a:t>Envases grandes: hasta 1.000 kg</a:t>
             </a:r>
           </a:p>
         </p:txBody>
@@ -5391,7 +5857,7 @@
                 </a:solidFill>
                 <a:latin typeface="Montserrat"/>
               </a:rPr>
-              <a:t>Hogares: 1,5 m · si &gt; 70 kg: 3 m</a:t>
+              <a:t>Tope total: 1.000 kg</a:t>
             </a:r>
           </a:p>
           <a:p>
@@ -5416,7 +5882,7 @@
                 </a:solidFill>
                 <a:latin typeface="Montserrat"/>
               </a:rPr>
-              <a:t>La caseta recorta desagües y sótanos</a:t>
+              <a:t>Baterías: servicio y reserva</a:t>
             </a:r>
           </a:p>
           <a:p>
@@ -5441,14 +5907,14 @@
                 </a:solidFill>
                 <a:latin typeface="Montserrat"/>
               </a:rPr>
-              <a:t>Extintores 21A-113B si &gt; 350 kg</a:t>
-            </a:r>
-          </a:p>
-        </p:txBody>
-      </p:sp>
-      <p:sp>
-        <p:nvSpPr>
-          <p:cNvPr id="8" name="imgph" descr="IMGQ:red fire extinguisher industrial wall"/>
+              <a:t>Inversor que cambia solo</a:t>
+            </a:r>
+          </a:p>
+        </p:txBody>
+      </p:sp>
+      <p:sp>
+        <p:nvSpPr>
+          <p:cNvPr id="8" name="imgph" descr="IMGQ:industrial propane cylinder battery manifold"/>
           <p:cNvSpPr/>
           <p:nvPr/>
         </p:nvSpPr>
@@ -5534,7 +6000,7 @@
                 </a:solidFill>
                 <a:latin typeface="Montserrat"/>
               </a:rPr>
-              <a:t>red fire extinguisher industrial wall</a:t>
+              <a:t>industrial propane cylinder battery manifold</a:t>
             </a:r>
           </a:p>
         </p:txBody>
@@ -5631,7 +6097,7 @@
                 </a:solidFill>
                 <a:latin typeface="Montserrat"/>
               </a:rPr>
-              <a:t>012 / 015</a:t>
+              <a:t>012 / 021</a:t>
             </a:r>
           </a:p>
         </p:txBody>
@@ -5665,7 +6131,7 @@
                 </a:solidFill>
                 <a:latin typeface="Montserrat"/>
               </a:rPr>
-              <a:t>Curso Gas B · Tema 03 · Envases de GLP uso propio</a:t>
+              <a:t>Curso Gas B · Tema 03 · ITC-ICG 06 · Envases de GLP para uso propio</a:t>
             </a:r>
           </a:p>
         </p:txBody>
@@ -5699,7 +6165,7 @@
                 </a:solidFill>
                 <a:latin typeface="Montserrat"/>
               </a:rPr>
-              <a:t>APARTADO 2.2.4 · CAMBIO DE ENVASES</a:t>
+              <a:t>APARTADO 2.2.2 · UBICACIÓN</a:t>
             </a:r>
           </a:p>
         </p:txBody>
@@ -5733,7 +6199,7 @@
                 </a:solidFill>
                 <a:latin typeface="Montserrat"/>
               </a:rPr>
-              <a:t>El momento más crítico</a:t>
+              <a:t>Fuera y en caseta</a:t>
             </a:r>
           </a:p>
         </p:txBody>
@@ -5781,7 +6247,7 @@
                 </a:solidFill>
                 <a:latin typeface="Montserrat"/>
               </a:rPr>
-              <a:t>Nada de fuego encendido</a:t>
+              <a:t>Siempre en el exterior</a:t>
             </a:r>
           </a:p>
           <a:p>
@@ -5806,7 +6272,7 @@
                 </a:solidFill>
                 <a:latin typeface="Montserrat"/>
               </a:rPr>
-              <a:t>No accionar interruptores</a:t>
+              <a:t>Protegidos por una caseta</a:t>
             </a:r>
           </a:p>
           <a:p>
@@ -5831,39 +6297,14 @@
                 </a:solidFill>
                 <a:latin typeface="Montserrat"/>
               </a:rPr>
-              <a:t>Motores parados</a:t>
-            </a:r>
-          </a:p>
-          <a:p>
-            <a:pPr>
-              <a:spcAft>
-                <a:spcPts val="1000"/>
-              </a:spcAft>
-            </a:pPr>
-            <a:r>
-              <a:rPr sz="1600" b="1" i="0">
-                <a:solidFill>
-                  <a:srgbClr val="2E3A80"/>
-                </a:solidFill>
-                <a:latin typeface="Montserrat"/>
-              </a:rPr>
-              <a:t>•  </a:t>
-            </a:r>
-            <a:r>
-              <a:rPr sz="1600" b="0" i="0">
-                <a:solidFill>
-                  <a:srgbClr val="1B2330"/>
-                </a:solidFill>
-                <a:latin typeface="Montserrat"/>
-              </a:rPr>
-              <a:t>Salvo &gt; 20 m dentro / &gt; 10 m fuera</a:t>
-            </a:r>
-          </a:p>
-        </p:txBody>
-      </p:sp>
-      <p:sp>
-        <p:nvSpPr>
-          <p:cNvPr id="8" name="imgph" descr="IMGQ:worker changing propane gas cylinder"/>
+              <a:t>Nada de sótanos ni ventilación forzada</a:t>
+            </a:r>
+          </a:p>
+        </p:txBody>
+      </p:sp>
+      <p:sp>
+        <p:nvSpPr>
+          <p:cNvPr id="8" name="imgph" descr="IMGQ:outdoor gas cylinder storage cabinet enclosure"/>
           <p:cNvSpPr/>
           <p:nvPr/>
         </p:nvSpPr>
@@ -5949,7 +6390,7 @@
                 </a:solidFill>
                 <a:latin typeface="Montserrat"/>
               </a:rPr>
-              <a:t>worker changing propane gas cylinder</a:t>
+              <a:t>outdoor gas cylinder storage cabinet enclosure</a:t>
             </a:r>
           </a:p>
         </p:txBody>
@@ -6046,7 +6487,7 @@
                 </a:solidFill>
                 <a:latin typeface="Montserrat"/>
               </a:rPr>
-              <a:t>013 / 015</a:t>
+              <a:t>013 / 021</a:t>
             </a:r>
           </a:p>
         </p:txBody>
@@ -6080,7 +6521,7 @@
                 </a:solidFill>
                 <a:latin typeface="Montserrat"/>
               </a:rPr>
-              <a:t>Curso Gas B · Tema 03 · Envases de GLP uso propio</a:t>
+              <a:t>Curso Gas B · Tema 03 · ITC-ICG 06 · Envases de GLP para uso propio</a:t>
             </a:r>
           </a:p>
         </p:txBody>
@@ -6114,7 +6555,7 @@
                 </a:solidFill>
                 <a:latin typeface="Montserrat"/>
               </a:rPr>
-              <a:t>APARTADO 3 · DOCUMENTACIÓN</a:t>
+              <a:t>APARTADO 2.2.2 · EXCEPCIÓN</a:t>
             </a:r>
           </a:p>
         </p:txBody>
@@ -6148,7 +6589,7 @@
                 </a:solidFill>
                 <a:latin typeface="Montserrat"/>
               </a:rPr>
-              <a:t>Papeleo ligero pero obligatorio</a:t>
+              <a:t>Dentro solo si ≤ 70 kg</a:t>
             </a:r>
           </a:p>
         </p:txBody>
@@ -6196,7 +6637,7 @@
                 </a:solidFill>
                 <a:latin typeface="Montserrat"/>
               </a:rPr>
-              <a:t>Ni autorización ni comunicación</a:t>
+              <a:t>Contenido total ≤ 70 kg</a:t>
             </a:r>
           </a:p>
           <a:p>
@@ -6221,7 +6662,7 @@
                 </a:solidFill>
                 <a:latin typeface="Montserrat"/>
               </a:rPr>
-              <a:t>Prueba de estanquidad: 1,5 × presión</a:t>
+              <a:t>Local &gt; 1.000 m3 y ≥ 150 m2</a:t>
             </a:r>
           </a:p>
           <a:p>
@@ -6246,7 +6687,7 @@
                 </a:solidFill>
                 <a:latin typeface="Montserrat"/>
               </a:rPr>
-              <a:t>Durante 10 minutos</a:t>
+              <a:t>Ventilación 1/15 a ras de suelo</a:t>
             </a:r>
           </a:p>
           <a:p>
@@ -6271,14 +6712,14 @@
                 </a:solidFill>
                 <a:latin typeface="Montserrat"/>
               </a:rPr>
-              <a:t>Certificado de instalación guardado</a:t>
-            </a:r>
-          </a:p>
-        </p:txBody>
-      </p:sp>
-      <p:sp>
-        <p:nvSpPr>
-          <p:cNvPr id="8" name="imgph" descr="IMGQ:gas pressure test manometer gauge"/>
+              <a:t>Dos extintores 21A-113B</a:t>
+            </a:r>
+          </a:p>
+        </p:txBody>
+      </p:sp>
+      <p:sp>
+        <p:nvSpPr>
+          <p:cNvPr id="8" name="imgph" descr="IMGQ:large industrial hall with ventilation openings"/>
           <p:cNvSpPr/>
           <p:nvPr/>
         </p:nvSpPr>
@@ -6364,7 +6805,7 @@
                 </a:solidFill>
                 <a:latin typeface="Montserrat"/>
               </a:rPr>
-              <a:t>gas pressure test manometer gauge</a:t>
+              <a:t>large industrial hall with ventilation openings</a:t>
             </a:r>
           </a:p>
         </p:txBody>
@@ -6461,7 +6902,7 @@
                 </a:solidFill>
                 <a:latin typeface="Montserrat"/>
               </a:rPr>
-              <a:t>014 / 015</a:t>
+              <a:t>014 / 021</a:t>
             </a:r>
           </a:p>
         </p:txBody>
@@ -6495,7 +6936,7 @@
                 </a:solidFill>
                 <a:latin typeface="Montserrat"/>
               </a:rPr>
-              <a:t>Curso Gas B · Tema 03 · Envases de GLP uso propio</a:t>
+              <a:t>Curso Gas B · Tema 03 · ITC-ICG 06 · Envases de GLP para uso propio</a:t>
             </a:r>
           </a:p>
         </p:txBody>
@@ -6529,7 +6970,7 @@
                 </a:solidFill>
                 <a:latin typeface="Montserrat"/>
               </a:rPr>
-              <a:t>APARTADO 4 · MANTENIMIENTO</a:t>
+              <a:t>APARTADO 2.2.3 · LA CASETA</a:t>
             </a:r>
           </a:p>
         </p:txBody>
@@ -6563,7 +7004,7 @@
                 </a:solidFill>
                 <a:latin typeface="Montserrat"/>
               </a:rPr>
-              <a:t>Revisión, no inspección</a:t>
+              <a:t>Dos rejillas y suelo en pendiente</a:t>
             </a:r>
           </a:p>
         </p:txBody>
@@ -6611,7 +7052,7 @@
                 </a:solidFill>
                 <a:latin typeface="Montserrat"/>
               </a:rPr>
-              <a:t>Revisión periódica (no inspección)</a:t>
+              <a:t>Material A2-s3,d0 (casi incombustible)</a:t>
             </a:r>
           </a:p>
           <a:p>
@@ -6636,7 +7077,7 @@
                 </a:solidFill>
                 <a:latin typeface="Montserrat"/>
               </a:rPr>
-              <a:t>Coincide con la receptora (ITC-ICG 07)</a:t>
+              <a:t>Ventilación arriba y abajo</a:t>
             </a:r>
           </a:p>
           <a:p>
@@ -6661,39 +7102,14 @@
                 </a:solidFill>
                 <a:latin typeface="Montserrat"/>
               </a:rPr>
-              <a:t>La hace una empresa instaladora</a:t>
-            </a:r>
-          </a:p>
-          <a:p>
-            <a:pPr>
-              <a:spcAft>
-                <a:spcPts val="1000"/>
-              </a:spcAft>
-            </a:pPr>
-            <a:r>
-              <a:rPr sz="1600" b="1" i="0">
-                <a:solidFill>
-                  <a:srgbClr val="2E3A80"/>
-                </a:solidFill>
-                <a:latin typeface="Montserrat"/>
-              </a:rPr>
-              <a:t>•  </a:t>
-            </a:r>
-            <a:r>
-              <a:rPr sz="1600" b="0" i="0">
-                <a:solidFill>
-                  <a:srgbClr val="1B2330"/>
-                </a:solidFill>
-                <a:latin typeface="Montserrat"/>
-              </a:rPr>
-              <a:t>Único envase &lt; 15 kg a aparato móvil: exento</a:t>
-            </a:r>
-          </a:p>
-        </p:txBody>
-      </p:sp>
-      <p:sp>
-        <p:nvSpPr>
-          <p:cNvPr id="8" name="imgph" descr="IMGQ:technician checking home gas installation"/>
+              <a:t>Superficie 1/10; suelo inclinado hacia fuera</a:t>
+            </a:r>
+          </a:p>
+        </p:txBody>
+      </p:sp>
+      <p:sp>
+        <p:nvSpPr>
+          <p:cNvPr id="8" name="imgph" descr="IMGQ:outdoor gas cylinder shelter with vents top and bottom"/>
           <p:cNvSpPr/>
           <p:nvPr/>
         </p:nvSpPr>
@@ -6779,7 +7195,7 @@
                 </a:solidFill>
                 <a:latin typeface="Montserrat"/>
               </a:rPr>
-              <a:t>technician checking home gas installation</a:t>
+              <a:t>outdoor gas cylinder shelter with vents top and bottom</a:t>
             </a:r>
           </a:p>
         </p:txBody>
@@ -6876,7 +7292,7 @@
                 </a:solidFill>
                 <a:latin typeface="Montserrat"/>
               </a:rPr>
-              <a:t>015 / 015</a:t>
+              <a:t>015 / 021</a:t>
             </a:r>
           </a:p>
         </p:txBody>
@@ -6910,7 +7326,7 @@
                 </a:solidFill>
                 <a:latin typeface="Montserrat"/>
               </a:rPr>
-              <a:t>Curso Gas B · Tema 03 · Envases de GLP uso propio</a:t>
+              <a:t>Curso Gas B · Tema 03 · ITC-ICG 06 · Envases de GLP para uso propio</a:t>
             </a:r>
           </a:p>
         </p:txBody>
@@ -6923,8 +7339,8 @@
         </p:nvSpPr>
         <p:spPr>
           <a:xfrm>
-            <a:off x="822960" y="640080"/>
-            <a:ext cx="10058400" cy="914400"/>
+            <a:off x="822960" y="457200"/>
+            <a:ext cx="8229600" cy="365760"/>
           </a:xfrm>
           <a:prstGeom prst="rect">
             <a:avLst/>
@@ -6938,13 +7354,13 @@
           <a:lstStyle/>
           <a:p>
             <a:r>
-              <a:rPr sz="3000" b="1" i="0">
-                <a:solidFill>
-                  <a:srgbClr val="1E2761"/>
-                </a:solidFill>
-                <a:latin typeface="Montserrat"/>
-              </a:rPr>
-              <a:t>Qué me llevo</a:t>
+              <a:rPr sz="1200" b="1" i="0">
+                <a:solidFill>
+                  <a:srgbClr val="64748B"/>
+                </a:solidFill>
+                <a:latin typeface="Montserrat"/>
+              </a:rPr>
+              <a:t>APARTADO 2.2.3 · CUADRO 2</a:t>
             </a:r>
           </a:p>
         </p:txBody>
@@ -6957,8 +7373,8 @@
         </p:nvSpPr>
         <p:spPr>
           <a:xfrm>
-            <a:off x="822960" y="2011680"/>
-            <a:ext cx="10058400" cy="3657600"/>
+            <a:off x="822960" y="868680"/>
+            <a:ext cx="10515600" cy="914400"/>
           </a:xfrm>
           <a:prstGeom prst="rect">
             <a:avLst/>
@@ -6971,78 +7387,1765 @@
           </a:bodyPr>
           <a:lstStyle/>
           <a:p>
+            <a:r>
+              <a:rPr sz="2700" b="1" i="0">
+                <a:solidFill>
+                  <a:srgbClr val="1E2761"/>
+                </a:solidFill>
+                <a:latin typeface="Montserrat"/>
+              </a:rPr>
+              <a:t>Más kilos, más metros</a:t>
+            </a:r>
+          </a:p>
+        </p:txBody>
+      </p:sp>
+      <p:sp>
+        <p:nvSpPr>
+          <p:cNvPr id="7" name="TextBox 6"/>
+          <p:cNvSpPr txBox="1"/>
+          <p:nvPr/>
+        </p:nvSpPr>
+        <p:spPr>
+          <a:xfrm>
+            <a:off x="822960" y="1920240"/>
+            <a:ext cx="4983480" cy="4206240"/>
+          </a:xfrm>
+          <a:prstGeom prst="rect">
+            <a:avLst/>
+          </a:prstGeom>
+          <a:noFill/>
+        </p:spPr>
+        <p:txBody>
+          <a:bodyPr wrap="square">
+            <a:spAutoFit/>
+          </a:bodyPr>
+          <a:lstStyle/>
+          <a:p>
             <a:pPr>
               <a:spcAft>
-                <a:spcPts val="1400"/>
+                <a:spcPts val="1000"/>
               </a:spcAft>
             </a:pPr>
             <a:r>
-              <a:rPr sz="2000" b="1" i="0">
+              <a:rPr sz="1600" b="1" i="0">
                 <a:solidFill>
                   <a:srgbClr val="2E3A80"/>
                 </a:solidFill>
                 <a:latin typeface="Montserrat"/>
               </a:rPr>
-              <a:t>✓  </a:t>
-            </a:r>
-            <a:r>
-              <a:rPr sz="2000" b="0" i="0">
+              <a:t>•  </a:t>
+            </a:r>
+            <a:r>
+              <a:rPr sz="1600" b="0" i="0">
                 <a:solidFill>
                   <a:srgbClr val="1B2330"/>
                 </a:solidFill>
                 <a:latin typeface="Montserrat"/>
               </a:rPr>
-              <a:t>El GLP pesa: nada de sótanos, ventila abajo</a:t>
+              <a:t>A más GLP, más distancia</a:t>
             </a:r>
           </a:p>
           <a:p>
             <a:pPr>
               <a:spcAft>
-                <a:spcPts val="1400"/>
+                <a:spcPts val="1000"/>
               </a:spcAft>
             </a:pPr>
             <a:r>
-              <a:rPr sz="2000" b="1" i="0">
+              <a:rPr sz="1600" b="1" i="0">
                 <a:solidFill>
                   <a:srgbClr val="2E3A80"/>
                 </a:solidFill>
                 <a:latin typeface="Montserrat"/>
               </a:rPr>
-              <a:t>✓  </a:t>
-            </a:r>
-            <a:r>
-              <a:rPr sz="2000" b="0" i="0">
+              <a:t>•  </a:t>
+            </a:r>
+            <a:r>
+              <a:rPr sz="1600" b="0" i="0">
                 <a:solidFill>
                   <a:srgbClr val="1B2330"/>
                 </a:solidFill>
                 <a:latin typeface="Montserrat"/>
               </a:rPr>
-              <a:t>300 · 1.000 · 70 kg, los topes clave</a:t>
+              <a:t>La caseta puede recortar distancias</a:t>
             </a:r>
           </a:p>
           <a:p>
             <a:pPr>
               <a:spcAft>
-                <a:spcPts val="1400"/>
+                <a:spcPts val="1000"/>
               </a:spcAft>
             </a:pPr>
             <a:r>
-              <a:rPr sz="2000" b="1" i="0">
+              <a:rPr sz="1600" b="1" i="0">
                 <a:solidFill>
                   <a:srgbClr val="2E3A80"/>
                 </a:solidFill>
                 <a:latin typeface="Montserrat"/>
               </a:rPr>
-              <a:t>✓  </a:t>
-            </a:r>
-            <a:r>
-              <a:rPr sz="2000" b="0" i="0">
+              <a:t>•  </a:t>
+            </a:r>
+            <a:r>
+              <a:rPr sz="1600" b="0" i="0">
                 <a:solidFill>
                   <a:srgbClr val="1B2330"/>
                 </a:solidFill>
                 <a:latin typeface="Montserrat"/>
               </a:rPr>
-              <a:t>Cambio de bombona: apágalo todo</a:t>
+              <a:t>Hogares y motores: no rebajan</a:t>
+            </a:r>
+          </a:p>
+        </p:txBody>
+      </p:sp>
+      <p:sp>
+        <p:nvSpPr>
+          <p:cNvPr id="8" name="imgph" descr="IMGQ:gas caseta enclosure next to building drain"/>
+          <p:cNvSpPr/>
+          <p:nvPr/>
+        </p:nvSpPr>
+        <p:spPr>
+          <a:xfrm>
+            <a:off x="5806440" y="1051560"/>
+            <a:ext cx="5298947" cy="4629150"/>
+          </a:xfrm>
+          <a:prstGeom prst="roundRect">
+            <a:avLst/>
+          </a:prstGeom>
+          <a:solidFill>
+            <a:srgbClr val="F3F6FB"/>
+          </a:solidFill>
+          <a:ln w="12700">
+            <a:solidFill>
+              <a:srgbClr val="C7D2E6"/>
+            </a:solidFill>
+          </a:ln>
+          <a:effectLst/>
+        </p:spPr>
+        <p:style>
+          <a:lnRef idx="1">
+            <a:schemeClr val="accent1"/>
+          </a:lnRef>
+          <a:fillRef idx="3">
+            <a:schemeClr val="accent1"/>
+          </a:fillRef>
+          <a:effectRef idx="2">
+            <a:schemeClr val="accent1"/>
+          </a:effectRef>
+          <a:fontRef idx="minor">
+            <a:schemeClr val="lt1"/>
+          </a:fontRef>
+        </p:style>
+        <p:txBody>
+          <a:bodyPr rtlCol="0" anchor="ctr"/>
+          <a:lstStyle/>
+          <a:p>
+            <a:pPr algn="ctr"/>
+          </a:p>
+        </p:txBody>
+      </p:sp>
+      <p:sp>
+        <p:nvSpPr>
+          <p:cNvPr id="9" name="TextBox 8"/>
+          <p:cNvSpPr txBox="1"/>
+          <p:nvPr/>
+        </p:nvSpPr>
+        <p:spPr>
+          <a:xfrm>
+            <a:off x="6080760" y="2726055"/>
+            <a:ext cx="4750307" cy="1280160"/>
+          </a:xfrm>
+          <a:prstGeom prst="rect">
+            <a:avLst/>
+          </a:prstGeom>
+          <a:noFill/>
+        </p:spPr>
+        <p:txBody>
+          <a:bodyPr wrap="square">
+            <a:spAutoFit/>
+          </a:bodyPr>
+          <a:lstStyle/>
+          <a:p>
+            <a:pPr algn="ctr"/>
+            <a:r>
+              <a:rPr sz="1400" b="1" i="0">
+                <a:solidFill>
+                  <a:srgbClr val="64748B"/>
+                </a:solidFill>
+                <a:latin typeface="Montserrat"/>
+              </a:rPr>
+              <a:t>IMAGEN REALISTA</a:t>
+            </a:r>
+          </a:p>
+          <a:p>
+            <a:pPr algn="ctr"/>
+            <a:r>
+              <a:rPr sz="1100" b="0" i="1">
+                <a:solidFill>
+                  <a:srgbClr val="64748B"/>
+                </a:solidFill>
+                <a:latin typeface="Montserrat"/>
+              </a:rPr>
+              <a:t>gas caseta enclosure next to building drain</a:t>
+            </a:r>
+          </a:p>
+        </p:txBody>
+      </p:sp>
+    </p:spTree>
+  </p:cSld>
+  <p:clrMapOvr>
+    <a:masterClrMapping/>
+  </p:clrMapOvr>
+</p:sld>
+</file>
+
+<file path=ppt/slides/slide16.xml><?xml version="1.0" encoding="utf-8"?>
+<p:sld xmlns:a="http://schemas.openxmlformats.org/drawingml/2006/main" xmlns:p="http://schemas.openxmlformats.org/presentationml/2006/main" xmlns:r="http://schemas.openxmlformats.org/officeDocument/2006/relationships">
+  <p:cSld>
+    <p:spTree>
+      <p:nvGrpSpPr>
+        <p:cNvPr id="1" name=""/>
+        <p:cNvGrpSpPr/>
+        <p:nvPr/>
+      </p:nvGrpSpPr>
+      <p:grpSpPr/>
+      <p:sp>
+        <p:nvSpPr>
+          <p:cNvPr id="2" name="Rectangle 1"/>
+          <p:cNvSpPr/>
+          <p:nvPr/>
+        </p:nvSpPr>
+        <p:spPr>
+          <a:xfrm>
+            <a:off x="0" y="0"/>
+            <a:ext cx="12191695" cy="6858000"/>
+          </a:xfrm>
+          <a:prstGeom prst="rect">
+            <a:avLst/>
+          </a:prstGeom>
+          <a:solidFill>
+            <a:srgbClr val="FFFFFF"/>
+          </a:solidFill>
+          <a:ln>
+            <a:noFill/>
+          </a:ln>
+          <a:effectLst/>
+        </p:spPr>
+        <p:style>
+          <a:lnRef idx="1">
+            <a:schemeClr val="accent1"/>
+          </a:lnRef>
+          <a:fillRef idx="3">
+            <a:schemeClr val="accent1"/>
+          </a:fillRef>
+          <a:effectRef idx="2">
+            <a:schemeClr val="accent1"/>
+          </a:effectRef>
+          <a:fontRef idx="minor">
+            <a:schemeClr val="lt1"/>
+          </a:fontRef>
+        </p:style>
+        <p:txBody>
+          <a:bodyPr rtlCol="0" anchor="ctr"/>
+          <a:lstStyle/>
+          <a:p>
+            <a:pPr algn="ctr"/>
+          </a:p>
+        </p:txBody>
+      </p:sp>
+      <p:sp>
+        <p:nvSpPr>
+          <p:cNvPr id="3" name="TextBox 2"/>
+          <p:cNvSpPr txBox="1"/>
+          <p:nvPr/>
+        </p:nvSpPr>
+        <p:spPr>
+          <a:xfrm>
+            <a:off x="10607040" y="320040"/>
+            <a:ext cx="1371600" cy="365760"/>
+          </a:xfrm>
+          <a:prstGeom prst="rect">
+            <a:avLst/>
+          </a:prstGeom>
+          <a:noFill/>
+        </p:spPr>
+        <p:txBody>
+          <a:bodyPr wrap="square">
+            <a:spAutoFit/>
+          </a:bodyPr>
+          <a:lstStyle/>
+          <a:p>
+            <a:pPr algn="r"/>
+            <a:r>
+              <a:rPr sz="1000" b="1" i="0">
+                <a:solidFill>
+                  <a:srgbClr val="64748B"/>
+                </a:solidFill>
+                <a:latin typeface="Montserrat"/>
+              </a:rPr>
+              <a:t>016 / 021</a:t>
+            </a:r>
+          </a:p>
+        </p:txBody>
+      </p:sp>
+      <p:sp>
+        <p:nvSpPr>
+          <p:cNvPr id="4" name="TextBox 3"/>
+          <p:cNvSpPr txBox="1"/>
+          <p:nvPr/>
+        </p:nvSpPr>
+        <p:spPr>
+          <a:xfrm>
+            <a:off x="457200" y="6419088"/>
+            <a:ext cx="8229600" cy="365760"/>
+          </a:xfrm>
+          <a:prstGeom prst="rect">
+            <a:avLst/>
+          </a:prstGeom>
+          <a:noFill/>
+        </p:spPr>
+        <p:txBody>
+          <a:bodyPr wrap="square">
+            <a:spAutoFit/>
+          </a:bodyPr>
+          <a:lstStyle/>
+          <a:p>
+            <a:r>
+              <a:rPr sz="900" b="0" i="0">
+                <a:solidFill>
+                  <a:srgbClr val="64748B"/>
+                </a:solidFill>
+                <a:latin typeface="Montserrat"/>
+              </a:rPr>
+              <a:t>Curso Gas B · Tema 03 · ITC-ICG 06 · Envases de GLP para uso propio</a:t>
+            </a:r>
+          </a:p>
+        </p:txBody>
+      </p:sp>
+      <p:sp>
+        <p:nvSpPr>
+          <p:cNvPr id="5" name="TextBox 4"/>
+          <p:cNvSpPr txBox="1"/>
+          <p:nvPr/>
+        </p:nvSpPr>
+        <p:spPr>
+          <a:xfrm>
+            <a:off x="822960" y="457200"/>
+            <a:ext cx="8229600" cy="365760"/>
+          </a:xfrm>
+          <a:prstGeom prst="rect">
+            <a:avLst/>
+          </a:prstGeom>
+          <a:noFill/>
+        </p:spPr>
+        <p:txBody>
+          <a:bodyPr wrap="square">
+            <a:spAutoFit/>
+          </a:bodyPr>
+          <a:lstStyle/>
+          <a:p>
+            <a:r>
+              <a:rPr sz="1200" b="1" i="0">
+                <a:solidFill>
+                  <a:srgbClr val="64748B"/>
+                </a:solidFill>
+                <a:latin typeface="Montserrat"/>
+              </a:rPr>
+              <a:t>APARTADO 2.2 · EXTINTORES</a:t>
+            </a:r>
+          </a:p>
+        </p:txBody>
+      </p:sp>
+      <p:sp>
+        <p:nvSpPr>
+          <p:cNvPr id="6" name="TextBox 5"/>
+          <p:cNvSpPr txBox="1"/>
+          <p:nvPr/>
+        </p:nvSpPr>
+        <p:spPr>
+          <a:xfrm>
+            <a:off x="822960" y="868680"/>
+            <a:ext cx="10515600" cy="914400"/>
+          </a:xfrm>
+          <a:prstGeom prst="rect">
+            <a:avLst/>
+          </a:prstGeom>
+          <a:noFill/>
+        </p:spPr>
+        <p:txBody>
+          <a:bodyPr wrap="square">
+            <a:spAutoFit/>
+          </a:bodyPr>
+          <a:lstStyle/>
+          <a:p>
+            <a:r>
+              <a:rPr sz="2700" b="1" i="0">
+                <a:solidFill>
+                  <a:srgbClr val="1E2761"/>
+                </a:solidFill>
+                <a:latin typeface="Montserrat"/>
+              </a:rPr>
+              <a:t>Mismo extintor, distinto disparador</a:t>
+            </a:r>
+          </a:p>
+        </p:txBody>
+      </p:sp>
+      <p:sp>
+        <p:nvSpPr>
+          <p:cNvPr id="7" name="TextBox 6"/>
+          <p:cNvSpPr txBox="1"/>
+          <p:nvPr/>
+        </p:nvSpPr>
+        <p:spPr>
+          <a:xfrm>
+            <a:off x="822960" y="1920240"/>
+            <a:ext cx="4983480" cy="4206240"/>
+          </a:xfrm>
+          <a:prstGeom prst="rect">
+            <a:avLst/>
+          </a:prstGeom>
+          <a:noFill/>
+        </p:spPr>
+        <p:txBody>
+          <a:bodyPr wrap="square">
+            <a:spAutoFit/>
+          </a:bodyPr>
+          <a:lstStyle/>
+          <a:p>
+            <a:pPr>
+              <a:spcAft>
+                <a:spcPts val="1000"/>
+              </a:spcAft>
+            </a:pPr>
+            <a:r>
+              <a:rPr sz="1600" b="1" i="0">
+                <a:solidFill>
+                  <a:srgbClr val="2E3A80"/>
+                </a:solidFill>
+                <a:latin typeface="Montserrat"/>
+              </a:rPr>
+              <a:t>•  </a:t>
+            </a:r>
+            <a:r>
+              <a:rPr sz="1600" b="0" i="0">
+                <a:solidFill>
+                  <a:srgbClr val="1B2330"/>
+                </a:solidFill>
+                <a:latin typeface="Montserrat"/>
+              </a:rPr>
+              <a:t>Extintores 21A-113B, dos unidades</a:t>
+            </a:r>
+          </a:p>
+          <a:p>
+            <a:pPr>
+              <a:spcAft>
+                <a:spcPts val="1000"/>
+              </a:spcAft>
+            </a:pPr>
+            <a:r>
+              <a:rPr sz="1600" b="1" i="0">
+                <a:solidFill>
+                  <a:srgbClr val="2E3A80"/>
+                </a:solidFill>
+                <a:latin typeface="Montserrat"/>
+              </a:rPr>
+              <a:t>•  </a:t>
+            </a:r>
+            <a:r>
+              <a:rPr sz="1600" b="0" i="0">
+                <a:solidFill>
+                  <a:srgbClr val="1B2330"/>
+                </a:solidFill>
+                <a:latin typeface="Montserrat"/>
+              </a:rPr>
+              <a:t>Interior del local: siempre</a:t>
+            </a:r>
+          </a:p>
+          <a:p>
+            <a:pPr>
+              <a:spcAft>
+                <a:spcPts val="1000"/>
+              </a:spcAft>
+            </a:pPr>
+            <a:r>
+              <a:rPr sz="1600" b="1" i="0">
+                <a:solidFill>
+                  <a:srgbClr val="2E3A80"/>
+                </a:solidFill>
+                <a:latin typeface="Montserrat"/>
+              </a:rPr>
+              <a:t>•  </a:t>
+            </a:r>
+            <a:r>
+              <a:rPr sz="1600" b="0" i="0">
+                <a:solidFill>
+                  <a:srgbClr val="1B2330"/>
+                </a:solidFill>
+                <a:latin typeface="Montserrat"/>
+              </a:rPr>
+              <a:t>En caseta: al superar 350 kg</a:t>
+            </a:r>
+          </a:p>
+        </p:txBody>
+      </p:sp>
+      <p:sp>
+        <p:nvSpPr>
+          <p:cNvPr id="8" name="imgph" descr="IMGQ:two fire extinguishers mounted on wall outdoor"/>
+          <p:cNvSpPr/>
+          <p:nvPr/>
+        </p:nvSpPr>
+        <p:spPr>
+          <a:xfrm>
+            <a:off x="5806440" y="1051560"/>
+            <a:ext cx="5298947" cy="4629150"/>
+          </a:xfrm>
+          <a:prstGeom prst="roundRect">
+            <a:avLst/>
+          </a:prstGeom>
+          <a:solidFill>
+            <a:srgbClr val="F3F6FB"/>
+          </a:solidFill>
+          <a:ln w="12700">
+            <a:solidFill>
+              <a:srgbClr val="C7D2E6"/>
+            </a:solidFill>
+          </a:ln>
+          <a:effectLst/>
+        </p:spPr>
+        <p:style>
+          <a:lnRef idx="1">
+            <a:schemeClr val="accent1"/>
+          </a:lnRef>
+          <a:fillRef idx="3">
+            <a:schemeClr val="accent1"/>
+          </a:fillRef>
+          <a:effectRef idx="2">
+            <a:schemeClr val="accent1"/>
+          </a:effectRef>
+          <a:fontRef idx="minor">
+            <a:schemeClr val="lt1"/>
+          </a:fontRef>
+        </p:style>
+        <p:txBody>
+          <a:bodyPr rtlCol="0" anchor="ctr"/>
+          <a:lstStyle/>
+          <a:p>
+            <a:pPr algn="ctr"/>
+          </a:p>
+        </p:txBody>
+      </p:sp>
+      <p:sp>
+        <p:nvSpPr>
+          <p:cNvPr id="9" name="TextBox 8"/>
+          <p:cNvSpPr txBox="1"/>
+          <p:nvPr/>
+        </p:nvSpPr>
+        <p:spPr>
+          <a:xfrm>
+            <a:off x="6080760" y="2726055"/>
+            <a:ext cx="4750307" cy="1280160"/>
+          </a:xfrm>
+          <a:prstGeom prst="rect">
+            <a:avLst/>
+          </a:prstGeom>
+          <a:noFill/>
+        </p:spPr>
+        <p:txBody>
+          <a:bodyPr wrap="square">
+            <a:spAutoFit/>
+          </a:bodyPr>
+          <a:lstStyle/>
+          <a:p>
+            <a:pPr algn="ctr"/>
+            <a:r>
+              <a:rPr sz="1400" b="1" i="0">
+                <a:solidFill>
+                  <a:srgbClr val="64748B"/>
+                </a:solidFill>
+                <a:latin typeface="Montserrat"/>
+              </a:rPr>
+              <a:t>IMAGEN REALISTA</a:t>
+            </a:r>
+          </a:p>
+          <a:p>
+            <a:pPr algn="ctr"/>
+            <a:r>
+              <a:rPr sz="1100" b="0" i="1">
+                <a:solidFill>
+                  <a:srgbClr val="64748B"/>
+                </a:solidFill>
+                <a:latin typeface="Montserrat"/>
+              </a:rPr>
+              <a:t>two fire extinguishers mounted on wall outdoor</a:t>
+            </a:r>
+          </a:p>
+        </p:txBody>
+      </p:sp>
+    </p:spTree>
+  </p:cSld>
+  <p:clrMapOvr>
+    <a:masterClrMapping/>
+  </p:clrMapOvr>
+</p:sld>
+</file>
+
+<file path=ppt/slides/slide17.xml><?xml version="1.0" encoding="utf-8"?>
+<p:sld xmlns:a="http://schemas.openxmlformats.org/drawingml/2006/main" xmlns:p="http://schemas.openxmlformats.org/presentationml/2006/main" xmlns:r="http://schemas.openxmlformats.org/officeDocument/2006/relationships">
+  <p:cSld>
+    <p:spTree>
+      <p:nvGrpSpPr>
+        <p:cNvPr id="1" name=""/>
+        <p:cNvGrpSpPr/>
+        <p:nvPr/>
+      </p:nvGrpSpPr>
+      <p:grpSpPr/>
+      <p:sp>
+        <p:nvSpPr>
+          <p:cNvPr id="2" name="Rectangle 1"/>
+          <p:cNvSpPr/>
+          <p:nvPr/>
+        </p:nvSpPr>
+        <p:spPr>
+          <a:xfrm>
+            <a:off x="0" y="0"/>
+            <a:ext cx="12191695" cy="6858000"/>
+          </a:xfrm>
+          <a:prstGeom prst="rect">
+            <a:avLst/>
+          </a:prstGeom>
+          <a:solidFill>
+            <a:srgbClr val="FFFFFF"/>
+          </a:solidFill>
+          <a:ln>
+            <a:noFill/>
+          </a:ln>
+          <a:effectLst/>
+        </p:spPr>
+        <p:style>
+          <a:lnRef idx="1">
+            <a:schemeClr val="accent1"/>
+          </a:lnRef>
+          <a:fillRef idx="3">
+            <a:schemeClr val="accent1"/>
+          </a:fillRef>
+          <a:effectRef idx="2">
+            <a:schemeClr val="accent1"/>
+          </a:effectRef>
+          <a:fontRef idx="minor">
+            <a:schemeClr val="lt1"/>
+          </a:fontRef>
+        </p:style>
+        <p:txBody>
+          <a:bodyPr rtlCol="0" anchor="ctr"/>
+          <a:lstStyle/>
+          <a:p>
+            <a:pPr algn="ctr"/>
+          </a:p>
+        </p:txBody>
+      </p:sp>
+      <p:sp>
+        <p:nvSpPr>
+          <p:cNvPr id="3" name="TextBox 2"/>
+          <p:cNvSpPr txBox="1"/>
+          <p:nvPr/>
+        </p:nvSpPr>
+        <p:spPr>
+          <a:xfrm>
+            <a:off x="10607040" y="320040"/>
+            <a:ext cx="1371600" cy="365760"/>
+          </a:xfrm>
+          <a:prstGeom prst="rect">
+            <a:avLst/>
+          </a:prstGeom>
+          <a:noFill/>
+        </p:spPr>
+        <p:txBody>
+          <a:bodyPr wrap="square">
+            <a:spAutoFit/>
+          </a:bodyPr>
+          <a:lstStyle/>
+          <a:p>
+            <a:pPr algn="r"/>
+            <a:r>
+              <a:rPr sz="1000" b="1" i="0">
+                <a:solidFill>
+                  <a:srgbClr val="64748B"/>
+                </a:solidFill>
+                <a:latin typeface="Montserrat"/>
+              </a:rPr>
+              <a:t>017 / 021</a:t>
+            </a:r>
+          </a:p>
+        </p:txBody>
+      </p:sp>
+      <p:sp>
+        <p:nvSpPr>
+          <p:cNvPr id="4" name="TextBox 3"/>
+          <p:cNvSpPr txBox="1"/>
+          <p:nvPr/>
+        </p:nvSpPr>
+        <p:spPr>
+          <a:xfrm>
+            <a:off x="457200" y="6419088"/>
+            <a:ext cx="8229600" cy="365760"/>
+          </a:xfrm>
+          <a:prstGeom prst="rect">
+            <a:avLst/>
+          </a:prstGeom>
+          <a:noFill/>
+        </p:spPr>
+        <p:txBody>
+          <a:bodyPr wrap="square">
+            <a:spAutoFit/>
+          </a:bodyPr>
+          <a:lstStyle/>
+          <a:p>
+            <a:r>
+              <a:rPr sz="900" b="0" i="0">
+                <a:solidFill>
+                  <a:srgbClr val="64748B"/>
+                </a:solidFill>
+                <a:latin typeface="Montserrat"/>
+              </a:rPr>
+              <a:t>Curso Gas B · Tema 03 · ITC-ICG 06 · Envases de GLP para uso propio</a:t>
+            </a:r>
+          </a:p>
+        </p:txBody>
+      </p:sp>
+      <p:sp>
+        <p:nvSpPr>
+          <p:cNvPr id="5" name="TextBox 4"/>
+          <p:cNvSpPr txBox="1"/>
+          <p:nvPr/>
+        </p:nvSpPr>
+        <p:spPr>
+          <a:xfrm>
+            <a:off x="822960" y="457200"/>
+            <a:ext cx="8229600" cy="365760"/>
+          </a:xfrm>
+          <a:prstGeom prst="rect">
+            <a:avLst/>
+          </a:prstGeom>
+          <a:noFill/>
+        </p:spPr>
+        <p:txBody>
+          <a:bodyPr wrap="square">
+            <a:spAutoFit/>
+          </a:bodyPr>
+          <a:lstStyle/>
+          <a:p>
+            <a:r>
+              <a:rPr sz="1200" b="1" i="0">
+                <a:solidFill>
+                  <a:srgbClr val="64748B"/>
+                </a:solidFill>
+                <a:latin typeface="Montserrat"/>
+              </a:rPr>
+              <a:t>APARTADO 2.2.4 · CAMBIO DE ENVASES</a:t>
+            </a:r>
+          </a:p>
+        </p:txBody>
+      </p:sp>
+      <p:sp>
+        <p:nvSpPr>
+          <p:cNvPr id="6" name="TextBox 5"/>
+          <p:cNvSpPr txBox="1"/>
+          <p:nvPr/>
+        </p:nvSpPr>
+        <p:spPr>
+          <a:xfrm>
+            <a:off x="822960" y="868680"/>
+            <a:ext cx="10515600" cy="914400"/>
+          </a:xfrm>
+          <a:prstGeom prst="rect">
+            <a:avLst/>
+          </a:prstGeom>
+          <a:noFill/>
+        </p:spPr>
+        <p:txBody>
+          <a:bodyPr wrap="square">
+            <a:spAutoFit/>
+          </a:bodyPr>
+          <a:lstStyle/>
+          <a:p>
+            <a:r>
+              <a:rPr sz="2700" b="1" i="0">
+                <a:solidFill>
+                  <a:srgbClr val="1E2761"/>
+                </a:solidFill>
+                <a:latin typeface="Montserrat"/>
+              </a:rPr>
+              <a:t>El momento más peligroso</a:t>
+            </a:r>
+          </a:p>
+        </p:txBody>
+      </p:sp>
+      <p:sp>
+        <p:nvSpPr>
+          <p:cNvPr id="7" name="TextBox 6"/>
+          <p:cNvSpPr txBox="1"/>
+          <p:nvPr/>
+        </p:nvSpPr>
+        <p:spPr>
+          <a:xfrm>
+            <a:off x="822960" y="1920240"/>
+            <a:ext cx="4983480" cy="4206240"/>
+          </a:xfrm>
+          <a:prstGeom prst="rect">
+            <a:avLst/>
+          </a:prstGeom>
+          <a:noFill/>
+        </p:spPr>
+        <p:txBody>
+          <a:bodyPr wrap="square">
+            <a:spAutoFit/>
+          </a:bodyPr>
+          <a:lstStyle/>
+          <a:p>
+            <a:pPr>
+              <a:spcAft>
+                <a:spcPts val="1000"/>
+              </a:spcAft>
+            </a:pPr>
+            <a:r>
+              <a:rPr sz="1600" b="1" i="0">
+                <a:solidFill>
+                  <a:srgbClr val="2E3A80"/>
+                </a:solidFill>
+                <a:latin typeface="Montserrat"/>
+              </a:rPr>
+              <a:t>•  </a:t>
+            </a:r>
+            <a:r>
+              <a:rPr sz="1600" b="0" i="0">
+                <a:solidFill>
+                  <a:srgbClr val="1B2330"/>
+                </a:solidFill>
+                <a:latin typeface="Montserrat"/>
+              </a:rPr>
+              <a:t>Ni fuego, ni interruptores, ni motores</a:t>
+            </a:r>
+          </a:p>
+          <a:p>
+            <a:pPr>
+              <a:spcAft>
+                <a:spcPts val="1000"/>
+              </a:spcAft>
+            </a:pPr>
+            <a:r>
+              <a:rPr sz="1600" b="1" i="0">
+                <a:solidFill>
+                  <a:srgbClr val="2E3A80"/>
+                </a:solidFill>
+                <a:latin typeface="Montserrat"/>
+              </a:rPr>
+              <a:t>•  </a:t>
+            </a:r>
+            <a:r>
+              <a:rPr sz="1600" b="0" i="0">
+                <a:solidFill>
+                  <a:srgbClr val="1B2330"/>
+                </a:solidFill>
+                <a:latin typeface="Montserrat"/>
+              </a:rPr>
+              <a:t>Se relaja si hay mucha distancia</a:t>
+            </a:r>
+          </a:p>
+          <a:p>
+            <a:pPr>
+              <a:spcAft>
+                <a:spcPts val="1000"/>
+              </a:spcAft>
+            </a:pPr>
+            <a:r>
+              <a:rPr sz="1600" b="1" i="0">
+                <a:solidFill>
+                  <a:srgbClr val="2E3A80"/>
+                </a:solidFill>
+                <a:latin typeface="Montserrat"/>
+              </a:rPr>
+              <a:t>•  </a:t>
+            </a:r>
+            <a:r>
+              <a:rPr sz="1600" b="0" i="0">
+                <a:solidFill>
+                  <a:srgbClr val="1B2330"/>
+                </a:solidFill>
+                <a:latin typeface="Montserrat"/>
+              </a:rPr>
+              <a:t>20 m dentro · 10 m fuera</a:t>
+            </a:r>
+          </a:p>
+        </p:txBody>
+      </p:sp>
+      <p:sp>
+        <p:nvSpPr>
+          <p:cNvPr id="8" name="imgph" descr="IMGQ:worker changing a propane cylinder connection"/>
+          <p:cNvSpPr/>
+          <p:nvPr/>
+        </p:nvSpPr>
+        <p:spPr>
+          <a:xfrm>
+            <a:off x="5806440" y="1051560"/>
+            <a:ext cx="5298947" cy="4629150"/>
+          </a:xfrm>
+          <a:prstGeom prst="roundRect">
+            <a:avLst/>
+          </a:prstGeom>
+          <a:solidFill>
+            <a:srgbClr val="F3F6FB"/>
+          </a:solidFill>
+          <a:ln w="12700">
+            <a:solidFill>
+              <a:srgbClr val="C7D2E6"/>
+            </a:solidFill>
+          </a:ln>
+          <a:effectLst/>
+        </p:spPr>
+        <p:style>
+          <a:lnRef idx="1">
+            <a:schemeClr val="accent1"/>
+          </a:lnRef>
+          <a:fillRef idx="3">
+            <a:schemeClr val="accent1"/>
+          </a:fillRef>
+          <a:effectRef idx="2">
+            <a:schemeClr val="accent1"/>
+          </a:effectRef>
+          <a:fontRef idx="minor">
+            <a:schemeClr val="lt1"/>
+          </a:fontRef>
+        </p:style>
+        <p:txBody>
+          <a:bodyPr rtlCol="0" anchor="ctr"/>
+          <a:lstStyle/>
+          <a:p>
+            <a:pPr algn="ctr"/>
+          </a:p>
+        </p:txBody>
+      </p:sp>
+      <p:sp>
+        <p:nvSpPr>
+          <p:cNvPr id="9" name="TextBox 8"/>
+          <p:cNvSpPr txBox="1"/>
+          <p:nvPr/>
+        </p:nvSpPr>
+        <p:spPr>
+          <a:xfrm>
+            <a:off x="6080760" y="2726055"/>
+            <a:ext cx="4750307" cy="1280160"/>
+          </a:xfrm>
+          <a:prstGeom prst="rect">
+            <a:avLst/>
+          </a:prstGeom>
+          <a:noFill/>
+        </p:spPr>
+        <p:txBody>
+          <a:bodyPr wrap="square">
+            <a:spAutoFit/>
+          </a:bodyPr>
+          <a:lstStyle/>
+          <a:p>
+            <a:pPr algn="ctr"/>
+            <a:r>
+              <a:rPr sz="1400" b="1" i="0">
+                <a:solidFill>
+                  <a:srgbClr val="64748B"/>
+                </a:solidFill>
+                <a:latin typeface="Montserrat"/>
+              </a:rPr>
+              <a:t>IMAGEN REALISTA</a:t>
+            </a:r>
+          </a:p>
+          <a:p>
+            <a:pPr algn="ctr"/>
+            <a:r>
+              <a:rPr sz="1100" b="0" i="1">
+                <a:solidFill>
+                  <a:srgbClr val="64748B"/>
+                </a:solidFill>
+                <a:latin typeface="Montserrat"/>
+              </a:rPr>
+              <a:t>worker changing a propane cylinder connection</a:t>
+            </a:r>
+          </a:p>
+        </p:txBody>
+      </p:sp>
+    </p:spTree>
+  </p:cSld>
+  <p:clrMapOvr>
+    <a:masterClrMapping/>
+  </p:clrMapOvr>
+</p:sld>
+</file>
+
+<file path=ppt/slides/slide18.xml><?xml version="1.0" encoding="utf-8"?>
+<p:sld xmlns:a="http://schemas.openxmlformats.org/drawingml/2006/main" xmlns:p="http://schemas.openxmlformats.org/presentationml/2006/main" xmlns:r="http://schemas.openxmlformats.org/officeDocument/2006/relationships">
+  <p:cSld>
+    <p:spTree>
+      <p:nvGrpSpPr>
+        <p:cNvPr id="1" name=""/>
+        <p:cNvGrpSpPr/>
+        <p:nvPr/>
+      </p:nvGrpSpPr>
+      <p:grpSpPr/>
+      <p:sp>
+        <p:nvSpPr>
+          <p:cNvPr id="2" name="Rectangle 1"/>
+          <p:cNvSpPr/>
+          <p:nvPr/>
+        </p:nvSpPr>
+        <p:spPr>
+          <a:xfrm>
+            <a:off x="0" y="0"/>
+            <a:ext cx="12191695" cy="6858000"/>
+          </a:xfrm>
+          <a:prstGeom prst="rect">
+            <a:avLst/>
+          </a:prstGeom>
+          <a:solidFill>
+            <a:srgbClr val="FFFFFF"/>
+          </a:solidFill>
+          <a:ln>
+            <a:noFill/>
+          </a:ln>
+          <a:effectLst/>
+        </p:spPr>
+        <p:style>
+          <a:lnRef idx="1">
+            <a:schemeClr val="accent1"/>
+          </a:lnRef>
+          <a:fillRef idx="3">
+            <a:schemeClr val="accent1"/>
+          </a:fillRef>
+          <a:effectRef idx="2">
+            <a:schemeClr val="accent1"/>
+          </a:effectRef>
+          <a:fontRef idx="minor">
+            <a:schemeClr val="lt1"/>
+          </a:fontRef>
+        </p:style>
+        <p:txBody>
+          <a:bodyPr rtlCol="0" anchor="ctr"/>
+          <a:lstStyle/>
+          <a:p>
+            <a:pPr algn="ctr"/>
+          </a:p>
+        </p:txBody>
+      </p:sp>
+      <p:sp>
+        <p:nvSpPr>
+          <p:cNvPr id="3" name="TextBox 2"/>
+          <p:cNvSpPr txBox="1"/>
+          <p:nvPr/>
+        </p:nvSpPr>
+        <p:spPr>
+          <a:xfrm>
+            <a:off x="10607040" y="320040"/>
+            <a:ext cx="1371600" cy="365760"/>
+          </a:xfrm>
+          <a:prstGeom prst="rect">
+            <a:avLst/>
+          </a:prstGeom>
+          <a:noFill/>
+        </p:spPr>
+        <p:txBody>
+          <a:bodyPr wrap="square">
+            <a:spAutoFit/>
+          </a:bodyPr>
+          <a:lstStyle/>
+          <a:p>
+            <a:pPr algn="r"/>
+            <a:r>
+              <a:rPr sz="1000" b="1" i="0">
+                <a:solidFill>
+                  <a:srgbClr val="64748B"/>
+                </a:solidFill>
+                <a:latin typeface="Montserrat"/>
+              </a:rPr>
+              <a:t>018 / 021</a:t>
+            </a:r>
+          </a:p>
+        </p:txBody>
+      </p:sp>
+      <p:sp>
+        <p:nvSpPr>
+          <p:cNvPr id="4" name="TextBox 3"/>
+          <p:cNvSpPr txBox="1"/>
+          <p:nvPr/>
+        </p:nvSpPr>
+        <p:spPr>
+          <a:xfrm>
+            <a:off x="457200" y="6419088"/>
+            <a:ext cx="8229600" cy="365760"/>
+          </a:xfrm>
+          <a:prstGeom prst="rect">
+            <a:avLst/>
+          </a:prstGeom>
+          <a:noFill/>
+        </p:spPr>
+        <p:txBody>
+          <a:bodyPr wrap="square">
+            <a:spAutoFit/>
+          </a:bodyPr>
+          <a:lstStyle/>
+          <a:p>
+            <a:r>
+              <a:rPr sz="900" b="0" i="0">
+                <a:solidFill>
+                  <a:srgbClr val="64748B"/>
+                </a:solidFill>
+                <a:latin typeface="Montserrat"/>
+              </a:rPr>
+              <a:t>Curso Gas B · Tema 03 · ITC-ICG 06 · Envases de GLP para uso propio</a:t>
+            </a:r>
+          </a:p>
+        </p:txBody>
+      </p:sp>
+      <p:sp>
+        <p:nvSpPr>
+          <p:cNvPr id="5" name="TextBox 4"/>
+          <p:cNvSpPr txBox="1"/>
+          <p:nvPr/>
+        </p:nvSpPr>
+        <p:spPr>
+          <a:xfrm>
+            <a:off x="822960" y="457200"/>
+            <a:ext cx="8229600" cy="365760"/>
+          </a:xfrm>
+          <a:prstGeom prst="rect">
+            <a:avLst/>
+          </a:prstGeom>
+          <a:noFill/>
+        </p:spPr>
+        <p:txBody>
+          <a:bodyPr wrap="square">
+            <a:spAutoFit/>
+          </a:bodyPr>
+          <a:lstStyle/>
+          <a:p>
+            <a:r>
+              <a:rPr sz="1200" b="1" i="0">
+                <a:solidFill>
+                  <a:srgbClr val="64748B"/>
+                </a:solidFill>
+                <a:latin typeface="Montserrat"/>
+              </a:rPr>
+              <a:t>APARTADO 3 · PAPELEO</a:t>
+            </a:r>
+          </a:p>
+        </p:txBody>
+      </p:sp>
+      <p:sp>
+        <p:nvSpPr>
+          <p:cNvPr id="6" name="TextBox 5"/>
+          <p:cNvSpPr txBox="1"/>
+          <p:nvPr/>
+        </p:nvSpPr>
+        <p:spPr>
+          <a:xfrm>
+            <a:off x="822960" y="868680"/>
+            <a:ext cx="10515600" cy="914400"/>
+          </a:xfrm>
+          <a:prstGeom prst="rect">
+            <a:avLst/>
+          </a:prstGeom>
+          <a:noFill/>
+        </p:spPr>
+        <p:txBody>
+          <a:bodyPr wrap="square">
+            <a:spAutoFit/>
+          </a:bodyPr>
+          <a:lstStyle/>
+          <a:p>
+            <a:r>
+              <a:rPr sz="2700" b="1" i="0">
+                <a:solidFill>
+                  <a:srgbClr val="1E2761"/>
+                </a:solidFill>
+                <a:latin typeface="Montserrat"/>
+              </a:rPr>
+              <a:t>Se libra el cacharro suelto</a:t>
+            </a:r>
+          </a:p>
+        </p:txBody>
+      </p:sp>
+      <p:sp>
+        <p:nvSpPr>
+          <p:cNvPr id="7" name="TextBox 6"/>
+          <p:cNvSpPr txBox="1"/>
+          <p:nvPr/>
+        </p:nvSpPr>
+        <p:spPr>
+          <a:xfrm>
+            <a:off x="822960" y="1920240"/>
+            <a:ext cx="4983480" cy="4206240"/>
+          </a:xfrm>
+          <a:prstGeom prst="rect">
+            <a:avLst/>
+          </a:prstGeom>
+          <a:noFill/>
+        </p:spPr>
+        <p:txBody>
+          <a:bodyPr wrap="square">
+            <a:spAutoFit/>
+          </a:bodyPr>
+          <a:lstStyle/>
+          <a:p>
+            <a:pPr>
+              <a:spcAft>
+                <a:spcPts val="1000"/>
+              </a:spcAft>
+            </a:pPr>
+            <a:r>
+              <a:rPr sz="1600" b="1" i="0">
+                <a:solidFill>
+                  <a:srgbClr val="2E3A80"/>
+                </a:solidFill>
+                <a:latin typeface="Montserrat"/>
+              </a:rPr>
+              <a:t>•  </a:t>
+            </a:r>
+            <a:r>
+              <a:rPr sz="1600" b="0" i="0">
+                <a:solidFill>
+                  <a:srgbClr val="1B2330"/>
+                </a:solidFill>
+                <a:latin typeface="Montserrat"/>
+              </a:rPr>
+              <a:t>Excluido: un envase ≤ 15 kg</a:t>
+            </a:r>
+          </a:p>
+          <a:p>
+            <a:pPr>
+              <a:spcAft>
+                <a:spcPts val="1000"/>
+              </a:spcAft>
+            </a:pPr>
+            <a:r>
+              <a:rPr sz="1600" b="1" i="0">
+                <a:solidFill>
+                  <a:srgbClr val="2E3A80"/>
+                </a:solidFill>
+                <a:latin typeface="Montserrat"/>
+              </a:rPr>
+              <a:t>•  </a:t>
+            </a:r>
+            <a:r>
+              <a:rPr sz="1600" b="0" i="0">
+                <a:solidFill>
+                  <a:srgbClr val="1B2330"/>
+                </a:solidFill>
+                <a:latin typeface="Montserrat"/>
+              </a:rPr>
+              <a:t>A un solo aparato móvil</a:t>
+            </a:r>
+          </a:p>
+          <a:p>
+            <a:pPr>
+              <a:spcAft>
+                <a:spcPts val="1000"/>
+              </a:spcAft>
+            </a:pPr>
+            <a:r>
+              <a:rPr sz="1600" b="1" i="0">
+                <a:solidFill>
+                  <a:srgbClr val="2E3A80"/>
+                </a:solidFill>
+                <a:latin typeface="Montserrat"/>
+              </a:rPr>
+              <a:t>•  </a:t>
+            </a:r>
+            <a:r>
+              <a:rPr sz="1600" b="0" i="0">
+                <a:solidFill>
+                  <a:srgbClr val="1B2330"/>
+                </a:solidFill>
+                <a:latin typeface="Montserrat"/>
+              </a:rPr>
+              <a:t>No precisa autorización previa</a:t>
+            </a:r>
+          </a:p>
+        </p:txBody>
+      </p:sp>
+      <p:sp>
+        <p:nvSpPr>
+          <p:cNvPr id="8" name="imgph" descr="IMGQ:portable gas heater with single butane cylinder"/>
+          <p:cNvSpPr/>
+          <p:nvPr/>
+        </p:nvSpPr>
+        <p:spPr>
+          <a:xfrm>
+            <a:off x="5806440" y="1051560"/>
+            <a:ext cx="5298947" cy="4629150"/>
+          </a:xfrm>
+          <a:prstGeom prst="roundRect">
+            <a:avLst/>
+          </a:prstGeom>
+          <a:solidFill>
+            <a:srgbClr val="F3F6FB"/>
+          </a:solidFill>
+          <a:ln w="12700">
+            <a:solidFill>
+              <a:srgbClr val="C7D2E6"/>
+            </a:solidFill>
+          </a:ln>
+          <a:effectLst/>
+        </p:spPr>
+        <p:style>
+          <a:lnRef idx="1">
+            <a:schemeClr val="accent1"/>
+          </a:lnRef>
+          <a:fillRef idx="3">
+            <a:schemeClr val="accent1"/>
+          </a:fillRef>
+          <a:effectRef idx="2">
+            <a:schemeClr val="accent1"/>
+          </a:effectRef>
+          <a:fontRef idx="minor">
+            <a:schemeClr val="lt1"/>
+          </a:fontRef>
+        </p:style>
+        <p:txBody>
+          <a:bodyPr rtlCol="0" anchor="ctr"/>
+          <a:lstStyle/>
+          <a:p>
+            <a:pPr algn="ctr"/>
+          </a:p>
+        </p:txBody>
+      </p:sp>
+      <p:sp>
+        <p:nvSpPr>
+          <p:cNvPr id="9" name="TextBox 8"/>
+          <p:cNvSpPr txBox="1"/>
+          <p:nvPr/>
+        </p:nvSpPr>
+        <p:spPr>
+          <a:xfrm>
+            <a:off x="6080760" y="2726055"/>
+            <a:ext cx="4750307" cy="1280160"/>
+          </a:xfrm>
+          <a:prstGeom prst="rect">
+            <a:avLst/>
+          </a:prstGeom>
+          <a:noFill/>
+        </p:spPr>
+        <p:txBody>
+          <a:bodyPr wrap="square">
+            <a:spAutoFit/>
+          </a:bodyPr>
+          <a:lstStyle/>
+          <a:p>
+            <a:pPr algn="ctr"/>
+            <a:r>
+              <a:rPr sz="1400" b="1" i="0">
+                <a:solidFill>
+                  <a:srgbClr val="64748B"/>
+                </a:solidFill>
+                <a:latin typeface="Montserrat"/>
+              </a:rPr>
+              <a:t>IMAGEN REALISTA</a:t>
+            </a:r>
+          </a:p>
+          <a:p>
+            <a:pPr algn="ctr"/>
+            <a:r>
+              <a:rPr sz="1100" b="0" i="1">
+                <a:solidFill>
+                  <a:srgbClr val="64748B"/>
+                </a:solidFill>
+                <a:latin typeface="Montserrat"/>
+              </a:rPr>
+              <a:t>portable gas heater with single butane cylinder</a:t>
+            </a:r>
+          </a:p>
+        </p:txBody>
+      </p:sp>
+    </p:spTree>
+  </p:cSld>
+  <p:clrMapOvr>
+    <a:masterClrMapping/>
+  </p:clrMapOvr>
+</p:sld>
+</file>
+
+<file path=ppt/slides/slide19.xml><?xml version="1.0" encoding="utf-8"?>
+<p:sld xmlns:a="http://schemas.openxmlformats.org/drawingml/2006/main" xmlns:p="http://schemas.openxmlformats.org/presentationml/2006/main" xmlns:r="http://schemas.openxmlformats.org/officeDocument/2006/relationships">
+  <p:cSld>
+    <p:spTree>
+      <p:nvGrpSpPr>
+        <p:cNvPr id="1" name=""/>
+        <p:cNvGrpSpPr/>
+        <p:nvPr/>
+      </p:nvGrpSpPr>
+      <p:grpSpPr/>
+      <p:sp>
+        <p:nvSpPr>
+          <p:cNvPr id="2" name="Rectangle 1"/>
+          <p:cNvSpPr/>
+          <p:nvPr/>
+        </p:nvSpPr>
+        <p:spPr>
+          <a:xfrm>
+            <a:off x="0" y="0"/>
+            <a:ext cx="12191695" cy="6858000"/>
+          </a:xfrm>
+          <a:prstGeom prst="rect">
+            <a:avLst/>
+          </a:prstGeom>
+          <a:solidFill>
+            <a:srgbClr val="FFFFFF"/>
+          </a:solidFill>
+          <a:ln>
+            <a:noFill/>
+          </a:ln>
+          <a:effectLst/>
+        </p:spPr>
+        <p:style>
+          <a:lnRef idx="1">
+            <a:schemeClr val="accent1"/>
+          </a:lnRef>
+          <a:fillRef idx="3">
+            <a:schemeClr val="accent1"/>
+          </a:fillRef>
+          <a:effectRef idx="2">
+            <a:schemeClr val="accent1"/>
+          </a:effectRef>
+          <a:fontRef idx="minor">
+            <a:schemeClr val="lt1"/>
+          </a:fontRef>
+        </p:style>
+        <p:txBody>
+          <a:bodyPr rtlCol="0" anchor="ctr"/>
+          <a:lstStyle/>
+          <a:p>
+            <a:pPr algn="ctr"/>
+          </a:p>
+        </p:txBody>
+      </p:sp>
+      <p:sp>
+        <p:nvSpPr>
+          <p:cNvPr id="3" name="TextBox 2"/>
+          <p:cNvSpPr txBox="1"/>
+          <p:nvPr/>
+        </p:nvSpPr>
+        <p:spPr>
+          <a:xfrm>
+            <a:off x="10607040" y="320040"/>
+            <a:ext cx="1371600" cy="365760"/>
+          </a:xfrm>
+          <a:prstGeom prst="rect">
+            <a:avLst/>
+          </a:prstGeom>
+          <a:noFill/>
+        </p:spPr>
+        <p:txBody>
+          <a:bodyPr wrap="square">
+            <a:spAutoFit/>
+          </a:bodyPr>
+          <a:lstStyle/>
+          <a:p>
+            <a:pPr algn="r"/>
+            <a:r>
+              <a:rPr sz="1000" b="1" i="0">
+                <a:solidFill>
+                  <a:srgbClr val="64748B"/>
+                </a:solidFill>
+                <a:latin typeface="Montserrat"/>
+              </a:rPr>
+              <a:t>019 / 021</a:t>
+            </a:r>
+          </a:p>
+        </p:txBody>
+      </p:sp>
+      <p:sp>
+        <p:nvSpPr>
+          <p:cNvPr id="4" name="TextBox 3"/>
+          <p:cNvSpPr txBox="1"/>
+          <p:nvPr/>
+        </p:nvSpPr>
+        <p:spPr>
+          <a:xfrm>
+            <a:off x="457200" y="6419088"/>
+            <a:ext cx="8229600" cy="365760"/>
+          </a:xfrm>
+          <a:prstGeom prst="rect">
+            <a:avLst/>
+          </a:prstGeom>
+          <a:noFill/>
+        </p:spPr>
+        <p:txBody>
+          <a:bodyPr wrap="square">
+            <a:spAutoFit/>
+          </a:bodyPr>
+          <a:lstStyle/>
+          <a:p>
+            <a:r>
+              <a:rPr sz="900" b="0" i="0">
+                <a:solidFill>
+                  <a:srgbClr val="64748B"/>
+                </a:solidFill>
+                <a:latin typeface="Montserrat"/>
+              </a:rPr>
+              <a:t>Curso Gas B · Tema 03 · ITC-ICG 06 · Envases de GLP para uso propio</a:t>
+            </a:r>
+          </a:p>
+        </p:txBody>
+      </p:sp>
+      <p:sp>
+        <p:nvSpPr>
+          <p:cNvPr id="5" name="TextBox 4"/>
+          <p:cNvSpPr txBox="1"/>
+          <p:nvPr/>
+        </p:nvSpPr>
+        <p:spPr>
+          <a:xfrm>
+            <a:off x="822960" y="457200"/>
+            <a:ext cx="8229600" cy="365760"/>
+          </a:xfrm>
+          <a:prstGeom prst="rect">
+            <a:avLst/>
+          </a:prstGeom>
+          <a:noFill/>
+        </p:spPr>
+        <p:txBody>
+          <a:bodyPr wrap="square">
+            <a:spAutoFit/>
+          </a:bodyPr>
+          <a:lstStyle/>
+          <a:p>
+            <a:r>
+              <a:rPr sz="1200" b="1" i="0">
+                <a:solidFill>
+                  <a:srgbClr val="64748B"/>
+                </a:solidFill>
+                <a:latin typeface="Montserrat"/>
+              </a:rPr>
+              <a:t>APARTADO 3.3 · PRUEBAS</a:t>
+            </a:r>
+          </a:p>
+        </p:txBody>
+      </p:sp>
+      <p:sp>
+        <p:nvSpPr>
+          <p:cNvPr id="6" name="TextBox 5"/>
+          <p:cNvSpPr txBox="1"/>
+          <p:nvPr/>
+        </p:nvSpPr>
+        <p:spPr>
+          <a:xfrm>
+            <a:off x="822960" y="868680"/>
+            <a:ext cx="10515600" cy="914400"/>
+          </a:xfrm>
+          <a:prstGeom prst="rect">
+            <a:avLst/>
+          </a:prstGeom>
+          <a:noFill/>
+        </p:spPr>
+        <p:txBody>
+          <a:bodyPr wrap="square">
+            <a:spAutoFit/>
+          </a:bodyPr>
+          <a:lstStyle/>
+          <a:p>
+            <a:r>
+              <a:rPr sz="2700" b="1" i="0">
+                <a:solidFill>
+                  <a:srgbClr val="1E2761"/>
+                </a:solidFill>
+                <a:latin typeface="Montserrat"/>
+              </a:rPr>
+              <a:t>La prueba de estanquidad</a:t>
+            </a:r>
+          </a:p>
+        </p:txBody>
+      </p:sp>
+      <p:sp>
+        <p:nvSpPr>
+          <p:cNvPr id="7" name="TextBox 6"/>
+          <p:cNvSpPr txBox="1"/>
+          <p:nvPr/>
+        </p:nvSpPr>
+        <p:spPr>
+          <a:xfrm>
+            <a:off x="822960" y="1920240"/>
+            <a:ext cx="4983480" cy="4206240"/>
+          </a:xfrm>
+          <a:prstGeom prst="rect">
+            <a:avLst/>
+          </a:prstGeom>
+          <a:noFill/>
+        </p:spPr>
+        <p:txBody>
+          <a:bodyPr wrap="square">
+            <a:spAutoFit/>
+          </a:bodyPr>
+          <a:lstStyle/>
+          <a:p>
+            <a:pPr>
+              <a:spcAft>
+                <a:spcPts val="1000"/>
+              </a:spcAft>
+            </a:pPr>
+            <a:r>
+              <a:rPr sz="1600" b="1" i="0">
+                <a:solidFill>
+                  <a:srgbClr val="2E3A80"/>
+                </a:solidFill>
+                <a:latin typeface="Montserrat"/>
+              </a:rPr>
+              <a:t>•  </a:t>
+            </a:r>
+            <a:r>
+              <a:rPr sz="1600" b="0" i="0">
+                <a:solidFill>
+                  <a:srgbClr val="1B2330"/>
+                </a:solidFill>
+                <a:latin typeface="Montserrat"/>
+              </a:rPr>
+              <a:t>1,5 veces la presión de operación</a:t>
+            </a:r>
+          </a:p>
+          <a:p>
+            <a:pPr>
+              <a:spcAft>
+                <a:spcPts val="1000"/>
+              </a:spcAft>
+            </a:pPr>
+            <a:r>
+              <a:rPr sz="1600" b="1" i="0">
+                <a:solidFill>
+                  <a:srgbClr val="2E3A80"/>
+                </a:solidFill>
+                <a:latin typeface="Montserrat"/>
+              </a:rPr>
+              <a:t>•  </a:t>
+            </a:r>
+            <a:r>
+              <a:rPr sz="1600" b="0" i="0">
+                <a:solidFill>
+                  <a:srgbClr val="1B2330"/>
+                </a:solidFill>
+                <a:latin typeface="Montserrat"/>
+              </a:rPr>
+              <a:t>Durante 10 minutos</a:t>
+            </a:r>
+          </a:p>
+          <a:p>
+            <a:pPr>
+              <a:spcAft>
+                <a:spcPts val="1000"/>
+              </a:spcAft>
+            </a:pPr>
+            <a:r>
+              <a:rPr sz="1600" b="1" i="0">
+                <a:solidFill>
+                  <a:srgbClr val="2E3A80"/>
+                </a:solidFill>
+                <a:latin typeface="Montserrat"/>
+              </a:rPr>
+              <a:t>•  </a:t>
+            </a:r>
+            <a:r>
+              <a:rPr sz="1600" b="0" i="0">
+                <a:solidFill>
+                  <a:srgbClr val="1B2330"/>
+                </a:solidFill>
+                <a:latin typeface="Montserrat"/>
+              </a:rPr>
+              <a:t>Aire, gas inerte o GLP en fase gas</a:t>
+            </a:r>
+          </a:p>
+        </p:txBody>
+      </p:sp>
+      <p:sp>
+        <p:nvSpPr>
+          <p:cNvPr id="8" name="imgph" descr="IMGQ:pressure gauge testing gas pipe installation"/>
+          <p:cNvSpPr/>
+          <p:nvPr/>
+        </p:nvSpPr>
+        <p:spPr>
+          <a:xfrm>
+            <a:off x="5806440" y="1051560"/>
+            <a:ext cx="5298947" cy="4629150"/>
+          </a:xfrm>
+          <a:prstGeom prst="roundRect">
+            <a:avLst/>
+          </a:prstGeom>
+          <a:solidFill>
+            <a:srgbClr val="F3F6FB"/>
+          </a:solidFill>
+          <a:ln w="12700">
+            <a:solidFill>
+              <a:srgbClr val="C7D2E6"/>
+            </a:solidFill>
+          </a:ln>
+          <a:effectLst/>
+        </p:spPr>
+        <p:style>
+          <a:lnRef idx="1">
+            <a:schemeClr val="accent1"/>
+          </a:lnRef>
+          <a:fillRef idx="3">
+            <a:schemeClr val="accent1"/>
+          </a:fillRef>
+          <a:effectRef idx="2">
+            <a:schemeClr val="accent1"/>
+          </a:effectRef>
+          <a:fontRef idx="minor">
+            <a:schemeClr val="lt1"/>
+          </a:fontRef>
+        </p:style>
+        <p:txBody>
+          <a:bodyPr rtlCol="0" anchor="ctr"/>
+          <a:lstStyle/>
+          <a:p>
+            <a:pPr algn="ctr"/>
+          </a:p>
+        </p:txBody>
+      </p:sp>
+      <p:sp>
+        <p:nvSpPr>
+          <p:cNvPr id="9" name="TextBox 8"/>
+          <p:cNvSpPr txBox="1"/>
+          <p:nvPr/>
+        </p:nvSpPr>
+        <p:spPr>
+          <a:xfrm>
+            <a:off x="6080760" y="2726055"/>
+            <a:ext cx="4750307" cy="1280160"/>
+          </a:xfrm>
+          <a:prstGeom prst="rect">
+            <a:avLst/>
+          </a:prstGeom>
+          <a:noFill/>
+        </p:spPr>
+        <p:txBody>
+          <a:bodyPr wrap="square">
+            <a:spAutoFit/>
+          </a:bodyPr>
+          <a:lstStyle/>
+          <a:p>
+            <a:pPr algn="ctr"/>
+            <a:r>
+              <a:rPr sz="1400" b="1" i="0">
+                <a:solidFill>
+                  <a:srgbClr val="64748B"/>
+                </a:solidFill>
+                <a:latin typeface="Montserrat"/>
+              </a:rPr>
+              <a:t>IMAGEN REALISTA</a:t>
+            </a:r>
+          </a:p>
+          <a:p>
+            <a:pPr algn="ctr"/>
+            <a:r>
+              <a:rPr sz="1100" b="0" i="1">
+                <a:solidFill>
+                  <a:srgbClr val="64748B"/>
+                </a:solidFill>
+                <a:latin typeface="Montserrat"/>
+              </a:rPr>
+              <a:t>pressure gauge testing gas pipe installation</a:t>
             </a:r>
           </a:p>
         </p:txBody>
@@ -7139,7 +9242,7 @@
                 </a:solidFill>
                 <a:latin typeface="Montserrat"/>
               </a:rPr>
-              <a:t>002 / 015</a:t>
+              <a:t>002 / 021</a:t>
             </a:r>
           </a:p>
         </p:txBody>
@@ -7173,7 +9276,7 @@
                 </a:solidFill>
                 <a:latin typeface="Montserrat"/>
               </a:rPr>
-              <a:t>Curso Gas B · Tema 03 · Envases de GLP uso propio</a:t>
+              <a:t>Curso Gas B · Tema 03 · ITC-ICG 06 · Envases de GLP para uso propio</a:t>
             </a:r>
           </a:p>
         </p:txBody>
@@ -7323,7 +9426,7 @@
                 </a:solidFill>
                 <a:latin typeface="Montserrat"/>
               </a:rPr>
-              <a:t>kg tope · envases ≤ 15 kg</a:t>
+              <a:t>kg máximos con envases ≤ 15 kg</a:t>
             </a:r>
           </a:p>
         </p:txBody>
@@ -7439,7 +9542,7 @@
                 </a:solidFill>
                 <a:latin typeface="Montserrat"/>
               </a:rPr>
-              <a:t>kg tope · envases &gt; 15 kg</a:t>
+              <a:t>kg máximos con envases &gt; 15 kg</a:t>
             </a:r>
           </a:p>
         </p:txBody>
@@ -7555,7 +9658,728 @@
                 </a:solidFill>
                 <a:latin typeface="Montserrat"/>
               </a:rPr>
-              <a:t>kg · frontera dentro/fuera</a:t>
+              <a:t>kg: frontera dentro / fuera</a:t>
+            </a:r>
+          </a:p>
+        </p:txBody>
+      </p:sp>
+    </p:spTree>
+  </p:cSld>
+  <p:clrMapOvr>
+    <a:masterClrMapping/>
+  </p:clrMapOvr>
+</p:sld>
+</file>
+
+<file path=ppt/slides/slide20.xml><?xml version="1.0" encoding="utf-8"?>
+<p:sld xmlns:a="http://schemas.openxmlformats.org/drawingml/2006/main" xmlns:p="http://schemas.openxmlformats.org/presentationml/2006/main" xmlns:r="http://schemas.openxmlformats.org/officeDocument/2006/relationships">
+  <p:cSld>
+    <p:spTree>
+      <p:nvGrpSpPr>
+        <p:cNvPr id="1" name=""/>
+        <p:cNvGrpSpPr/>
+        <p:nvPr/>
+      </p:nvGrpSpPr>
+      <p:grpSpPr/>
+      <p:sp>
+        <p:nvSpPr>
+          <p:cNvPr id="2" name="Rectangle 1"/>
+          <p:cNvSpPr/>
+          <p:nvPr/>
+        </p:nvSpPr>
+        <p:spPr>
+          <a:xfrm>
+            <a:off x="0" y="0"/>
+            <a:ext cx="12191695" cy="6858000"/>
+          </a:xfrm>
+          <a:prstGeom prst="rect">
+            <a:avLst/>
+          </a:prstGeom>
+          <a:solidFill>
+            <a:srgbClr val="FFFFFF"/>
+          </a:solidFill>
+          <a:ln>
+            <a:noFill/>
+          </a:ln>
+          <a:effectLst/>
+        </p:spPr>
+        <p:style>
+          <a:lnRef idx="1">
+            <a:schemeClr val="accent1"/>
+          </a:lnRef>
+          <a:fillRef idx="3">
+            <a:schemeClr val="accent1"/>
+          </a:fillRef>
+          <a:effectRef idx="2">
+            <a:schemeClr val="accent1"/>
+          </a:effectRef>
+          <a:fontRef idx="minor">
+            <a:schemeClr val="lt1"/>
+          </a:fontRef>
+        </p:style>
+        <p:txBody>
+          <a:bodyPr rtlCol="0" anchor="ctr"/>
+          <a:lstStyle/>
+          <a:p>
+            <a:pPr algn="ctr"/>
+          </a:p>
+        </p:txBody>
+      </p:sp>
+      <p:sp>
+        <p:nvSpPr>
+          <p:cNvPr id="3" name="TextBox 2"/>
+          <p:cNvSpPr txBox="1"/>
+          <p:nvPr/>
+        </p:nvSpPr>
+        <p:spPr>
+          <a:xfrm>
+            <a:off x="10607040" y="320040"/>
+            <a:ext cx="1371600" cy="365760"/>
+          </a:xfrm>
+          <a:prstGeom prst="rect">
+            <a:avLst/>
+          </a:prstGeom>
+          <a:noFill/>
+        </p:spPr>
+        <p:txBody>
+          <a:bodyPr wrap="square">
+            <a:spAutoFit/>
+          </a:bodyPr>
+          <a:lstStyle/>
+          <a:p>
+            <a:pPr algn="r"/>
+            <a:r>
+              <a:rPr sz="1000" b="1" i="0">
+                <a:solidFill>
+                  <a:srgbClr val="64748B"/>
+                </a:solidFill>
+                <a:latin typeface="Montserrat"/>
+              </a:rPr>
+              <a:t>020 / 021</a:t>
+            </a:r>
+          </a:p>
+        </p:txBody>
+      </p:sp>
+      <p:sp>
+        <p:nvSpPr>
+          <p:cNvPr id="4" name="TextBox 3"/>
+          <p:cNvSpPr txBox="1"/>
+          <p:nvPr/>
+        </p:nvSpPr>
+        <p:spPr>
+          <a:xfrm>
+            <a:off x="457200" y="6419088"/>
+            <a:ext cx="8229600" cy="365760"/>
+          </a:xfrm>
+          <a:prstGeom prst="rect">
+            <a:avLst/>
+          </a:prstGeom>
+          <a:noFill/>
+        </p:spPr>
+        <p:txBody>
+          <a:bodyPr wrap="square">
+            <a:spAutoFit/>
+          </a:bodyPr>
+          <a:lstStyle/>
+          <a:p>
+            <a:r>
+              <a:rPr sz="900" b="0" i="0">
+                <a:solidFill>
+                  <a:srgbClr val="64748B"/>
+                </a:solidFill>
+                <a:latin typeface="Montserrat"/>
+              </a:rPr>
+              <a:t>Curso Gas B · Tema 03 · ITC-ICG 06 · Envases de GLP para uso propio</a:t>
+            </a:r>
+          </a:p>
+        </p:txBody>
+      </p:sp>
+      <p:sp>
+        <p:nvSpPr>
+          <p:cNvPr id="5" name="TextBox 4"/>
+          <p:cNvSpPr txBox="1"/>
+          <p:nvPr/>
+        </p:nvSpPr>
+        <p:spPr>
+          <a:xfrm>
+            <a:off x="822960" y="457200"/>
+            <a:ext cx="8229600" cy="365760"/>
+          </a:xfrm>
+          <a:prstGeom prst="rect">
+            <a:avLst/>
+          </a:prstGeom>
+          <a:noFill/>
+        </p:spPr>
+        <p:txBody>
+          <a:bodyPr wrap="square">
+            <a:spAutoFit/>
+          </a:bodyPr>
+          <a:lstStyle/>
+          <a:p>
+            <a:r>
+              <a:rPr sz="1200" b="1" i="0">
+                <a:solidFill>
+                  <a:srgbClr val="64748B"/>
+                </a:solidFill>
+                <a:latin typeface="Montserrat"/>
+              </a:rPr>
+              <a:t>APARTADOS 3-4 · CIERRE DEL CICLO</a:t>
+            </a:r>
+          </a:p>
+        </p:txBody>
+      </p:sp>
+      <p:sp>
+        <p:nvSpPr>
+          <p:cNvPr id="6" name="TextBox 5"/>
+          <p:cNvSpPr txBox="1"/>
+          <p:nvPr/>
+        </p:nvSpPr>
+        <p:spPr>
+          <a:xfrm>
+            <a:off x="822960" y="868680"/>
+            <a:ext cx="10515600" cy="914400"/>
+          </a:xfrm>
+          <a:prstGeom prst="rect">
+            <a:avLst/>
+          </a:prstGeom>
+          <a:noFill/>
+        </p:spPr>
+        <p:txBody>
+          <a:bodyPr wrap="square">
+            <a:spAutoFit/>
+          </a:bodyPr>
+          <a:lstStyle/>
+          <a:p>
+            <a:r>
+              <a:rPr sz="2700" b="1" i="0">
+                <a:solidFill>
+                  <a:srgbClr val="1E2761"/>
+                </a:solidFill>
+                <a:latin typeface="Montserrat"/>
+              </a:rPr>
+              <a:t>Sin comunicación, y revisión</a:t>
+            </a:r>
+          </a:p>
+        </p:txBody>
+      </p:sp>
+      <p:sp>
+        <p:nvSpPr>
+          <p:cNvPr id="7" name="TextBox 6"/>
+          <p:cNvSpPr txBox="1"/>
+          <p:nvPr/>
+        </p:nvSpPr>
+        <p:spPr>
+          <a:xfrm>
+            <a:off x="822960" y="1920240"/>
+            <a:ext cx="4983480" cy="4206240"/>
+          </a:xfrm>
+          <a:prstGeom prst="rect">
+            <a:avLst/>
+          </a:prstGeom>
+          <a:noFill/>
+        </p:spPr>
+        <p:txBody>
+          <a:bodyPr wrap="square">
+            <a:spAutoFit/>
+          </a:bodyPr>
+          <a:lstStyle/>
+          <a:p>
+            <a:pPr>
+              <a:spcAft>
+                <a:spcPts val="1000"/>
+              </a:spcAft>
+            </a:pPr>
+            <a:r>
+              <a:rPr sz="1600" b="1" i="0">
+                <a:solidFill>
+                  <a:srgbClr val="2E3A80"/>
+                </a:solidFill>
+                <a:latin typeface="Montserrat"/>
+              </a:rPr>
+              <a:t>•  </a:t>
+            </a:r>
+            <a:r>
+              <a:rPr sz="1600" b="0" i="0">
+                <a:solidFill>
+                  <a:srgbClr val="1B2330"/>
+                </a:solidFill>
+                <a:latin typeface="Montserrat"/>
+              </a:rPr>
+              <a:t>Sin autorización ni comunicación</a:t>
+            </a:r>
+          </a:p>
+          <a:p>
+            <a:pPr>
+              <a:spcAft>
+                <a:spcPts val="1000"/>
+              </a:spcAft>
+            </a:pPr>
+            <a:r>
+              <a:rPr sz="1600" b="1" i="0">
+                <a:solidFill>
+                  <a:srgbClr val="2E3A80"/>
+                </a:solidFill>
+                <a:latin typeface="Montserrat"/>
+              </a:rPr>
+              <a:t>•  </a:t>
+            </a:r>
+            <a:r>
+              <a:rPr sz="1600" b="0" i="0">
+                <a:solidFill>
+                  <a:srgbClr val="1B2330"/>
+                </a:solidFill>
+                <a:latin typeface="Montserrat"/>
+              </a:rPr>
+              <a:t>Guardar el certificado de instalación</a:t>
+            </a:r>
+          </a:p>
+          <a:p>
+            <a:pPr>
+              <a:spcAft>
+                <a:spcPts val="1000"/>
+              </a:spcAft>
+            </a:pPr>
+            <a:r>
+              <a:rPr sz="1600" b="1" i="0">
+                <a:solidFill>
+                  <a:srgbClr val="2E3A80"/>
+                </a:solidFill>
+                <a:latin typeface="Montserrat"/>
+              </a:rPr>
+              <a:t>•  </a:t>
+            </a:r>
+            <a:r>
+              <a:rPr sz="1600" b="0" i="0">
+                <a:solidFill>
+                  <a:srgbClr val="1B2330"/>
+                </a:solidFill>
+                <a:latin typeface="Montserrat"/>
+              </a:rPr>
+              <a:t>Revisión (no inspección), con la receptora</a:t>
+            </a:r>
+          </a:p>
+        </p:txBody>
+      </p:sp>
+      <p:sp>
+        <p:nvSpPr>
+          <p:cNvPr id="8" name="imgph" descr="IMGQ:installer reviewing home gas installation checklist"/>
+          <p:cNvSpPr/>
+          <p:nvPr/>
+        </p:nvSpPr>
+        <p:spPr>
+          <a:xfrm>
+            <a:off x="5806440" y="1051560"/>
+            <a:ext cx="5298947" cy="4629150"/>
+          </a:xfrm>
+          <a:prstGeom prst="roundRect">
+            <a:avLst/>
+          </a:prstGeom>
+          <a:solidFill>
+            <a:srgbClr val="F3F6FB"/>
+          </a:solidFill>
+          <a:ln w="12700">
+            <a:solidFill>
+              <a:srgbClr val="C7D2E6"/>
+            </a:solidFill>
+          </a:ln>
+          <a:effectLst/>
+        </p:spPr>
+        <p:style>
+          <a:lnRef idx="1">
+            <a:schemeClr val="accent1"/>
+          </a:lnRef>
+          <a:fillRef idx="3">
+            <a:schemeClr val="accent1"/>
+          </a:fillRef>
+          <a:effectRef idx="2">
+            <a:schemeClr val="accent1"/>
+          </a:effectRef>
+          <a:fontRef idx="minor">
+            <a:schemeClr val="lt1"/>
+          </a:fontRef>
+        </p:style>
+        <p:txBody>
+          <a:bodyPr rtlCol="0" anchor="ctr"/>
+          <a:lstStyle/>
+          <a:p>
+            <a:pPr algn="ctr"/>
+          </a:p>
+        </p:txBody>
+      </p:sp>
+      <p:sp>
+        <p:nvSpPr>
+          <p:cNvPr id="9" name="TextBox 8"/>
+          <p:cNvSpPr txBox="1"/>
+          <p:nvPr/>
+        </p:nvSpPr>
+        <p:spPr>
+          <a:xfrm>
+            <a:off x="6080760" y="2726055"/>
+            <a:ext cx="4750307" cy="1280160"/>
+          </a:xfrm>
+          <a:prstGeom prst="rect">
+            <a:avLst/>
+          </a:prstGeom>
+          <a:noFill/>
+        </p:spPr>
+        <p:txBody>
+          <a:bodyPr wrap="square">
+            <a:spAutoFit/>
+          </a:bodyPr>
+          <a:lstStyle/>
+          <a:p>
+            <a:pPr algn="ctr"/>
+            <a:r>
+              <a:rPr sz="1400" b="1" i="0">
+                <a:solidFill>
+                  <a:srgbClr val="64748B"/>
+                </a:solidFill>
+                <a:latin typeface="Montserrat"/>
+              </a:rPr>
+              <a:t>IMAGEN REALISTA</a:t>
+            </a:r>
+          </a:p>
+          <a:p>
+            <a:pPr algn="ctr"/>
+            <a:r>
+              <a:rPr sz="1100" b="0" i="1">
+                <a:solidFill>
+                  <a:srgbClr val="64748B"/>
+                </a:solidFill>
+                <a:latin typeface="Montserrat"/>
+              </a:rPr>
+              <a:t>installer reviewing home gas installation checklist</a:t>
+            </a:r>
+          </a:p>
+        </p:txBody>
+      </p:sp>
+    </p:spTree>
+  </p:cSld>
+  <p:clrMapOvr>
+    <a:masterClrMapping/>
+  </p:clrMapOvr>
+</p:sld>
+</file>
+
+<file path=ppt/slides/slide21.xml><?xml version="1.0" encoding="utf-8"?>
+<p:sld xmlns:a="http://schemas.openxmlformats.org/drawingml/2006/main" xmlns:p="http://schemas.openxmlformats.org/presentationml/2006/main" xmlns:r="http://schemas.openxmlformats.org/officeDocument/2006/relationships">
+  <p:cSld>
+    <p:spTree>
+      <p:nvGrpSpPr>
+        <p:cNvPr id="1" name=""/>
+        <p:cNvGrpSpPr/>
+        <p:nvPr/>
+      </p:nvGrpSpPr>
+      <p:grpSpPr/>
+      <p:sp>
+        <p:nvSpPr>
+          <p:cNvPr id="2" name="Rectangle 1"/>
+          <p:cNvSpPr/>
+          <p:nvPr/>
+        </p:nvSpPr>
+        <p:spPr>
+          <a:xfrm>
+            <a:off x="0" y="0"/>
+            <a:ext cx="12191695" cy="6858000"/>
+          </a:xfrm>
+          <a:prstGeom prst="rect">
+            <a:avLst/>
+          </a:prstGeom>
+          <a:solidFill>
+            <a:srgbClr val="1E2761"/>
+          </a:solidFill>
+          <a:ln>
+            <a:noFill/>
+          </a:ln>
+          <a:effectLst/>
+        </p:spPr>
+        <p:style>
+          <a:lnRef idx="1">
+            <a:schemeClr val="accent1"/>
+          </a:lnRef>
+          <a:fillRef idx="3">
+            <a:schemeClr val="accent1"/>
+          </a:fillRef>
+          <a:effectRef idx="2">
+            <a:schemeClr val="accent1"/>
+          </a:effectRef>
+          <a:fontRef idx="minor">
+            <a:schemeClr val="lt1"/>
+          </a:fontRef>
+        </p:style>
+        <p:txBody>
+          <a:bodyPr rtlCol="0" anchor="ctr"/>
+          <a:lstStyle/>
+          <a:p>
+            <a:pPr algn="ctr"/>
+          </a:p>
+        </p:txBody>
+      </p:sp>
+      <p:sp>
+        <p:nvSpPr>
+          <p:cNvPr id="3" name="TextBox 2"/>
+          <p:cNvSpPr txBox="1"/>
+          <p:nvPr/>
+        </p:nvSpPr>
+        <p:spPr>
+          <a:xfrm>
+            <a:off x="822960" y="640080"/>
+            <a:ext cx="10515600" cy="457200"/>
+          </a:xfrm>
+          <a:prstGeom prst="rect">
+            <a:avLst/>
+          </a:prstGeom>
+          <a:noFill/>
+        </p:spPr>
+        <p:txBody>
+          <a:bodyPr wrap="square">
+            <a:spAutoFit/>
+          </a:bodyPr>
+          <a:lstStyle/>
+          <a:p>
+            <a:r>
+              <a:rPr sz="1400" b="1" i="0">
+                <a:solidFill>
+                  <a:srgbClr val="CADCFC"/>
+                </a:solidFill>
+                <a:latin typeface="Montserrat"/>
+              </a:rPr>
+              <a:t>LO QUE YA DOMINAS</a:t>
+            </a:r>
+          </a:p>
+        </p:txBody>
+      </p:sp>
+      <p:sp>
+        <p:nvSpPr>
+          <p:cNvPr id="4" name="TextBox 3"/>
+          <p:cNvSpPr txBox="1"/>
+          <p:nvPr/>
+        </p:nvSpPr>
+        <p:spPr>
+          <a:xfrm>
+            <a:off x="822960" y="1143000"/>
+            <a:ext cx="10515600" cy="1097280"/>
+          </a:xfrm>
+          <a:prstGeom prst="rect">
+            <a:avLst/>
+          </a:prstGeom>
+          <a:noFill/>
+        </p:spPr>
+        <p:txBody>
+          <a:bodyPr wrap="square">
+            <a:spAutoFit/>
+          </a:bodyPr>
+          <a:lstStyle/>
+          <a:p>
+            <a:r>
+              <a:rPr sz="3400" b="1" i="0">
+                <a:solidFill>
+                  <a:srgbClr val="FFFFFF"/>
+                </a:solidFill>
+                <a:latin typeface="Montserrat"/>
+              </a:rPr>
+              <a:t>Ya montas envases de GLP con criterio</a:t>
+            </a:r>
+          </a:p>
+        </p:txBody>
+      </p:sp>
+      <p:sp>
+        <p:nvSpPr>
+          <p:cNvPr id="5" name="TextBox 4"/>
+          <p:cNvSpPr txBox="1"/>
+          <p:nvPr/>
+        </p:nvSpPr>
+        <p:spPr>
+          <a:xfrm>
+            <a:off x="822960" y="2514600"/>
+            <a:ext cx="10515600" cy="2834640"/>
+          </a:xfrm>
+          <a:prstGeom prst="rect">
+            <a:avLst/>
+          </a:prstGeom>
+          <a:noFill/>
+        </p:spPr>
+        <p:txBody>
+          <a:bodyPr wrap="square">
+            <a:spAutoFit/>
+          </a:bodyPr>
+          <a:lstStyle/>
+          <a:p>
+            <a:pPr>
+              <a:spcAft>
+                <a:spcPts val="1200"/>
+              </a:spcAft>
+            </a:pPr>
+            <a:r>
+              <a:rPr sz="2000" b="1" i="0">
+                <a:solidFill>
+                  <a:srgbClr val="CADCFC"/>
+                </a:solidFill>
+                <a:latin typeface="Montserrat"/>
+              </a:rPr>
+              <a:t>✓  </a:t>
+            </a:r>
+            <a:r>
+              <a:rPr sz="1900" b="0" i="0">
+                <a:solidFill>
+                  <a:srgbClr val="FFFFFF"/>
+                </a:solidFill>
+                <a:latin typeface="Montserrat"/>
+              </a:rPr>
+              <a:t>El GLP pesa: nada de sótanos, ventilación abajo</a:t>
+            </a:r>
+          </a:p>
+          <a:p>
+            <a:pPr>
+              <a:spcAft>
+                <a:spcPts val="1200"/>
+              </a:spcAft>
+            </a:pPr>
+            <a:r>
+              <a:rPr sz="2000" b="1" i="0">
+                <a:solidFill>
+                  <a:srgbClr val="CADCFC"/>
+                </a:solidFill>
+                <a:latin typeface="Montserrat"/>
+              </a:rPr>
+              <a:t>✓  </a:t>
+            </a:r>
+            <a:r>
+              <a:rPr sz="1900" b="0" i="0">
+                <a:solidFill>
+                  <a:srgbClr val="FFFFFF"/>
+                </a:solidFill>
+                <a:latin typeface="Montserrat"/>
+              </a:rPr>
+              <a:t>300 y 1.000 kg; 70 kg decide dentro o fuera</a:t>
+            </a:r>
+          </a:p>
+          <a:p>
+            <a:pPr>
+              <a:spcAft>
+                <a:spcPts val="1200"/>
+              </a:spcAft>
+            </a:pPr>
+            <a:r>
+              <a:rPr sz="2000" b="1" i="0">
+                <a:solidFill>
+                  <a:srgbClr val="CADCFC"/>
+                </a:solidFill>
+                <a:latin typeface="Montserrat"/>
+              </a:rPr>
+              <a:t>✓  </a:t>
+            </a:r>
+            <a:r>
+              <a:rPr sz="1900" b="0" i="0">
+                <a:solidFill>
+                  <a:srgbClr val="FFFFFF"/>
+                </a:solidFill>
+                <a:latin typeface="Montserrat"/>
+              </a:rPr>
+              <a:t>Regulador siempre; estanquidad 1,5× y 10 min</a:t>
+            </a:r>
+          </a:p>
+          <a:p>
+            <a:pPr>
+              <a:spcAft>
+                <a:spcPts val="1200"/>
+              </a:spcAft>
+            </a:pPr>
+            <a:r>
+              <a:rPr sz="2000" b="1" i="0">
+                <a:solidFill>
+                  <a:srgbClr val="CADCFC"/>
+                </a:solidFill>
+                <a:latin typeface="Montserrat"/>
+              </a:rPr>
+              <a:t>✓  </a:t>
+            </a:r>
+            <a:r>
+              <a:rPr sz="1900" b="0" i="0">
+                <a:solidFill>
+                  <a:srgbClr val="FFFFFF"/>
+                </a:solidFill>
+                <a:latin typeface="Montserrat"/>
+              </a:rPr>
+              <a:t>Ni autorización ni comunicación: certificado guardado</a:t>
+            </a:r>
+          </a:p>
+        </p:txBody>
+      </p:sp>
+      <p:sp>
+        <p:nvSpPr>
+          <p:cNvPr id="6" name="Rounded Rectangle 5"/>
+          <p:cNvSpPr/>
+          <p:nvPr/>
+        </p:nvSpPr>
+        <p:spPr>
+          <a:xfrm>
+            <a:off x="822960" y="5532120"/>
+            <a:ext cx="10515600" cy="777240"/>
+          </a:xfrm>
+          <a:prstGeom prst="roundRect">
+            <a:avLst/>
+          </a:prstGeom>
+          <a:solidFill>
+            <a:srgbClr val="2E3A80"/>
+          </a:solidFill>
+          <a:ln>
+            <a:noFill/>
+          </a:ln>
+          <a:effectLst/>
+        </p:spPr>
+        <p:style>
+          <a:lnRef idx="1">
+            <a:schemeClr val="accent1"/>
+          </a:lnRef>
+          <a:fillRef idx="3">
+            <a:schemeClr val="accent1"/>
+          </a:fillRef>
+          <a:effectRef idx="2">
+            <a:schemeClr val="accent1"/>
+          </a:effectRef>
+          <a:fontRef idx="minor">
+            <a:schemeClr val="lt1"/>
+          </a:fontRef>
+        </p:style>
+        <p:txBody>
+          <a:bodyPr rtlCol="0" anchor="ctr"/>
+          <a:lstStyle/>
+          <a:p>
+            <a:pPr algn="ctr"/>
+          </a:p>
+        </p:txBody>
+      </p:sp>
+      <p:sp>
+        <p:nvSpPr>
+          <p:cNvPr id="7" name="TextBox 6"/>
+          <p:cNvSpPr txBox="1"/>
+          <p:nvPr/>
+        </p:nvSpPr>
+        <p:spPr>
+          <a:xfrm>
+            <a:off x="1051560" y="5605272"/>
+            <a:ext cx="10058400" cy="640080"/>
+          </a:xfrm>
+          <a:prstGeom prst="rect">
+            <a:avLst/>
+          </a:prstGeom>
+          <a:noFill/>
+        </p:spPr>
+        <p:txBody>
+          <a:bodyPr wrap="square">
+            <a:spAutoFit/>
+          </a:bodyPr>
+          <a:lstStyle/>
+          <a:p>
+            <a:r>
+              <a:rPr sz="1500" b="1" i="1">
+                <a:solidFill>
+                  <a:srgbClr val="CADCFC"/>
+                </a:solidFill>
+                <a:latin typeface="Montserrat"/>
+              </a:rPr>
+              <a:t>Has cerrado el Tema 03. Hoy ya eres bastante más gasista que ayer.</a:t>
             </a:r>
           </a:p>
         </p:txBody>
@@ -7652,7 +10476,7 @@
                 </a:solidFill>
                 <a:latin typeface="Montserrat"/>
               </a:rPr>
-              <a:t>003 / 015</a:t>
+              <a:t>003 / 021</a:t>
             </a:r>
           </a:p>
         </p:txBody>
@@ -7686,7 +10510,7 @@
                 </a:solidFill>
                 <a:latin typeface="Montserrat"/>
               </a:rPr>
-              <a:t>Curso Gas B · Tema 03 · Envases de GLP uso propio</a:t>
+              <a:t>Curso Gas B · Tema 03 · ITC-ICG 06 · Envases de GLP para uso propio</a:t>
             </a:r>
           </a:p>
         </p:txBody>
@@ -7754,7 +10578,7 @@
                 </a:solidFill>
                 <a:latin typeface="Montserrat"/>
               </a:rPr>
-              <a:t>Bombonas con normativa</a:t>
+              <a:t>¿Qué entra en esta ITC?</a:t>
             </a:r>
           </a:p>
         </p:txBody>
@@ -7802,7 +10626,7 @@
                 </a:solidFill>
                 <a:latin typeface="Montserrat"/>
               </a:rPr>
-              <a:t>Diseño, construcción y explotación</a:t>
+              <a:t>Envases de GLP: butano y propano</a:t>
             </a:r>
           </a:p>
           <a:p>
@@ -7827,7 +10651,7 @@
                 </a:solidFill>
                 <a:latin typeface="Montserrat"/>
               </a:rPr>
-              <a:t>Envases de GLP para uso propio</a:t>
+              <a:t>Carga unitaria &gt; 3 kg</a:t>
             </a:r>
           </a:p>
           <a:p>
@@ -7852,39 +10676,14 @@
                 </a:solidFill>
                 <a:latin typeface="Montserrat"/>
               </a:rPr>
-              <a:t>Carga unitaria &gt; 3 kg</a:t>
-            </a:r>
-          </a:p>
-          <a:p>
-            <a:pPr>
-              <a:spcAft>
-                <a:spcPts val="1000"/>
-              </a:spcAft>
-            </a:pPr>
-            <a:r>
-              <a:rPr sz="1600" b="1" i="0">
-                <a:solidFill>
-                  <a:srgbClr val="2E3A80"/>
-                </a:solidFill>
-                <a:latin typeface="Montserrat"/>
-              </a:rPr>
-              <a:t>•  </a:t>
-            </a:r>
-            <a:r>
-              <a:rPr sz="1600" b="0" i="0">
-                <a:solidFill>
-                  <a:srgbClr val="1B2330"/>
-                </a:solidFill>
-                <a:latin typeface="Montserrat"/>
-              </a:rPr>
-              <a:t>Alimentan la instalación receptora</a:t>
-            </a:r>
-          </a:p>
-        </p:txBody>
-      </p:sp>
-      <p:sp>
-        <p:nvSpPr>
-          <p:cNvPr id="8" name="imgph" descr="IMGQ:propane gas cylinders storage row"/>
+              <a:t>Alimentan una instalación receptora</a:t>
+            </a:r>
+          </a:p>
+        </p:txBody>
+      </p:sp>
+      <p:sp>
+        <p:nvSpPr>
+          <p:cNvPr id="8" name="imgph" descr="IMGQ:row of propane gas cylinders outdoors"/>
           <p:cNvSpPr/>
           <p:nvPr/>
         </p:nvSpPr>
@@ -7970,7 +10769,7 @@
                 </a:solidFill>
                 <a:latin typeface="Montserrat"/>
               </a:rPr>
-              <a:t>propane gas cylinders storage row</a:t>
+              <a:t>row of propane gas cylinders outdoors</a:t>
             </a:r>
           </a:p>
         </p:txBody>
@@ -8067,7 +10866,7 @@
                 </a:solidFill>
                 <a:latin typeface="Montserrat"/>
               </a:rPr>
-              <a:t>004 / 015</a:t>
+              <a:t>004 / 021</a:t>
             </a:r>
           </a:p>
         </p:txBody>
@@ -8101,7 +10900,7 @@
                 </a:solidFill>
                 <a:latin typeface="Montserrat"/>
               </a:rPr>
-              <a:t>Curso Gas B · Tema 03 · Envases de GLP uso propio</a:t>
+              <a:t>Curso Gas B · Tema 03 · ITC-ICG 06 · Envases de GLP para uso propio</a:t>
             </a:r>
           </a:p>
         </p:txBody>
@@ -8169,7 +10968,7 @@
                 </a:solidFill>
                 <a:latin typeface="Montserrat"/>
               </a:rPr>
-              <a:t>Todo depende del tamaño</a:t>
+              <a:t>Todo se parte por el tamaño</a:t>
             </a:r>
           </a:p>
         </p:txBody>
@@ -8267,39 +11066,14 @@
                 </a:solidFill>
                 <a:latin typeface="Montserrat"/>
               </a:rPr>
-              <a:t>Suma llenos Y vacíos</a:t>
-            </a:r>
-          </a:p>
-          <a:p>
-            <a:pPr>
-              <a:spcAft>
-                <a:spcPts val="1000"/>
-              </a:spcAft>
-            </a:pPr>
-            <a:r>
-              <a:rPr sz="1600" b="1" i="0">
-                <a:solidFill>
-                  <a:srgbClr val="2E3A80"/>
-                </a:solidFill>
-                <a:latin typeface="Montserrat"/>
-              </a:rPr>
-              <a:t>•  </a:t>
-            </a:r>
-            <a:r>
-              <a:rPr sz="1600" b="0" i="0">
-                <a:solidFill>
-                  <a:srgbClr val="1B2330"/>
-                </a:solidFill>
-                <a:latin typeface="Montserrat"/>
-              </a:rPr>
-              <a:t>El vacío también cuenta</a:t>
-            </a:r>
-          </a:p>
-        </p:txBody>
-      </p:sp>
-      <p:sp>
-        <p:nvSpPr>
-          <p:cNvPr id="8" name="imgph" descr="IMGQ:butane gas bottle domestic kitchen"/>
+              <a:t>Cada grupo, sus propias reglas</a:t>
+            </a:r>
+          </a:p>
+        </p:txBody>
+      </p:sp>
+      <p:sp>
+        <p:nvSpPr>
+          <p:cNvPr id="8" name="imgph" descr="IMGQ:small butane cylinder next to large propane tank"/>
           <p:cNvSpPr/>
           <p:nvPr/>
         </p:nvSpPr>
@@ -8385,7 +11159,7 @@
                 </a:solidFill>
                 <a:latin typeface="Montserrat"/>
               </a:rPr>
-              <a:t>butane gas bottle domestic kitchen</a:t>
+              <a:t>small butane cylinder next to large propane tank</a:t>
             </a:r>
           </a:p>
         </p:txBody>
@@ -8482,7 +11256,7 @@
                 </a:solidFill>
                 <a:latin typeface="Montserrat"/>
               </a:rPr>
-              <a:t>005 / 015</a:t>
+              <a:t>005 / 021</a:t>
             </a:r>
           </a:p>
         </p:txBody>
@@ -8516,7 +11290,7 @@
                 </a:solidFill>
                 <a:latin typeface="Montserrat"/>
               </a:rPr>
-              <a:t>Curso Gas B · Tema 03 · Envases de GLP uso propio</a:t>
+              <a:t>Curso Gas B · Tema 03 · ITC-ICG 06 · Envases de GLP para uso propio</a:t>
             </a:r>
           </a:p>
         </p:txBody>
@@ -8550,7 +11324,7 @@
                 </a:solidFill>
                 <a:latin typeface="Montserrat"/>
               </a:rPr>
-              <a:t>APARTADO 2.1 · ENVASES ≤ 15 KG</a:t>
+              <a:t>APARTADO 2.1 · HASTA 15 KG</a:t>
             </a:r>
           </a:p>
         </p:txBody>
@@ -8584,7 +11358,7 @@
                 </a:solidFill>
                 <a:latin typeface="Montserrat"/>
               </a:rPr>
-              <a:t>Bombona doméstica: dónde NO</a:t>
+              <a:t>El tope de los 300 kg</a:t>
             </a:r>
           </a:p>
         </p:txBody>
@@ -8632,7 +11406,7 @@
                 </a:solidFill>
                 <a:latin typeface="Montserrat"/>
               </a:rPr>
-              <a:t>Tope total: 300 kg</a:t>
+              <a:t>Suma de TODOS los envases</a:t>
             </a:r>
           </a:p>
           <a:p>
@@ -8657,7 +11431,7 @@
                 </a:solidFill>
                 <a:latin typeface="Montserrat"/>
               </a:rPr>
-              <a:t>Nada de sótanos ni semisótanos</a:t>
+              <a:t>Llenos y vacíos cuentan igual</a:t>
             </a:r>
           </a:p>
           <a:p>
@@ -8682,39 +11456,14 @@
                 </a:solidFill>
                 <a:latin typeface="Montserrat"/>
               </a:rPr>
-              <a:t>Ni cajas de escalera ni pasillos</a:t>
-            </a:r>
-          </a:p>
-          <a:p>
-            <a:pPr>
-              <a:spcAft>
-                <a:spcPts val="1000"/>
-              </a:spcAft>
-            </a:pPr>
-            <a:r>
-              <a:rPr sz="1600" b="1" i="0">
-                <a:solidFill>
-                  <a:srgbClr val="2E3A80"/>
-                </a:solidFill>
-                <a:latin typeface="Montserrat"/>
-              </a:rPr>
-              <a:t>•  </a:t>
-            </a:r>
-            <a:r>
-              <a:rPr sz="1600" b="0" i="0">
-                <a:solidFill>
-                  <a:srgbClr val="1B2330"/>
-                </a:solidFill>
-                <a:latin typeface="Montserrat"/>
-              </a:rPr>
-              <a:t>Máximo 2 envases en batería</a:t>
-            </a:r>
-          </a:p>
-        </p:txBody>
-      </p:sp>
-      <p:sp>
-        <p:nvSpPr>
-          <p:cNvPr id="8" name="imgph" descr="IMGQ:gas bottle balcony exterior building"/>
+              <a:t>Máximo 300 kg en total</a:t>
+            </a:r>
+          </a:p>
+        </p:txBody>
+      </p:sp>
+      <p:sp>
+        <p:nvSpPr>
+          <p:cNvPr id="8" name="imgph" descr="IMGQ:cluster of butane cylinders full and empty"/>
           <p:cNvSpPr/>
           <p:nvPr/>
         </p:nvSpPr>
@@ -8800,7 +11549,7 @@
                 </a:solidFill>
                 <a:latin typeface="Montserrat"/>
               </a:rPr>
-              <a:t>gas bottle balcony exterior building</a:t>
+              <a:t>cluster of butane cylinders full and empty</a:t>
             </a:r>
           </a:p>
         </p:txBody>
@@ -8897,7 +11646,7 @@
                 </a:solidFill>
                 <a:latin typeface="Montserrat"/>
               </a:rPr>
-              <a:t>006 / 015</a:t>
+              <a:t>006 / 021</a:t>
             </a:r>
           </a:p>
         </p:txBody>
@@ -8931,7 +11680,7 @@
                 </a:solidFill>
                 <a:latin typeface="Montserrat"/>
               </a:rPr>
-              <a:t>Curso Gas B · Tema 03 · Envases de GLP uso propio</a:t>
+              <a:t>Curso Gas B · Tema 03 · ITC-ICG 06 · Envases de GLP para uso propio</a:t>
             </a:r>
           </a:p>
         </p:txBody>
@@ -8965,7 +11714,7 @@
                 </a:solidFill>
                 <a:latin typeface="Montserrat"/>
               </a:rPr>
-              <a:t>APARTADO 2.1 · ARMARIO Y REGULADOR</a:t>
+              <a:t>APARTADO 2.1 · UBICACIÓN</a:t>
             </a:r>
           </a:p>
         </p:txBody>
@@ -8999,7 +11748,7 @@
                 </a:solidFill>
                 <a:latin typeface="Montserrat"/>
               </a:rPr>
-              <a:t>Ventilación abajo y regulador</a:t>
+              <a:t>Nada de sótanos</a:t>
             </a:r>
           </a:p>
         </p:txBody>
@@ -9047,7 +11796,7 @@
                 </a:solidFill>
                 <a:latin typeface="Montserrat"/>
               </a:rPr>
-              <a:t>Rejilla en la base del armario</a:t>
+              <a:t>Prohibido en sótanos y semisótanos</a:t>
             </a:r>
           </a:p>
           <a:p>
@@ -9072,7 +11821,7 @@
                 </a:solidFill>
                 <a:latin typeface="Montserrat"/>
               </a:rPr>
-              <a:t>Superficie libre &gt; 1/100</a:t>
+              <a:t>Ni cajas de escalera ni pasillos</a:t>
             </a:r>
           </a:p>
           <a:p>
@@ -9097,39 +11846,14 @@
                 </a:solidFill>
                 <a:latin typeface="Montserrat"/>
               </a:rPr>
-              <a:t>Envase con válvula: siempre vertical</a:t>
-            </a:r>
-          </a:p>
-          <a:p>
-            <a:pPr>
-              <a:spcAft>
-                <a:spcPts val="1000"/>
-              </a:spcAft>
-            </a:pPr>
-            <a:r>
-              <a:rPr sz="1600" b="1" i="0">
-                <a:solidFill>
-                  <a:srgbClr val="2E3A80"/>
-                </a:solidFill>
-                <a:latin typeface="Montserrat"/>
-              </a:rPr>
-              <a:t>•  </a:t>
-            </a:r>
-            <a:r>
-              <a:rPr sz="1600" b="0" i="0">
-                <a:solidFill>
-                  <a:srgbClr val="1B2330"/>
-                </a:solidFill>
-                <a:latin typeface="Montserrat"/>
-              </a:rPr>
-              <a:t>Regulador SIEMPRE entre bombona y aparato</a:t>
-            </a:r>
-          </a:p>
-        </p:txBody>
-      </p:sp>
-      <p:sp>
-        <p:nvSpPr>
-          <p:cNvPr id="8" name="imgph" descr="IMGQ:gas cylinder cabinet ventilation grille wall"/>
+              <a:t>El GLP pesa y se acumula abajo</a:t>
+            </a:r>
+          </a:p>
+        </p:txBody>
+      </p:sp>
+      <p:sp>
+        <p:nvSpPr>
+          <p:cNvPr id="8" name="imgph" descr="IMGQ:basement stairwell warning no gas cylinders"/>
           <p:cNvSpPr/>
           <p:nvPr/>
         </p:nvSpPr>
@@ -9215,7 +11939,7 @@
                 </a:solidFill>
                 <a:latin typeface="Montserrat"/>
               </a:rPr>
-              <a:t>gas cylinder cabinet ventilation grille wall</a:t>
+              <a:t>basement stairwell warning no gas cylinders</a:t>
             </a:r>
           </a:p>
         </p:txBody>
@@ -9312,7 +12036,7 @@
                 </a:solidFill>
                 <a:latin typeface="Montserrat"/>
               </a:rPr>
-              <a:t>007 / 015</a:t>
+              <a:t>007 / 021</a:t>
             </a:r>
           </a:p>
         </p:txBody>
@@ -9346,7 +12070,7 @@
                 </a:solidFill>
                 <a:latin typeface="Montserrat"/>
               </a:rPr>
-              <a:t>Curso Gas B · Tema 03 · Envases de GLP uso propio</a:t>
+              <a:t>Curso Gas B · Tema 03 · ITC-ICG 06 · Envases de GLP para uso propio</a:t>
             </a:r>
           </a:p>
         </p:txBody>
@@ -9380,7 +12104,7 @@
                 </a:solidFill>
                 <a:latin typeface="Montserrat"/>
               </a:rPr>
-              <a:t>CUADRO 1 · DISTANCIAS (≤ 15 KG)</a:t>
+              <a:t>APARTADO 2.1 · REGLAS DE INTERIOR</a:t>
             </a:r>
           </a:p>
         </p:txBody>
@@ -9414,7 +12138,7 @@
                 </a:solidFill>
                 <a:latin typeface="Montserrat"/>
               </a:rPr>
-              <a:t>Las distancias de la bombona</a:t>
+              <a:t>Tres reglas que caen</a:t>
             </a:r>
           </a:p>
         </p:txBody>
@@ -9462,7 +12186,7 @@
                 </a:solidFill>
                 <a:latin typeface="Montserrat"/>
               </a:rPr>
-              <a:t>Hogares y fuentes de calor: 1,5 m</a:t>
+              <a:t>Llave general de corte accesible dentro</a:t>
             </a:r>
           </a:p>
           <a:p>
@@ -9487,7 +12211,7 @@
                 </a:solidFill>
                 <a:latin typeface="Montserrat"/>
               </a:rPr>
-              <a:t>Tomas de corriente: 0,5 m</a:t>
+              <a:t>Máximo dos envases en batería</a:t>
             </a:r>
           </a:p>
           <a:p>
@@ -9512,39 +12236,14 @@
                 </a:solidFill>
                 <a:latin typeface="Montserrat"/>
               </a:rPr>
-              <a:t>Hornillos, interruptores, conductores: 0,3 m</a:t>
-            </a:r>
-          </a:p>
-          <a:p>
-            <a:pPr>
-              <a:spcAft>
-                <a:spcPts val="1000"/>
-              </a:spcAft>
-            </a:pPr>
-            <a:r>
-              <a:rPr sz="1600" b="1" i="0">
-                <a:solidFill>
-                  <a:srgbClr val="2E3A80"/>
-                </a:solidFill>
-                <a:latin typeface="Montserrat"/>
-              </a:rPr>
-              <a:t>•  </a:t>
-            </a:r>
-            <a:r>
-              <a:rPr sz="1600" b="0" i="0">
-                <a:solidFill>
-                  <a:srgbClr val="1B2330"/>
-                </a:solidFill>
-                <a:latin typeface="Montserrat"/>
-              </a:rPr>
-              <a:t>Con protección: 1,5→0,5 y 0,3→0,10</a:t>
-            </a:r>
-          </a:p>
-        </p:txBody>
-      </p:sp>
-      <p:sp>
-        <p:nvSpPr>
-          <p:cNvPr id="8" name="imgph" descr="IMGQ:kitchen gas stove blue flame burner"/>
+              <a:t>Con válvula de seguridad, siempre vertical</a:t>
+            </a:r>
+          </a:p>
+        </p:txBody>
+      </p:sp>
+      <p:sp>
+        <p:nvSpPr>
+          <p:cNvPr id="8" name="imgph" descr="IMGQ:gas shut off valve on kitchen wall"/>
           <p:cNvSpPr/>
           <p:nvPr/>
         </p:nvSpPr>
@@ -9630,7 +12329,7 @@
                 </a:solidFill>
                 <a:latin typeface="Montserrat"/>
               </a:rPr>
-              <a:t>kitchen gas stove blue flame burner</a:t>
+              <a:t>gas shut off valve on kitchen wall</a:t>
             </a:r>
           </a:p>
         </p:txBody>
@@ -9727,7 +12426,7 @@
                 </a:solidFill>
                 <a:latin typeface="Montserrat"/>
               </a:rPr>
-              <a:t>008 / 015</a:t>
+              <a:t>008 / 021</a:t>
             </a:r>
           </a:p>
         </p:txBody>
@@ -9761,7 +12460,7 @@
                 </a:solidFill>
                 <a:latin typeface="Montserrat"/>
               </a:rPr>
-              <a:t>Curso Gas B · Tema 03 · Envases de GLP uso propio</a:t>
+              <a:t>Curso Gas B · Tema 03 · ITC-ICG 06 · Envases de GLP para uso propio</a:t>
             </a:r>
           </a:p>
         </p:txBody>
@@ -9795,7 +12494,7 @@
                 </a:solidFill>
                 <a:latin typeface="Montserrat"/>
               </a:rPr>
-              <a:t>APARTADO 2.2.1 · ENVASES &gt; 15 KG</a:t>
+              <a:t>APARTADO 2.1 · VENTILACIÓN</a:t>
             </a:r>
           </a:p>
         </p:txBody>
@@ -9829,7 +12528,7 @@
                 </a:solidFill>
                 <a:latin typeface="Montserrat"/>
               </a:rPr>
-              <a:t>La batería grande</a:t>
+              <a:t>La rejilla va abajo</a:t>
             </a:r>
           </a:p>
         </p:txBody>
@@ -9877,7 +12576,7 @@
                 </a:solidFill>
                 <a:latin typeface="Montserrat"/>
               </a:rPr>
-              <a:t>Tope total: 1.000 kg</a:t>
+              <a:t>Ventilación permanente en la base</a:t>
             </a:r>
           </a:p>
           <a:p>
@@ -9902,7 +12601,7 @@
                 </a:solidFill>
                 <a:latin typeface="Montserrat"/>
               </a:rPr>
-              <a:t>En baterías: servicio y reserva</a:t>
+              <a:t>Superficie libre &gt; 1/100 del fondo</a:t>
             </a:r>
           </a:p>
           <a:p>
@@ -9927,39 +12626,14 @@
                 </a:solidFill>
                 <a:latin typeface="Montserrat"/>
               </a:rPr>
-              <a:t>Inversor (primera regulación)</a:t>
-            </a:r>
-          </a:p>
-          <a:p>
-            <a:pPr>
-              <a:spcAft>
-                <a:spcPts val="1000"/>
-              </a:spcAft>
-            </a:pPr>
-            <a:r>
-              <a:rPr sz="1600" b="1" i="0">
-                <a:solidFill>
-                  <a:srgbClr val="2E3A80"/>
-                </a:solidFill>
-                <a:latin typeface="Montserrat"/>
-              </a:rPr>
-              <a:t>•  </a:t>
-            </a:r>
-            <a:r>
-              <a:rPr sz="1600" b="0" i="0">
-                <a:solidFill>
-                  <a:srgbClr val="1B2330"/>
-                </a:solidFill>
-                <a:latin typeface="Montserrat"/>
-              </a:rPr>
-              <a:t>Válvula antirretorno en el colector</a:t>
-            </a:r>
-          </a:p>
-        </p:txBody>
-      </p:sp>
-      <p:sp>
-        <p:nvSpPr>
-          <p:cNvPr id="8" name="imgph" descr="IMGQ:propane tank battery manifold industrial"/>
+              <a:t>Casi cuadrada; nunca tapada</a:t>
+            </a:r>
+          </a:p>
+        </p:txBody>
+      </p:sp>
+      <p:sp>
+        <p:nvSpPr>
+          <p:cNvPr id="8" name="imgph" descr="IMGQ:ventilation grille at bottom of gas cabinet"/>
           <p:cNvSpPr/>
           <p:nvPr/>
         </p:nvSpPr>
@@ -10045,7 +12719,7 @@
                 </a:solidFill>
                 <a:latin typeface="Montserrat"/>
               </a:rPr>
-              <a:t>propane tank battery manifold industrial</a:t>
+              <a:t>ventilation grille at bottom of gas cabinet</a:t>
             </a:r>
           </a:p>
         </p:txBody>
@@ -10142,7 +12816,7 @@
                 </a:solidFill>
                 <a:latin typeface="Montserrat"/>
               </a:rPr>
-              <a:t>009 / 015</a:t>
+              <a:t>009 / 021</a:t>
             </a:r>
           </a:p>
         </p:txBody>
@@ -10176,7 +12850,7 @@
                 </a:solidFill>
                 <a:latin typeface="Montserrat"/>
               </a:rPr>
-              <a:t>Curso Gas B · Tema 03 · Envases de GLP uso propio</a:t>
+              <a:t>Curso Gas B · Tema 03 · ITC-ICG 06 · Envases de GLP para uso propio</a:t>
             </a:r>
           </a:p>
         </p:txBody>
@@ -10210,7 +12884,7 @@
                 </a:solidFill>
                 <a:latin typeface="Montserrat"/>
               </a:rPr>
-              <a:t>APARTADO 2.2.2 · UBICACIÓN</a:t>
+              <a:t>APARTADO 2.1 · REGULADOR</a:t>
             </a:r>
           </a:p>
         </p:txBody>
@@ -10244,7 +12918,7 @@
                 </a:solidFill>
                 <a:latin typeface="Montserrat"/>
               </a:rPr>
-              <a:t>Fuera y en caseta</a:t>
+              <a:t>Regulador siempre</a:t>
             </a:r>
           </a:p>
         </p:txBody>
@@ -10292,7 +12966,7 @@
                 </a:solidFill>
                 <a:latin typeface="Montserrat"/>
               </a:rPr>
-              <a:t>Siempre en el exterior, en caseta</a:t>
+              <a:t>Entre envase y aparato, regulador</a:t>
             </a:r>
           </a:p>
           <a:p>
@@ -10317,7 +12991,7 @@
                 </a:solidFill>
                 <a:latin typeface="Montserrat"/>
               </a:rPr>
-              <a:t>Interior solo si ≤ 70 kg</a:t>
+              <a:t>Excepción: aparatos a presión directa</a:t>
             </a:r>
           </a:p>
           <a:p>
@@ -10342,39 +13016,14 @@
                 </a:solidFill>
                 <a:latin typeface="Montserrat"/>
               </a:rPr>
-              <a:t>Local &gt; 1.000 m³ y ≥ 150 m²</a:t>
-            </a:r>
-          </a:p>
-          <a:p>
-            <a:pPr>
-              <a:spcAft>
-                <a:spcPts val="1000"/>
-              </a:spcAft>
-            </a:pPr>
-            <a:r>
-              <a:rPr sz="1600" b="1" i="0">
-                <a:solidFill>
-                  <a:srgbClr val="2E3A80"/>
-                </a:solidFill>
-                <a:latin typeface="Montserrat"/>
-              </a:rPr>
-              <a:t>•  </a:t>
-            </a:r>
-            <a:r>
-              <a:rPr sz="1600" b="0" i="0">
-                <a:solidFill>
-                  <a:srgbClr val="1B2330"/>
-                </a:solidFill>
-                <a:latin typeface="Montserrat"/>
-              </a:rPr>
-              <a:t>Ventilación 1/15 y dos extintores</a:t>
-            </a:r>
-          </a:p>
-        </p:txBody>
-      </p:sp>
-      <p:sp>
-        <p:nvSpPr>
-          <p:cNvPr id="8" name="imgph" descr="IMGQ:outdoor propane cylinder enclosure fenced"/>
+              <a:t>Y entonces, con tubo rígido</a:t>
+            </a:r>
+          </a:p>
+        </p:txBody>
+      </p:sp>
+      <p:sp>
+        <p:nvSpPr>
+          <p:cNvPr id="8" name="imgph" descr="IMGQ:gas pressure regulator on cylinder valve"/>
           <p:cNvSpPr/>
           <p:nvPr/>
         </p:nvSpPr>
@@ -10460,7 +13109,7 @@
                 </a:solidFill>
                 <a:latin typeface="Montserrat"/>
               </a:rPr>
-              <a:t>outdoor propane cylinder enclosure fenced</a:t>
+              <a:t>gas pressure regulator on cylinder valve</a:t>
             </a:r>
           </a:p>
         </p:txBody>

--- a/Curso Gas B/03 - ITC-ICG 05-06 - Estaciones de servicio y envases GLP uso propio/03 - ITC-ICG 05-06 - Estaciones de servicio y envases GLP uso propio - Vídeo 2.pptx
+++ b/Curso Gas B/03 - ITC-ICG 05-06 - Estaciones de servicio y envases GLP uso propio/03 - ITC-ICG 05-06 - Estaciones de servicio y envases GLP uso propio - Vídeo 2.pptx
@@ -26,6 +26,7 @@
     <p:sldId id="274" r:id="rId26"/>
     <p:sldId id="275" r:id="rId27"/>
     <p:sldId id="276" r:id="rId28"/>
+    <p:sldId id="277" r:id="rId29"/>
   </p:sldIdLst>
   <p:sldSz cx="12191695" cy="6858000" type="screen4x3"/>
   <p:notesSz cx="6858000" cy="9144000"/>
@@ -597,12 +598,12 @@
           <a:lstStyle/>
           <a:p>
             <a:r>
-              <a:t>N1: El cuadro de distancias me agobia. ¿Hay forma de memorizarlo?</a:t>
-            </a:r>
-          </a:p>
-          <a:p>
-            <a:r>
-              <a:t>N2: Sí, ordénalo de más peligro a menos, que es de más distancia a menos. Lo que da fuego de verdad, los hogares y otras fuentes de calor, es lo más peligroso, así que lo más lejos: un metro y medio. Luego, las tomas de corriente, los enchufes, a medio metro, porque un enchufe puede chispear justo al conectar o desconectar algo. Y lo más cerca que se permite, treinta centímetros, para los hornillos, los interruptores y los conductores eléctricos. Uno y medio, medio, treinta centímetros. Y dos trampillas de reducción que caen: si pones una protección contra la radiación, una pantalla sólida y eficaz de material casi incombustible, el hogar puede acercarse de un metro y medio a medio metro, y el hornillo de treinta a diez centímetros. Ese material de la pantalla tiene una clase concreta de reacción al fuego, prácticamente incombustible.</a:t>
+              <a:t>N1: ¿Puedo conectar la bombona directa al aparato para ahorrarme piezas?</a:t>
+            </a:r>
+          </a:p>
+          <a:p>
+            <a:r>
+              <a:t>N2: No, y esto es de los que hay que tener grabado. Entre la bombona y el aparato siempre va un regulador. ¿Por qué? Porque la bombona da una presión alta y variable, que además cambia según lo llena que esté y la temperatura, mientras que el aparato necesita una presión baja y estable para dar una llama controlada. El regulador es el que traduce esa presión alta y caprichosa en presión baja y constante. Conectar a pelo, sin regulador, es peligrosísimo: mandas al quemador una presión que no controla. La única excepción son los aparatos aprobados expresamente para funcionar a presión directa, y en ese caso la conexión se hace con canalización rígida, con tubo rígido, no flexible. Así que si alguna vez ves escrito que se pueden conectar aparatos sin regulador, es falso, salvo ese caso concreto de presión directa con tubo rígido.</a:t>
             </a:r>
           </a:p>
         </p:txBody>
@@ -672,12 +673,12 @@
           <a:lstStyle/>
           <a:p>
             <a:r>
-              <a:t>N1: Con los envases grandes, ¿qué cambia respecto a las bombonas pequeñas?</a:t>
-            </a:r>
-          </a:p>
-          <a:p>
-            <a:r>
-              <a:t>N2: Sube el listón. Con envases de más de quince kilos, el almacenamiento total ya no es trescientos, sino mil kilos como máximo. Y la instalación se monta normalmente en baterías: un grupo de envases en servicio, dando gas, y otro grupo en reserva, esperando. ¿Y quién gestiona ese relevo? Un aparato llamado inversor. El inversor es listo: cuando la batería que está dando gas se vacía, cambia solo a la de reserva sin que te quedes sin suministro, y de paso hace la primera etapa de regulación de presión. Si no hay envases de reserva, ese papel de primera regulación lo hace un simple regulador. Y en el colector, el tubo donde se juntan los envases, va una válvula antirretorno, que impide que el gas se vaya para atrás hacia los envases vacíos. Además, un envase que se pueda llenar en su propio sitio pasa a regirse por la instrucción de los depósitos fijos de GLP.</a:t>
+              <a:t>N1: El cuadro de distancias me agobia. ¿Hay forma de memorizarlo?</a:t>
+            </a:r>
+          </a:p>
+          <a:p>
+            <a:r>
+              <a:t>N2: Sí, ordénalo de más peligro a menos, que es de más distancia a menos. Lo que da fuego de verdad, los hogares y otras fuentes de calor, es lo más peligroso, así que lo más lejos: un metro y medio. Luego, las tomas de corriente, los enchufes, a medio metro, porque un enchufe puede chispear justo al conectar o desconectar algo. Y lo más cerca que se permite, treinta centímetros, para los hornillos, los interruptores y los conductores eléctricos. Uno y medio, medio, treinta centímetros. Y dos trampillas de reducción que caen: si pones una protección contra la radiación, una pantalla sólida y eficaz de material casi incombustible, el hogar puede acercarse de un metro y medio a medio metro, y el hornillo de treinta a diez centímetros. Ese material de la pantalla tiene una clase concreta de reacción al fuego, prácticamente incombustible.</a:t>
             </a:r>
           </a:p>
         </p:txBody>
@@ -747,12 +748,12 @@
           <a:lstStyle/>
           <a:p>
             <a:r>
-              <a:t>N1: ¿Los envases grandes también pueden ir dentro de casa?</a:t>
-            </a:r>
-          </a:p>
-          <a:p>
-            <a:r>
-              <a:t>N2: Por norma general, no: los envases de más de quince kilos van siempre en el exterior de las edificaciones, protegidos por una caseta que cumple unas condiciones que veremos enseguida. Y siguen valiendo las prohibiciones de siempre: nada de sótanos, semisótanos, cajas de escalera ni pasillos, por lo del gas que pesa y se embolsa. Además, aparece una prohibición nueva: tampoco se permiten en locales con ventilación forzada, esos que llevan extractores metiendo y sacando aire, salvo que se tomen medidas especiales, como que la ventilación sea antiexplosiva y sus conductos no pasen por otros locales, o que haya un sistema de detección de fugas que corte el gas y active los extractores. ¿Por qué? Porque un extractor moviendo una atmósfera con gas puede repartir la fuga o incluso provocar la chispa. Por defecto, quédate con: envases grandes, fuera y en caseta.</a:t>
+              <a:t>N1: Con los envases grandes, ¿qué cambia respecto a las bombonas pequeñas?</a:t>
+            </a:r>
+          </a:p>
+          <a:p>
+            <a:r>
+              <a:t>N2: Sube el listón. Con envases de más de quince kilos, el almacenamiento total ya no es trescientos, sino mil kilos como máximo. Y la instalación se monta normalmente en baterías: un grupo de envases en servicio, dando gas, y otro grupo en reserva, esperando. ¿Y quién gestiona ese relevo? Un aparato llamado inversor. El inversor es listo: cuando la batería que está dando gas se vacía, cambia solo a la de reserva sin que te quedes sin suministro, y de paso hace la primera etapa de regulación de presión. Si no hay envases de reserva, ese papel de primera regulación lo hace un simple regulador. Y en el colector, el tubo donde se juntan los envases, va una válvula antirretorno, que impide que el gas se vaya para atrás hacia los envases vacíos. Además, un envase que se pueda llenar en su propio sitio pasa a regirse por la instrucción de los depósitos fijos de GLP.</a:t>
             </a:r>
           </a:p>
         </p:txBody>
@@ -822,12 +823,12 @@
           <a:lstStyle/>
           <a:p>
             <a:r>
-              <a:t>N1: ¿Y la única forma de tenerlos dentro cuál es?</a:t>
-            </a:r>
-          </a:p>
-          <a:p>
-            <a:r>
-              <a:t>N2: Hay una sola puerta, y es estrecha. Los envases grandes pueden ir en el interior del local únicamente si el contenido total de GLP no pasa de setenta kilos, y además el local es grande y está muy bien ventilado. En concreto: volumen superior a mil metros cúbicos, superficie mínima de ciento cincuenta metros cuadrados, huecos de ventilación con una superficie libre de al menos una quinceava parte de la superficie del local, y sirviendo cualquier abertura permanente, puertas o ventanas, que llegue a ras de suelo, otra vez porque el gas se posa abajo. Y encima, protección contra incendios: dos extintores de una eficacia concreta, veintiuno A, ciento trece B, cerca de los envases y en sitio de fácil acceso. Memoriza los setenta kilos como la frontera dentro o fuera para los envases de más de quince kilos. Si se pasa de setenta, fuera sí o sí.</a:t>
+              <a:t>N1: ¿Los envases grandes también pueden ir dentro de casa?</a:t>
+            </a:r>
+          </a:p>
+          <a:p>
+            <a:r>
+              <a:t>N2: Por norma general, no: los envases de más de quince kilos van siempre en el exterior de las edificaciones, protegidos por una caseta que cumple unas condiciones que veremos enseguida. Y siguen valiendo las prohibiciones de siempre: nada de sótanos, semisótanos, cajas de escalera ni pasillos, por lo del gas que pesa y se embolsa. Además, aparece una prohibición nueva: tampoco se permiten en locales con ventilación forzada, esos que llevan extractores metiendo y sacando aire, salvo que se tomen medidas especiales, como que la ventilación sea antiexplosiva y sus conductos no pasen por otros locales, o que haya un sistema de detección de fugas que corte el gas y active los extractores. ¿Por qué? Porque un extractor moviendo una atmósfera con gas puede repartir la fuga o incluso provocar la chispa. Por defecto, quédate con: envases grandes, fuera y en caseta.</a:t>
             </a:r>
           </a:p>
         </p:txBody>
@@ -897,12 +898,12 @@
           <a:lstStyle/>
           <a:p>
             <a:r>
-              <a:t>N1: ¿Y cómo tiene que ser esa caseta por dentro?</a:t>
-            </a:r>
-          </a:p>
-          <a:p>
-            <a:r>
-              <a:t>N2: La caseta se construye con material casi incombustible, una clase de reacción al fuego alta. Y su secreto son dos rejillas, no una: ventila arriba y abajo. Los huecos van a menos de quince centímetros del suelo y a menos de quince centímetros del techo. ¿Por qué las dos? Abajo escapa el GLP que se posa, que es lo más importante; y arriba salen los vapores más ligeros y se favorece la corriente de aire. La superficie de esas aberturas es de al menos una décima parte de la superficie de la caseta, y de nuevo casi cuadradas, sin que una dimensión pase del doble de la otra. Y un detalle bonito: el suelo de la caseta va ligeramente inclinado hacia el exterior, para que el gas pesado resbale afuera en vez de quedarse dentro. Cuidado con un lío típico de examen: la ventilación de la caseta es una décima parte, y la del armario de las bombonas pequeñas era una centésima. No confundas la décima de la caseta con la centésima del armario. Y si la caseta se pega a la fachada, se duplica la ventilación.</a:t>
+              <a:t>N1: ¿Y la única forma de tenerlos dentro cuál es?</a:t>
+            </a:r>
+          </a:p>
+          <a:p>
+            <a:r>
+              <a:t>N2: Hay una sola puerta, y es estrecha. Los envases grandes pueden ir en el interior del local únicamente si el contenido total de GLP no pasa de setenta kilos, y además el local es grande y está muy bien ventilado. En concreto: volumen superior a mil metros cúbicos, superficie mínima de ciento cincuenta metros cuadrados, huecos de ventilación con una superficie libre de al menos una quinceava parte de la superficie del local, y sirviendo cualquier abertura permanente, puertas o ventanas, que llegue a ras de suelo, otra vez porque el gas se posa abajo. Y encima, protección contra incendios: dos extintores de una eficacia concreta, veintiuno A, ciento trece B, cerca de los envases y en sitio de fácil acceso. Memoriza los setenta kilos como la frontera dentro o fuera para los envases de más de quince kilos. Si se pasa de setenta, fuera sí o sí.</a:t>
             </a:r>
           </a:p>
         </p:txBody>
@@ -972,12 +973,12 @@
           <a:lstStyle/>
           <a:p>
             <a:r>
-              <a:t>N1: El segundo cuadro de distancias tiene muchas columnas. ¿Cómo lo leo sin agobio?</a:t>
-            </a:r>
-          </a:p>
-          <a:p>
-            <a:r>
-              <a:t>N2: Con dos ideas y ya está. Idea una: cuanto más gas, más distancia. Por eso el cuadro separa según el contenido total, hasta setenta kilos o por encima, y cuando pasas de setenta las distancias crecen. Por ejemplo, a un hogar se está a más de metro y medio hasta setenta kilos, pero a más de tres metros por encima. Idea dos: la caseta protege, así que a veces la distancia baja. Fíjate en las alcantarillas, desagües y aberturas a sótanos: sin caseta necesitas metro y medio, pero con caseta te basta medio metro, porque la caseta ya hace de barrera y evita que el gas se cuele por esos huecos hacia abajo. En cambio, para los hogares y los motores, la caseta no rebaja nada, siguen lejos. La chuleta: más kilos, más metros; y la caseta recorta hacia desagües y sótanos, pero no hacia fuegos ni motores.</a:t>
+              <a:t>N1: ¿Y cómo tiene que ser esa caseta por dentro?</a:t>
+            </a:r>
+          </a:p>
+          <a:p>
+            <a:r>
+              <a:t>N2: La caseta se construye con material casi incombustible, una clase de reacción al fuego alta. Y su secreto son dos rejillas, no una: ventila arriba y abajo. Los huecos van a menos de quince centímetros del suelo y a menos de quince centímetros del techo. ¿Por qué las dos? Abajo escapa el GLP que se posa, que es lo más importante; y arriba salen los vapores más ligeros y se favorece la corriente de aire. La superficie de esas aberturas es de al menos una décima parte de la superficie de la caseta, y de nuevo casi cuadradas, sin que una dimensión pase del doble de la otra. Y un detalle bonito: el suelo de la caseta va ligeramente inclinado hacia el exterior, para que el gas pesado resbale afuera en vez de quedarse dentro. Cuidado con un lío típico de examen: la ventilación de la caseta es una décima parte, y la del armario de las bombonas pequeñas era una centésima. No confundas la décima de la caseta con la centésima del armario. Y si la caseta se pega a la fachada, se duplica la ventilación.</a:t>
             </a:r>
           </a:p>
         </p:txBody>
@@ -1047,12 +1048,12 @@
           <a:lstStyle/>
           <a:p>
             <a:r>
-              <a:t>N1: Lo de los extintores me lía. ¿Cuándo hacen falta?</a:t>
-            </a:r>
-          </a:p>
-          <a:p>
-            <a:r>
-              <a:t>N2: Es fácil si separas los dos casos, porque el extintor es el mismo pero el motivo por el que se pone cambia. El extintor siempre es el mismo modelo de eficacia, veintiuno A, ciento trece B, y siempre son dos. Caso uno: cuando metes los envases en el interior del local, esa excepción de los setenta kilos que vimos, los dos extintores son obligatorios siempre, por el simple hecho de tener gas dentro. Caso dos: cuando los envases están en la caseta, los dos extintores solo hacen falta si el contenido total sobrepasa los trescientos cincuenta kilos, y se colocan en el exterior de la caseta, a mano. Resumen para no fallar: mismo extintor, distinto disparador. Interior, siempre; caseta, a partir de trescientos cincuenta kilos.</a:t>
+              <a:t>N1: El segundo cuadro de distancias tiene muchas columnas. ¿Cómo lo leo sin agobio?</a:t>
+            </a:r>
+          </a:p>
+          <a:p>
+            <a:r>
+              <a:t>N2: Con dos ideas y ya está. Idea una: cuanto más gas, más distancia. Por eso el cuadro separa según el contenido total, hasta setenta kilos o por encima, y cuando pasas de setenta las distancias crecen. Por ejemplo, a un hogar se está a más de metro y medio hasta setenta kilos, pero a más de tres metros por encima. Idea dos: la caseta protege, así que a veces la distancia baja. Fíjate en las alcantarillas, desagües y aberturas a sótanos: sin caseta necesitas metro y medio, pero con caseta te basta medio metro, porque la caseta ya hace de barrera y evita que el gas se cuele por esos huecos hacia abajo. En cambio, para los hogares y los motores, la caseta no rebaja nada, siguen lejos. La chuleta: más kilos, más metros; y la caseta recorta hacia desagües y sótanos, pero no hacia fuegos ni motores.</a:t>
             </a:r>
           </a:p>
         </p:txBody>
@@ -1122,12 +1123,12 @@
           <a:lstStyle/>
           <a:p>
             <a:r>
-              <a:t>N1: ¿Cambiar una bombona tiene tanto riesgo como para venir en la norma?</a:t>
-            </a:r>
-          </a:p>
-          <a:p>
-            <a:r>
-              <a:t>N2: Es el momento más peligroso de toda la instalación, y por eso tiene reglas propias. Al desacoplar un envase siempre se escapa un poquito de gas, es inevitable. Así que durante el cambio: nada de encender ni mantener ningún punto de fuego, no accionar ningún interruptor eléctrico, y ningún motor en marcha. ¿Por qué tan estricto? Porque cualquier chispa, la de un interruptor o la de un motor, con ese gas suelto en el aire, puede prender. Ahora bien, la norma se relaja si hay distancia de sobra: no hace falta tanta precaución si entre los envases y esos elementos median más de veinte metros cuando están dentro de un local, o más de diez metros cuando están fuera. Dentro se pide más distancia porque el gas no se dispersa igual. Y si los aparatos eléctricos son antiexplosivos, de esos que no dan chispa al aire, las dos precauciones eléctricas ya no hacen falta. Truco: cambiar bombona es apagarlo todo, salvo que estés muy lejos o el material sea antichispa.</a:t>
+              <a:t>N1: Lo de los extintores me lía. ¿Cuándo hacen falta?</a:t>
+            </a:r>
+          </a:p>
+          <a:p>
+            <a:r>
+              <a:t>N2: Es fácil si separas los dos casos, porque el extintor es el mismo pero el motivo por el que se pone cambia. El extintor siempre es el mismo modelo de eficacia, veintiuno A, ciento trece B, y siempre son dos. Caso uno: cuando metes los envases en el interior del local, esa excepción de los setenta kilos que vimos, los dos extintores son obligatorios siempre, por el simple hecho de tener gas dentro. Caso dos: cuando los envases están en la caseta, los dos extintores solo hacen falta si el contenido total sobrepasa los trescientos cincuenta kilos, y se colocan en el exterior de la caseta, a mano. Resumen para no fallar: mismo extintor, distinto disparador. Interior, siempre; caseta, a partir de trescientos cincuenta kilos.</a:t>
             </a:r>
           </a:p>
         </p:txBody>
@@ -1197,12 +1198,12 @@
           <a:lstStyle/>
           <a:p>
             <a:r>
-              <a:t>N1: La estufa de butano con su bombona, ¿también lleva todo este papeleo?</a:t>
-            </a:r>
-          </a:p>
-          <a:p>
-            <a:r>
-              <a:t>N2: No, y esa es la primera exclusión que tienes que conocer. Queda fuera del papeleo de puesta en servicio la instalación más sencilla que existe: un único envase de GLP de contenido igual o menor a quince kilos, conectado por tubería flexible o acoplado directamente a un solo aparato de gas móvil. Es el clásico bombona de butano más estufa móvil, o la bombona con el infiernillo. Eso se libra. Pero en cuanto haya más de un envase, o tubería fija, o varios aparatos, ya deja de estar excluido y entra el papeleo. Este límite, un envase de hasta quince kilos a un solo aparato móvil, aparece una y otra vez en el reglamento; apréndetelo como la frontera del cacharro suelto. Y para el resto, igual que la estación de servicio: las instalaciones de envases de GLP no precisan autorización administrativa previa.</a:t>
+              <a:t>N1: ¿Cambiar una bombona tiene tanto riesgo como para venir en la norma?</a:t>
+            </a:r>
+          </a:p>
+          <a:p>
+            <a:r>
+              <a:t>N2: Es el momento más peligroso de toda la instalación, y por eso tiene reglas propias. Al desacoplar un envase siempre se escapa un poquito de gas, es inevitable. Así que durante el cambio: nada de encender ni mantener ningún punto de fuego, no accionar ningún interruptor eléctrico, y ningún motor en marcha. ¿Por qué tan estricto? Porque cualquier chispa, la de un interruptor o la de un motor, con ese gas suelto en el aire, puede prender. Ahora bien, la norma se relaja si hay distancia de sobra: no hace falta tanta precaución si entre los envases y esos elementos median más de veinte metros cuando están dentro de un local, o más de diez metros cuando están fuera. Dentro se pide más distancia porque el gas no se dispersa igual. Y si los aparatos eléctricos son antiexplosivos, de esos que no dan chispa al aire, las dos precauciones eléctricas ya no hacen falta. Truco: cambiar bombona es apagarlo todo, salvo que estés muy lejos o el material sea antichispa.</a:t>
             </a:r>
           </a:p>
         </p:txBody>
@@ -1272,12 +1273,12 @@
           <a:lstStyle/>
           <a:p>
             <a:r>
-              <a:t>N1: ¿Qué es eso de la prueba de estanquidad y qué números lleva?</a:t>
-            </a:r>
-          </a:p>
-          <a:p>
-            <a:r>
-              <a:t>N2: Estanquidad significa que no se escape ni una burbuja de gas por ningún lado. Y antes de dar servicio, la empresa instaladora comprueba justo eso en las canalizaciones. Los tres números que caen fijo: se prueba a una presión de una vez y media la presión de operación, es decir, la presión normal de trabajo multiplicada por uno coma cinco, para tener margen de seguridad; se mantiene durante diez minutos; y se hace con aire, con gas inerte o con GLP en fase gaseosa. Si te dan dos veces la presión, o media hora, es falso: aquí es una vez y media y diez minutos. Además, si la prueba se hace con GLP, hay precauciones extra: prohibido fumar, evitar puntos de ignición, y algo muy de oficio, purgar y soplar las canalizaciones antes de reparar, o sea sacar todo el gas y limpiar con aire o inerte para que no quede GLP dentro cuando entre la herramienta. Con resultado positivo, la empresa instaladora emite el certificado de instalación.</a:t>
+              <a:t>N1: La estufa de butano con su bombona, ¿también lleva todo este papeleo?</a:t>
+            </a:r>
+          </a:p>
+          <a:p>
+            <a:r>
+              <a:t>N2: No, y esa es la primera exclusión que tienes que conocer. Queda fuera del papeleo de puesta en servicio la instalación más sencilla que existe: un único envase de GLP de contenido igual o menor a quince kilos, conectado por tubería flexible o acoplado directamente a un solo aparato de gas móvil. Es el clásico bombona de butano más estufa móvil, o la bombona con el infiernillo. Eso se libra. Pero en cuanto haya más de un envase, o tubería fija, o varios aparatos, ya deja de estar excluido y entra el papeleo. Este límite, un envase de hasta quince kilos a un solo aparato móvil, aparece una y otra vez en el reglamento; apréndetelo como la frontera del cacharro suelto. Y para el resto, igual que la estación de servicio: las instalaciones de envases de GLP no precisan autorización administrativa previa.</a:t>
             </a:r>
           </a:p>
         </p:txBody>
@@ -1422,12 +1423,12 @@
           <a:lstStyle/>
           <a:p>
             <a:r>
-              <a:t>N1: ¿Y aquí también hay que avisar a la Administración en quince días como en la estación?</a:t>
-            </a:r>
-          </a:p>
-          <a:p>
-            <a:r>
-              <a:t>N2: Pues no, y es una diferencia fuerte que conviene tener clarísima. En la estación de servicio del vídeo anterior sí se comunicaba, en quince días hábiles. Aquí, en los envases de GLP, no es precisa ninguna comunicación a la Administración. Basta con que tanto el titular como la empresa instaladora conserven el certificado de instalación y lo tengan a mano por si la Administración lo pide. La idea: envases de GLP, ni autorización ni comunicación, pero certificado guardado. La puesta en servicio, además, se hace conjuntamente con la instalación receptora a la que alimentan. Y una última pieza, la del mantenimiento: fíjate en la palabra, aquí se habla de revisión, no de inspección. Es coherente con lo que aprendiste: como los envases no cuelgan de una red de distribución, el control se llama revisión. El titular la encarga a una empresa instaladora, coincidiendo con la revisión periódica de la instalación receptora, para no hacer dos visitas. Y otra vez se libra el único envase de menos de quince kilos con su aparato móvil.</a:t>
+              <a:t>N1: ¿Qué es eso de la prueba de estanquidad y qué números lleva?</a:t>
+            </a:r>
+          </a:p>
+          <a:p>
+            <a:r>
+              <a:t>N2: Estanquidad significa que no se escape ni una burbuja de gas por ningún lado. Y antes de dar servicio, la empresa instaladora comprueba justo eso en las canalizaciones. Los tres números que caen fijo: se prueba a una presión de una vez y media la presión de operación, es decir, la presión normal de trabajo multiplicada por uno coma cinco, para tener margen de seguridad; se mantiene durante diez minutos; y se hace con aire, con gas inerte o con GLP en fase gaseosa. Si te dan dos veces la presión, o media hora, es falso: aquí es una vez y media y diez minutos. Además, si la prueba se hace con GLP, hay precauciones extra: prohibido fumar, evitar puntos de ignición, y algo muy de oficio, purgar y soplar las canalizaciones antes de reparar, o sea sacar todo el gas y limpiar con aire o inerte para que no quede GLP dentro cuando entre la herramienta. Con resultado positivo, la empresa instaladora emite el certificado de instalación.</a:t>
             </a:r>
           </a:p>
         </p:txBody>
@@ -1497,6 +1498,81 @@
           <a:lstStyle/>
           <a:p>
             <a:r>
+              <a:t>N1: ¿Y aquí también hay que avisar a la Administración en quince días como en la estación?</a:t>
+            </a:r>
+          </a:p>
+          <a:p>
+            <a:r>
+              <a:t>N2: Pues no, y es una diferencia fuerte que conviene tener clarísima. En la estación de servicio del vídeo anterior sí se comunicaba, en quince días hábiles. Aquí, en los envases de GLP, no es precisa ninguna comunicación a la Administración. Basta con que tanto el titular como la empresa instaladora conserven el certificado de instalación y lo tengan a mano por si la Administración lo pide. La idea: envases de GLP, ni autorización ni comunicación, pero certificado guardado. La puesta en servicio, además, se hace conjuntamente con la instalación receptora a la que alimentan. Y una última pieza, la del mantenimiento: fíjate en la palabra, aquí se habla de revisión, no de inspección. Es coherente con lo que aprendiste: como los envases no cuelgan de una red de distribución, el control se llama revisión. El titular la encarga a una empresa instaladora, coincidiendo con la revisión periódica de la instalación receptora, para no hacer dos visitas. Y otra vez se libra el único envase de menos de quince kilos con su aparato móvil.</a:t>
+            </a:r>
+          </a:p>
+        </p:txBody>
+      </p:sp>
+      <p:sp>
+        <p:nvSpPr>
+          <p:cNvPr id="4" name="Slide Number Placeholder 3"/>
+          <p:cNvSpPr>
+            <a:spLocks noGrp="1"/>
+          </p:cNvSpPr>
+          <p:nvPr>
+            <p:ph type="sldNum" idx="5" sz="quarter"/>
+          </p:nvPr>
+        </p:nvSpPr>
+        <p:spPr/>
+      </p:sp>
+    </p:spTree>
+  </p:cSld>
+  <p:clrMapOvr>
+    <a:masterClrMapping/>
+  </p:clrMapOvr>
+</p:notes>
+</file>
+
+<file path=ppt/notesSlides/notesSlide22.xml><?xml version="1.0" encoding="utf-8"?>
+<p:notes xmlns:a="http://schemas.openxmlformats.org/drawingml/2006/main" xmlns:p="http://schemas.openxmlformats.org/presentationml/2006/main" xmlns:r="http://schemas.openxmlformats.org/officeDocument/2006/relationships">
+  <p:cSld>
+    <p:spTree>
+      <p:nvGrpSpPr>
+        <p:cNvPr id="1" name=""/>
+        <p:cNvGrpSpPr/>
+        <p:nvPr/>
+      </p:nvGrpSpPr>
+      <p:grpSpPr>
+        <a:xfrm>
+          <a:off x="0" y="0"/>
+          <a:ext cx="0" cy="0"/>
+          <a:chOff x="0" y="0"/>
+          <a:chExt cx="0" cy="0"/>
+        </a:xfrm>
+      </p:grpSpPr>
+      <p:sp>
+        <p:nvSpPr>
+          <p:cNvPr id="2" name="Slide Image Placeholder 1"/>
+          <p:cNvSpPr>
+            <a:spLocks noGrp="1"/>
+          </p:cNvSpPr>
+          <p:nvPr>
+            <p:ph type="sldImg" idx="2"/>
+          </p:nvPr>
+        </p:nvSpPr>
+        <p:spPr/>
+      </p:sp>
+      <p:sp>
+        <p:nvSpPr>
+          <p:cNvPr id="3" name="Notes Placeholder 2"/>
+          <p:cNvSpPr>
+            <a:spLocks noGrp="1"/>
+          </p:cNvSpPr>
+          <p:nvPr>
+            <p:ph type="body" idx="3" sz="quarter"/>
+          </p:nvPr>
+        </p:nvSpPr>
+        <p:spPr/>
+        <p:txBody>
+          <a:bodyPr/>
+          <a:lstStyle/>
+          <a:p>
+            <a:r>
               <a:t>N1: Cierre del vídeo y del tema. ¿Me reconstruyes el hilo entero?</a:t>
             </a:r>
           </a:p>
@@ -1580,16 +1656,7 @@
         <p:txBody>
           <a:bodyPr/>
           <a:lstStyle/>
-          <a:p>
-            <a:r>
-              <a:t>N1: ¿Cualquier bombona entra en esta instrucción, hasta el cartucho de camping?</a:t>
-            </a:r>
-          </a:p>
-          <a:p>
-            <a:r>
-              <a:t>N2: No, y aquí está el primer filtro, el umbral de entrada. Esta instrucción se ocupa de los envases de gas licuado del petróleo, o sea butano y propano, cuya carga unitaria sea superior a tres kilos, y que sirvan para alimentar una instalación receptora, la de una vivienda o un negocio. La palabra clave es superior a tres kilos por envase. Por debajo de eso, los cartuchos de camping-gas o las bombonitas de menos de tres kilos, esta instrucción ni los mira. La regla mental: bombona de butano de doce kilos y medio o de propano de treinta y cinco kilos, están dentro; el cartuchito de dos kilos, fuera. Fija ese tres como la puerta de entrada.</a:t>
-            </a:r>
-          </a:p>
+          <a:p/>
         </p:txBody>
       </p:sp>
       <p:sp>
@@ -1657,12 +1724,12 @@
           <a:lstStyle/>
           <a:p>
             <a:r>
-              <a:t>N1: ¿Y por qué se separa según el tamaño de la bombona?</a:t>
-            </a:r>
-          </a:p>
-          <a:p>
-            <a:r>
-              <a:t>N2: Porque no es lo mismo montar cuatro bombonas de butano en un patio que una batería de envases grandes de propano detrás de un restaurante. El riesgo cambia, y por eso la instrucción divide en dos mundos según la capacidad unitaria del envase, es decir, según lo que pesa cada envase por separado. Mundo uno: envases de hasta quince kilos, la bombona doméstica clásica; ahí el almacenamiento total no puede pasar de trescientos kilos. Mundo dos: envases de más de quince kilos, los industriales; ahí el tope sube a mil kilos. No mezcles nunca los dos límites: pequeño va con trescientos, grande va con mil. A partir de aquí, cada mundo tiene sus propias reglas de ubicación, ventilación y distancias, y las vamos a ver una a una.</a:t>
+              <a:t>N1: ¿Cualquier bombona entra en esta instrucción, hasta el cartucho de camping?</a:t>
+            </a:r>
+          </a:p>
+          <a:p>
+            <a:r>
+              <a:t>N2: No, y aquí está el primer filtro, el umbral de entrada. Esta instrucción se ocupa de los envases de gas licuado del petróleo, o sea butano y propano, cuya carga unitaria sea superior a tres kilos, y que sirvan para alimentar una instalación receptora, la de una vivienda o un negocio. La palabra clave es superior a tres kilos por envase. Por debajo de eso, los cartuchos de camping-gas o las bombonitas de menos de tres kilos, esta instrucción ni los mira. La regla mental: bombona de butano de doce kilos y medio o de propano de treinta y cinco kilos, están dentro; el cartuchito de dos kilos, fuera. Fija ese tres como la puerta de entrada.</a:t>
             </a:r>
           </a:p>
         </p:txBody>
@@ -1732,12 +1799,12 @@
           <a:lstStyle/>
           <a:p>
             <a:r>
-              <a:t>N1: Ese tope de trescientos kilos, ¿cómo se cuenta exactamente?</a:t>
-            </a:r>
-          </a:p>
-          <a:p>
-            <a:r>
-              <a:t>N2: Con cuidado, porque aquí se cae mucha gente. La capacidad total de almacenamiento es la suma de las capacidades de todos los envases que haya, y ojo al detalle: cuentan tanto los llenos como los vacíos. ¿Por qué un vacío cuenta si no tiene gas? Por dos motivos: uno, porque un envase vacío casi nunca está del todo vacío, siempre le quedan restos de gas dentro; y dos, porque ese envase se va a rellenar, forma parte de la instalación. Así que si en un examen te dan una batería de bombonas, unas llenas y otras vacías, y te preguntan si cumple, sumas las capacidades de todas, llenas y vacías, y compruebas que no pasa de trescientos kilos. Sumar solo las llenas es el error típico.</a:t>
+              <a:t>N1: ¿Y por qué se separa según el tamaño de la bombona?</a:t>
+            </a:r>
+          </a:p>
+          <a:p>
+            <a:r>
+              <a:t>N2: Porque no es lo mismo montar cuatro bombonas de butano en un patio que una batería de envases grandes de propano detrás de un restaurante. El riesgo cambia, y por eso la instrucción divide en dos mundos según la capacidad unitaria del envase, es decir, según lo que pesa cada envase por separado. Mundo uno: envases de hasta quince kilos, la bombona doméstica clásica; ahí el almacenamiento total no puede pasar de trescientos kilos. Mundo dos: envases de más de quince kilos, los industriales; ahí el tope sube a mil kilos. No mezcles nunca los dos límites: pequeño va con trescientos, grande va con mil. A partir de aquí, cada mundo tiene sus propias reglas de ubicación, ventilación y distancias, y las vamos a ver una a una.</a:t>
             </a:r>
           </a:p>
         </p:txBody>
@@ -1807,12 +1874,12 @@
           <a:lstStyle/>
           <a:p>
             <a:r>
-              <a:t>N1: ¿Por qué tanta manía con los sótanos?</a:t>
-            </a:r>
-          </a:p>
-          <a:p>
-            <a:r>
-              <a:t>N2: Por una propiedad física del GLP que tienes que llevar tatuada: el butano y el propano pesan más que el aire. Eso significa que si hay una fuga, el gas no sube ni se dispersa, sino que cae y se va al punto más bajo, donde se acumula formando una bolsa. Ahora piensa qué es un sótano: precisamente el punto más bajo, un agujero donde el gas se embolsa y solo espera una chispa. Por eso la instrucción prohíbe los envases en sótanos, en semisótanos, en cajas de escalera y en pasillos: son trampas para el gas pesado. La regla de oro del GLP: el gas cae, así que nada de meterlo en agujeros. Solo con autorización expresa de la Comunidad Autónoma se puede saltar esta prohibición, y no es lo normal.</a:t>
+              <a:t>N1: Ese tope de trescientos kilos, ¿cómo se cuenta exactamente?</a:t>
+            </a:r>
+          </a:p>
+          <a:p>
+            <a:r>
+              <a:t>N2: Con cuidado, porque aquí se cae mucha gente. La capacidad total de almacenamiento es la suma de las capacidades de todos los envases que haya, y ojo al detalle: cuentan tanto los llenos como los vacíos. ¿Por qué un vacío cuenta si no tiene gas? Por dos motivos: uno, porque un envase vacío casi nunca está del todo vacío, siempre le quedan restos de gas dentro; y dos, porque ese envase se va a rellenar, forma parte de la instalación. Así que si en un examen te dan una batería de bombonas, unas llenas y otras vacías, y te preguntan si cumple, sumas las capacidades de todas, llenas y vacías, y compruebas que no pasa de trescientos kilos. Sumar solo las llenas es el error típico.</a:t>
             </a:r>
           </a:p>
         </p:txBody>
@@ -1882,12 +1949,12 @@
           <a:lstStyle/>
           <a:p>
             <a:r>
-              <a:t>N1: Si los envases van fuera y la cocina dentro, ¿hay algo especial que poner?</a:t>
-            </a:r>
-          </a:p>
-          <a:p>
-            <a:r>
-              <a:t>N2: Sí, tres detalles que se preguntan. Primero: cuando los envases están en el exterior, en una terraza o un patio, y los aparatos de consumo están en el interior, tiene que haber, dentro de la vivienda, una llave general de corte de gas fácilmente accesible. ¿Por qué dentro? Para que, si hueles a gas, puedas cortarlo sin salir a la terraza, que es justo donde no quieres ir si hay fuga. Segundo: dentro de la vivienda no puede haber más de dos envases conectados en batería, ni en servicio ni en reserva; cuantos más envases dentro, más gas acumulado en caso de fuga. Y tercero: los envases que llevan válvula de seguridad, estén llenos o vacíos, se colocan siempre en posición vertical, para que esa válvula funcione como debe y no suelte líquido.</a:t>
+              <a:t>N1: ¿Por qué tanta manía con los sótanos?</a:t>
+            </a:r>
+          </a:p>
+          <a:p>
+            <a:r>
+              <a:t>N2: Por una propiedad física del GLP que tienes que llevar tatuada: el butano y el propano pesan más que el aire. Eso significa que si hay una fuga, el gas no sube ni se dispersa, sino que cae y se va al punto más bajo, donde se acumula formando una bolsa. Ahora piensa qué es un sótano: precisamente el punto más bajo, un agujero donde el gas se embolsa y solo espera una chispa. Por eso la instrucción prohíbe los envases en sótanos, en semisótanos, en cajas de escalera y en pasillos: son trampas para el gas pesado. La regla de oro del GLP: el gas cae, así que nada de meterlo en agujeros. Solo con autorización expresa de la Comunidad Autónoma se puede saltar esta prohibición, y no es lo normal.</a:t>
             </a:r>
           </a:p>
         </p:txBody>
@@ -1957,12 +2024,12 @@
           <a:lstStyle/>
           <a:p>
             <a:r>
-              <a:t>N1: En los armarios de bombonas veo rejillas abajo. ¿Por qué ahí y no arriba?</a:t>
-            </a:r>
-          </a:p>
-          <a:p>
-            <a:r>
-              <a:t>N2: Otra vez la misma lógica: el GLP pesa y se va al fondo. Si la fuga se acumula en la parte baja del armario, la rejilla tiene que estar abajo para que ese gas pueda escapar por su propio peso. Por eso la ventilación permanente va en la base o suelo del armario. ¿Y de qué tamaño? La superficie libre de paso tiene que ser mayor de una centésima parte, es decir, más de un uno por ciento de la superficie de la pared o el fondo del armario. Y hay una condición de forma: una dimensión no puede ser mayor del doble de la otra, lo que en cristiano significa que la rejilla debe ser más o menos cuadrada, no una ranura larguísima y finísima. Y una advertencia de obra: ningún envase puede tapar, ni siquiera en parte, esa rejilla. Una ventilación tapada es gas acumulado esperando.</a:t>
+              <a:t>N1: Si los envases van fuera y la cocina dentro, ¿hay algo especial que poner?</a:t>
+            </a:r>
+          </a:p>
+          <a:p>
+            <a:r>
+              <a:t>N2: Sí, tres detalles que se preguntan. Primero: cuando los envases están en el exterior, en una terraza o un patio, y los aparatos de consumo están en el interior, tiene que haber, dentro de la vivienda, una llave general de corte de gas fácilmente accesible. ¿Por qué dentro? Para que, si hueles a gas, puedas cortarlo sin salir a la terraza, que es justo donde no quieres ir si hay fuga. Segundo: dentro de la vivienda no puede haber más de dos envases conectados en batería, ni en servicio ni en reserva; cuantos más envases dentro, más gas acumulado en caso de fuga. Y tercero: los envases que llevan válvula de seguridad, estén llenos o vacíos, se colocan siempre en posición vertical, para que esa válvula funcione como debe y no suelte líquido.</a:t>
             </a:r>
           </a:p>
         </p:txBody>
@@ -2032,12 +2099,12 @@
           <a:lstStyle/>
           <a:p>
             <a:r>
-              <a:t>N1: ¿Puedo conectar la bombona directa al aparato para ahorrarme piezas?</a:t>
-            </a:r>
-          </a:p>
-          <a:p>
-            <a:r>
-              <a:t>N2: No, y esto es de los que hay que tener grabado. Entre la bombona y el aparato siempre va un regulador. ¿Por qué? Porque la bombona da una presión alta y variable, que además cambia según lo llena que esté y la temperatura, mientras que el aparato necesita una presión baja y estable para dar una llama controlada. El regulador es el que traduce esa presión alta y caprichosa en presión baja y constante. Conectar a pelo, sin regulador, es peligrosísimo: mandas al quemador una presión que no controla. La única excepción son los aparatos aprobados expresamente para funcionar a presión directa, y en ese caso la conexión se hace con canalización rígida, con tubo rígido, no flexible. Así que si alguna vez ves escrito que se pueden conectar aparatos sin regulador, es falso, salvo ese caso concreto de presión directa con tubo rígido.</a:t>
+              <a:t>N1: En los armarios de bombonas veo rejillas abajo. ¿Por qué ahí y no arriba?</a:t>
+            </a:r>
+          </a:p>
+          <a:p>
+            <a:r>
+              <a:t>N2: Otra vez la misma lógica: el GLP pesa y se va al fondo. Si la fuga se acumula en la parte baja del armario, la rejilla tiene que estar abajo para que ese gas pueda escapar por su propio peso. Por eso la ventilación permanente va en la base o suelo del armario. ¿Y de qué tamaño? La superficie libre de paso tiene que ser mayor de una centésima parte, es decir, más de un uno por ciento de la superficie de la pared o el fondo del armario. Y hay una condición de forma: una dimensión no puede ser mayor del doble de la otra, lo que en cristiano significa que la rejilla debe ser más o menos cuadrada, no una ranura larguísima y finísima. Y una advertencia de obra: ningún envase puede tapar, ni siquiera en parte, esa rejilla. Una ventilación tapada es gas acumulado esperando.</a:t>
             </a:r>
           </a:p>
         </p:txBody>
@@ -5112,7 +5179,7 @@
             <a:r>
               <a:rPr sz="1400" b="1" i="0">
                 <a:solidFill>
-                  <a:srgbClr val="CADCFC"/>
+                  <a:srgbClr val="F4A24C"/>
                 </a:solidFill>
                 <a:latin typeface="Montserrat"/>
               </a:rPr>
@@ -5123,13 +5190,57 @@
       </p:sp>
       <p:sp>
         <p:nvSpPr>
-          <p:cNvPr id="4" name="TextBox 3"/>
+          <p:cNvPr id="4" name="Rounded Rectangle 3"/>
+          <p:cNvSpPr/>
+          <p:nvPr/>
+        </p:nvSpPr>
+        <p:spPr>
+          <a:xfrm>
+            <a:off x="868680" y="2057400"/>
+            <a:ext cx="1463040" cy="82296"/>
+          </a:xfrm>
+          <a:prstGeom prst="roundRect">
+            <a:avLst/>
+          </a:prstGeom>
+          <a:solidFill>
+            <a:srgbClr val="E8801A"/>
+          </a:solidFill>
+          <a:ln>
+            <a:noFill/>
+          </a:ln>
+          <a:effectLst/>
+        </p:spPr>
+        <p:style>
+          <a:lnRef idx="1">
+            <a:schemeClr val="accent1"/>
+          </a:lnRef>
+          <a:fillRef idx="3">
+            <a:schemeClr val="accent1"/>
+          </a:fillRef>
+          <a:effectRef idx="2">
+            <a:schemeClr val="accent1"/>
+          </a:effectRef>
+          <a:fontRef idx="minor">
+            <a:schemeClr val="lt1"/>
+          </a:fontRef>
+        </p:style>
+        <p:txBody>
+          <a:bodyPr rtlCol="0" anchor="ctr"/>
+          <a:lstStyle/>
+          <a:p>
+            <a:pPr algn="ctr"/>
+          </a:p>
+        </p:txBody>
+      </p:sp>
+      <p:sp>
+        <p:nvSpPr>
+          <p:cNvPr id="5" name="TextBox 4"/>
           <p:cNvSpPr txBox="1"/>
           <p:nvPr/>
         </p:nvSpPr>
         <p:spPr>
           <a:xfrm>
-            <a:off x="822960" y="2194560"/>
+            <a:off x="822960" y="2286000"/>
             <a:ext cx="10515600" cy="2011680"/>
           </a:xfrm>
           <a:prstGeom prst="rect">
@@ -5168,7 +5279,7 @@
       </p:sp>
       <p:sp>
         <p:nvSpPr>
-          <p:cNvPr id="5" name="TextBox 4"/>
+          <p:cNvPr id="6" name="TextBox 5"/>
           <p:cNvSpPr txBox="1"/>
           <p:nvPr/>
         </p:nvSpPr>
@@ -5292,7 +5403,7 @@
                 </a:solidFill>
                 <a:latin typeface="Montserrat"/>
               </a:rPr>
-              <a:t>010 / 021</a:t>
+              <a:t>010 / 022</a:t>
             </a:r>
           </a:p>
         </p:txBody>
@@ -5340,7 +5451,7 @@
         <p:spPr>
           <a:xfrm>
             <a:off x="822960" y="457200"/>
-            <a:ext cx="8229600" cy="365760"/>
+            <a:ext cx="10058400" cy="365760"/>
           </a:xfrm>
           <a:prstGeom prst="rect">
             <a:avLst/>
@@ -5354,13 +5465,13 @@
           <a:lstStyle/>
           <a:p>
             <a:r>
-              <a:rPr sz="1200" b="1" i="0">
-                <a:solidFill>
-                  <a:srgbClr val="64748B"/>
-                </a:solidFill>
-                <a:latin typeface="Montserrat"/>
-              </a:rPr>
-              <a:t>APARTADO 2.1 · CUADRO 1</a:t>
+              <a:rPr sz="1300" b="1" i="0">
+                <a:solidFill>
+                  <a:srgbClr val="E8801A"/>
+                </a:solidFill>
+                <a:latin typeface="Montserrat"/>
+              </a:rPr>
+              <a:t>APARTADO 2.1 · REGULADOR</a:t>
             </a:r>
           </a:p>
         </p:txBody>
@@ -5388,26 +5499,70 @@
           <a:lstStyle/>
           <a:p>
             <a:r>
-              <a:rPr sz="2700" b="1" i="0">
+              <a:rPr sz="2800" b="1" i="0">
                 <a:solidFill>
                   <a:srgbClr val="1E2761"/>
                 </a:solidFill>
                 <a:latin typeface="Montserrat"/>
               </a:rPr>
-              <a:t>Distancias con envases ≤ 15 kg</a:t>
-            </a:r>
-          </a:p>
-        </p:txBody>
-      </p:sp>
-      <p:sp>
-        <p:nvSpPr>
-          <p:cNvPr id="7" name="TextBox 6"/>
+              <a:t>Regulador siempre</a:t>
+            </a:r>
+          </a:p>
+        </p:txBody>
+      </p:sp>
+      <p:sp>
+        <p:nvSpPr>
+          <p:cNvPr id="7" name="Rounded Rectangle 6"/>
+          <p:cNvSpPr/>
+          <p:nvPr/>
+        </p:nvSpPr>
+        <p:spPr>
+          <a:xfrm>
+            <a:off x="868680" y="1627632"/>
+            <a:ext cx="2011680" cy="73152"/>
+          </a:xfrm>
+          <a:prstGeom prst="roundRect">
+            <a:avLst/>
+          </a:prstGeom>
+          <a:solidFill>
+            <a:srgbClr val="E8801A"/>
+          </a:solidFill>
+          <a:ln>
+            <a:noFill/>
+          </a:ln>
+          <a:effectLst/>
+        </p:spPr>
+        <p:style>
+          <a:lnRef idx="1">
+            <a:schemeClr val="accent1"/>
+          </a:lnRef>
+          <a:fillRef idx="3">
+            <a:schemeClr val="accent1"/>
+          </a:fillRef>
+          <a:effectRef idx="2">
+            <a:schemeClr val="accent1"/>
+          </a:effectRef>
+          <a:fontRef idx="minor">
+            <a:schemeClr val="lt1"/>
+          </a:fontRef>
+        </p:style>
+        <p:txBody>
+          <a:bodyPr rtlCol="0" anchor="ctr"/>
+          <a:lstStyle/>
+          <a:p>
+            <a:pPr algn="ctr"/>
+          </a:p>
+        </p:txBody>
+      </p:sp>
+      <p:sp>
+        <p:nvSpPr>
+          <p:cNvPr id="8" name="TextBox 7"/>
           <p:cNvSpPr txBox="1"/>
           <p:nvPr/>
         </p:nvSpPr>
         <p:spPr>
           <a:xfrm>
-            <a:off x="822960" y="1920240"/>
+            <a:off x="822960" y="1965960"/>
             <a:ext cx="4983480" cy="4206240"/>
           </a:xfrm>
           <a:prstGeom prst="rect">
@@ -5423,17 +5578,17 @@
           <a:p>
             <a:pPr>
               <a:spcAft>
-                <a:spcPts val="1000"/>
+                <a:spcPts val="1100"/>
               </a:spcAft>
             </a:pPr>
             <a:r>
               <a:rPr sz="1600" b="1" i="0">
                 <a:solidFill>
-                  <a:srgbClr val="2E3A80"/>
-                </a:solidFill>
-                <a:latin typeface="Montserrat"/>
-              </a:rPr>
-              <a:t>•  </a:t>
+                  <a:srgbClr val="E8801A"/>
+                </a:solidFill>
+                <a:latin typeface="Montserrat"/>
+              </a:rPr>
+              <a:t>▸  </a:t>
             </a:r>
             <a:r>
               <a:rPr sz="1600" b="0" i="0">
@@ -5442,23 +5597,23 @@
                 </a:solidFill>
                 <a:latin typeface="Montserrat"/>
               </a:rPr>
-              <a:t>Hogares y fuentes de calor: 1,5 m</a:t>
+              <a:t>Entre envase y aparato, regulador</a:t>
             </a:r>
           </a:p>
           <a:p>
             <a:pPr>
               <a:spcAft>
-                <a:spcPts val="1000"/>
+                <a:spcPts val="1100"/>
               </a:spcAft>
             </a:pPr>
             <a:r>
               <a:rPr sz="1600" b="1" i="0">
                 <a:solidFill>
-                  <a:srgbClr val="2E3A80"/>
-                </a:solidFill>
-                <a:latin typeface="Montserrat"/>
-              </a:rPr>
-              <a:t>•  </a:t>
+                  <a:srgbClr val="E8801A"/>
+                </a:solidFill>
+                <a:latin typeface="Montserrat"/>
+              </a:rPr>
+              <a:t>▸  </a:t>
             </a:r>
             <a:r>
               <a:rPr sz="1600" b="0" i="0">
@@ -5467,23 +5622,23 @@
                 </a:solidFill>
                 <a:latin typeface="Montserrat"/>
               </a:rPr>
-              <a:t>Tomas de corriente: 0,5 m</a:t>
+              <a:t>Excepción: aparatos a presión directa</a:t>
             </a:r>
           </a:p>
           <a:p>
             <a:pPr>
               <a:spcAft>
-                <a:spcPts val="1000"/>
+                <a:spcPts val="1100"/>
               </a:spcAft>
             </a:pPr>
             <a:r>
               <a:rPr sz="1600" b="1" i="0">
                 <a:solidFill>
-                  <a:srgbClr val="2E3A80"/>
-                </a:solidFill>
-                <a:latin typeface="Montserrat"/>
-              </a:rPr>
-              <a:t>•  </a:t>
+                  <a:srgbClr val="E8801A"/>
+                </a:solidFill>
+                <a:latin typeface="Montserrat"/>
+              </a:rPr>
+              <a:t>▸  </a:t>
             </a:r>
             <a:r>
               <a:rPr sz="1600" b="0" i="0">
@@ -5492,39 +5647,14 @@
                 </a:solidFill>
                 <a:latin typeface="Montserrat"/>
               </a:rPr>
-              <a:t>Hornillos, interruptores, conductores: 0,3 m</a:t>
-            </a:r>
-          </a:p>
-          <a:p>
-            <a:pPr>
-              <a:spcAft>
-                <a:spcPts val="1000"/>
-              </a:spcAft>
-            </a:pPr>
-            <a:r>
-              <a:rPr sz="1600" b="1" i="0">
-                <a:solidFill>
-                  <a:srgbClr val="2E3A80"/>
-                </a:solidFill>
-                <a:latin typeface="Montserrat"/>
-              </a:rPr>
-              <a:t>•  </a:t>
-            </a:r>
-            <a:r>
-              <a:rPr sz="1600" b="0" i="0">
-                <a:solidFill>
-                  <a:srgbClr val="1B2330"/>
-                </a:solidFill>
-                <a:latin typeface="Montserrat"/>
-              </a:rPr>
-              <a:t>Con protección antirradiación, se reducen</a:t>
-            </a:r>
-          </a:p>
-        </p:txBody>
-      </p:sp>
-      <p:sp>
-        <p:nvSpPr>
-          <p:cNvPr id="8" name="imgph" descr="IMGQ:gas cylinder near kitchen stove distance"/>
+              <a:t>Y entonces, con tubo rígido</a:t>
+            </a:r>
+          </a:p>
+        </p:txBody>
+      </p:sp>
+      <p:sp>
+        <p:nvSpPr>
+          <p:cNvPr id="9" name="imgph" descr="IMGQ:gas pressure regulator on cylinder valve"/>
           <p:cNvSpPr/>
           <p:nvPr/>
         </p:nvSpPr>
@@ -5570,7 +5700,7 @@
       </p:sp>
       <p:sp>
         <p:nvSpPr>
-          <p:cNvPr id="9" name="TextBox 8"/>
+          <p:cNvPr id="10" name="TextBox 9"/>
           <p:cNvSpPr txBox="1"/>
           <p:nvPr/>
         </p:nvSpPr>
@@ -5610,7 +5740,7 @@
                 </a:solidFill>
                 <a:latin typeface="Montserrat"/>
               </a:rPr>
-              <a:t>gas cylinder near kitchen stove distance</a:t>
+              <a:t>gas pressure regulator on cylinder valve</a:t>
             </a:r>
           </a:p>
         </p:txBody>
@@ -5707,7 +5837,7 @@
                 </a:solidFill>
                 <a:latin typeface="Montserrat"/>
               </a:rPr>
-              <a:t>011 / 021</a:t>
+              <a:t>011 / 022</a:t>
             </a:r>
           </a:p>
         </p:txBody>
@@ -5755,7 +5885,7 @@
         <p:spPr>
           <a:xfrm>
             <a:off x="822960" y="457200"/>
-            <a:ext cx="8229600" cy="365760"/>
+            <a:ext cx="10058400" cy="365760"/>
           </a:xfrm>
           <a:prstGeom prst="rect">
             <a:avLst/>
@@ -5769,13 +5899,13 @@
           <a:lstStyle/>
           <a:p>
             <a:r>
-              <a:rPr sz="1200" b="1" i="0">
-                <a:solidFill>
-                  <a:srgbClr val="64748B"/>
-                </a:solidFill>
-                <a:latin typeface="Montserrat"/>
-              </a:rPr>
-              <a:t>APARTADO 2.2 · MÁS DE 15 KG</a:t>
+              <a:rPr sz="1300" b="1" i="0">
+                <a:solidFill>
+                  <a:srgbClr val="E8801A"/>
+                </a:solidFill>
+                <a:latin typeface="Montserrat"/>
+              </a:rPr>
+              <a:t>APARTADO 2.1 · CUADRO 1</a:t>
             </a:r>
           </a:p>
         </p:txBody>
@@ -5803,26 +5933,70 @@
           <a:lstStyle/>
           <a:p>
             <a:r>
-              <a:rPr sz="2700" b="1" i="0">
+              <a:rPr sz="2800" b="1" i="0">
                 <a:solidFill>
                   <a:srgbClr val="1E2761"/>
                 </a:solidFill>
                 <a:latin typeface="Montserrat"/>
               </a:rPr>
-              <a:t>Envases grandes: hasta 1.000 kg</a:t>
-            </a:r>
-          </a:p>
-        </p:txBody>
-      </p:sp>
-      <p:sp>
-        <p:nvSpPr>
-          <p:cNvPr id="7" name="TextBox 6"/>
+              <a:t>Distancias con envases ≤ 15 kg</a:t>
+            </a:r>
+          </a:p>
+        </p:txBody>
+      </p:sp>
+      <p:sp>
+        <p:nvSpPr>
+          <p:cNvPr id="7" name="Rounded Rectangle 6"/>
+          <p:cNvSpPr/>
+          <p:nvPr/>
+        </p:nvSpPr>
+        <p:spPr>
+          <a:xfrm>
+            <a:off x="868680" y="1627632"/>
+            <a:ext cx="2011680" cy="73152"/>
+          </a:xfrm>
+          <a:prstGeom prst="roundRect">
+            <a:avLst/>
+          </a:prstGeom>
+          <a:solidFill>
+            <a:srgbClr val="E8801A"/>
+          </a:solidFill>
+          <a:ln>
+            <a:noFill/>
+          </a:ln>
+          <a:effectLst/>
+        </p:spPr>
+        <p:style>
+          <a:lnRef idx="1">
+            <a:schemeClr val="accent1"/>
+          </a:lnRef>
+          <a:fillRef idx="3">
+            <a:schemeClr val="accent1"/>
+          </a:fillRef>
+          <a:effectRef idx="2">
+            <a:schemeClr val="accent1"/>
+          </a:effectRef>
+          <a:fontRef idx="minor">
+            <a:schemeClr val="lt1"/>
+          </a:fontRef>
+        </p:style>
+        <p:txBody>
+          <a:bodyPr rtlCol="0" anchor="ctr"/>
+          <a:lstStyle/>
+          <a:p>
+            <a:pPr algn="ctr"/>
+          </a:p>
+        </p:txBody>
+      </p:sp>
+      <p:sp>
+        <p:nvSpPr>
+          <p:cNvPr id="8" name="TextBox 7"/>
           <p:cNvSpPr txBox="1"/>
           <p:nvPr/>
         </p:nvSpPr>
         <p:spPr>
           <a:xfrm>
-            <a:off x="822960" y="1920240"/>
+            <a:off x="822960" y="1965960"/>
             <a:ext cx="4983480" cy="4206240"/>
           </a:xfrm>
           <a:prstGeom prst="rect">
@@ -5838,17 +6012,17 @@
           <a:p>
             <a:pPr>
               <a:spcAft>
-                <a:spcPts val="1000"/>
+                <a:spcPts val="1100"/>
               </a:spcAft>
             </a:pPr>
             <a:r>
               <a:rPr sz="1600" b="1" i="0">
                 <a:solidFill>
-                  <a:srgbClr val="2E3A80"/>
-                </a:solidFill>
-                <a:latin typeface="Montserrat"/>
-              </a:rPr>
-              <a:t>•  </a:t>
+                  <a:srgbClr val="E8801A"/>
+                </a:solidFill>
+                <a:latin typeface="Montserrat"/>
+              </a:rPr>
+              <a:t>▸  </a:t>
             </a:r>
             <a:r>
               <a:rPr sz="1600" b="0" i="0">
@@ -5857,23 +6031,23 @@
                 </a:solidFill>
                 <a:latin typeface="Montserrat"/>
               </a:rPr>
-              <a:t>Tope total: 1.000 kg</a:t>
+              <a:t>Hogares y fuentes de calor: 1,5 m</a:t>
             </a:r>
           </a:p>
           <a:p>
             <a:pPr>
               <a:spcAft>
-                <a:spcPts val="1000"/>
+                <a:spcPts val="1100"/>
               </a:spcAft>
             </a:pPr>
             <a:r>
               <a:rPr sz="1600" b="1" i="0">
                 <a:solidFill>
-                  <a:srgbClr val="2E3A80"/>
-                </a:solidFill>
-                <a:latin typeface="Montserrat"/>
-              </a:rPr>
-              <a:t>•  </a:t>
+                  <a:srgbClr val="E8801A"/>
+                </a:solidFill>
+                <a:latin typeface="Montserrat"/>
+              </a:rPr>
+              <a:t>▸  </a:t>
             </a:r>
             <a:r>
               <a:rPr sz="1600" b="0" i="0">
@@ -5882,23 +6056,23 @@
                 </a:solidFill>
                 <a:latin typeface="Montserrat"/>
               </a:rPr>
-              <a:t>Baterías: servicio y reserva</a:t>
+              <a:t>Tomas de corriente: 0,5 m</a:t>
             </a:r>
           </a:p>
           <a:p>
             <a:pPr>
               <a:spcAft>
-                <a:spcPts val="1000"/>
+                <a:spcPts val="1100"/>
               </a:spcAft>
             </a:pPr>
             <a:r>
               <a:rPr sz="1600" b="1" i="0">
                 <a:solidFill>
-                  <a:srgbClr val="2E3A80"/>
-                </a:solidFill>
-                <a:latin typeface="Montserrat"/>
-              </a:rPr>
-              <a:t>•  </a:t>
+                  <a:srgbClr val="E8801A"/>
+                </a:solidFill>
+                <a:latin typeface="Montserrat"/>
+              </a:rPr>
+              <a:t>▸  </a:t>
             </a:r>
             <a:r>
               <a:rPr sz="1600" b="0" i="0">
@@ -5907,14 +6081,39 @@
                 </a:solidFill>
                 <a:latin typeface="Montserrat"/>
               </a:rPr>
-              <a:t>Inversor que cambia solo</a:t>
-            </a:r>
-          </a:p>
-        </p:txBody>
-      </p:sp>
-      <p:sp>
-        <p:nvSpPr>
-          <p:cNvPr id="8" name="imgph" descr="IMGQ:industrial propane cylinder battery manifold"/>
+              <a:t>Hornillos, interruptores, conductores: 0,3 m</a:t>
+            </a:r>
+          </a:p>
+          <a:p>
+            <a:pPr>
+              <a:spcAft>
+                <a:spcPts val="1100"/>
+              </a:spcAft>
+            </a:pPr>
+            <a:r>
+              <a:rPr sz="1600" b="1" i="0">
+                <a:solidFill>
+                  <a:srgbClr val="E8801A"/>
+                </a:solidFill>
+                <a:latin typeface="Montserrat"/>
+              </a:rPr>
+              <a:t>▸  </a:t>
+            </a:r>
+            <a:r>
+              <a:rPr sz="1600" b="0" i="0">
+                <a:solidFill>
+                  <a:srgbClr val="1B2330"/>
+                </a:solidFill>
+                <a:latin typeface="Montserrat"/>
+              </a:rPr>
+              <a:t>Con protección antirradiación, se reducen</a:t>
+            </a:r>
+          </a:p>
+        </p:txBody>
+      </p:sp>
+      <p:sp>
+        <p:nvSpPr>
+          <p:cNvPr id="9" name="imgph" descr="IMGQ:gas cylinder near kitchen stove distance"/>
           <p:cNvSpPr/>
           <p:nvPr/>
         </p:nvSpPr>
@@ -5960,7 +6159,7 @@
       </p:sp>
       <p:sp>
         <p:nvSpPr>
-          <p:cNvPr id="9" name="TextBox 8"/>
+          <p:cNvPr id="10" name="TextBox 9"/>
           <p:cNvSpPr txBox="1"/>
           <p:nvPr/>
         </p:nvSpPr>
@@ -6000,7 +6199,7 @@
                 </a:solidFill>
                 <a:latin typeface="Montserrat"/>
               </a:rPr>
-              <a:t>industrial propane cylinder battery manifold</a:t>
+              <a:t>gas cylinder near kitchen stove distance</a:t>
             </a:r>
           </a:p>
         </p:txBody>
@@ -6097,7 +6296,7 @@
                 </a:solidFill>
                 <a:latin typeface="Montserrat"/>
               </a:rPr>
-              <a:t>012 / 021</a:t>
+              <a:t>012 / 022</a:t>
             </a:r>
           </a:p>
         </p:txBody>
@@ -6145,7 +6344,7 @@
         <p:spPr>
           <a:xfrm>
             <a:off x="822960" y="457200"/>
-            <a:ext cx="8229600" cy="365760"/>
+            <a:ext cx="10058400" cy="365760"/>
           </a:xfrm>
           <a:prstGeom prst="rect">
             <a:avLst/>
@@ -6159,13 +6358,13 @@
           <a:lstStyle/>
           <a:p>
             <a:r>
-              <a:rPr sz="1200" b="1" i="0">
-                <a:solidFill>
-                  <a:srgbClr val="64748B"/>
-                </a:solidFill>
-                <a:latin typeface="Montserrat"/>
-              </a:rPr>
-              <a:t>APARTADO 2.2.2 · UBICACIÓN</a:t>
+              <a:rPr sz="1300" b="1" i="0">
+                <a:solidFill>
+                  <a:srgbClr val="E8801A"/>
+                </a:solidFill>
+                <a:latin typeface="Montserrat"/>
+              </a:rPr>
+              <a:t>APARTADO 2.2 · MÁS DE 15 KG</a:t>
             </a:r>
           </a:p>
         </p:txBody>
@@ -6193,26 +6392,70 @@
           <a:lstStyle/>
           <a:p>
             <a:r>
-              <a:rPr sz="2700" b="1" i="0">
+              <a:rPr sz="2800" b="1" i="0">
                 <a:solidFill>
                   <a:srgbClr val="1E2761"/>
                 </a:solidFill>
                 <a:latin typeface="Montserrat"/>
               </a:rPr>
-              <a:t>Fuera y en caseta</a:t>
-            </a:r>
-          </a:p>
-        </p:txBody>
-      </p:sp>
-      <p:sp>
-        <p:nvSpPr>
-          <p:cNvPr id="7" name="TextBox 6"/>
+              <a:t>Envases grandes: hasta 1.000 kg</a:t>
+            </a:r>
+          </a:p>
+        </p:txBody>
+      </p:sp>
+      <p:sp>
+        <p:nvSpPr>
+          <p:cNvPr id="7" name="Rounded Rectangle 6"/>
+          <p:cNvSpPr/>
+          <p:nvPr/>
+        </p:nvSpPr>
+        <p:spPr>
+          <a:xfrm>
+            <a:off x="868680" y="1627632"/>
+            <a:ext cx="2011680" cy="73152"/>
+          </a:xfrm>
+          <a:prstGeom prst="roundRect">
+            <a:avLst/>
+          </a:prstGeom>
+          <a:solidFill>
+            <a:srgbClr val="E8801A"/>
+          </a:solidFill>
+          <a:ln>
+            <a:noFill/>
+          </a:ln>
+          <a:effectLst/>
+        </p:spPr>
+        <p:style>
+          <a:lnRef idx="1">
+            <a:schemeClr val="accent1"/>
+          </a:lnRef>
+          <a:fillRef idx="3">
+            <a:schemeClr val="accent1"/>
+          </a:fillRef>
+          <a:effectRef idx="2">
+            <a:schemeClr val="accent1"/>
+          </a:effectRef>
+          <a:fontRef idx="minor">
+            <a:schemeClr val="lt1"/>
+          </a:fontRef>
+        </p:style>
+        <p:txBody>
+          <a:bodyPr rtlCol="0" anchor="ctr"/>
+          <a:lstStyle/>
+          <a:p>
+            <a:pPr algn="ctr"/>
+          </a:p>
+        </p:txBody>
+      </p:sp>
+      <p:sp>
+        <p:nvSpPr>
+          <p:cNvPr id="8" name="TextBox 7"/>
           <p:cNvSpPr txBox="1"/>
           <p:nvPr/>
         </p:nvSpPr>
         <p:spPr>
           <a:xfrm>
-            <a:off x="822960" y="1920240"/>
+            <a:off x="822960" y="1965960"/>
             <a:ext cx="4983480" cy="4206240"/>
           </a:xfrm>
           <a:prstGeom prst="rect">
@@ -6228,17 +6471,17 @@
           <a:p>
             <a:pPr>
               <a:spcAft>
-                <a:spcPts val="1000"/>
+                <a:spcPts val="1100"/>
               </a:spcAft>
             </a:pPr>
             <a:r>
               <a:rPr sz="1600" b="1" i="0">
                 <a:solidFill>
-                  <a:srgbClr val="2E3A80"/>
-                </a:solidFill>
-                <a:latin typeface="Montserrat"/>
-              </a:rPr>
-              <a:t>•  </a:t>
+                  <a:srgbClr val="E8801A"/>
+                </a:solidFill>
+                <a:latin typeface="Montserrat"/>
+              </a:rPr>
+              <a:t>▸  </a:t>
             </a:r>
             <a:r>
               <a:rPr sz="1600" b="0" i="0">
@@ -6247,23 +6490,23 @@
                 </a:solidFill>
                 <a:latin typeface="Montserrat"/>
               </a:rPr>
-              <a:t>Siempre en el exterior</a:t>
+              <a:t>Tope total: 1.000 kg</a:t>
             </a:r>
           </a:p>
           <a:p>
             <a:pPr>
               <a:spcAft>
-                <a:spcPts val="1000"/>
+                <a:spcPts val="1100"/>
               </a:spcAft>
             </a:pPr>
             <a:r>
               <a:rPr sz="1600" b="1" i="0">
                 <a:solidFill>
-                  <a:srgbClr val="2E3A80"/>
-                </a:solidFill>
-                <a:latin typeface="Montserrat"/>
-              </a:rPr>
-              <a:t>•  </a:t>
+                  <a:srgbClr val="E8801A"/>
+                </a:solidFill>
+                <a:latin typeface="Montserrat"/>
+              </a:rPr>
+              <a:t>▸  </a:t>
             </a:r>
             <a:r>
               <a:rPr sz="1600" b="0" i="0">
@@ -6272,23 +6515,23 @@
                 </a:solidFill>
                 <a:latin typeface="Montserrat"/>
               </a:rPr>
-              <a:t>Protegidos por una caseta</a:t>
+              <a:t>Baterías: servicio y reserva</a:t>
             </a:r>
           </a:p>
           <a:p>
             <a:pPr>
               <a:spcAft>
-                <a:spcPts val="1000"/>
+                <a:spcPts val="1100"/>
               </a:spcAft>
             </a:pPr>
             <a:r>
               <a:rPr sz="1600" b="1" i="0">
                 <a:solidFill>
-                  <a:srgbClr val="2E3A80"/>
-                </a:solidFill>
-                <a:latin typeface="Montserrat"/>
-              </a:rPr>
-              <a:t>•  </a:t>
+                  <a:srgbClr val="E8801A"/>
+                </a:solidFill>
+                <a:latin typeface="Montserrat"/>
+              </a:rPr>
+              <a:t>▸  </a:t>
             </a:r>
             <a:r>
               <a:rPr sz="1600" b="0" i="0">
@@ -6297,14 +6540,14 @@
                 </a:solidFill>
                 <a:latin typeface="Montserrat"/>
               </a:rPr>
-              <a:t>Nada de sótanos ni ventilación forzada</a:t>
-            </a:r>
-          </a:p>
-        </p:txBody>
-      </p:sp>
-      <p:sp>
-        <p:nvSpPr>
-          <p:cNvPr id="8" name="imgph" descr="IMGQ:outdoor gas cylinder storage cabinet enclosure"/>
+              <a:t>Inversor que cambia solo</a:t>
+            </a:r>
+          </a:p>
+        </p:txBody>
+      </p:sp>
+      <p:sp>
+        <p:nvSpPr>
+          <p:cNvPr id="9" name="imgph" descr="IMGQ:industrial propane cylinder battery manifold"/>
           <p:cNvSpPr/>
           <p:nvPr/>
         </p:nvSpPr>
@@ -6350,7 +6593,7 @@
       </p:sp>
       <p:sp>
         <p:nvSpPr>
-          <p:cNvPr id="9" name="TextBox 8"/>
+          <p:cNvPr id="10" name="TextBox 9"/>
           <p:cNvSpPr txBox="1"/>
           <p:nvPr/>
         </p:nvSpPr>
@@ -6390,7 +6633,7 @@
                 </a:solidFill>
                 <a:latin typeface="Montserrat"/>
               </a:rPr>
-              <a:t>outdoor gas cylinder storage cabinet enclosure</a:t>
+              <a:t>industrial propane cylinder battery manifold</a:t>
             </a:r>
           </a:p>
         </p:txBody>
@@ -6487,7 +6730,7 @@
                 </a:solidFill>
                 <a:latin typeface="Montserrat"/>
               </a:rPr>
-              <a:t>013 / 021</a:t>
+              <a:t>013 / 022</a:t>
             </a:r>
           </a:p>
         </p:txBody>
@@ -6535,7 +6778,7 @@
         <p:spPr>
           <a:xfrm>
             <a:off x="822960" y="457200"/>
-            <a:ext cx="8229600" cy="365760"/>
+            <a:ext cx="10058400" cy="365760"/>
           </a:xfrm>
           <a:prstGeom prst="rect">
             <a:avLst/>
@@ -6549,13 +6792,13 @@
           <a:lstStyle/>
           <a:p>
             <a:r>
-              <a:rPr sz="1200" b="1" i="0">
-                <a:solidFill>
-                  <a:srgbClr val="64748B"/>
-                </a:solidFill>
-                <a:latin typeface="Montserrat"/>
-              </a:rPr>
-              <a:t>APARTADO 2.2.2 · EXCEPCIÓN</a:t>
+              <a:rPr sz="1300" b="1" i="0">
+                <a:solidFill>
+                  <a:srgbClr val="E8801A"/>
+                </a:solidFill>
+                <a:latin typeface="Montserrat"/>
+              </a:rPr>
+              <a:t>APARTADO 2.2.2 · UBICACIÓN</a:t>
             </a:r>
           </a:p>
         </p:txBody>
@@ -6583,26 +6826,70 @@
           <a:lstStyle/>
           <a:p>
             <a:r>
-              <a:rPr sz="2700" b="1" i="0">
+              <a:rPr sz="2800" b="1" i="0">
                 <a:solidFill>
                   <a:srgbClr val="1E2761"/>
                 </a:solidFill>
                 <a:latin typeface="Montserrat"/>
               </a:rPr>
-              <a:t>Dentro solo si ≤ 70 kg</a:t>
-            </a:r>
-          </a:p>
-        </p:txBody>
-      </p:sp>
-      <p:sp>
-        <p:nvSpPr>
-          <p:cNvPr id="7" name="TextBox 6"/>
+              <a:t>Fuera y en caseta</a:t>
+            </a:r>
+          </a:p>
+        </p:txBody>
+      </p:sp>
+      <p:sp>
+        <p:nvSpPr>
+          <p:cNvPr id="7" name="Rounded Rectangle 6"/>
+          <p:cNvSpPr/>
+          <p:nvPr/>
+        </p:nvSpPr>
+        <p:spPr>
+          <a:xfrm>
+            <a:off x="868680" y="1627632"/>
+            <a:ext cx="2011680" cy="73152"/>
+          </a:xfrm>
+          <a:prstGeom prst="roundRect">
+            <a:avLst/>
+          </a:prstGeom>
+          <a:solidFill>
+            <a:srgbClr val="E8801A"/>
+          </a:solidFill>
+          <a:ln>
+            <a:noFill/>
+          </a:ln>
+          <a:effectLst/>
+        </p:spPr>
+        <p:style>
+          <a:lnRef idx="1">
+            <a:schemeClr val="accent1"/>
+          </a:lnRef>
+          <a:fillRef idx="3">
+            <a:schemeClr val="accent1"/>
+          </a:fillRef>
+          <a:effectRef idx="2">
+            <a:schemeClr val="accent1"/>
+          </a:effectRef>
+          <a:fontRef idx="minor">
+            <a:schemeClr val="lt1"/>
+          </a:fontRef>
+        </p:style>
+        <p:txBody>
+          <a:bodyPr rtlCol="0" anchor="ctr"/>
+          <a:lstStyle/>
+          <a:p>
+            <a:pPr algn="ctr"/>
+          </a:p>
+        </p:txBody>
+      </p:sp>
+      <p:sp>
+        <p:nvSpPr>
+          <p:cNvPr id="8" name="TextBox 7"/>
           <p:cNvSpPr txBox="1"/>
           <p:nvPr/>
         </p:nvSpPr>
         <p:spPr>
           <a:xfrm>
-            <a:off x="822960" y="1920240"/>
+            <a:off x="822960" y="1965960"/>
             <a:ext cx="4983480" cy="4206240"/>
           </a:xfrm>
           <a:prstGeom prst="rect">
@@ -6618,17 +6905,17 @@
           <a:p>
             <a:pPr>
               <a:spcAft>
-                <a:spcPts val="1000"/>
+                <a:spcPts val="1100"/>
               </a:spcAft>
             </a:pPr>
             <a:r>
               <a:rPr sz="1600" b="1" i="0">
                 <a:solidFill>
-                  <a:srgbClr val="2E3A80"/>
-                </a:solidFill>
-                <a:latin typeface="Montserrat"/>
-              </a:rPr>
-              <a:t>•  </a:t>
+                  <a:srgbClr val="E8801A"/>
+                </a:solidFill>
+                <a:latin typeface="Montserrat"/>
+              </a:rPr>
+              <a:t>▸  </a:t>
             </a:r>
             <a:r>
               <a:rPr sz="1600" b="0" i="0">
@@ -6637,23 +6924,23 @@
                 </a:solidFill>
                 <a:latin typeface="Montserrat"/>
               </a:rPr>
-              <a:t>Contenido total ≤ 70 kg</a:t>
+              <a:t>Siempre en el exterior</a:t>
             </a:r>
           </a:p>
           <a:p>
             <a:pPr>
               <a:spcAft>
-                <a:spcPts val="1000"/>
+                <a:spcPts val="1100"/>
               </a:spcAft>
             </a:pPr>
             <a:r>
               <a:rPr sz="1600" b="1" i="0">
                 <a:solidFill>
-                  <a:srgbClr val="2E3A80"/>
-                </a:solidFill>
-                <a:latin typeface="Montserrat"/>
-              </a:rPr>
-              <a:t>•  </a:t>
+                  <a:srgbClr val="E8801A"/>
+                </a:solidFill>
+                <a:latin typeface="Montserrat"/>
+              </a:rPr>
+              <a:t>▸  </a:t>
             </a:r>
             <a:r>
               <a:rPr sz="1600" b="0" i="0">
@@ -6662,23 +6949,23 @@
                 </a:solidFill>
                 <a:latin typeface="Montserrat"/>
               </a:rPr>
-              <a:t>Local &gt; 1.000 m3 y ≥ 150 m2</a:t>
+              <a:t>Protegidos por una caseta</a:t>
             </a:r>
           </a:p>
           <a:p>
             <a:pPr>
               <a:spcAft>
-                <a:spcPts val="1000"/>
+                <a:spcPts val="1100"/>
               </a:spcAft>
             </a:pPr>
             <a:r>
               <a:rPr sz="1600" b="1" i="0">
                 <a:solidFill>
-                  <a:srgbClr val="2E3A80"/>
-                </a:solidFill>
-                <a:latin typeface="Montserrat"/>
-              </a:rPr>
-              <a:t>•  </a:t>
+                  <a:srgbClr val="E8801A"/>
+                </a:solidFill>
+                <a:latin typeface="Montserrat"/>
+              </a:rPr>
+              <a:t>▸  </a:t>
             </a:r>
             <a:r>
               <a:rPr sz="1600" b="0" i="0">
@@ -6687,39 +6974,14 @@
                 </a:solidFill>
                 <a:latin typeface="Montserrat"/>
               </a:rPr>
-              <a:t>Ventilación 1/15 a ras de suelo</a:t>
-            </a:r>
-          </a:p>
-          <a:p>
-            <a:pPr>
-              <a:spcAft>
-                <a:spcPts val="1000"/>
-              </a:spcAft>
-            </a:pPr>
-            <a:r>
-              <a:rPr sz="1600" b="1" i="0">
-                <a:solidFill>
-                  <a:srgbClr val="2E3A80"/>
-                </a:solidFill>
-                <a:latin typeface="Montserrat"/>
-              </a:rPr>
-              <a:t>•  </a:t>
-            </a:r>
-            <a:r>
-              <a:rPr sz="1600" b="0" i="0">
-                <a:solidFill>
-                  <a:srgbClr val="1B2330"/>
-                </a:solidFill>
-                <a:latin typeface="Montserrat"/>
-              </a:rPr>
-              <a:t>Dos extintores 21A-113B</a:t>
-            </a:r>
-          </a:p>
-        </p:txBody>
-      </p:sp>
-      <p:sp>
-        <p:nvSpPr>
-          <p:cNvPr id="8" name="imgph" descr="IMGQ:large industrial hall with ventilation openings"/>
+              <a:t>Nada de sótanos ni ventilación forzada</a:t>
+            </a:r>
+          </a:p>
+        </p:txBody>
+      </p:sp>
+      <p:sp>
+        <p:nvSpPr>
+          <p:cNvPr id="9" name="imgph" descr="IMGQ:outdoor gas cylinder storage cabinet enclosure"/>
           <p:cNvSpPr/>
           <p:nvPr/>
         </p:nvSpPr>
@@ -6765,7 +7027,7 @@
       </p:sp>
       <p:sp>
         <p:nvSpPr>
-          <p:cNvPr id="9" name="TextBox 8"/>
+          <p:cNvPr id="10" name="TextBox 9"/>
           <p:cNvSpPr txBox="1"/>
           <p:nvPr/>
         </p:nvSpPr>
@@ -6805,7 +7067,7 @@
                 </a:solidFill>
                 <a:latin typeface="Montserrat"/>
               </a:rPr>
-              <a:t>large industrial hall with ventilation openings</a:t>
+              <a:t>outdoor gas cylinder storage cabinet enclosure</a:t>
             </a:r>
           </a:p>
         </p:txBody>
@@ -6902,7 +7164,7 @@
                 </a:solidFill>
                 <a:latin typeface="Montserrat"/>
               </a:rPr>
-              <a:t>014 / 021</a:t>
+              <a:t>014 / 022</a:t>
             </a:r>
           </a:p>
         </p:txBody>
@@ -6950,7 +7212,7 @@
         <p:spPr>
           <a:xfrm>
             <a:off x="822960" y="457200"/>
-            <a:ext cx="8229600" cy="365760"/>
+            <a:ext cx="10058400" cy="365760"/>
           </a:xfrm>
           <a:prstGeom prst="rect">
             <a:avLst/>
@@ -6964,13 +7226,13 @@
           <a:lstStyle/>
           <a:p>
             <a:r>
-              <a:rPr sz="1200" b="1" i="0">
-                <a:solidFill>
-                  <a:srgbClr val="64748B"/>
-                </a:solidFill>
-                <a:latin typeface="Montserrat"/>
-              </a:rPr>
-              <a:t>APARTADO 2.2.3 · LA CASETA</a:t>
+              <a:rPr sz="1300" b="1" i="0">
+                <a:solidFill>
+                  <a:srgbClr val="E8801A"/>
+                </a:solidFill>
+                <a:latin typeface="Montserrat"/>
+              </a:rPr>
+              <a:t>APARTADO 2.2.2 · EXCEPCIÓN</a:t>
             </a:r>
           </a:p>
         </p:txBody>
@@ -6998,26 +7260,70 @@
           <a:lstStyle/>
           <a:p>
             <a:r>
-              <a:rPr sz="2700" b="1" i="0">
+              <a:rPr sz="2800" b="1" i="0">
                 <a:solidFill>
                   <a:srgbClr val="1E2761"/>
                 </a:solidFill>
                 <a:latin typeface="Montserrat"/>
               </a:rPr>
-              <a:t>Dos rejillas y suelo en pendiente</a:t>
-            </a:r>
-          </a:p>
-        </p:txBody>
-      </p:sp>
-      <p:sp>
-        <p:nvSpPr>
-          <p:cNvPr id="7" name="TextBox 6"/>
+              <a:t>Dentro solo si ≤ 70 kg</a:t>
+            </a:r>
+          </a:p>
+        </p:txBody>
+      </p:sp>
+      <p:sp>
+        <p:nvSpPr>
+          <p:cNvPr id="7" name="Rounded Rectangle 6"/>
+          <p:cNvSpPr/>
+          <p:nvPr/>
+        </p:nvSpPr>
+        <p:spPr>
+          <a:xfrm>
+            <a:off x="868680" y="1627632"/>
+            <a:ext cx="2011680" cy="73152"/>
+          </a:xfrm>
+          <a:prstGeom prst="roundRect">
+            <a:avLst/>
+          </a:prstGeom>
+          <a:solidFill>
+            <a:srgbClr val="E8801A"/>
+          </a:solidFill>
+          <a:ln>
+            <a:noFill/>
+          </a:ln>
+          <a:effectLst/>
+        </p:spPr>
+        <p:style>
+          <a:lnRef idx="1">
+            <a:schemeClr val="accent1"/>
+          </a:lnRef>
+          <a:fillRef idx="3">
+            <a:schemeClr val="accent1"/>
+          </a:fillRef>
+          <a:effectRef idx="2">
+            <a:schemeClr val="accent1"/>
+          </a:effectRef>
+          <a:fontRef idx="minor">
+            <a:schemeClr val="lt1"/>
+          </a:fontRef>
+        </p:style>
+        <p:txBody>
+          <a:bodyPr rtlCol="0" anchor="ctr"/>
+          <a:lstStyle/>
+          <a:p>
+            <a:pPr algn="ctr"/>
+          </a:p>
+        </p:txBody>
+      </p:sp>
+      <p:sp>
+        <p:nvSpPr>
+          <p:cNvPr id="8" name="TextBox 7"/>
           <p:cNvSpPr txBox="1"/>
           <p:nvPr/>
         </p:nvSpPr>
         <p:spPr>
           <a:xfrm>
-            <a:off x="822960" y="1920240"/>
+            <a:off x="822960" y="1965960"/>
             <a:ext cx="4983480" cy="4206240"/>
           </a:xfrm>
           <a:prstGeom prst="rect">
@@ -7033,17 +7339,17 @@
           <a:p>
             <a:pPr>
               <a:spcAft>
-                <a:spcPts val="1000"/>
+                <a:spcPts val="1100"/>
               </a:spcAft>
             </a:pPr>
             <a:r>
               <a:rPr sz="1600" b="1" i="0">
                 <a:solidFill>
-                  <a:srgbClr val="2E3A80"/>
-                </a:solidFill>
-                <a:latin typeface="Montserrat"/>
-              </a:rPr>
-              <a:t>•  </a:t>
+                  <a:srgbClr val="E8801A"/>
+                </a:solidFill>
+                <a:latin typeface="Montserrat"/>
+              </a:rPr>
+              <a:t>▸  </a:t>
             </a:r>
             <a:r>
               <a:rPr sz="1600" b="0" i="0">
@@ -7052,23 +7358,23 @@
                 </a:solidFill>
                 <a:latin typeface="Montserrat"/>
               </a:rPr>
-              <a:t>Material A2-s3,d0 (casi incombustible)</a:t>
+              <a:t>Contenido total ≤ 70 kg</a:t>
             </a:r>
           </a:p>
           <a:p>
             <a:pPr>
               <a:spcAft>
-                <a:spcPts val="1000"/>
+                <a:spcPts val="1100"/>
               </a:spcAft>
             </a:pPr>
             <a:r>
               <a:rPr sz="1600" b="1" i="0">
                 <a:solidFill>
-                  <a:srgbClr val="2E3A80"/>
-                </a:solidFill>
-                <a:latin typeface="Montserrat"/>
-              </a:rPr>
-              <a:t>•  </a:t>
+                  <a:srgbClr val="E8801A"/>
+                </a:solidFill>
+                <a:latin typeface="Montserrat"/>
+              </a:rPr>
+              <a:t>▸  </a:t>
             </a:r>
             <a:r>
               <a:rPr sz="1600" b="0" i="0">
@@ -7077,23 +7383,23 @@
                 </a:solidFill>
                 <a:latin typeface="Montserrat"/>
               </a:rPr>
-              <a:t>Ventilación arriba y abajo</a:t>
+              <a:t>Local &gt; 1.000 m3 y ≥ 150 m2</a:t>
             </a:r>
           </a:p>
           <a:p>
             <a:pPr>
               <a:spcAft>
-                <a:spcPts val="1000"/>
+                <a:spcPts val="1100"/>
               </a:spcAft>
             </a:pPr>
             <a:r>
               <a:rPr sz="1600" b="1" i="0">
                 <a:solidFill>
-                  <a:srgbClr val="2E3A80"/>
-                </a:solidFill>
-                <a:latin typeface="Montserrat"/>
-              </a:rPr>
-              <a:t>•  </a:t>
+                  <a:srgbClr val="E8801A"/>
+                </a:solidFill>
+                <a:latin typeface="Montserrat"/>
+              </a:rPr>
+              <a:t>▸  </a:t>
             </a:r>
             <a:r>
               <a:rPr sz="1600" b="0" i="0">
@@ -7102,14 +7408,39 @@
                 </a:solidFill>
                 <a:latin typeface="Montserrat"/>
               </a:rPr>
-              <a:t>Superficie 1/10; suelo inclinado hacia fuera</a:t>
-            </a:r>
-          </a:p>
-        </p:txBody>
-      </p:sp>
-      <p:sp>
-        <p:nvSpPr>
-          <p:cNvPr id="8" name="imgph" descr="IMGQ:outdoor gas cylinder shelter with vents top and bottom"/>
+              <a:t>Ventilación 1/15 a ras de suelo</a:t>
+            </a:r>
+          </a:p>
+          <a:p>
+            <a:pPr>
+              <a:spcAft>
+                <a:spcPts val="1100"/>
+              </a:spcAft>
+            </a:pPr>
+            <a:r>
+              <a:rPr sz="1600" b="1" i="0">
+                <a:solidFill>
+                  <a:srgbClr val="E8801A"/>
+                </a:solidFill>
+                <a:latin typeface="Montserrat"/>
+              </a:rPr>
+              <a:t>▸  </a:t>
+            </a:r>
+            <a:r>
+              <a:rPr sz="1600" b="0" i="0">
+                <a:solidFill>
+                  <a:srgbClr val="1B2330"/>
+                </a:solidFill>
+                <a:latin typeface="Montserrat"/>
+              </a:rPr>
+              <a:t>Dos extintores 21A-113B</a:t>
+            </a:r>
+          </a:p>
+        </p:txBody>
+      </p:sp>
+      <p:sp>
+        <p:nvSpPr>
+          <p:cNvPr id="9" name="imgph" descr="IMGQ:large industrial hall with ventilation openings"/>
           <p:cNvSpPr/>
           <p:nvPr/>
         </p:nvSpPr>
@@ -7155,7 +7486,7 @@
       </p:sp>
       <p:sp>
         <p:nvSpPr>
-          <p:cNvPr id="9" name="TextBox 8"/>
+          <p:cNvPr id="10" name="TextBox 9"/>
           <p:cNvSpPr txBox="1"/>
           <p:nvPr/>
         </p:nvSpPr>
@@ -7195,7 +7526,7 @@
                 </a:solidFill>
                 <a:latin typeface="Montserrat"/>
               </a:rPr>
-              <a:t>outdoor gas cylinder shelter with vents top and bottom</a:t>
+              <a:t>large industrial hall with ventilation openings</a:t>
             </a:r>
           </a:p>
         </p:txBody>
@@ -7292,7 +7623,7 @@
                 </a:solidFill>
                 <a:latin typeface="Montserrat"/>
               </a:rPr>
-              <a:t>015 / 021</a:t>
+              <a:t>015 / 022</a:t>
             </a:r>
           </a:p>
         </p:txBody>
@@ -7340,7 +7671,7 @@
         <p:spPr>
           <a:xfrm>
             <a:off x="822960" y="457200"/>
-            <a:ext cx="8229600" cy="365760"/>
+            <a:ext cx="10058400" cy="365760"/>
           </a:xfrm>
           <a:prstGeom prst="rect">
             <a:avLst/>
@@ -7354,13 +7685,13 @@
           <a:lstStyle/>
           <a:p>
             <a:r>
-              <a:rPr sz="1200" b="1" i="0">
-                <a:solidFill>
-                  <a:srgbClr val="64748B"/>
-                </a:solidFill>
-                <a:latin typeface="Montserrat"/>
-              </a:rPr>
-              <a:t>APARTADO 2.2.3 · CUADRO 2</a:t>
+              <a:rPr sz="1300" b="1" i="0">
+                <a:solidFill>
+                  <a:srgbClr val="E8801A"/>
+                </a:solidFill>
+                <a:latin typeface="Montserrat"/>
+              </a:rPr>
+              <a:t>APARTADO 2.2.3 · LA CASETA</a:t>
             </a:r>
           </a:p>
         </p:txBody>
@@ -7388,26 +7719,70 @@
           <a:lstStyle/>
           <a:p>
             <a:r>
-              <a:rPr sz="2700" b="1" i="0">
+              <a:rPr sz="2800" b="1" i="0">
                 <a:solidFill>
                   <a:srgbClr val="1E2761"/>
                 </a:solidFill>
                 <a:latin typeface="Montserrat"/>
               </a:rPr>
-              <a:t>Más kilos, más metros</a:t>
-            </a:r>
-          </a:p>
-        </p:txBody>
-      </p:sp>
-      <p:sp>
-        <p:nvSpPr>
-          <p:cNvPr id="7" name="TextBox 6"/>
+              <a:t>Dos rejillas y suelo en pendiente</a:t>
+            </a:r>
+          </a:p>
+        </p:txBody>
+      </p:sp>
+      <p:sp>
+        <p:nvSpPr>
+          <p:cNvPr id="7" name="Rounded Rectangle 6"/>
+          <p:cNvSpPr/>
+          <p:nvPr/>
+        </p:nvSpPr>
+        <p:spPr>
+          <a:xfrm>
+            <a:off x="868680" y="1627632"/>
+            <a:ext cx="2011680" cy="73152"/>
+          </a:xfrm>
+          <a:prstGeom prst="roundRect">
+            <a:avLst/>
+          </a:prstGeom>
+          <a:solidFill>
+            <a:srgbClr val="E8801A"/>
+          </a:solidFill>
+          <a:ln>
+            <a:noFill/>
+          </a:ln>
+          <a:effectLst/>
+        </p:spPr>
+        <p:style>
+          <a:lnRef idx="1">
+            <a:schemeClr val="accent1"/>
+          </a:lnRef>
+          <a:fillRef idx="3">
+            <a:schemeClr val="accent1"/>
+          </a:fillRef>
+          <a:effectRef idx="2">
+            <a:schemeClr val="accent1"/>
+          </a:effectRef>
+          <a:fontRef idx="minor">
+            <a:schemeClr val="lt1"/>
+          </a:fontRef>
+        </p:style>
+        <p:txBody>
+          <a:bodyPr rtlCol="0" anchor="ctr"/>
+          <a:lstStyle/>
+          <a:p>
+            <a:pPr algn="ctr"/>
+          </a:p>
+        </p:txBody>
+      </p:sp>
+      <p:sp>
+        <p:nvSpPr>
+          <p:cNvPr id="8" name="TextBox 7"/>
           <p:cNvSpPr txBox="1"/>
           <p:nvPr/>
         </p:nvSpPr>
         <p:spPr>
           <a:xfrm>
-            <a:off x="822960" y="1920240"/>
+            <a:off x="822960" y="1965960"/>
             <a:ext cx="4983480" cy="4206240"/>
           </a:xfrm>
           <a:prstGeom prst="rect">
@@ -7423,17 +7798,17 @@
           <a:p>
             <a:pPr>
               <a:spcAft>
-                <a:spcPts val="1000"/>
+                <a:spcPts val="1100"/>
               </a:spcAft>
             </a:pPr>
             <a:r>
               <a:rPr sz="1600" b="1" i="0">
                 <a:solidFill>
-                  <a:srgbClr val="2E3A80"/>
-                </a:solidFill>
-                <a:latin typeface="Montserrat"/>
-              </a:rPr>
-              <a:t>•  </a:t>
+                  <a:srgbClr val="E8801A"/>
+                </a:solidFill>
+                <a:latin typeface="Montserrat"/>
+              </a:rPr>
+              <a:t>▸  </a:t>
             </a:r>
             <a:r>
               <a:rPr sz="1600" b="0" i="0">
@@ -7442,23 +7817,23 @@
                 </a:solidFill>
                 <a:latin typeface="Montserrat"/>
               </a:rPr>
-              <a:t>A más GLP, más distancia</a:t>
+              <a:t>Material A2-s3,d0 (casi incombustible)</a:t>
             </a:r>
           </a:p>
           <a:p>
             <a:pPr>
               <a:spcAft>
-                <a:spcPts val="1000"/>
+                <a:spcPts val="1100"/>
               </a:spcAft>
             </a:pPr>
             <a:r>
               <a:rPr sz="1600" b="1" i="0">
                 <a:solidFill>
-                  <a:srgbClr val="2E3A80"/>
-                </a:solidFill>
-                <a:latin typeface="Montserrat"/>
-              </a:rPr>
-              <a:t>•  </a:t>
+                  <a:srgbClr val="E8801A"/>
+                </a:solidFill>
+                <a:latin typeface="Montserrat"/>
+              </a:rPr>
+              <a:t>▸  </a:t>
             </a:r>
             <a:r>
               <a:rPr sz="1600" b="0" i="0">
@@ -7467,23 +7842,23 @@
                 </a:solidFill>
                 <a:latin typeface="Montserrat"/>
               </a:rPr>
-              <a:t>La caseta puede recortar distancias</a:t>
+              <a:t>Ventilación arriba y abajo</a:t>
             </a:r>
           </a:p>
           <a:p>
             <a:pPr>
               <a:spcAft>
-                <a:spcPts val="1000"/>
+                <a:spcPts val="1100"/>
               </a:spcAft>
             </a:pPr>
             <a:r>
               <a:rPr sz="1600" b="1" i="0">
                 <a:solidFill>
-                  <a:srgbClr val="2E3A80"/>
-                </a:solidFill>
-                <a:latin typeface="Montserrat"/>
-              </a:rPr>
-              <a:t>•  </a:t>
+                  <a:srgbClr val="E8801A"/>
+                </a:solidFill>
+                <a:latin typeface="Montserrat"/>
+              </a:rPr>
+              <a:t>▸  </a:t>
             </a:r>
             <a:r>
               <a:rPr sz="1600" b="0" i="0">
@@ -7492,14 +7867,14 @@
                 </a:solidFill>
                 <a:latin typeface="Montserrat"/>
               </a:rPr>
-              <a:t>Hogares y motores: no rebajan</a:t>
-            </a:r>
-          </a:p>
-        </p:txBody>
-      </p:sp>
-      <p:sp>
-        <p:nvSpPr>
-          <p:cNvPr id="8" name="imgph" descr="IMGQ:gas caseta enclosure next to building drain"/>
+              <a:t>Superficie 1/10; suelo inclinado hacia fuera</a:t>
+            </a:r>
+          </a:p>
+        </p:txBody>
+      </p:sp>
+      <p:sp>
+        <p:nvSpPr>
+          <p:cNvPr id="9" name="imgph" descr="IMGQ:outdoor gas cylinder shelter with vents top and bottom"/>
           <p:cNvSpPr/>
           <p:nvPr/>
         </p:nvSpPr>
@@ -7545,7 +7920,7 @@
       </p:sp>
       <p:sp>
         <p:nvSpPr>
-          <p:cNvPr id="9" name="TextBox 8"/>
+          <p:cNvPr id="10" name="TextBox 9"/>
           <p:cNvSpPr txBox="1"/>
           <p:nvPr/>
         </p:nvSpPr>
@@ -7585,7 +7960,7 @@
                 </a:solidFill>
                 <a:latin typeface="Montserrat"/>
               </a:rPr>
-              <a:t>gas caseta enclosure next to building drain</a:t>
+              <a:t>outdoor gas cylinder shelter with vents top and bottom</a:t>
             </a:r>
           </a:p>
         </p:txBody>
@@ -7682,7 +8057,7 @@
                 </a:solidFill>
                 <a:latin typeface="Montserrat"/>
               </a:rPr>
-              <a:t>016 / 021</a:t>
+              <a:t>016 / 022</a:t>
             </a:r>
           </a:p>
         </p:txBody>
@@ -7730,7 +8105,7 @@
         <p:spPr>
           <a:xfrm>
             <a:off x="822960" y="457200"/>
-            <a:ext cx="8229600" cy="365760"/>
+            <a:ext cx="10058400" cy="365760"/>
           </a:xfrm>
           <a:prstGeom prst="rect">
             <a:avLst/>
@@ -7744,13 +8119,13 @@
           <a:lstStyle/>
           <a:p>
             <a:r>
-              <a:rPr sz="1200" b="1" i="0">
-                <a:solidFill>
-                  <a:srgbClr val="64748B"/>
-                </a:solidFill>
-                <a:latin typeface="Montserrat"/>
-              </a:rPr>
-              <a:t>APARTADO 2.2 · EXTINTORES</a:t>
+              <a:rPr sz="1300" b="1" i="0">
+                <a:solidFill>
+                  <a:srgbClr val="E8801A"/>
+                </a:solidFill>
+                <a:latin typeface="Montserrat"/>
+              </a:rPr>
+              <a:t>APARTADO 2.2.3 · CUADRO 2</a:t>
             </a:r>
           </a:p>
         </p:txBody>
@@ -7778,26 +8153,70 @@
           <a:lstStyle/>
           <a:p>
             <a:r>
-              <a:rPr sz="2700" b="1" i="0">
+              <a:rPr sz="2800" b="1" i="0">
                 <a:solidFill>
                   <a:srgbClr val="1E2761"/>
                 </a:solidFill>
                 <a:latin typeface="Montserrat"/>
               </a:rPr>
-              <a:t>Mismo extintor, distinto disparador</a:t>
-            </a:r>
-          </a:p>
-        </p:txBody>
-      </p:sp>
-      <p:sp>
-        <p:nvSpPr>
-          <p:cNvPr id="7" name="TextBox 6"/>
+              <a:t>Más kilos, más metros</a:t>
+            </a:r>
+          </a:p>
+        </p:txBody>
+      </p:sp>
+      <p:sp>
+        <p:nvSpPr>
+          <p:cNvPr id="7" name="Rounded Rectangle 6"/>
+          <p:cNvSpPr/>
+          <p:nvPr/>
+        </p:nvSpPr>
+        <p:spPr>
+          <a:xfrm>
+            <a:off x="868680" y="1627632"/>
+            <a:ext cx="2011680" cy="73152"/>
+          </a:xfrm>
+          <a:prstGeom prst="roundRect">
+            <a:avLst/>
+          </a:prstGeom>
+          <a:solidFill>
+            <a:srgbClr val="E8801A"/>
+          </a:solidFill>
+          <a:ln>
+            <a:noFill/>
+          </a:ln>
+          <a:effectLst/>
+        </p:spPr>
+        <p:style>
+          <a:lnRef idx="1">
+            <a:schemeClr val="accent1"/>
+          </a:lnRef>
+          <a:fillRef idx="3">
+            <a:schemeClr val="accent1"/>
+          </a:fillRef>
+          <a:effectRef idx="2">
+            <a:schemeClr val="accent1"/>
+          </a:effectRef>
+          <a:fontRef idx="minor">
+            <a:schemeClr val="lt1"/>
+          </a:fontRef>
+        </p:style>
+        <p:txBody>
+          <a:bodyPr rtlCol="0" anchor="ctr"/>
+          <a:lstStyle/>
+          <a:p>
+            <a:pPr algn="ctr"/>
+          </a:p>
+        </p:txBody>
+      </p:sp>
+      <p:sp>
+        <p:nvSpPr>
+          <p:cNvPr id="8" name="TextBox 7"/>
           <p:cNvSpPr txBox="1"/>
           <p:nvPr/>
         </p:nvSpPr>
         <p:spPr>
           <a:xfrm>
-            <a:off x="822960" y="1920240"/>
+            <a:off x="822960" y="1965960"/>
             <a:ext cx="4983480" cy="4206240"/>
           </a:xfrm>
           <a:prstGeom prst="rect">
@@ -7813,17 +8232,17 @@
           <a:p>
             <a:pPr>
               <a:spcAft>
-                <a:spcPts val="1000"/>
+                <a:spcPts val="1100"/>
               </a:spcAft>
             </a:pPr>
             <a:r>
               <a:rPr sz="1600" b="1" i="0">
                 <a:solidFill>
-                  <a:srgbClr val="2E3A80"/>
-                </a:solidFill>
-                <a:latin typeface="Montserrat"/>
-              </a:rPr>
-              <a:t>•  </a:t>
+                  <a:srgbClr val="E8801A"/>
+                </a:solidFill>
+                <a:latin typeface="Montserrat"/>
+              </a:rPr>
+              <a:t>▸  </a:t>
             </a:r>
             <a:r>
               <a:rPr sz="1600" b="0" i="0">
@@ -7832,23 +8251,23 @@
                 </a:solidFill>
                 <a:latin typeface="Montserrat"/>
               </a:rPr>
-              <a:t>Extintores 21A-113B, dos unidades</a:t>
+              <a:t>A más GLP, más distancia</a:t>
             </a:r>
           </a:p>
           <a:p>
             <a:pPr>
               <a:spcAft>
-                <a:spcPts val="1000"/>
+                <a:spcPts val="1100"/>
               </a:spcAft>
             </a:pPr>
             <a:r>
               <a:rPr sz="1600" b="1" i="0">
                 <a:solidFill>
-                  <a:srgbClr val="2E3A80"/>
-                </a:solidFill>
-                <a:latin typeface="Montserrat"/>
-              </a:rPr>
-              <a:t>•  </a:t>
+                  <a:srgbClr val="E8801A"/>
+                </a:solidFill>
+                <a:latin typeface="Montserrat"/>
+              </a:rPr>
+              <a:t>▸  </a:t>
             </a:r>
             <a:r>
               <a:rPr sz="1600" b="0" i="0">
@@ -7857,23 +8276,23 @@
                 </a:solidFill>
                 <a:latin typeface="Montserrat"/>
               </a:rPr>
-              <a:t>Interior del local: siempre</a:t>
+              <a:t>La caseta puede recortar distancias</a:t>
             </a:r>
           </a:p>
           <a:p>
             <a:pPr>
               <a:spcAft>
-                <a:spcPts val="1000"/>
+                <a:spcPts val="1100"/>
               </a:spcAft>
             </a:pPr>
             <a:r>
               <a:rPr sz="1600" b="1" i="0">
                 <a:solidFill>
-                  <a:srgbClr val="2E3A80"/>
-                </a:solidFill>
-                <a:latin typeface="Montserrat"/>
-              </a:rPr>
-              <a:t>•  </a:t>
+                  <a:srgbClr val="E8801A"/>
+                </a:solidFill>
+                <a:latin typeface="Montserrat"/>
+              </a:rPr>
+              <a:t>▸  </a:t>
             </a:r>
             <a:r>
               <a:rPr sz="1600" b="0" i="0">
@@ -7882,14 +8301,14 @@
                 </a:solidFill>
                 <a:latin typeface="Montserrat"/>
               </a:rPr>
-              <a:t>En caseta: al superar 350 kg</a:t>
-            </a:r>
-          </a:p>
-        </p:txBody>
-      </p:sp>
-      <p:sp>
-        <p:nvSpPr>
-          <p:cNvPr id="8" name="imgph" descr="IMGQ:two fire extinguishers mounted on wall outdoor"/>
+              <a:t>Hogares y motores: no rebajan</a:t>
+            </a:r>
+          </a:p>
+        </p:txBody>
+      </p:sp>
+      <p:sp>
+        <p:nvSpPr>
+          <p:cNvPr id="9" name="imgph" descr="IMGQ:gas caseta enclosure next to building drain"/>
           <p:cNvSpPr/>
           <p:nvPr/>
         </p:nvSpPr>
@@ -7935,7 +8354,7 @@
       </p:sp>
       <p:sp>
         <p:nvSpPr>
-          <p:cNvPr id="9" name="TextBox 8"/>
+          <p:cNvPr id="10" name="TextBox 9"/>
           <p:cNvSpPr txBox="1"/>
           <p:nvPr/>
         </p:nvSpPr>
@@ -7975,7 +8394,7 @@
                 </a:solidFill>
                 <a:latin typeface="Montserrat"/>
               </a:rPr>
-              <a:t>two fire extinguishers mounted on wall outdoor</a:t>
+              <a:t>gas caseta enclosure next to building drain</a:t>
             </a:r>
           </a:p>
         </p:txBody>
@@ -8072,7 +8491,7 @@
                 </a:solidFill>
                 <a:latin typeface="Montserrat"/>
               </a:rPr>
-              <a:t>017 / 021</a:t>
+              <a:t>017 / 022</a:t>
             </a:r>
           </a:p>
         </p:txBody>
@@ -8120,7 +8539,7 @@
         <p:spPr>
           <a:xfrm>
             <a:off x="822960" y="457200"/>
-            <a:ext cx="8229600" cy="365760"/>
+            <a:ext cx="10058400" cy="365760"/>
           </a:xfrm>
           <a:prstGeom prst="rect">
             <a:avLst/>
@@ -8134,13 +8553,13 @@
           <a:lstStyle/>
           <a:p>
             <a:r>
-              <a:rPr sz="1200" b="1" i="0">
-                <a:solidFill>
-                  <a:srgbClr val="64748B"/>
-                </a:solidFill>
-                <a:latin typeface="Montserrat"/>
-              </a:rPr>
-              <a:t>APARTADO 2.2.4 · CAMBIO DE ENVASES</a:t>
+              <a:rPr sz="1300" b="1" i="0">
+                <a:solidFill>
+                  <a:srgbClr val="E8801A"/>
+                </a:solidFill>
+                <a:latin typeface="Montserrat"/>
+              </a:rPr>
+              <a:t>APARTADO 2.2 · EXTINTORES</a:t>
             </a:r>
           </a:p>
         </p:txBody>
@@ -8168,26 +8587,70 @@
           <a:lstStyle/>
           <a:p>
             <a:r>
-              <a:rPr sz="2700" b="1" i="0">
+              <a:rPr sz="2800" b="1" i="0">
                 <a:solidFill>
                   <a:srgbClr val="1E2761"/>
                 </a:solidFill>
                 <a:latin typeface="Montserrat"/>
               </a:rPr>
-              <a:t>El momento más peligroso</a:t>
-            </a:r>
-          </a:p>
-        </p:txBody>
-      </p:sp>
-      <p:sp>
-        <p:nvSpPr>
-          <p:cNvPr id="7" name="TextBox 6"/>
+              <a:t>Mismo extintor, distinto disparador</a:t>
+            </a:r>
+          </a:p>
+        </p:txBody>
+      </p:sp>
+      <p:sp>
+        <p:nvSpPr>
+          <p:cNvPr id="7" name="Rounded Rectangle 6"/>
+          <p:cNvSpPr/>
+          <p:nvPr/>
+        </p:nvSpPr>
+        <p:spPr>
+          <a:xfrm>
+            <a:off x="868680" y="1627632"/>
+            <a:ext cx="2011680" cy="73152"/>
+          </a:xfrm>
+          <a:prstGeom prst="roundRect">
+            <a:avLst/>
+          </a:prstGeom>
+          <a:solidFill>
+            <a:srgbClr val="E8801A"/>
+          </a:solidFill>
+          <a:ln>
+            <a:noFill/>
+          </a:ln>
+          <a:effectLst/>
+        </p:spPr>
+        <p:style>
+          <a:lnRef idx="1">
+            <a:schemeClr val="accent1"/>
+          </a:lnRef>
+          <a:fillRef idx="3">
+            <a:schemeClr val="accent1"/>
+          </a:fillRef>
+          <a:effectRef idx="2">
+            <a:schemeClr val="accent1"/>
+          </a:effectRef>
+          <a:fontRef idx="minor">
+            <a:schemeClr val="lt1"/>
+          </a:fontRef>
+        </p:style>
+        <p:txBody>
+          <a:bodyPr rtlCol="0" anchor="ctr"/>
+          <a:lstStyle/>
+          <a:p>
+            <a:pPr algn="ctr"/>
+          </a:p>
+        </p:txBody>
+      </p:sp>
+      <p:sp>
+        <p:nvSpPr>
+          <p:cNvPr id="8" name="TextBox 7"/>
           <p:cNvSpPr txBox="1"/>
           <p:nvPr/>
         </p:nvSpPr>
         <p:spPr>
           <a:xfrm>
-            <a:off x="822960" y="1920240"/>
+            <a:off x="822960" y="1965960"/>
             <a:ext cx="4983480" cy="4206240"/>
           </a:xfrm>
           <a:prstGeom prst="rect">
@@ -8203,17 +8666,17 @@
           <a:p>
             <a:pPr>
               <a:spcAft>
-                <a:spcPts val="1000"/>
+                <a:spcPts val="1100"/>
               </a:spcAft>
             </a:pPr>
             <a:r>
               <a:rPr sz="1600" b="1" i="0">
                 <a:solidFill>
-                  <a:srgbClr val="2E3A80"/>
-                </a:solidFill>
-                <a:latin typeface="Montserrat"/>
-              </a:rPr>
-              <a:t>•  </a:t>
+                  <a:srgbClr val="E8801A"/>
+                </a:solidFill>
+                <a:latin typeface="Montserrat"/>
+              </a:rPr>
+              <a:t>▸  </a:t>
             </a:r>
             <a:r>
               <a:rPr sz="1600" b="0" i="0">
@@ -8222,23 +8685,23 @@
                 </a:solidFill>
                 <a:latin typeface="Montserrat"/>
               </a:rPr>
-              <a:t>Ni fuego, ni interruptores, ni motores</a:t>
+              <a:t>Extintores 21A-113B, dos unidades</a:t>
             </a:r>
           </a:p>
           <a:p>
             <a:pPr>
               <a:spcAft>
-                <a:spcPts val="1000"/>
+                <a:spcPts val="1100"/>
               </a:spcAft>
             </a:pPr>
             <a:r>
               <a:rPr sz="1600" b="1" i="0">
                 <a:solidFill>
-                  <a:srgbClr val="2E3A80"/>
-                </a:solidFill>
-                <a:latin typeface="Montserrat"/>
-              </a:rPr>
-              <a:t>•  </a:t>
+                  <a:srgbClr val="E8801A"/>
+                </a:solidFill>
+                <a:latin typeface="Montserrat"/>
+              </a:rPr>
+              <a:t>▸  </a:t>
             </a:r>
             <a:r>
               <a:rPr sz="1600" b="0" i="0">
@@ -8247,23 +8710,23 @@
                 </a:solidFill>
                 <a:latin typeface="Montserrat"/>
               </a:rPr>
-              <a:t>Se relaja si hay mucha distancia</a:t>
+              <a:t>Interior del local: siempre</a:t>
             </a:r>
           </a:p>
           <a:p>
             <a:pPr>
               <a:spcAft>
-                <a:spcPts val="1000"/>
+                <a:spcPts val="1100"/>
               </a:spcAft>
             </a:pPr>
             <a:r>
               <a:rPr sz="1600" b="1" i="0">
                 <a:solidFill>
-                  <a:srgbClr val="2E3A80"/>
-                </a:solidFill>
-                <a:latin typeface="Montserrat"/>
-              </a:rPr>
-              <a:t>•  </a:t>
+                  <a:srgbClr val="E8801A"/>
+                </a:solidFill>
+                <a:latin typeface="Montserrat"/>
+              </a:rPr>
+              <a:t>▸  </a:t>
             </a:r>
             <a:r>
               <a:rPr sz="1600" b="0" i="0">
@@ -8272,14 +8735,14 @@
                 </a:solidFill>
                 <a:latin typeface="Montserrat"/>
               </a:rPr>
-              <a:t>20 m dentro · 10 m fuera</a:t>
-            </a:r>
-          </a:p>
-        </p:txBody>
-      </p:sp>
-      <p:sp>
-        <p:nvSpPr>
-          <p:cNvPr id="8" name="imgph" descr="IMGQ:worker changing a propane cylinder connection"/>
+              <a:t>En caseta: al superar 350 kg</a:t>
+            </a:r>
+          </a:p>
+        </p:txBody>
+      </p:sp>
+      <p:sp>
+        <p:nvSpPr>
+          <p:cNvPr id="9" name="imgph" descr="IMGQ:two fire extinguishers mounted on wall outdoor"/>
           <p:cNvSpPr/>
           <p:nvPr/>
         </p:nvSpPr>
@@ -8325,7 +8788,7 @@
       </p:sp>
       <p:sp>
         <p:nvSpPr>
-          <p:cNvPr id="9" name="TextBox 8"/>
+          <p:cNvPr id="10" name="TextBox 9"/>
           <p:cNvSpPr txBox="1"/>
           <p:nvPr/>
         </p:nvSpPr>
@@ -8365,7 +8828,7 @@
                 </a:solidFill>
                 <a:latin typeface="Montserrat"/>
               </a:rPr>
-              <a:t>worker changing a propane cylinder connection</a:t>
+              <a:t>two fire extinguishers mounted on wall outdoor</a:t>
             </a:r>
           </a:p>
         </p:txBody>
@@ -8462,7 +8925,7 @@
                 </a:solidFill>
                 <a:latin typeface="Montserrat"/>
               </a:rPr>
-              <a:t>018 / 021</a:t>
+              <a:t>018 / 022</a:t>
             </a:r>
           </a:p>
         </p:txBody>
@@ -8510,7 +8973,7 @@
         <p:spPr>
           <a:xfrm>
             <a:off x="822960" y="457200"/>
-            <a:ext cx="8229600" cy="365760"/>
+            <a:ext cx="10058400" cy="365760"/>
           </a:xfrm>
           <a:prstGeom prst="rect">
             <a:avLst/>
@@ -8524,13 +8987,13 @@
           <a:lstStyle/>
           <a:p>
             <a:r>
-              <a:rPr sz="1200" b="1" i="0">
-                <a:solidFill>
-                  <a:srgbClr val="64748B"/>
-                </a:solidFill>
-                <a:latin typeface="Montserrat"/>
-              </a:rPr>
-              <a:t>APARTADO 3 · PAPELEO</a:t>
+              <a:rPr sz="1300" b="1" i="0">
+                <a:solidFill>
+                  <a:srgbClr val="E8801A"/>
+                </a:solidFill>
+                <a:latin typeface="Montserrat"/>
+              </a:rPr>
+              <a:t>APARTADO 2.2.4 · CAMBIO DE ENVASES</a:t>
             </a:r>
           </a:p>
         </p:txBody>
@@ -8558,26 +9021,70 @@
           <a:lstStyle/>
           <a:p>
             <a:r>
-              <a:rPr sz="2700" b="1" i="0">
+              <a:rPr sz="2800" b="1" i="0">
                 <a:solidFill>
                   <a:srgbClr val="1E2761"/>
                 </a:solidFill>
                 <a:latin typeface="Montserrat"/>
               </a:rPr>
-              <a:t>Se libra el cacharro suelto</a:t>
-            </a:r>
-          </a:p>
-        </p:txBody>
-      </p:sp>
-      <p:sp>
-        <p:nvSpPr>
-          <p:cNvPr id="7" name="TextBox 6"/>
+              <a:t>El momento más peligroso</a:t>
+            </a:r>
+          </a:p>
+        </p:txBody>
+      </p:sp>
+      <p:sp>
+        <p:nvSpPr>
+          <p:cNvPr id="7" name="Rounded Rectangle 6"/>
+          <p:cNvSpPr/>
+          <p:nvPr/>
+        </p:nvSpPr>
+        <p:spPr>
+          <a:xfrm>
+            <a:off x="868680" y="1627632"/>
+            <a:ext cx="2011680" cy="73152"/>
+          </a:xfrm>
+          <a:prstGeom prst="roundRect">
+            <a:avLst/>
+          </a:prstGeom>
+          <a:solidFill>
+            <a:srgbClr val="E8801A"/>
+          </a:solidFill>
+          <a:ln>
+            <a:noFill/>
+          </a:ln>
+          <a:effectLst/>
+        </p:spPr>
+        <p:style>
+          <a:lnRef idx="1">
+            <a:schemeClr val="accent1"/>
+          </a:lnRef>
+          <a:fillRef idx="3">
+            <a:schemeClr val="accent1"/>
+          </a:fillRef>
+          <a:effectRef idx="2">
+            <a:schemeClr val="accent1"/>
+          </a:effectRef>
+          <a:fontRef idx="minor">
+            <a:schemeClr val="lt1"/>
+          </a:fontRef>
+        </p:style>
+        <p:txBody>
+          <a:bodyPr rtlCol="0" anchor="ctr"/>
+          <a:lstStyle/>
+          <a:p>
+            <a:pPr algn="ctr"/>
+          </a:p>
+        </p:txBody>
+      </p:sp>
+      <p:sp>
+        <p:nvSpPr>
+          <p:cNvPr id="8" name="TextBox 7"/>
           <p:cNvSpPr txBox="1"/>
           <p:nvPr/>
         </p:nvSpPr>
         <p:spPr>
           <a:xfrm>
-            <a:off x="822960" y="1920240"/>
+            <a:off x="822960" y="1965960"/>
             <a:ext cx="4983480" cy="4206240"/>
           </a:xfrm>
           <a:prstGeom prst="rect">
@@ -8593,17 +9100,17 @@
           <a:p>
             <a:pPr>
               <a:spcAft>
-                <a:spcPts val="1000"/>
+                <a:spcPts val="1100"/>
               </a:spcAft>
             </a:pPr>
             <a:r>
               <a:rPr sz="1600" b="1" i="0">
                 <a:solidFill>
-                  <a:srgbClr val="2E3A80"/>
-                </a:solidFill>
-                <a:latin typeface="Montserrat"/>
-              </a:rPr>
-              <a:t>•  </a:t>
+                  <a:srgbClr val="E8801A"/>
+                </a:solidFill>
+                <a:latin typeface="Montserrat"/>
+              </a:rPr>
+              <a:t>▸  </a:t>
             </a:r>
             <a:r>
               <a:rPr sz="1600" b="0" i="0">
@@ -8612,23 +9119,23 @@
                 </a:solidFill>
                 <a:latin typeface="Montserrat"/>
               </a:rPr>
-              <a:t>Excluido: un envase ≤ 15 kg</a:t>
+              <a:t>Ni fuego, ni interruptores, ni motores</a:t>
             </a:r>
           </a:p>
           <a:p>
             <a:pPr>
               <a:spcAft>
-                <a:spcPts val="1000"/>
+                <a:spcPts val="1100"/>
               </a:spcAft>
             </a:pPr>
             <a:r>
               <a:rPr sz="1600" b="1" i="0">
                 <a:solidFill>
-                  <a:srgbClr val="2E3A80"/>
-                </a:solidFill>
-                <a:latin typeface="Montserrat"/>
-              </a:rPr>
-              <a:t>•  </a:t>
+                  <a:srgbClr val="E8801A"/>
+                </a:solidFill>
+                <a:latin typeface="Montserrat"/>
+              </a:rPr>
+              <a:t>▸  </a:t>
             </a:r>
             <a:r>
               <a:rPr sz="1600" b="0" i="0">
@@ -8637,23 +9144,23 @@
                 </a:solidFill>
                 <a:latin typeface="Montserrat"/>
               </a:rPr>
-              <a:t>A un solo aparato móvil</a:t>
+              <a:t>Se relaja si hay mucha distancia</a:t>
             </a:r>
           </a:p>
           <a:p>
             <a:pPr>
               <a:spcAft>
-                <a:spcPts val="1000"/>
+                <a:spcPts val="1100"/>
               </a:spcAft>
             </a:pPr>
             <a:r>
               <a:rPr sz="1600" b="1" i="0">
                 <a:solidFill>
-                  <a:srgbClr val="2E3A80"/>
-                </a:solidFill>
-                <a:latin typeface="Montserrat"/>
-              </a:rPr>
-              <a:t>•  </a:t>
+                  <a:srgbClr val="E8801A"/>
+                </a:solidFill>
+                <a:latin typeface="Montserrat"/>
+              </a:rPr>
+              <a:t>▸  </a:t>
             </a:r>
             <a:r>
               <a:rPr sz="1600" b="0" i="0">
@@ -8662,14 +9169,14 @@
                 </a:solidFill>
                 <a:latin typeface="Montserrat"/>
               </a:rPr>
-              <a:t>No precisa autorización previa</a:t>
-            </a:r>
-          </a:p>
-        </p:txBody>
-      </p:sp>
-      <p:sp>
-        <p:nvSpPr>
-          <p:cNvPr id="8" name="imgph" descr="IMGQ:portable gas heater with single butane cylinder"/>
+              <a:t>20 m dentro · 10 m fuera</a:t>
+            </a:r>
+          </a:p>
+        </p:txBody>
+      </p:sp>
+      <p:sp>
+        <p:nvSpPr>
+          <p:cNvPr id="9" name="imgph" descr="IMGQ:worker changing a propane cylinder connection"/>
           <p:cNvSpPr/>
           <p:nvPr/>
         </p:nvSpPr>
@@ -8715,7 +9222,7 @@
       </p:sp>
       <p:sp>
         <p:nvSpPr>
-          <p:cNvPr id="9" name="TextBox 8"/>
+          <p:cNvPr id="10" name="TextBox 9"/>
           <p:cNvSpPr txBox="1"/>
           <p:nvPr/>
         </p:nvSpPr>
@@ -8755,7 +9262,7 @@
                 </a:solidFill>
                 <a:latin typeface="Montserrat"/>
               </a:rPr>
-              <a:t>portable gas heater with single butane cylinder</a:t>
+              <a:t>worker changing a propane cylinder connection</a:t>
             </a:r>
           </a:p>
         </p:txBody>
@@ -8852,7 +9359,7 @@
                 </a:solidFill>
                 <a:latin typeface="Montserrat"/>
               </a:rPr>
-              <a:t>019 / 021</a:t>
+              <a:t>019 / 022</a:t>
             </a:r>
           </a:p>
         </p:txBody>
@@ -8900,7 +9407,7 @@
         <p:spPr>
           <a:xfrm>
             <a:off x="822960" y="457200"/>
-            <a:ext cx="8229600" cy="365760"/>
+            <a:ext cx="10058400" cy="365760"/>
           </a:xfrm>
           <a:prstGeom prst="rect">
             <a:avLst/>
@@ -8914,13 +9421,13 @@
           <a:lstStyle/>
           <a:p>
             <a:r>
-              <a:rPr sz="1200" b="1" i="0">
-                <a:solidFill>
-                  <a:srgbClr val="64748B"/>
-                </a:solidFill>
-                <a:latin typeface="Montserrat"/>
-              </a:rPr>
-              <a:t>APARTADO 3.3 · PRUEBAS</a:t>
+              <a:rPr sz="1300" b="1" i="0">
+                <a:solidFill>
+                  <a:srgbClr val="E8801A"/>
+                </a:solidFill>
+                <a:latin typeface="Montserrat"/>
+              </a:rPr>
+              <a:t>APARTADO 3 · PAPELEO</a:t>
             </a:r>
           </a:p>
         </p:txBody>
@@ -8948,26 +9455,70 @@
           <a:lstStyle/>
           <a:p>
             <a:r>
-              <a:rPr sz="2700" b="1" i="0">
+              <a:rPr sz="2800" b="1" i="0">
                 <a:solidFill>
                   <a:srgbClr val="1E2761"/>
                 </a:solidFill>
                 <a:latin typeface="Montserrat"/>
               </a:rPr>
-              <a:t>La prueba de estanquidad</a:t>
-            </a:r>
-          </a:p>
-        </p:txBody>
-      </p:sp>
-      <p:sp>
-        <p:nvSpPr>
-          <p:cNvPr id="7" name="TextBox 6"/>
+              <a:t>Se libra el cacharro suelto</a:t>
+            </a:r>
+          </a:p>
+        </p:txBody>
+      </p:sp>
+      <p:sp>
+        <p:nvSpPr>
+          <p:cNvPr id="7" name="Rounded Rectangle 6"/>
+          <p:cNvSpPr/>
+          <p:nvPr/>
+        </p:nvSpPr>
+        <p:spPr>
+          <a:xfrm>
+            <a:off x="868680" y="1627632"/>
+            <a:ext cx="2011680" cy="73152"/>
+          </a:xfrm>
+          <a:prstGeom prst="roundRect">
+            <a:avLst/>
+          </a:prstGeom>
+          <a:solidFill>
+            <a:srgbClr val="E8801A"/>
+          </a:solidFill>
+          <a:ln>
+            <a:noFill/>
+          </a:ln>
+          <a:effectLst/>
+        </p:spPr>
+        <p:style>
+          <a:lnRef idx="1">
+            <a:schemeClr val="accent1"/>
+          </a:lnRef>
+          <a:fillRef idx="3">
+            <a:schemeClr val="accent1"/>
+          </a:fillRef>
+          <a:effectRef idx="2">
+            <a:schemeClr val="accent1"/>
+          </a:effectRef>
+          <a:fontRef idx="minor">
+            <a:schemeClr val="lt1"/>
+          </a:fontRef>
+        </p:style>
+        <p:txBody>
+          <a:bodyPr rtlCol="0" anchor="ctr"/>
+          <a:lstStyle/>
+          <a:p>
+            <a:pPr algn="ctr"/>
+          </a:p>
+        </p:txBody>
+      </p:sp>
+      <p:sp>
+        <p:nvSpPr>
+          <p:cNvPr id="8" name="TextBox 7"/>
           <p:cNvSpPr txBox="1"/>
           <p:nvPr/>
         </p:nvSpPr>
         <p:spPr>
           <a:xfrm>
-            <a:off x="822960" y="1920240"/>
+            <a:off x="822960" y="1965960"/>
             <a:ext cx="4983480" cy="4206240"/>
           </a:xfrm>
           <a:prstGeom prst="rect">
@@ -8983,17 +9534,17 @@
           <a:p>
             <a:pPr>
               <a:spcAft>
-                <a:spcPts val="1000"/>
+                <a:spcPts val="1100"/>
               </a:spcAft>
             </a:pPr>
             <a:r>
               <a:rPr sz="1600" b="1" i="0">
                 <a:solidFill>
-                  <a:srgbClr val="2E3A80"/>
-                </a:solidFill>
-                <a:latin typeface="Montserrat"/>
-              </a:rPr>
-              <a:t>•  </a:t>
+                  <a:srgbClr val="E8801A"/>
+                </a:solidFill>
+                <a:latin typeface="Montserrat"/>
+              </a:rPr>
+              <a:t>▸  </a:t>
             </a:r>
             <a:r>
               <a:rPr sz="1600" b="0" i="0">
@@ -9002,23 +9553,23 @@
                 </a:solidFill>
                 <a:latin typeface="Montserrat"/>
               </a:rPr>
-              <a:t>1,5 veces la presión de operación</a:t>
+              <a:t>Excluido: un envase ≤ 15 kg</a:t>
             </a:r>
           </a:p>
           <a:p>
             <a:pPr>
               <a:spcAft>
-                <a:spcPts val="1000"/>
+                <a:spcPts val="1100"/>
               </a:spcAft>
             </a:pPr>
             <a:r>
               <a:rPr sz="1600" b="1" i="0">
                 <a:solidFill>
-                  <a:srgbClr val="2E3A80"/>
-                </a:solidFill>
-                <a:latin typeface="Montserrat"/>
-              </a:rPr>
-              <a:t>•  </a:t>
+                  <a:srgbClr val="E8801A"/>
+                </a:solidFill>
+                <a:latin typeface="Montserrat"/>
+              </a:rPr>
+              <a:t>▸  </a:t>
             </a:r>
             <a:r>
               <a:rPr sz="1600" b="0" i="0">
@@ -9027,23 +9578,23 @@
                 </a:solidFill>
                 <a:latin typeface="Montserrat"/>
               </a:rPr>
-              <a:t>Durante 10 minutos</a:t>
+              <a:t>A un solo aparato móvil</a:t>
             </a:r>
           </a:p>
           <a:p>
             <a:pPr>
               <a:spcAft>
-                <a:spcPts val="1000"/>
+                <a:spcPts val="1100"/>
               </a:spcAft>
             </a:pPr>
             <a:r>
               <a:rPr sz="1600" b="1" i="0">
                 <a:solidFill>
-                  <a:srgbClr val="2E3A80"/>
-                </a:solidFill>
-                <a:latin typeface="Montserrat"/>
-              </a:rPr>
-              <a:t>•  </a:t>
+                  <a:srgbClr val="E8801A"/>
+                </a:solidFill>
+                <a:latin typeface="Montserrat"/>
+              </a:rPr>
+              <a:t>▸  </a:t>
             </a:r>
             <a:r>
               <a:rPr sz="1600" b="0" i="0">
@@ -9052,14 +9603,14 @@
                 </a:solidFill>
                 <a:latin typeface="Montserrat"/>
               </a:rPr>
-              <a:t>Aire, gas inerte o GLP en fase gas</a:t>
-            </a:r>
-          </a:p>
-        </p:txBody>
-      </p:sp>
-      <p:sp>
-        <p:nvSpPr>
-          <p:cNvPr id="8" name="imgph" descr="IMGQ:pressure gauge testing gas pipe installation"/>
+              <a:t>No precisa autorización previa</a:t>
+            </a:r>
+          </a:p>
+        </p:txBody>
+      </p:sp>
+      <p:sp>
+        <p:nvSpPr>
+          <p:cNvPr id="9" name="imgph" descr="IMGQ:portable gas heater with single butane cylinder"/>
           <p:cNvSpPr/>
           <p:nvPr/>
         </p:nvSpPr>
@@ -9105,7 +9656,7 @@
       </p:sp>
       <p:sp>
         <p:nvSpPr>
-          <p:cNvPr id="9" name="TextBox 8"/>
+          <p:cNvPr id="10" name="TextBox 9"/>
           <p:cNvSpPr txBox="1"/>
           <p:nvPr/>
         </p:nvSpPr>
@@ -9145,7 +9696,7 @@
                 </a:solidFill>
                 <a:latin typeface="Montserrat"/>
               </a:rPr>
-              <a:t>pressure gauge testing gas pipe installation</a:t>
+              <a:t>portable gas heater with single butane cylinder</a:t>
             </a:r>
           </a:p>
         </p:txBody>
@@ -9242,7 +9793,7 @@
                 </a:solidFill>
                 <a:latin typeface="Montserrat"/>
               </a:rPr>
-              <a:t>002 / 021</a:t>
+              <a:t>002 / 022</a:t>
             </a:r>
           </a:p>
         </p:txBody>
@@ -9306,7 +9857,7 @@
             <a:r>
               <a:rPr sz="2700" b="1" i="0">
                 <a:solidFill>
-                  <a:srgbClr val="1E2761"/>
+                  <a:srgbClr val="E8801A"/>
                 </a:solidFill>
                 <a:latin typeface="Montserrat"/>
               </a:rPr>
@@ -9318,6 +9869,50 @@
       <p:sp>
         <p:nvSpPr>
           <p:cNvPr id="6" name="Rounded Rectangle 5"/>
+          <p:cNvSpPr/>
+          <p:nvPr/>
+        </p:nvSpPr>
+        <p:spPr>
+          <a:xfrm>
+            <a:off x="868680" y="1234440"/>
+            <a:ext cx="1463040" cy="73152"/>
+          </a:xfrm>
+          <a:prstGeom prst="roundRect">
+            <a:avLst/>
+          </a:prstGeom>
+          <a:solidFill>
+            <a:srgbClr val="1E2761"/>
+          </a:solidFill>
+          <a:ln>
+            <a:noFill/>
+          </a:ln>
+          <a:effectLst/>
+        </p:spPr>
+        <p:style>
+          <a:lnRef idx="1">
+            <a:schemeClr val="accent1"/>
+          </a:lnRef>
+          <a:fillRef idx="3">
+            <a:schemeClr val="accent1"/>
+          </a:fillRef>
+          <a:effectRef idx="2">
+            <a:schemeClr val="accent1"/>
+          </a:effectRef>
+          <a:fontRef idx="minor">
+            <a:schemeClr val="lt1"/>
+          </a:fontRef>
+        </p:style>
+        <p:txBody>
+          <a:bodyPr rtlCol="0" anchor="ctr"/>
+          <a:lstStyle/>
+          <a:p>
+            <a:pPr algn="ctr"/>
+          </a:p>
+        </p:txBody>
+      </p:sp>
+      <p:sp>
+        <p:nvSpPr>
+          <p:cNvPr id="7" name="Rounded Rectangle 6"/>
           <p:cNvSpPr/>
           <p:nvPr/>
         </p:nvSpPr>
@@ -9363,7 +9958,7 @@
       </p:sp>
       <p:sp>
         <p:nvSpPr>
-          <p:cNvPr id="7" name="TextBox 6"/>
+          <p:cNvPr id="8" name="TextBox 7"/>
           <p:cNvSpPr txBox="1"/>
           <p:nvPr/>
         </p:nvSpPr>
@@ -9398,7 +9993,7 @@
       </p:sp>
       <p:sp>
         <p:nvSpPr>
-          <p:cNvPr id="8" name="TextBox 7"/>
+          <p:cNvPr id="9" name="TextBox 8"/>
           <p:cNvSpPr txBox="1"/>
           <p:nvPr/>
         </p:nvSpPr>
@@ -9433,7 +10028,7 @@
       </p:sp>
       <p:sp>
         <p:nvSpPr>
-          <p:cNvPr id="9" name="Rounded Rectangle 8"/>
+          <p:cNvPr id="10" name="Rounded Rectangle 9"/>
           <p:cNvSpPr/>
           <p:nvPr/>
         </p:nvSpPr>
@@ -9479,7 +10074,7 @@
       </p:sp>
       <p:sp>
         <p:nvSpPr>
-          <p:cNvPr id="10" name="TextBox 9"/>
+          <p:cNvPr id="11" name="TextBox 10"/>
           <p:cNvSpPr txBox="1"/>
           <p:nvPr/>
         </p:nvSpPr>
@@ -9514,7 +10109,7 @@
       </p:sp>
       <p:sp>
         <p:nvSpPr>
-          <p:cNvPr id="11" name="TextBox 10"/>
+          <p:cNvPr id="12" name="TextBox 11"/>
           <p:cNvSpPr txBox="1"/>
           <p:nvPr/>
         </p:nvSpPr>
@@ -9549,7 +10144,7 @@
       </p:sp>
       <p:sp>
         <p:nvSpPr>
-          <p:cNvPr id="12" name="Rounded Rectangle 11"/>
+          <p:cNvPr id="13" name="Rounded Rectangle 12"/>
           <p:cNvSpPr/>
           <p:nvPr/>
         </p:nvSpPr>
@@ -9595,7 +10190,7 @@
       </p:sp>
       <p:sp>
         <p:nvSpPr>
-          <p:cNvPr id="13" name="TextBox 12"/>
+          <p:cNvPr id="14" name="TextBox 13"/>
           <p:cNvSpPr txBox="1"/>
           <p:nvPr/>
         </p:nvSpPr>
@@ -9630,7 +10225,7 @@
       </p:sp>
       <p:sp>
         <p:nvSpPr>
-          <p:cNvPr id="14" name="TextBox 13"/>
+          <p:cNvPr id="15" name="TextBox 14"/>
           <p:cNvSpPr txBox="1"/>
           <p:nvPr/>
         </p:nvSpPr>
@@ -9755,7 +10350,7 @@
                 </a:solidFill>
                 <a:latin typeface="Montserrat"/>
               </a:rPr>
-              <a:t>020 / 021</a:t>
+              <a:t>020 / 022</a:t>
             </a:r>
           </a:p>
         </p:txBody>
@@ -9803,7 +10398,7 @@
         <p:spPr>
           <a:xfrm>
             <a:off x="822960" y="457200"/>
-            <a:ext cx="8229600" cy="365760"/>
+            <a:ext cx="10058400" cy="365760"/>
           </a:xfrm>
           <a:prstGeom prst="rect">
             <a:avLst/>
@@ -9817,13 +10412,13 @@
           <a:lstStyle/>
           <a:p>
             <a:r>
-              <a:rPr sz="1200" b="1" i="0">
-                <a:solidFill>
-                  <a:srgbClr val="64748B"/>
-                </a:solidFill>
-                <a:latin typeface="Montserrat"/>
-              </a:rPr>
-              <a:t>APARTADOS 3-4 · CIERRE DEL CICLO</a:t>
+              <a:rPr sz="1300" b="1" i="0">
+                <a:solidFill>
+                  <a:srgbClr val="E8801A"/>
+                </a:solidFill>
+                <a:latin typeface="Montserrat"/>
+              </a:rPr>
+              <a:t>APARTADO 3.3 · PRUEBAS</a:t>
             </a:r>
           </a:p>
         </p:txBody>
@@ -9851,26 +10446,70 @@
           <a:lstStyle/>
           <a:p>
             <a:r>
-              <a:rPr sz="2700" b="1" i="0">
+              <a:rPr sz="2800" b="1" i="0">
                 <a:solidFill>
                   <a:srgbClr val="1E2761"/>
                 </a:solidFill>
                 <a:latin typeface="Montserrat"/>
               </a:rPr>
-              <a:t>Sin comunicación, y revisión</a:t>
-            </a:r>
-          </a:p>
-        </p:txBody>
-      </p:sp>
-      <p:sp>
-        <p:nvSpPr>
-          <p:cNvPr id="7" name="TextBox 6"/>
+              <a:t>La prueba de estanquidad</a:t>
+            </a:r>
+          </a:p>
+        </p:txBody>
+      </p:sp>
+      <p:sp>
+        <p:nvSpPr>
+          <p:cNvPr id="7" name="Rounded Rectangle 6"/>
+          <p:cNvSpPr/>
+          <p:nvPr/>
+        </p:nvSpPr>
+        <p:spPr>
+          <a:xfrm>
+            <a:off x="868680" y="1627632"/>
+            <a:ext cx="2011680" cy="73152"/>
+          </a:xfrm>
+          <a:prstGeom prst="roundRect">
+            <a:avLst/>
+          </a:prstGeom>
+          <a:solidFill>
+            <a:srgbClr val="E8801A"/>
+          </a:solidFill>
+          <a:ln>
+            <a:noFill/>
+          </a:ln>
+          <a:effectLst/>
+        </p:spPr>
+        <p:style>
+          <a:lnRef idx="1">
+            <a:schemeClr val="accent1"/>
+          </a:lnRef>
+          <a:fillRef idx="3">
+            <a:schemeClr val="accent1"/>
+          </a:fillRef>
+          <a:effectRef idx="2">
+            <a:schemeClr val="accent1"/>
+          </a:effectRef>
+          <a:fontRef idx="minor">
+            <a:schemeClr val="lt1"/>
+          </a:fontRef>
+        </p:style>
+        <p:txBody>
+          <a:bodyPr rtlCol="0" anchor="ctr"/>
+          <a:lstStyle/>
+          <a:p>
+            <a:pPr algn="ctr"/>
+          </a:p>
+        </p:txBody>
+      </p:sp>
+      <p:sp>
+        <p:nvSpPr>
+          <p:cNvPr id="8" name="TextBox 7"/>
           <p:cNvSpPr txBox="1"/>
           <p:nvPr/>
         </p:nvSpPr>
         <p:spPr>
           <a:xfrm>
-            <a:off x="822960" y="1920240"/>
+            <a:off x="822960" y="1965960"/>
             <a:ext cx="4983480" cy="4206240"/>
           </a:xfrm>
           <a:prstGeom prst="rect">
@@ -9886,17 +10525,17 @@
           <a:p>
             <a:pPr>
               <a:spcAft>
-                <a:spcPts val="1000"/>
+                <a:spcPts val="1100"/>
               </a:spcAft>
             </a:pPr>
             <a:r>
               <a:rPr sz="1600" b="1" i="0">
                 <a:solidFill>
-                  <a:srgbClr val="2E3A80"/>
-                </a:solidFill>
-                <a:latin typeface="Montserrat"/>
-              </a:rPr>
-              <a:t>•  </a:t>
+                  <a:srgbClr val="E8801A"/>
+                </a:solidFill>
+                <a:latin typeface="Montserrat"/>
+              </a:rPr>
+              <a:t>▸  </a:t>
             </a:r>
             <a:r>
               <a:rPr sz="1600" b="0" i="0">
@@ -9905,23 +10544,23 @@
                 </a:solidFill>
                 <a:latin typeface="Montserrat"/>
               </a:rPr>
-              <a:t>Sin autorización ni comunicación</a:t>
+              <a:t>1,5 veces la presión de operación</a:t>
             </a:r>
           </a:p>
           <a:p>
             <a:pPr>
               <a:spcAft>
-                <a:spcPts val="1000"/>
+                <a:spcPts val="1100"/>
               </a:spcAft>
             </a:pPr>
             <a:r>
               <a:rPr sz="1600" b="1" i="0">
                 <a:solidFill>
-                  <a:srgbClr val="2E3A80"/>
-                </a:solidFill>
-                <a:latin typeface="Montserrat"/>
-              </a:rPr>
-              <a:t>•  </a:t>
+                  <a:srgbClr val="E8801A"/>
+                </a:solidFill>
+                <a:latin typeface="Montserrat"/>
+              </a:rPr>
+              <a:t>▸  </a:t>
             </a:r>
             <a:r>
               <a:rPr sz="1600" b="0" i="0">
@@ -9930,23 +10569,23 @@
                 </a:solidFill>
                 <a:latin typeface="Montserrat"/>
               </a:rPr>
-              <a:t>Guardar el certificado de instalación</a:t>
+              <a:t>Durante 10 minutos</a:t>
             </a:r>
           </a:p>
           <a:p>
             <a:pPr>
               <a:spcAft>
-                <a:spcPts val="1000"/>
+                <a:spcPts val="1100"/>
               </a:spcAft>
             </a:pPr>
             <a:r>
               <a:rPr sz="1600" b="1" i="0">
                 <a:solidFill>
-                  <a:srgbClr val="2E3A80"/>
-                </a:solidFill>
-                <a:latin typeface="Montserrat"/>
-              </a:rPr>
-              <a:t>•  </a:t>
+                  <a:srgbClr val="E8801A"/>
+                </a:solidFill>
+                <a:latin typeface="Montserrat"/>
+              </a:rPr>
+              <a:t>▸  </a:t>
             </a:r>
             <a:r>
               <a:rPr sz="1600" b="0" i="0">
@@ -9955,14 +10594,14 @@
                 </a:solidFill>
                 <a:latin typeface="Montserrat"/>
               </a:rPr>
-              <a:t>Revisión (no inspección), con la receptora</a:t>
-            </a:r>
-          </a:p>
-        </p:txBody>
-      </p:sp>
-      <p:sp>
-        <p:nvSpPr>
-          <p:cNvPr id="8" name="imgph" descr="IMGQ:installer reviewing home gas installation checklist"/>
+              <a:t>Aire, gas inerte o GLP en fase gas</a:t>
+            </a:r>
+          </a:p>
+        </p:txBody>
+      </p:sp>
+      <p:sp>
+        <p:nvSpPr>
+          <p:cNvPr id="9" name="imgph" descr="IMGQ:pressure gauge testing gas pipe installation"/>
           <p:cNvSpPr/>
           <p:nvPr/>
         </p:nvSpPr>
@@ -10008,7 +10647,7 @@
       </p:sp>
       <p:sp>
         <p:nvSpPr>
-          <p:cNvPr id="9" name="TextBox 8"/>
+          <p:cNvPr id="10" name="TextBox 9"/>
           <p:cNvSpPr txBox="1"/>
           <p:nvPr/>
         </p:nvSpPr>
@@ -10048,7 +10687,7 @@
                 </a:solidFill>
                 <a:latin typeface="Montserrat"/>
               </a:rPr>
-              <a:t>installer reviewing home gas installation checklist</a:t>
+              <a:t>pressure gauge testing gas pipe installation</a:t>
             </a:r>
           </a:p>
         </p:txBody>
@@ -10086,6 +10725,440 @@
             <a:avLst/>
           </a:prstGeom>
           <a:solidFill>
+            <a:srgbClr val="FFFFFF"/>
+          </a:solidFill>
+          <a:ln>
+            <a:noFill/>
+          </a:ln>
+          <a:effectLst/>
+        </p:spPr>
+        <p:style>
+          <a:lnRef idx="1">
+            <a:schemeClr val="accent1"/>
+          </a:lnRef>
+          <a:fillRef idx="3">
+            <a:schemeClr val="accent1"/>
+          </a:fillRef>
+          <a:effectRef idx="2">
+            <a:schemeClr val="accent1"/>
+          </a:effectRef>
+          <a:fontRef idx="minor">
+            <a:schemeClr val="lt1"/>
+          </a:fontRef>
+        </p:style>
+        <p:txBody>
+          <a:bodyPr rtlCol="0" anchor="ctr"/>
+          <a:lstStyle/>
+          <a:p>
+            <a:pPr algn="ctr"/>
+          </a:p>
+        </p:txBody>
+      </p:sp>
+      <p:sp>
+        <p:nvSpPr>
+          <p:cNvPr id="3" name="TextBox 2"/>
+          <p:cNvSpPr txBox="1"/>
+          <p:nvPr/>
+        </p:nvSpPr>
+        <p:spPr>
+          <a:xfrm>
+            <a:off x="10607040" y="320040"/>
+            <a:ext cx="1371600" cy="365760"/>
+          </a:xfrm>
+          <a:prstGeom prst="rect">
+            <a:avLst/>
+          </a:prstGeom>
+          <a:noFill/>
+        </p:spPr>
+        <p:txBody>
+          <a:bodyPr wrap="square">
+            <a:spAutoFit/>
+          </a:bodyPr>
+          <a:lstStyle/>
+          <a:p>
+            <a:pPr algn="r"/>
+            <a:r>
+              <a:rPr sz="1000" b="1" i="0">
+                <a:solidFill>
+                  <a:srgbClr val="64748B"/>
+                </a:solidFill>
+                <a:latin typeface="Montserrat"/>
+              </a:rPr>
+              <a:t>021 / 022</a:t>
+            </a:r>
+          </a:p>
+        </p:txBody>
+      </p:sp>
+      <p:sp>
+        <p:nvSpPr>
+          <p:cNvPr id="4" name="TextBox 3"/>
+          <p:cNvSpPr txBox="1"/>
+          <p:nvPr/>
+        </p:nvSpPr>
+        <p:spPr>
+          <a:xfrm>
+            <a:off x="457200" y="6419088"/>
+            <a:ext cx="8229600" cy="365760"/>
+          </a:xfrm>
+          <a:prstGeom prst="rect">
+            <a:avLst/>
+          </a:prstGeom>
+          <a:noFill/>
+        </p:spPr>
+        <p:txBody>
+          <a:bodyPr wrap="square">
+            <a:spAutoFit/>
+          </a:bodyPr>
+          <a:lstStyle/>
+          <a:p>
+            <a:r>
+              <a:rPr sz="900" b="0" i="0">
+                <a:solidFill>
+                  <a:srgbClr val="64748B"/>
+                </a:solidFill>
+                <a:latin typeface="Montserrat"/>
+              </a:rPr>
+              <a:t>Curso Gas B · Tema 03 · ITC-ICG 06 · Envases de GLP para uso propio</a:t>
+            </a:r>
+          </a:p>
+        </p:txBody>
+      </p:sp>
+      <p:sp>
+        <p:nvSpPr>
+          <p:cNvPr id="5" name="TextBox 4"/>
+          <p:cNvSpPr txBox="1"/>
+          <p:nvPr/>
+        </p:nvSpPr>
+        <p:spPr>
+          <a:xfrm>
+            <a:off x="822960" y="457200"/>
+            <a:ext cx="10058400" cy="365760"/>
+          </a:xfrm>
+          <a:prstGeom prst="rect">
+            <a:avLst/>
+          </a:prstGeom>
+          <a:noFill/>
+        </p:spPr>
+        <p:txBody>
+          <a:bodyPr wrap="square">
+            <a:spAutoFit/>
+          </a:bodyPr>
+          <a:lstStyle/>
+          <a:p>
+            <a:r>
+              <a:rPr sz="1300" b="1" i="0">
+                <a:solidFill>
+                  <a:srgbClr val="E8801A"/>
+                </a:solidFill>
+                <a:latin typeface="Montserrat"/>
+              </a:rPr>
+              <a:t>APARTADOS 3-4 · CIERRE DEL CICLO</a:t>
+            </a:r>
+          </a:p>
+        </p:txBody>
+      </p:sp>
+      <p:sp>
+        <p:nvSpPr>
+          <p:cNvPr id="6" name="TextBox 5"/>
+          <p:cNvSpPr txBox="1"/>
+          <p:nvPr/>
+        </p:nvSpPr>
+        <p:spPr>
+          <a:xfrm>
+            <a:off x="822960" y="868680"/>
+            <a:ext cx="10515600" cy="914400"/>
+          </a:xfrm>
+          <a:prstGeom prst="rect">
+            <a:avLst/>
+          </a:prstGeom>
+          <a:noFill/>
+        </p:spPr>
+        <p:txBody>
+          <a:bodyPr wrap="square">
+            <a:spAutoFit/>
+          </a:bodyPr>
+          <a:lstStyle/>
+          <a:p>
+            <a:r>
+              <a:rPr sz="2800" b="1" i="0">
+                <a:solidFill>
+                  <a:srgbClr val="1E2761"/>
+                </a:solidFill>
+                <a:latin typeface="Montserrat"/>
+              </a:rPr>
+              <a:t>Sin comunicación, y revisión</a:t>
+            </a:r>
+          </a:p>
+        </p:txBody>
+      </p:sp>
+      <p:sp>
+        <p:nvSpPr>
+          <p:cNvPr id="7" name="Rounded Rectangle 6"/>
+          <p:cNvSpPr/>
+          <p:nvPr/>
+        </p:nvSpPr>
+        <p:spPr>
+          <a:xfrm>
+            <a:off x="868680" y="1627632"/>
+            <a:ext cx="2011680" cy="73152"/>
+          </a:xfrm>
+          <a:prstGeom prst="roundRect">
+            <a:avLst/>
+          </a:prstGeom>
+          <a:solidFill>
+            <a:srgbClr val="E8801A"/>
+          </a:solidFill>
+          <a:ln>
+            <a:noFill/>
+          </a:ln>
+          <a:effectLst/>
+        </p:spPr>
+        <p:style>
+          <a:lnRef idx="1">
+            <a:schemeClr val="accent1"/>
+          </a:lnRef>
+          <a:fillRef idx="3">
+            <a:schemeClr val="accent1"/>
+          </a:fillRef>
+          <a:effectRef idx="2">
+            <a:schemeClr val="accent1"/>
+          </a:effectRef>
+          <a:fontRef idx="minor">
+            <a:schemeClr val="lt1"/>
+          </a:fontRef>
+        </p:style>
+        <p:txBody>
+          <a:bodyPr rtlCol="0" anchor="ctr"/>
+          <a:lstStyle/>
+          <a:p>
+            <a:pPr algn="ctr"/>
+          </a:p>
+        </p:txBody>
+      </p:sp>
+      <p:sp>
+        <p:nvSpPr>
+          <p:cNvPr id="8" name="TextBox 7"/>
+          <p:cNvSpPr txBox="1"/>
+          <p:nvPr/>
+        </p:nvSpPr>
+        <p:spPr>
+          <a:xfrm>
+            <a:off x="822960" y="1965960"/>
+            <a:ext cx="4983480" cy="4206240"/>
+          </a:xfrm>
+          <a:prstGeom prst="rect">
+            <a:avLst/>
+          </a:prstGeom>
+          <a:noFill/>
+        </p:spPr>
+        <p:txBody>
+          <a:bodyPr wrap="square">
+            <a:spAutoFit/>
+          </a:bodyPr>
+          <a:lstStyle/>
+          <a:p>
+            <a:pPr>
+              <a:spcAft>
+                <a:spcPts val="1100"/>
+              </a:spcAft>
+            </a:pPr>
+            <a:r>
+              <a:rPr sz="1600" b="1" i="0">
+                <a:solidFill>
+                  <a:srgbClr val="E8801A"/>
+                </a:solidFill>
+                <a:latin typeface="Montserrat"/>
+              </a:rPr>
+              <a:t>▸  </a:t>
+            </a:r>
+            <a:r>
+              <a:rPr sz="1600" b="0" i="0">
+                <a:solidFill>
+                  <a:srgbClr val="1B2330"/>
+                </a:solidFill>
+                <a:latin typeface="Montserrat"/>
+              </a:rPr>
+              <a:t>Sin autorización ni comunicación</a:t>
+            </a:r>
+          </a:p>
+          <a:p>
+            <a:pPr>
+              <a:spcAft>
+                <a:spcPts val="1100"/>
+              </a:spcAft>
+            </a:pPr>
+            <a:r>
+              <a:rPr sz="1600" b="1" i="0">
+                <a:solidFill>
+                  <a:srgbClr val="E8801A"/>
+                </a:solidFill>
+                <a:latin typeface="Montserrat"/>
+              </a:rPr>
+              <a:t>▸  </a:t>
+            </a:r>
+            <a:r>
+              <a:rPr sz="1600" b="0" i="0">
+                <a:solidFill>
+                  <a:srgbClr val="1B2330"/>
+                </a:solidFill>
+                <a:latin typeface="Montserrat"/>
+              </a:rPr>
+              <a:t>Guardar el certificado de instalación</a:t>
+            </a:r>
+          </a:p>
+          <a:p>
+            <a:pPr>
+              <a:spcAft>
+                <a:spcPts val="1100"/>
+              </a:spcAft>
+            </a:pPr>
+            <a:r>
+              <a:rPr sz="1600" b="1" i="0">
+                <a:solidFill>
+                  <a:srgbClr val="E8801A"/>
+                </a:solidFill>
+                <a:latin typeface="Montserrat"/>
+              </a:rPr>
+              <a:t>▸  </a:t>
+            </a:r>
+            <a:r>
+              <a:rPr sz="1600" b="0" i="0">
+                <a:solidFill>
+                  <a:srgbClr val="1B2330"/>
+                </a:solidFill>
+                <a:latin typeface="Montserrat"/>
+              </a:rPr>
+              <a:t>Revisión (no inspección), con la receptora</a:t>
+            </a:r>
+          </a:p>
+        </p:txBody>
+      </p:sp>
+      <p:sp>
+        <p:nvSpPr>
+          <p:cNvPr id="9" name="imgph" descr="IMGQ:installer reviewing home gas installation checklist"/>
+          <p:cNvSpPr/>
+          <p:nvPr/>
+        </p:nvSpPr>
+        <p:spPr>
+          <a:xfrm>
+            <a:off x="5806440" y="1051560"/>
+            <a:ext cx="5298947" cy="4629150"/>
+          </a:xfrm>
+          <a:prstGeom prst="roundRect">
+            <a:avLst/>
+          </a:prstGeom>
+          <a:solidFill>
+            <a:srgbClr val="F3F6FB"/>
+          </a:solidFill>
+          <a:ln w="12700">
+            <a:solidFill>
+              <a:srgbClr val="C7D2E6"/>
+            </a:solidFill>
+          </a:ln>
+          <a:effectLst/>
+        </p:spPr>
+        <p:style>
+          <a:lnRef idx="1">
+            <a:schemeClr val="accent1"/>
+          </a:lnRef>
+          <a:fillRef idx="3">
+            <a:schemeClr val="accent1"/>
+          </a:fillRef>
+          <a:effectRef idx="2">
+            <a:schemeClr val="accent1"/>
+          </a:effectRef>
+          <a:fontRef idx="minor">
+            <a:schemeClr val="lt1"/>
+          </a:fontRef>
+        </p:style>
+        <p:txBody>
+          <a:bodyPr rtlCol="0" anchor="ctr"/>
+          <a:lstStyle/>
+          <a:p>
+            <a:pPr algn="ctr"/>
+          </a:p>
+        </p:txBody>
+      </p:sp>
+      <p:sp>
+        <p:nvSpPr>
+          <p:cNvPr id="10" name="TextBox 9"/>
+          <p:cNvSpPr txBox="1"/>
+          <p:nvPr/>
+        </p:nvSpPr>
+        <p:spPr>
+          <a:xfrm>
+            <a:off x="6080760" y="2726055"/>
+            <a:ext cx="4750307" cy="1280160"/>
+          </a:xfrm>
+          <a:prstGeom prst="rect">
+            <a:avLst/>
+          </a:prstGeom>
+          <a:noFill/>
+        </p:spPr>
+        <p:txBody>
+          <a:bodyPr wrap="square">
+            <a:spAutoFit/>
+          </a:bodyPr>
+          <a:lstStyle/>
+          <a:p>
+            <a:pPr algn="ctr"/>
+            <a:r>
+              <a:rPr sz="1400" b="1" i="0">
+                <a:solidFill>
+                  <a:srgbClr val="64748B"/>
+                </a:solidFill>
+                <a:latin typeface="Montserrat"/>
+              </a:rPr>
+              <a:t>IMAGEN REALISTA</a:t>
+            </a:r>
+          </a:p>
+          <a:p>
+            <a:pPr algn="ctr"/>
+            <a:r>
+              <a:rPr sz="1100" b="0" i="1">
+                <a:solidFill>
+                  <a:srgbClr val="64748B"/>
+                </a:solidFill>
+                <a:latin typeface="Montserrat"/>
+              </a:rPr>
+              <a:t>installer reviewing home gas installation checklist</a:t>
+            </a:r>
+          </a:p>
+        </p:txBody>
+      </p:sp>
+    </p:spTree>
+  </p:cSld>
+  <p:clrMapOvr>
+    <a:masterClrMapping/>
+  </p:clrMapOvr>
+</p:sld>
+</file>
+
+<file path=ppt/slides/slide22.xml><?xml version="1.0" encoding="utf-8"?>
+<p:sld xmlns:a="http://schemas.openxmlformats.org/drawingml/2006/main" xmlns:p="http://schemas.openxmlformats.org/presentationml/2006/main" xmlns:r="http://schemas.openxmlformats.org/officeDocument/2006/relationships">
+  <p:cSld>
+    <p:spTree>
+      <p:nvGrpSpPr>
+        <p:cNvPr id="1" name=""/>
+        <p:cNvGrpSpPr/>
+        <p:nvPr/>
+      </p:nvGrpSpPr>
+      <p:grpSpPr/>
+      <p:sp>
+        <p:nvSpPr>
+          <p:cNvPr id="2" name="Rectangle 1"/>
+          <p:cNvSpPr/>
+          <p:nvPr/>
+        </p:nvSpPr>
+        <p:spPr>
+          <a:xfrm>
+            <a:off x="0" y="0"/>
+            <a:ext cx="12191695" cy="6858000"/>
+          </a:xfrm>
+          <a:prstGeom prst="rect">
+            <a:avLst/>
+          </a:prstGeom>
+          <a:solidFill>
             <a:srgbClr val="1E2761"/>
           </a:solidFill>
           <a:ln>
@@ -10140,7 +11213,7 @@
             <a:r>
               <a:rPr sz="1400" b="1" i="0">
                 <a:solidFill>
-                  <a:srgbClr val="CADCFC"/>
+                  <a:srgbClr val="F4A24C"/>
                 </a:solidFill>
                 <a:latin typeface="Montserrat"/>
               </a:rPr>
@@ -10151,13 +11224,57 @@
       </p:sp>
       <p:sp>
         <p:nvSpPr>
-          <p:cNvPr id="4" name="TextBox 3"/>
+          <p:cNvPr id="4" name="Rounded Rectangle 3"/>
+          <p:cNvSpPr/>
+          <p:nvPr/>
+        </p:nvSpPr>
+        <p:spPr>
+          <a:xfrm>
+            <a:off x="868680" y="1051560"/>
+            <a:ext cx="1463040" cy="82296"/>
+          </a:xfrm>
+          <a:prstGeom prst="roundRect">
+            <a:avLst/>
+          </a:prstGeom>
+          <a:solidFill>
+            <a:srgbClr val="E8801A"/>
+          </a:solidFill>
+          <a:ln>
+            <a:noFill/>
+          </a:ln>
+          <a:effectLst/>
+        </p:spPr>
+        <p:style>
+          <a:lnRef idx="1">
+            <a:schemeClr val="accent1"/>
+          </a:lnRef>
+          <a:fillRef idx="3">
+            <a:schemeClr val="accent1"/>
+          </a:fillRef>
+          <a:effectRef idx="2">
+            <a:schemeClr val="accent1"/>
+          </a:effectRef>
+          <a:fontRef idx="minor">
+            <a:schemeClr val="lt1"/>
+          </a:fontRef>
+        </p:style>
+        <p:txBody>
+          <a:bodyPr rtlCol="0" anchor="ctr"/>
+          <a:lstStyle/>
+          <a:p>
+            <a:pPr algn="ctr"/>
+          </a:p>
+        </p:txBody>
+      </p:sp>
+      <p:sp>
+        <p:nvSpPr>
+          <p:cNvPr id="5" name="TextBox 4"/>
           <p:cNvSpPr txBox="1"/>
           <p:nvPr/>
         </p:nvSpPr>
         <p:spPr>
           <a:xfrm>
-            <a:off x="822960" y="1143000"/>
+            <a:off x="822960" y="1234440"/>
             <a:ext cx="10515600" cy="1097280"/>
           </a:xfrm>
           <a:prstGeom prst="rect">
@@ -10185,14 +11302,14 @@
       </p:sp>
       <p:sp>
         <p:nvSpPr>
-          <p:cNvPr id="5" name="TextBox 4"/>
+          <p:cNvPr id="6" name="TextBox 5"/>
           <p:cNvSpPr txBox="1"/>
           <p:nvPr/>
         </p:nvSpPr>
         <p:spPr>
           <a:xfrm>
-            <a:off x="822960" y="2514600"/>
-            <a:ext cx="10515600" cy="2834640"/>
+            <a:off x="822960" y="2606040"/>
+            <a:ext cx="10515600" cy="2743200"/>
           </a:xfrm>
           <a:prstGeom prst="rect">
             <a:avLst/>
@@ -10213,7 +11330,7 @@
             <a:r>
               <a:rPr sz="2000" b="1" i="0">
                 <a:solidFill>
-                  <a:srgbClr val="CADCFC"/>
+                  <a:srgbClr val="F4A24C"/>
                 </a:solidFill>
                 <a:latin typeface="Montserrat"/>
               </a:rPr>
@@ -10238,7 +11355,7 @@
             <a:r>
               <a:rPr sz="2000" b="1" i="0">
                 <a:solidFill>
-                  <a:srgbClr val="CADCFC"/>
+                  <a:srgbClr val="F4A24C"/>
                 </a:solidFill>
                 <a:latin typeface="Montserrat"/>
               </a:rPr>
@@ -10263,7 +11380,7 @@
             <a:r>
               <a:rPr sz="2000" b="1" i="0">
                 <a:solidFill>
-                  <a:srgbClr val="CADCFC"/>
+                  <a:srgbClr val="F4A24C"/>
                 </a:solidFill>
                 <a:latin typeface="Montserrat"/>
               </a:rPr>
@@ -10288,7 +11405,7 @@
             <a:r>
               <a:rPr sz="2000" b="1" i="0">
                 <a:solidFill>
-                  <a:srgbClr val="CADCFC"/>
+                  <a:srgbClr val="F4A24C"/>
                 </a:solidFill>
                 <a:latin typeface="Montserrat"/>
               </a:rPr>
@@ -10308,20 +11425,20 @@
       </p:sp>
       <p:sp>
         <p:nvSpPr>
-          <p:cNvPr id="6" name="Rounded Rectangle 5"/>
+          <p:cNvPr id="7" name="Rounded Rectangle 6"/>
           <p:cNvSpPr/>
           <p:nvPr/>
         </p:nvSpPr>
         <p:spPr>
           <a:xfrm>
             <a:off x="822960" y="5532120"/>
-            <a:ext cx="10515600" cy="777240"/>
+            <a:ext cx="10515600" cy="822960"/>
           </a:xfrm>
           <a:prstGeom prst="roundRect">
             <a:avLst/>
           </a:prstGeom>
           <a:solidFill>
-            <a:srgbClr val="2E3A80"/>
+            <a:srgbClr val="E8801A"/>
           </a:solidFill>
           <a:ln>
             <a:noFill/>
@@ -10352,13 +11469,13 @@
       </p:sp>
       <p:sp>
         <p:nvSpPr>
-          <p:cNvPr id="7" name="TextBox 6"/>
+          <p:cNvPr id="8" name="TextBox 7"/>
           <p:cNvSpPr txBox="1"/>
           <p:nvPr/>
         </p:nvSpPr>
         <p:spPr>
           <a:xfrm>
-            <a:off x="1051560" y="5605272"/>
+            <a:off x="1051560" y="5623560"/>
             <a:ext cx="10058400" cy="640080"/>
           </a:xfrm>
           <a:prstGeom prst="rect">
@@ -10375,7 +11492,7 @@
             <a:r>
               <a:rPr sz="1500" b="1" i="1">
                 <a:solidFill>
-                  <a:srgbClr val="CADCFC"/>
+                  <a:srgbClr val="1E2761"/>
                 </a:solidFill>
                 <a:latin typeface="Montserrat"/>
               </a:rPr>
@@ -10476,7 +11593,7 @@
                 </a:solidFill>
                 <a:latin typeface="Montserrat"/>
               </a:rPr>
-              <a:t>003 / 021</a:t>
+              <a:t>003 / 022</a:t>
             </a:r>
           </a:p>
         </p:txBody>
@@ -10523,7 +11640,7 @@
         </p:nvSpPr>
         <p:spPr>
           <a:xfrm>
-            <a:off x="822960" y="457200"/>
+            <a:off x="822960" y="502920"/>
             <a:ext cx="8229600" cy="365760"/>
           </a:xfrm>
           <a:prstGeom prst="rect">
@@ -10538,13 +11655,13 @@
           <a:lstStyle/>
           <a:p>
             <a:r>
-              <a:rPr sz="1200" b="1" i="0">
-                <a:solidFill>
-                  <a:srgbClr val="64748B"/>
-                </a:solidFill>
-                <a:latin typeface="Montserrat"/>
-              </a:rPr>
-              <a:t>APARTADO 1 · OBJETO</a:t>
+              <a:rPr sz="1300" b="1" i="0">
+                <a:solidFill>
+                  <a:srgbClr val="E8801A"/>
+                </a:solidFill>
+                <a:latin typeface="Montserrat"/>
+              </a:rPr>
+              <a:t>PARTES DE ESTE VÍDEO</a:t>
             </a:r>
           </a:p>
         </p:txBody>
@@ -10557,7 +11674,7 @@
         </p:nvSpPr>
         <p:spPr>
           <a:xfrm>
-            <a:off x="822960" y="868680"/>
+            <a:off x="822960" y="914400"/>
             <a:ext cx="10515600" cy="914400"/>
           </a:xfrm>
           <a:prstGeom prst="rect">
@@ -10578,130 +11695,30 @@
                 </a:solidFill>
                 <a:latin typeface="Montserrat"/>
               </a:rPr>
-              <a:t>¿Qué entra en esta ITC?</a:t>
-            </a:r>
-          </a:p>
-        </p:txBody>
-      </p:sp>
-      <p:sp>
-        <p:nvSpPr>
-          <p:cNvPr id="7" name="TextBox 6"/>
-          <p:cNvSpPr txBox="1"/>
-          <p:nvPr/>
-        </p:nvSpPr>
-        <p:spPr>
-          <a:xfrm>
-            <a:off x="822960" y="1920240"/>
-            <a:ext cx="4983480" cy="4206240"/>
-          </a:xfrm>
-          <a:prstGeom prst="rect">
-            <a:avLst/>
-          </a:prstGeom>
-          <a:noFill/>
-        </p:spPr>
-        <p:txBody>
-          <a:bodyPr wrap="square">
-            <a:spAutoFit/>
-          </a:bodyPr>
-          <a:lstStyle/>
-          <a:p>
-            <a:pPr>
-              <a:spcAft>
-                <a:spcPts val="1000"/>
-              </a:spcAft>
-            </a:pPr>
-            <a:r>
-              <a:rPr sz="1600" b="1" i="0">
-                <a:solidFill>
-                  <a:srgbClr val="2E3A80"/>
-                </a:solidFill>
-                <a:latin typeface="Montserrat"/>
-              </a:rPr>
-              <a:t>•  </a:t>
-            </a:r>
-            <a:r>
-              <a:rPr sz="1600" b="0" i="0">
-                <a:solidFill>
-                  <a:srgbClr val="1B2330"/>
-                </a:solidFill>
-                <a:latin typeface="Montserrat"/>
-              </a:rPr>
-              <a:t>Envases de GLP: butano y propano</a:t>
-            </a:r>
-          </a:p>
-          <a:p>
-            <a:pPr>
-              <a:spcAft>
-                <a:spcPts val="1000"/>
-              </a:spcAft>
-            </a:pPr>
-            <a:r>
-              <a:rPr sz="1600" b="1" i="0">
-                <a:solidFill>
-                  <a:srgbClr val="2E3A80"/>
-                </a:solidFill>
-                <a:latin typeface="Montserrat"/>
-              </a:rPr>
-              <a:t>•  </a:t>
-            </a:r>
-            <a:r>
-              <a:rPr sz="1600" b="0" i="0">
-                <a:solidFill>
-                  <a:srgbClr val="1B2330"/>
-                </a:solidFill>
-                <a:latin typeface="Montserrat"/>
-              </a:rPr>
-              <a:t>Carga unitaria &gt; 3 kg</a:t>
-            </a:r>
-          </a:p>
-          <a:p>
-            <a:pPr>
-              <a:spcAft>
-                <a:spcPts val="1000"/>
-              </a:spcAft>
-            </a:pPr>
-            <a:r>
-              <a:rPr sz="1600" b="1" i="0">
-                <a:solidFill>
-                  <a:srgbClr val="2E3A80"/>
-                </a:solidFill>
-                <a:latin typeface="Montserrat"/>
-              </a:rPr>
-              <a:t>•  </a:t>
-            </a:r>
-            <a:r>
-              <a:rPr sz="1600" b="0" i="0">
-                <a:solidFill>
-                  <a:srgbClr val="1B2330"/>
-                </a:solidFill>
-                <a:latin typeface="Montserrat"/>
-              </a:rPr>
-              <a:t>Alimentan una instalación receptora</a:t>
-            </a:r>
-          </a:p>
-        </p:txBody>
-      </p:sp>
-      <p:sp>
-        <p:nvSpPr>
-          <p:cNvPr id="8" name="imgph" descr="IMGQ:row of propane gas cylinders outdoors"/>
+              <a:t>En este vídeo</a:t>
+            </a:r>
+          </a:p>
+        </p:txBody>
+      </p:sp>
+      <p:sp>
+        <p:nvSpPr>
+          <p:cNvPr id="7" name="Rounded Rectangle 6"/>
           <p:cNvSpPr/>
           <p:nvPr/>
         </p:nvSpPr>
         <p:spPr>
           <a:xfrm>
-            <a:off x="5806440" y="1051560"/>
-            <a:ext cx="5298947" cy="4629150"/>
+            <a:off x="868680" y="1673352"/>
+            <a:ext cx="2011680" cy="73152"/>
           </a:xfrm>
           <a:prstGeom prst="roundRect">
             <a:avLst/>
           </a:prstGeom>
           <a:solidFill>
-            <a:srgbClr val="F3F6FB"/>
+            <a:srgbClr val="E8801A"/>
           </a:solidFill>
-          <a:ln w="12700">
-            <a:solidFill>
-              <a:srgbClr val="C7D2E6"/>
-            </a:solidFill>
+          <a:ln>
+            <a:noFill/>
           </a:ln>
           <a:effectLst/>
         </p:spPr>
@@ -10729,14 +11746,14 @@
       </p:sp>
       <p:sp>
         <p:nvSpPr>
-          <p:cNvPr id="9" name="TextBox 8"/>
+          <p:cNvPr id="8" name="TextBox 7"/>
           <p:cNvSpPr txBox="1"/>
           <p:nvPr/>
         </p:nvSpPr>
         <p:spPr>
           <a:xfrm>
-            <a:off x="6080760" y="2726055"/>
-            <a:ext cx="4750307" cy="1280160"/>
+            <a:off x="822960" y="2103120"/>
+            <a:ext cx="10515600" cy="4023360"/>
           </a:xfrm>
           <a:prstGeom prst="rect">
             <a:avLst/>
@@ -10749,27 +11766,228 @@
           </a:bodyPr>
           <a:lstStyle/>
           <a:p>
-            <a:pPr algn="ctr"/>
-            <a:r>
-              <a:rPr sz="1400" b="1" i="0">
-                <a:solidFill>
-                  <a:srgbClr val="64748B"/>
-                </a:solidFill>
-                <a:latin typeface="Montserrat"/>
-              </a:rPr>
-              <a:t>IMAGEN REALISTA</a:t>
-            </a:r>
-          </a:p>
-          <a:p>
-            <a:pPr algn="ctr"/>
-            <a:r>
-              <a:rPr sz="1100" b="0" i="1">
-                <a:solidFill>
-                  <a:srgbClr val="64748B"/>
-                </a:solidFill>
-                <a:latin typeface="Montserrat"/>
-              </a:rPr>
-              <a:t>row of propane gas cylinders outdoors</a:t>
+            <a:pPr>
+              <a:spcAft>
+                <a:spcPts val="900"/>
+              </a:spcAft>
+            </a:pPr>
+            <a:r>
+              <a:rPr sz="1800" b="1" i="0">
+                <a:solidFill>
+                  <a:srgbClr val="E8801A"/>
+                </a:solidFill>
+                <a:latin typeface="Montserrat"/>
+              </a:rPr>
+              <a:t>01   </a:t>
+            </a:r>
+            <a:r>
+              <a:rPr sz="1700" b="0" i="0">
+                <a:solidFill>
+                  <a:srgbClr val="1B2330"/>
+                </a:solidFill>
+                <a:latin typeface="Montserrat"/>
+              </a:rPr>
+              <a:t>Apartado 1</a:t>
+            </a:r>
+          </a:p>
+          <a:p>
+            <a:pPr>
+              <a:spcAft>
+                <a:spcPts val="900"/>
+              </a:spcAft>
+            </a:pPr>
+            <a:r>
+              <a:rPr sz="1800" b="1" i="0">
+                <a:solidFill>
+                  <a:srgbClr val="E8801A"/>
+                </a:solidFill>
+                <a:latin typeface="Montserrat"/>
+              </a:rPr>
+              <a:t>02   </a:t>
+            </a:r>
+            <a:r>
+              <a:rPr sz="1700" b="0" i="0">
+                <a:solidFill>
+                  <a:srgbClr val="1B2330"/>
+                </a:solidFill>
+                <a:latin typeface="Montserrat"/>
+              </a:rPr>
+              <a:t>Apartado 2</a:t>
+            </a:r>
+          </a:p>
+          <a:p>
+            <a:pPr>
+              <a:spcAft>
+                <a:spcPts val="900"/>
+              </a:spcAft>
+            </a:pPr>
+            <a:r>
+              <a:rPr sz="1800" b="1" i="0">
+                <a:solidFill>
+                  <a:srgbClr val="E8801A"/>
+                </a:solidFill>
+                <a:latin typeface="Montserrat"/>
+              </a:rPr>
+              <a:t>03   </a:t>
+            </a:r>
+            <a:r>
+              <a:rPr sz="1700" b="0" i="0">
+                <a:solidFill>
+                  <a:srgbClr val="1B2330"/>
+                </a:solidFill>
+                <a:latin typeface="Montserrat"/>
+              </a:rPr>
+              <a:t>Apartado 2.1</a:t>
+            </a:r>
+          </a:p>
+          <a:p>
+            <a:pPr>
+              <a:spcAft>
+                <a:spcPts val="900"/>
+              </a:spcAft>
+            </a:pPr>
+            <a:r>
+              <a:rPr sz="1800" b="1" i="0">
+                <a:solidFill>
+                  <a:srgbClr val="E8801A"/>
+                </a:solidFill>
+                <a:latin typeface="Montserrat"/>
+              </a:rPr>
+              <a:t>04   </a:t>
+            </a:r>
+            <a:r>
+              <a:rPr sz="1700" b="0" i="0">
+                <a:solidFill>
+                  <a:srgbClr val="1B2330"/>
+                </a:solidFill>
+                <a:latin typeface="Montserrat"/>
+              </a:rPr>
+              <a:t>Apartado 2.2</a:t>
+            </a:r>
+          </a:p>
+          <a:p>
+            <a:pPr>
+              <a:spcAft>
+                <a:spcPts val="900"/>
+              </a:spcAft>
+            </a:pPr>
+            <a:r>
+              <a:rPr sz="1800" b="1" i="0">
+                <a:solidFill>
+                  <a:srgbClr val="E8801A"/>
+                </a:solidFill>
+                <a:latin typeface="Montserrat"/>
+              </a:rPr>
+              <a:t>05   </a:t>
+            </a:r>
+            <a:r>
+              <a:rPr sz="1700" b="0" i="0">
+                <a:solidFill>
+                  <a:srgbClr val="1B2330"/>
+                </a:solidFill>
+                <a:latin typeface="Montserrat"/>
+              </a:rPr>
+              <a:t>Apartado 2.2.2</a:t>
+            </a:r>
+          </a:p>
+          <a:p>
+            <a:pPr>
+              <a:spcAft>
+                <a:spcPts val="900"/>
+              </a:spcAft>
+            </a:pPr>
+            <a:r>
+              <a:rPr sz="1800" b="1" i="0">
+                <a:solidFill>
+                  <a:srgbClr val="E8801A"/>
+                </a:solidFill>
+                <a:latin typeface="Montserrat"/>
+              </a:rPr>
+              <a:t>06   </a:t>
+            </a:r>
+            <a:r>
+              <a:rPr sz="1700" b="0" i="0">
+                <a:solidFill>
+                  <a:srgbClr val="1B2330"/>
+                </a:solidFill>
+                <a:latin typeface="Montserrat"/>
+              </a:rPr>
+              <a:t>Apartado 2.2.3</a:t>
+            </a:r>
+          </a:p>
+          <a:p>
+            <a:pPr>
+              <a:spcAft>
+                <a:spcPts val="900"/>
+              </a:spcAft>
+            </a:pPr>
+            <a:r>
+              <a:rPr sz="1800" b="1" i="0">
+                <a:solidFill>
+                  <a:srgbClr val="E8801A"/>
+                </a:solidFill>
+                <a:latin typeface="Montserrat"/>
+              </a:rPr>
+              <a:t>07   </a:t>
+            </a:r>
+            <a:r>
+              <a:rPr sz="1700" b="0" i="0">
+                <a:solidFill>
+                  <a:srgbClr val="1B2330"/>
+                </a:solidFill>
+                <a:latin typeface="Montserrat"/>
+              </a:rPr>
+              <a:t>Apartado 2.2.4</a:t>
+            </a:r>
+          </a:p>
+          <a:p>
+            <a:pPr>
+              <a:spcAft>
+                <a:spcPts val="900"/>
+              </a:spcAft>
+            </a:pPr>
+            <a:r>
+              <a:rPr sz="1800" b="1" i="0">
+                <a:solidFill>
+                  <a:srgbClr val="E8801A"/>
+                </a:solidFill>
+                <a:latin typeface="Montserrat"/>
+              </a:rPr>
+              <a:t>08   </a:t>
+            </a:r>
+            <a:r>
+              <a:rPr sz="1700" b="0" i="0">
+                <a:solidFill>
+                  <a:srgbClr val="1B2330"/>
+                </a:solidFill>
+                <a:latin typeface="Montserrat"/>
+              </a:rPr>
+              <a:t>Apartado 3</a:t>
+            </a:r>
+          </a:p>
+          <a:p>
+            <a:pPr>
+              <a:spcAft>
+                <a:spcPts val="900"/>
+              </a:spcAft>
+            </a:pPr>
+            <a:r>
+              <a:rPr sz="1800" b="1" i="0">
+                <a:solidFill>
+                  <a:srgbClr val="E8801A"/>
+                </a:solidFill>
+                <a:latin typeface="Montserrat"/>
+              </a:rPr>
+              <a:t>09   </a:t>
+            </a:r>
+            <a:r>
+              <a:rPr sz="1700" b="0" i="0">
+                <a:solidFill>
+                  <a:srgbClr val="1B2330"/>
+                </a:solidFill>
+                <a:latin typeface="Montserrat"/>
+              </a:rPr>
+              <a:t>Apartado 3.3</a:t>
             </a:r>
           </a:p>
         </p:txBody>
@@ -10866,7 +12084,7 @@
                 </a:solidFill>
                 <a:latin typeface="Montserrat"/>
               </a:rPr>
-              <a:t>004 / 021</a:t>
+              <a:t>004 / 022</a:t>
             </a:r>
           </a:p>
         </p:txBody>
@@ -10914,7 +12132,7 @@
         <p:spPr>
           <a:xfrm>
             <a:off x="822960" y="457200"/>
-            <a:ext cx="8229600" cy="365760"/>
+            <a:ext cx="10058400" cy="365760"/>
           </a:xfrm>
           <a:prstGeom prst="rect">
             <a:avLst/>
@@ -10928,13 +12146,13 @@
           <a:lstStyle/>
           <a:p>
             <a:r>
-              <a:rPr sz="1200" b="1" i="0">
-                <a:solidFill>
-                  <a:srgbClr val="64748B"/>
-                </a:solidFill>
-                <a:latin typeface="Montserrat"/>
-              </a:rPr>
-              <a:t>APARTADO 2 · DOS GRUPOS</a:t>
+              <a:rPr sz="1300" b="1" i="0">
+                <a:solidFill>
+                  <a:srgbClr val="E8801A"/>
+                </a:solidFill>
+                <a:latin typeface="Montserrat"/>
+              </a:rPr>
+              <a:t>APARTADO 1 · OBJETO</a:t>
             </a:r>
           </a:p>
         </p:txBody>
@@ -10962,26 +12180,70 @@
           <a:lstStyle/>
           <a:p>
             <a:r>
-              <a:rPr sz="2700" b="1" i="0">
+              <a:rPr sz="2800" b="1" i="0">
                 <a:solidFill>
                   <a:srgbClr val="1E2761"/>
                 </a:solidFill>
                 <a:latin typeface="Montserrat"/>
               </a:rPr>
-              <a:t>Todo se parte por el tamaño</a:t>
-            </a:r>
-          </a:p>
-        </p:txBody>
-      </p:sp>
-      <p:sp>
-        <p:nvSpPr>
-          <p:cNvPr id="7" name="TextBox 6"/>
+              <a:t>¿Qué entra en esta ITC?</a:t>
+            </a:r>
+          </a:p>
+        </p:txBody>
+      </p:sp>
+      <p:sp>
+        <p:nvSpPr>
+          <p:cNvPr id="7" name="Rounded Rectangle 6"/>
+          <p:cNvSpPr/>
+          <p:nvPr/>
+        </p:nvSpPr>
+        <p:spPr>
+          <a:xfrm>
+            <a:off x="868680" y="1627632"/>
+            <a:ext cx="2011680" cy="73152"/>
+          </a:xfrm>
+          <a:prstGeom prst="roundRect">
+            <a:avLst/>
+          </a:prstGeom>
+          <a:solidFill>
+            <a:srgbClr val="E8801A"/>
+          </a:solidFill>
+          <a:ln>
+            <a:noFill/>
+          </a:ln>
+          <a:effectLst/>
+        </p:spPr>
+        <p:style>
+          <a:lnRef idx="1">
+            <a:schemeClr val="accent1"/>
+          </a:lnRef>
+          <a:fillRef idx="3">
+            <a:schemeClr val="accent1"/>
+          </a:fillRef>
+          <a:effectRef idx="2">
+            <a:schemeClr val="accent1"/>
+          </a:effectRef>
+          <a:fontRef idx="minor">
+            <a:schemeClr val="lt1"/>
+          </a:fontRef>
+        </p:style>
+        <p:txBody>
+          <a:bodyPr rtlCol="0" anchor="ctr"/>
+          <a:lstStyle/>
+          <a:p>
+            <a:pPr algn="ctr"/>
+          </a:p>
+        </p:txBody>
+      </p:sp>
+      <p:sp>
+        <p:nvSpPr>
+          <p:cNvPr id="8" name="TextBox 7"/>
           <p:cNvSpPr txBox="1"/>
           <p:nvPr/>
         </p:nvSpPr>
         <p:spPr>
           <a:xfrm>
-            <a:off x="822960" y="1920240"/>
+            <a:off x="822960" y="1965960"/>
             <a:ext cx="4983480" cy="4206240"/>
           </a:xfrm>
           <a:prstGeom prst="rect">
@@ -10997,17 +12259,17 @@
           <a:p>
             <a:pPr>
               <a:spcAft>
-                <a:spcPts val="1000"/>
+                <a:spcPts val="1100"/>
               </a:spcAft>
             </a:pPr>
             <a:r>
               <a:rPr sz="1600" b="1" i="0">
                 <a:solidFill>
-                  <a:srgbClr val="2E3A80"/>
-                </a:solidFill>
-                <a:latin typeface="Montserrat"/>
-              </a:rPr>
-              <a:t>•  </a:t>
+                  <a:srgbClr val="E8801A"/>
+                </a:solidFill>
+                <a:latin typeface="Montserrat"/>
+              </a:rPr>
+              <a:t>▸  </a:t>
             </a:r>
             <a:r>
               <a:rPr sz="1600" b="0" i="0">
@@ -11016,23 +12278,23 @@
                 </a:solidFill>
                 <a:latin typeface="Montserrat"/>
               </a:rPr>
-              <a:t>Envases ≤ 15 kg → tope 300 kg</a:t>
+              <a:t>Envases de GLP: butano y propano</a:t>
             </a:r>
           </a:p>
           <a:p>
             <a:pPr>
               <a:spcAft>
-                <a:spcPts val="1000"/>
+                <a:spcPts val="1100"/>
               </a:spcAft>
             </a:pPr>
             <a:r>
               <a:rPr sz="1600" b="1" i="0">
                 <a:solidFill>
-                  <a:srgbClr val="2E3A80"/>
-                </a:solidFill>
-                <a:latin typeface="Montserrat"/>
-              </a:rPr>
-              <a:t>•  </a:t>
+                  <a:srgbClr val="E8801A"/>
+                </a:solidFill>
+                <a:latin typeface="Montserrat"/>
+              </a:rPr>
+              <a:t>▸  </a:t>
             </a:r>
             <a:r>
               <a:rPr sz="1600" b="0" i="0">
@@ -11041,23 +12303,23 @@
                 </a:solidFill>
                 <a:latin typeface="Montserrat"/>
               </a:rPr>
-              <a:t>Envases &gt; 15 kg → tope 1.000 kg</a:t>
+              <a:t>Carga unitaria &gt; 3 kg</a:t>
             </a:r>
           </a:p>
           <a:p>
             <a:pPr>
               <a:spcAft>
-                <a:spcPts val="1000"/>
+                <a:spcPts val="1100"/>
               </a:spcAft>
             </a:pPr>
             <a:r>
               <a:rPr sz="1600" b="1" i="0">
                 <a:solidFill>
-                  <a:srgbClr val="2E3A80"/>
-                </a:solidFill>
-                <a:latin typeface="Montserrat"/>
-              </a:rPr>
-              <a:t>•  </a:t>
+                  <a:srgbClr val="E8801A"/>
+                </a:solidFill>
+                <a:latin typeface="Montserrat"/>
+              </a:rPr>
+              <a:t>▸  </a:t>
             </a:r>
             <a:r>
               <a:rPr sz="1600" b="0" i="0">
@@ -11066,14 +12328,14 @@
                 </a:solidFill>
                 <a:latin typeface="Montserrat"/>
               </a:rPr>
-              <a:t>Cada grupo, sus propias reglas</a:t>
-            </a:r>
-          </a:p>
-        </p:txBody>
-      </p:sp>
-      <p:sp>
-        <p:nvSpPr>
-          <p:cNvPr id="8" name="imgph" descr="IMGQ:small butane cylinder next to large propane tank"/>
+              <a:t>Alimentan una instalación receptora</a:t>
+            </a:r>
+          </a:p>
+        </p:txBody>
+      </p:sp>
+      <p:sp>
+        <p:nvSpPr>
+          <p:cNvPr id="9" name="imgph" descr="IMGQ:row of propane gas cylinders outdoors"/>
           <p:cNvSpPr/>
           <p:nvPr/>
         </p:nvSpPr>
@@ -11119,7 +12381,7 @@
       </p:sp>
       <p:sp>
         <p:nvSpPr>
-          <p:cNvPr id="9" name="TextBox 8"/>
+          <p:cNvPr id="10" name="TextBox 9"/>
           <p:cNvSpPr txBox="1"/>
           <p:nvPr/>
         </p:nvSpPr>
@@ -11159,7 +12421,7 @@
                 </a:solidFill>
                 <a:latin typeface="Montserrat"/>
               </a:rPr>
-              <a:t>small butane cylinder next to large propane tank</a:t>
+              <a:t>row of propane gas cylinders outdoors</a:t>
             </a:r>
           </a:p>
         </p:txBody>
@@ -11256,7 +12518,7 @@
                 </a:solidFill>
                 <a:latin typeface="Montserrat"/>
               </a:rPr>
-              <a:t>005 / 021</a:t>
+              <a:t>005 / 022</a:t>
             </a:r>
           </a:p>
         </p:txBody>
@@ -11304,7 +12566,7 @@
         <p:spPr>
           <a:xfrm>
             <a:off x="822960" y="457200"/>
-            <a:ext cx="8229600" cy="365760"/>
+            <a:ext cx="10058400" cy="365760"/>
           </a:xfrm>
           <a:prstGeom prst="rect">
             <a:avLst/>
@@ -11318,13 +12580,13 @@
           <a:lstStyle/>
           <a:p>
             <a:r>
-              <a:rPr sz="1200" b="1" i="0">
-                <a:solidFill>
-                  <a:srgbClr val="64748B"/>
-                </a:solidFill>
-                <a:latin typeface="Montserrat"/>
-              </a:rPr>
-              <a:t>APARTADO 2.1 · HASTA 15 KG</a:t>
+              <a:rPr sz="1300" b="1" i="0">
+                <a:solidFill>
+                  <a:srgbClr val="E8801A"/>
+                </a:solidFill>
+                <a:latin typeface="Montserrat"/>
+              </a:rPr>
+              <a:t>APARTADO 2 · DOS GRUPOS</a:t>
             </a:r>
           </a:p>
         </p:txBody>
@@ -11352,26 +12614,70 @@
           <a:lstStyle/>
           <a:p>
             <a:r>
-              <a:rPr sz="2700" b="1" i="0">
+              <a:rPr sz="2800" b="1" i="0">
                 <a:solidFill>
                   <a:srgbClr val="1E2761"/>
                 </a:solidFill>
                 <a:latin typeface="Montserrat"/>
               </a:rPr>
-              <a:t>El tope de los 300 kg</a:t>
-            </a:r>
-          </a:p>
-        </p:txBody>
-      </p:sp>
-      <p:sp>
-        <p:nvSpPr>
-          <p:cNvPr id="7" name="TextBox 6"/>
+              <a:t>Todo se parte por el tamaño</a:t>
+            </a:r>
+          </a:p>
+        </p:txBody>
+      </p:sp>
+      <p:sp>
+        <p:nvSpPr>
+          <p:cNvPr id="7" name="Rounded Rectangle 6"/>
+          <p:cNvSpPr/>
+          <p:nvPr/>
+        </p:nvSpPr>
+        <p:spPr>
+          <a:xfrm>
+            <a:off x="868680" y="1627632"/>
+            <a:ext cx="2011680" cy="73152"/>
+          </a:xfrm>
+          <a:prstGeom prst="roundRect">
+            <a:avLst/>
+          </a:prstGeom>
+          <a:solidFill>
+            <a:srgbClr val="E8801A"/>
+          </a:solidFill>
+          <a:ln>
+            <a:noFill/>
+          </a:ln>
+          <a:effectLst/>
+        </p:spPr>
+        <p:style>
+          <a:lnRef idx="1">
+            <a:schemeClr val="accent1"/>
+          </a:lnRef>
+          <a:fillRef idx="3">
+            <a:schemeClr val="accent1"/>
+          </a:fillRef>
+          <a:effectRef idx="2">
+            <a:schemeClr val="accent1"/>
+          </a:effectRef>
+          <a:fontRef idx="minor">
+            <a:schemeClr val="lt1"/>
+          </a:fontRef>
+        </p:style>
+        <p:txBody>
+          <a:bodyPr rtlCol="0" anchor="ctr"/>
+          <a:lstStyle/>
+          <a:p>
+            <a:pPr algn="ctr"/>
+          </a:p>
+        </p:txBody>
+      </p:sp>
+      <p:sp>
+        <p:nvSpPr>
+          <p:cNvPr id="8" name="TextBox 7"/>
           <p:cNvSpPr txBox="1"/>
           <p:nvPr/>
         </p:nvSpPr>
         <p:spPr>
           <a:xfrm>
-            <a:off x="822960" y="1920240"/>
+            <a:off x="822960" y="1965960"/>
             <a:ext cx="4983480" cy="4206240"/>
           </a:xfrm>
           <a:prstGeom prst="rect">
@@ -11387,17 +12693,17 @@
           <a:p>
             <a:pPr>
               <a:spcAft>
-                <a:spcPts val="1000"/>
+                <a:spcPts val="1100"/>
               </a:spcAft>
             </a:pPr>
             <a:r>
               <a:rPr sz="1600" b="1" i="0">
                 <a:solidFill>
-                  <a:srgbClr val="2E3A80"/>
-                </a:solidFill>
-                <a:latin typeface="Montserrat"/>
-              </a:rPr>
-              <a:t>•  </a:t>
+                  <a:srgbClr val="E8801A"/>
+                </a:solidFill>
+                <a:latin typeface="Montserrat"/>
+              </a:rPr>
+              <a:t>▸  </a:t>
             </a:r>
             <a:r>
               <a:rPr sz="1600" b="0" i="0">
@@ -11406,23 +12712,23 @@
                 </a:solidFill>
                 <a:latin typeface="Montserrat"/>
               </a:rPr>
-              <a:t>Suma de TODOS los envases</a:t>
+              <a:t>Envases ≤ 15 kg → tope 300 kg</a:t>
             </a:r>
           </a:p>
           <a:p>
             <a:pPr>
               <a:spcAft>
-                <a:spcPts val="1000"/>
+                <a:spcPts val="1100"/>
               </a:spcAft>
             </a:pPr>
             <a:r>
               <a:rPr sz="1600" b="1" i="0">
                 <a:solidFill>
-                  <a:srgbClr val="2E3A80"/>
-                </a:solidFill>
-                <a:latin typeface="Montserrat"/>
-              </a:rPr>
-              <a:t>•  </a:t>
+                  <a:srgbClr val="E8801A"/>
+                </a:solidFill>
+                <a:latin typeface="Montserrat"/>
+              </a:rPr>
+              <a:t>▸  </a:t>
             </a:r>
             <a:r>
               <a:rPr sz="1600" b="0" i="0">
@@ -11431,23 +12737,23 @@
                 </a:solidFill>
                 <a:latin typeface="Montserrat"/>
               </a:rPr>
-              <a:t>Llenos y vacíos cuentan igual</a:t>
+              <a:t>Envases &gt; 15 kg → tope 1.000 kg</a:t>
             </a:r>
           </a:p>
           <a:p>
             <a:pPr>
               <a:spcAft>
-                <a:spcPts val="1000"/>
+                <a:spcPts val="1100"/>
               </a:spcAft>
             </a:pPr>
             <a:r>
               <a:rPr sz="1600" b="1" i="0">
                 <a:solidFill>
-                  <a:srgbClr val="2E3A80"/>
-                </a:solidFill>
-                <a:latin typeface="Montserrat"/>
-              </a:rPr>
-              <a:t>•  </a:t>
+                  <a:srgbClr val="E8801A"/>
+                </a:solidFill>
+                <a:latin typeface="Montserrat"/>
+              </a:rPr>
+              <a:t>▸  </a:t>
             </a:r>
             <a:r>
               <a:rPr sz="1600" b="0" i="0">
@@ -11456,14 +12762,14 @@
                 </a:solidFill>
                 <a:latin typeface="Montserrat"/>
               </a:rPr>
-              <a:t>Máximo 300 kg en total</a:t>
-            </a:r>
-          </a:p>
-        </p:txBody>
-      </p:sp>
-      <p:sp>
-        <p:nvSpPr>
-          <p:cNvPr id="8" name="imgph" descr="IMGQ:cluster of butane cylinders full and empty"/>
+              <a:t>Cada grupo, sus propias reglas</a:t>
+            </a:r>
+          </a:p>
+        </p:txBody>
+      </p:sp>
+      <p:sp>
+        <p:nvSpPr>
+          <p:cNvPr id="9" name="imgph" descr="IMGQ:small butane cylinder next to large propane tank"/>
           <p:cNvSpPr/>
           <p:nvPr/>
         </p:nvSpPr>
@@ -11509,7 +12815,7 @@
       </p:sp>
       <p:sp>
         <p:nvSpPr>
-          <p:cNvPr id="9" name="TextBox 8"/>
+          <p:cNvPr id="10" name="TextBox 9"/>
           <p:cNvSpPr txBox="1"/>
           <p:nvPr/>
         </p:nvSpPr>
@@ -11549,7 +12855,7 @@
                 </a:solidFill>
                 <a:latin typeface="Montserrat"/>
               </a:rPr>
-              <a:t>cluster of butane cylinders full and empty</a:t>
+              <a:t>small butane cylinder next to large propane tank</a:t>
             </a:r>
           </a:p>
         </p:txBody>
@@ -11646,7 +12952,7 @@
                 </a:solidFill>
                 <a:latin typeface="Montserrat"/>
               </a:rPr>
-              <a:t>006 / 021</a:t>
+              <a:t>006 / 022</a:t>
             </a:r>
           </a:p>
         </p:txBody>
@@ -11694,7 +13000,7 @@
         <p:spPr>
           <a:xfrm>
             <a:off x="822960" y="457200"/>
-            <a:ext cx="8229600" cy="365760"/>
+            <a:ext cx="10058400" cy="365760"/>
           </a:xfrm>
           <a:prstGeom prst="rect">
             <a:avLst/>
@@ -11708,13 +13014,13 @@
           <a:lstStyle/>
           <a:p>
             <a:r>
-              <a:rPr sz="1200" b="1" i="0">
-                <a:solidFill>
-                  <a:srgbClr val="64748B"/>
-                </a:solidFill>
-                <a:latin typeface="Montserrat"/>
-              </a:rPr>
-              <a:t>APARTADO 2.1 · UBICACIÓN</a:t>
+              <a:rPr sz="1300" b="1" i="0">
+                <a:solidFill>
+                  <a:srgbClr val="E8801A"/>
+                </a:solidFill>
+                <a:latin typeface="Montserrat"/>
+              </a:rPr>
+              <a:t>APARTADO 2.1 · HASTA 15 KG</a:t>
             </a:r>
           </a:p>
         </p:txBody>
@@ -11742,26 +13048,70 @@
           <a:lstStyle/>
           <a:p>
             <a:r>
-              <a:rPr sz="2700" b="1" i="0">
+              <a:rPr sz="2800" b="1" i="0">
                 <a:solidFill>
                   <a:srgbClr val="1E2761"/>
                 </a:solidFill>
                 <a:latin typeface="Montserrat"/>
               </a:rPr>
-              <a:t>Nada de sótanos</a:t>
-            </a:r>
-          </a:p>
-        </p:txBody>
-      </p:sp>
-      <p:sp>
-        <p:nvSpPr>
-          <p:cNvPr id="7" name="TextBox 6"/>
+              <a:t>El tope de los 300 kg</a:t>
+            </a:r>
+          </a:p>
+        </p:txBody>
+      </p:sp>
+      <p:sp>
+        <p:nvSpPr>
+          <p:cNvPr id="7" name="Rounded Rectangle 6"/>
+          <p:cNvSpPr/>
+          <p:nvPr/>
+        </p:nvSpPr>
+        <p:spPr>
+          <a:xfrm>
+            <a:off x="868680" y="1627632"/>
+            <a:ext cx="2011680" cy="73152"/>
+          </a:xfrm>
+          <a:prstGeom prst="roundRect">
+            <a:avLst/>
+          </a:prstGeom>
+          <a:solidFill>
+            <a:srgbClr val="E8801A"/>
+          </a:solidFill>
+          <a:ln>
+            <a:noFill/>
+          </a:ln>
+          <a:effectLst/>
+        </p:spPr>
+        <p:style>
+          <a:lnRef idx="1">
+            <a:schemeClr val="accent1"/>
+          </a:lnRef>
+          <a:fillRef idx="3">
+            <a:schemeClr val="accent1"/>
+          </a:fillRef>
+          <a:effectRef idx="2">
+            <a:schemeClr val="accent1"/>
+          </a:effectRef>
+          <a:fontRef idx="minor">
+            <a:schemeClr val="lt1"/>
+          </a:fontRef>
+        </p:style>
+        <p:txBody>
+          <a:bodyPr rtlCol="0" anchor="ctr"/>
+          <a:lstStyle/>
+          <a:p>
+            <a:pPr algn="ctr"/>
+          </a:p>
+        </p:txBody>
+      </p:sp>
+      <p:sp>
+        <p:nvSpPr>
+          <p:cNvPr id="8" name="TextBox 7"/>
           <p:cNvSpPr txBox="1"/>
           <p:nvPr/>
         </p:nvSpPr>
         <p:spPr>
           <a:xfrm>
-            <a:off x="822960" y="1920240"/>
+            <a:off x="822960" y="1965960"/>
             <a:ext cx="4983480" cy="4206240"/>
           </a:xfrm>
           <a:prstGeom prst="rect">
@@ -11777,17 +13127,17 @@
           <a:p>
             <a:pPr>
               <a:spcAft>
-                <a:spcPts val="1000"/>
+                <a:spcPts val="1100"/>
               </a:spcAft>
             </a:pPr>
             <a:r>
               <a:rPr sz="1600" b="1" i="0">
                 <a:solidFill>
-                  <a:srgbClr val="2E3A80"/>
-                </a:solidFill>
-                <a:latin typeface="Montserrat"/>
-              </a:rPr>
-              <a:t>•  </a:t>
+                  <a:srgbClr val="E8801A"/>
+                </a:solidFill>
+                <a:latin typeface="Montserrat"/>
+              </a:rPr>
+              <a:t>▸  </a:t>
             </a:r>
             <a:r>
               <a:rPr sz="1600" b="0" i="0">
@@ -11796,23 +13146,23 @@
                 </a:solidFill>
                 <a:latin typeface="Montserrat"/>
               </a:rPr>
-              <a:t>Prohibido en sótanos y semisótanos</a:t>
+              <a:t>Suma de TODOS los envases</a:t>
             </a:r>
           </a:p>
           <a:p>
             <a:pPr>
               <a:spcAft>
-                <a:spcPts val="1000"/>
+                <a:spcPts val="1100"/>
               </a:spcAft>
             </a:pPr>
             <a:r>
               <a:rPr sz="1600" b="1" i="0">
                 <a:solidFill>
-                  <a:srgbClr val="2E3A80"/>
-                </a:solidFill>
-                <a:latin typeface="Montserrat"/>
-              </a:rPr>
-              <a:t>•  </a:t>
+                  <a:srgbClr val="E8801A"/>
+                </a:solidFill>
+                <a:latin typeface="Montserrat"/>
+              </a:rPr>
+              <a:t>▸  </a:t>
             </a:r>
             <a:r>
               <a:rPr sz="1600" b="0" i="0">
@@ -11821,23 +13171,23 @@
                 </a:solidFill>
                 <a:latin typeface="Montserrat"/>
               </a:rPr>
-              <a:t>Ni cajas de escalera ni pasillos</a:t>
+              <a:t>Llenos y vacíos cuentan igual</a:t>
             </a:r>
           </a:p>
           <a:p>
             <a:pPr>
               <a:spcAft>
-                <a:spcPts val="1000"/>
+                <a:spcPts val="1100"/>
               </a:spcAft>
             </a:pPr>
             <a:r>
               <a:rPr sz="1600" b="1" i="0">
                 <a:solidFill>
-                  <a:srgbClr val="2E3A80"/>
-                </a:solidFill>
-                <a:latin typeface="Montserrat"/>
-              </a:rPr>
-              <a:t>•  </a:t>
+                  <a:srgbClr val="E8801A"/>
+                </a:solidFill>
+                <a:latin typeface="Montserrat"/>
+              </a:rPr>
+              <a:t>▸  </a:t>
             </a:r>
             <a:r>
               <a:rPr sz="1600" b="0" i="0">
@@ -11846,14 +13196,14 @@
                 </a:solidFill>
                 <a:latin typeface="Montserrat"/>
               </a:rPr>
-              <a:t>El GLP pesa y se acumula abajo</a:t>
-            </a:r>
-          </a:p>
-        </p:txBody>
-      </p:sp>
-      <p:sp>
-        <p:nvSpPr>
-          <p:cNvPr id="8" name="imgph" descr="IMGQ:basement stairwell warning no gas cylinders"/>
+              <a:t>Máximo 300 kg en total</a:t>
+            </a:r>
+          </a:p>
+        </p:txBody>
+      </p:sp>
+      <p:sp>
+        <p:nvSpPr>
+          <p:cNvPr id="9" name="imgph" descr="IMGQ:cluster of butane cylinders full and empty"/>
           <p:cNvSpPr/>
           <p:nvPr/>
         </p:nvSpPr>
@@ -11899,7 +13249,7 @@
       </p:sp>
       <p:sp>
         <p:nvSpPr>
-          <p:cNvPr id="9" name="TextBox 8"/>
+          <p:cNvPr id="10" name="TextBox 9"/>
           <p:cNvSpPr txBox="1"/>
           <p:nvPr/>
         </p:nvSpPr>
@@ -11939,7 +13289,7 @@
                 </a:solidFill>
                 <a:latin typeface="Montserrat"/>
               </a:rPr>
-              <a:t>basement stairwell warning no gas cylinders</a:t>
+              <a:t>cluster of butane cylinders full and empty</a:t>
             </a:r>
           </a:p>
         </p:txBody>
@@ -12036,7 +13386,7 @@
                 </a:solidFill>
                 <a:latin typeface="Montserrat"/>
               </a:rPr>
-              <a:t>007 / 021</a:t>
+              <a:t>007 / 022</a:t>
             </a:r>
           </a:p>
         </p:txBody>
@@ -12084,7 +13434,7 @@
         <p:spPr>
           <a:xfrm>
             <a:off x="822960" y="457200"/>
-            <a:ext cx="8229600" cy="365760"/>
+            <a:ext cx="10058400" cy="365760"/>
           </a:xfrm>
           <a:prstGeom prst="rect">
             <a:avLst/>
@@ -12098,13 +13448,13 @@
           <a:lstStyle/>
           <a:p>
             <a:r>
-              <a:rPr sz="1200" b="1" i="0">
-                <a:solidFill>
-                  <a:srgbClr val="64748B"/>
-                </a:solidFill>
-                <a:latin typeface="Montserrat"/>
-              </a:rPr>
-              <a:t>APARTADO 2.1 · REGLAS DE INTERIOR</a:t>
+              <a:rPr sz="1300" b="1" i="0">
+                <a:solidFill>
+                  <a:srgbClr val="E8801A"/>
+                </a:solidFill>
+                <a:latin typeface="Montserrat"/>
+              </a:rPr>
+              <a:t>APARTADO 2.1 · UBICACIÓN</a:t>
             </a:r>
           </a:p>
         </p:txBody>
@@ -12132,26 +13482,70 @@
           <a:lstStyle/>
           <a:p>
             <a:r>
-              <a:rPr sz="2700" b="1" i="0">
+              <a:rPr sz="2800" b="1" i="0">
                 <a:solidFill>
                   <a:srgbClr val="1E2761"/>
                 </a:solidFill>
                 <a:latin typeface="Montserrat"/>
               </a:rPr>
-              <a:t>Tres reglas que caen</a:t>
-            </a:r>
-          </a:p>
-        </p:txBody>
-      </p:sp>
-      <p:sp>
-        <p:nvSpPr>
-          <p:cNvPr id="7" name="TextBox 6"/>
+              <a:t>Nada de sótanos</a:t>
+            </a:r>
+          </a:p>
+        </p:txBody>
+      </p:sp>
+      <p:sp>
+        <p:nvSpPr>
+          <p:cNvPr id="7" name="Rounded Rectangle 6"/>
+          <p:cNvSpPr/>
+          <p:nvPr/>
+        </p:nvSpPr>
+        <p:spPr>
+          <a:xfrm>
+            <a:off x="868680" y="1627632"/>
+            <a:ext cx="2011680" cy="73152"/>
+          </a:xfrm>
+          <a:prstGeom prst="roundRect">
+            <a:avLst/>
+          </a:prstGeom>
+          <a:solidFill>
+            <a:srgbClr val="E8801A"/>
+          </a:solidFill>
+          <a:ln>
+            <a:noFill/>
+          </a:ln>
+          <a:effectLst/>
+        </p:spPr>
+        <p:style>
+          <a:lnRef idx="1">
+            <a:schemeClr val="accent1"/>
+          </a:lnRef>
+          <a:fillRef idx="3">
+            <a:schemeClr val="accent1"/>
+          </a:fillRef>
+          <a:effectRef idx="2">
+            <a:schemeClr val="accent1"/>
+          </a:effectRef>
+          <a:fontRef idx="minor">
+            <a:schemeClr val="lt1"/>
+          </a:fontRef>
+        </p:style>
+        <p:txBody>
+          <a:bodyPr rtlCol="0" anchor="ctr"/>
+          <a:lstStyle/>
+          <a:p>
+            <a:pPr algn="ctr"/>
+          </a:p>
+        </p:txBody>
+      </p:sp>
+      <p:sp>
+        <p:nvSpPr>
+          <p:cNvPr id="8" name="TextBox 7"/>
           <p:cNvSpPr txBox="1"/>
           <p:nvPr/>
         </p:nvSpPr>
         <p:spPr>
           <a:xfrm>
-            <a:off x="822960" y="1920240"/>
+            <a:off x="822960" y="1965960"/>
             <a:ext cx="4983480" cy="4206240"/>
           </a:xfrm>
           <a:prstGeom prst="rect">
@@ -12167,17 +13561,17 @@
           <a:p>
             <a:pPr>
               <a:spcAft>
-                <a:spcPts val="1000"/>
+                <a:spcPts val="1100"/>
               </a:spcAft>
             </a:pPr>
             <a:r>
               <a:rPr sz="1600" b="1" i="0">
                 <a:solidFill>
-                  <a:srgbClr val="2E3A80"/>
-                </a:solidFill>
-                <a:latin typeface="Montserrat"/>
-              </a:rPr>
-              <a:t>•  </a:t>
+                  <a:srgbClr val="E8801A"/>
+                </a:solidFill>
+                <a:latin typeface="Montserrat"/>
+              </a:rPr>
+              <a:t>▸  </a:t>
             </a:r>
             <a:r>
               <a:rPr sz="1600" b="0" i="0">
@@ -12186,23 +13580,23 @@
                 </a:solidFill>
                 <a:latin typeface="Montserrat"/>
               </a:rPr>
-              <a:t>Llave general de corte accesible dentro</a:t>
+              <a:t>Prohibido en sótanos y semisótanos</a:t>
             </a:r>
           </a:p>
           <a:p>
             <a:pPr>
               <a:spcAft>
-                <a:spcPts val="1000"/>
+                <a:spcPts val="1100"/>
               </a:spcAft>
             </a:pPr>
             <a:r>
               <a:rPr sz="1600" b="1" i="0">
                 <a:solidFill>
-                  <a:srgbClr val="2E3A80"/>
-                </a:solidFill>
-                <a:latin typeface="Montserrat"/>
-              </a:rPr>
-              <a:t>•  </a:t>
+                  <a:srgbClr val="E8801A"/>
+                </a:solidFill>
+                <a:latin typeface="Montserrat"/>
+              </a:rPr>
+              <a:t>▸  </a:t>
             </a:r>
             <a:r>
               <a:rPr sz="1600" b="0" i="0">
@@ -12211,23 +13605,23 @@
                 </a:solidFill>
                 <a:latin typeface="Montserrat"/>
               </a:rPr>
-              <a:t>Máximo dos envases en batería</a:t>
+              <a:t>Ni cajas de escalera ni pasillos</a:t>
             </a:r>
           </a:p>
           <a:p>
             <a:pPr>
               <a:spcAft>
-                <a:spcPts val="1000"/>
+                <a:spcPts val="1100"/>
               </a:spcAft>
             </a:pPr>
             <a:r>
               <a:rPr sz="1600" b="1" i="0">
                 <a:solidFill>
-                  <a:srgbClr val="2E3A80"/>
-                </a:solidFill>
-                <a:latin typeface="Montserrat"/>
-              </a:rPr>
-              <a:t>•  </a:t>
+                  <a:srgbClr val="E8801A"/>
+                </a:solidFill>
+                <a:latin typeface="Montserrat"/>
+              </a:rPr>
+              <a:t>▸  </a:t>
             </a:r>
             <a:r>
               <a:rPr sz="1600" b="0" i="0">
@@ -12236,14 +13630,14 @@
                 </a:solidFill>
                 <a:latin typeface="Montserrat"/>
               </a:rPr>
-              <a:t>Con válvula de seguridad, siempre vertical</a:t>
-            </a:r>
-          </a:p>
-        </p:txBody>
-      </p:sp>
-      <p:sp>
-        <p:nvSpPr>
-          <p:cNvPr id="8" name="imgph" descr="IMGQ:gas shut off valve on kitchen wall"/>
+              <a:t>El GLP pesa y se acumula abajo</a:t>
+            </a:r>
+          </a:p>
+        </p:txBody>
+      </p:sp>
+      <p:sp>
+        <p:nvSpPr>
+          <p:cNvPr id="9" name="imgph" descr="IMGQ:basement stairwell warning no gas cylinders"/>
           <p:cNvSpPr/>
           <p:nvPr/>
         </p:nvSpPr>
@@ -12289,7 +13683,7 @@
       </p:sp>
       <p:sp>
         <p:nvSpPr>
-          <p:cNvPr id="9" name="TextBox 8"/>
+          <p:cNvPr id="10" name="TextBox 9"/>
           <p:cNvSpPr txBox="1"/>
           <p:nvPr/>
         </p:nvSpPr>
@@ -12329,7 +13723,7 @@
                 </a:solidFill>
                 <a:latin typeface="Montserrat"/>
               </a:rPr>
-              <a:t>gas shut off valve on kitchen wall</a:t>
+              <a:t>basement stairwell warning no gas cylinders</a:t>
             </a:r>
           </a:p>
         </p:txBody>
@@ -12426,7 +13820,7 @@
                 </a:solidFill>
                 <a:latin typeface="Montserrat"/>
               </a:rPr>
-              <a:t>008 / 021</a:t>
+              <a:t>008 / 022</a:t>
             </a:r>
           </a:p>
         </p:txBody>
@@ -12474,7 +13868,7 @@
         <p:spPr>
           <a:xfrm>
             <a:off x="822960" y="457200"/>
-            <a:ext cx="8229600" cy="365760"/>
+            <a:ext cx="10058400" cy="365760"/>
           </a:xfrm>
           <a:prstGeom prst="rect">
             <a:avLst/>
@@ -12488,13 +13882,13 @@
           <a:lstStyle/>
           <a:p>
             <a:r>
-              <a:rPr sz="1200" b="1" i="0">
-                <a:solidFill>
-                  <a:srgbClr val="64748B"/>
-                </a:solidFill>
-                <a:latin typeface="Montserrat"/>
-              </a:rPr>
-              <a:t>APARTADO 2.1 · VENTILACIÓN</a:t>
+              <a:rPr sz="1300" b="1" i="0">
+                <a:solidFill>
+                  <a:srgbClr val="E8801A"/>
+                </a:solidFill>
+                <a:latin typeface="Montserrat"/>
+              </a:rPr>
+              <a:t>APARTADO 2.1 · REGLAS DE INTERIOR</a:t>
             </a:r>
           </a:p>
         </p:txBody>
@@ -12522,26 +13916,70 @@
           <a:lstStyle/>
           <a:p>
             <a:r>
-              <a:rPr sz="2700" b="1" i="0">
+              <a:rPr sz="2800" b="1" i="0">
                 <a:solidFill>
                   <a:srgbClr val="1E2761"/>
                 </a:solidFill>
                 <a:latin typeface="Montserrat"/>
               </a:rPr>
-              <a:t>La rejilla va abajo</a:t>
-            </a:r>
-          </a:p>
-        </p:txBody>
-      </p:sp>
-      <p:sp>
-        <p:nvSpPr>
-          <p:cNvPr id="7" name="TextBox 6"/>
+              <a:t>Tres reglas que caen</a:t>
+            </a:r>
+          </a:p>
+        </p:txBody>
+      </p:sp>
+      <p:sp>
+        <p:nvSpPr>
+          <p:cNvPr id="7" name="Rounded Rectangle 6"/>
+          <p:cNvSpPr/>
+          <p:nvPr/>
+        </p:nvSpPr>
+        <p:spPr>
+          <a:xfrm>
+            <a:off x="868680" y="1627632"/>
+            <a:ext cx="2011680" cy="73152"/>
+          </a:xfrm>
+          <a:prstGeom prst="roundRect">
+            <a:avLst/>
+          </a:prstGeom>
+          <a:solidFill>
+            <a:srgbClr val="E8801A"/>
+          </a:solidFill>
+          <a:ln>
+            <a:noFill/>
+          </a:ln>
+          <a:effectLst/>
+        </p:spPr>
+        <p:style>
+          <a:lnRef idx="1">
+            <a:schemeClr val="accent1"/>
+          </a:lnRef>
+          <a:fillRef idx="3">
+            <a:schemeClr val="accent1"/>
+          </a:fillRef>
+          <a:effectRef idx="2">
+            <a:schemeClr val="accent1"/>
+          </a:effectRef>
+          <a:fontRef idx="minor">
+            <a:schemeClr val="lt1"/>
+          </a:fontRef>
+        </p:style>
+        <p:txBody>
+          <a:bodyPr rtlCol="0" anchor="ctr"/>
+          <a:lstStyle/>
+          <a:p>
+            <a:pPr algn="ctr"/>
+          </a:p>
+        </p:txBody>
+      </p:sp>
+      <p:sp>
+        <p:nvSpPr>
+          <p:cNvPr id="8" name="TextBox 7"/>
           <p:cNvSpPr txBox="1"/>
           <p:nvPr/>
         </p:nvSpPr>
         <p:spPr>
           <a:xfrm>
-            <a:off x="822960" y="1920240"/>
+            <a:off x="822960" y="1965960"/>
             <a:ext cx="4983480" cy="4206240"/>
           </a:xfrm>
           <a:prstGeom prst="rect">
@@ -12557,17 +13995,17 @@
           <a:p>
             <a:pPr>
               <a:spcAft>
-                <a:spcPts val="1000"/>
+                <a:spcPts val="1100"/>
               </a:spcAft>
             </a:pPr>
             <a:r>
               <a:rPr sz="1600" b="1" i="0">
                 <a:solidFill>
-                  <a:srgbClr val="2E3A80"/>
-                </a:solidFill>
-                <a:latin typeface="Montserrat"/>
-              </a:rPr>
-              <a:t>•  </a:t>
+                  <a:srgbClr val="E8801A"/>
+                </a:solidFill>
+                <a:latin typeface="Montserrat"/>
+              </a:rPr>
+              <a:t>▸  </a:t>
             </a:r>
             <a:r>
               <a:rPr sz="1600" b="0" i="0">
@@ -12576,23 +14014,23 @@
                 </a:solidFill>
                 <a:latin typeface="Montserrat"/>
               </a:rPr>
-              <a:t>Ventilación permanente en la base</a:t>
+              <a:t>Llave general de corte accesible dentro</a:t>
             </a:r>
           </a:p>
           <a:p>
             <a:pPr>
               <a:spcAft>
-                <a:spcPts val="1000"/>
+                <a:spcPts val="1100"/>
               </a:spcAft>
             </a:pPr>
             <a:r>
               <a:rPr sz="1600" b="1" i="0">
                 <a:solidFill>
-                  <a:srgbClr val="2E3A80"/>
-                </a:solidFill>
-                <a:latin typeface="Montserrat"/>
-              </a:rPr>
-              <a:t>•  </a:t>
+                  <a:srgbClr val="E8801A"/>
+                </a:solidFill>
+                <a:latin typeface="Montserrat"/>
+              </a:rPr>
+              <a:t>▸  </a:t>
             </a:r>
             <a:r>
               <a:rPr sz="1600" b="0" i="0">
@@ -12601,23 +14039,23 @@
                 </a:solidFill>
                 <a:latin typeface="Montserrat"/>
               </a:rPr>
-              <a:t>Superficie libre &gt; 1/100 del fondo</a:t>
+              <a:t>Máximo dos envases en batería</a:t>
             </a:r>
           </a:p>
           <a:p>
             <a:pPr>
               <a:spcAft>
-                <a:spcPts val="1000"/>
+                <a:spcPts val="1100"/>
               </a:spcAft>
             </a:pPr>
             <a:r>
               <a:rPr sz="1600" b="1" i="0">
                 <a:solidFill>
-                  <a:srgbClr val="2E3A80"/>
-                </a:solidFill>
-                <a:latin typeface="Montserrat"/>
-              </a:rPr>
-              <a:t>•  </a:t>
+                  <a:srgbClr val="E8801A"/>
+                </a:solidFill>
+                <a:latin typeface="Montserrat"/>
+              </a:rPr>
+              <a:t>▸  </a:t>
             </a:r>
             <a:r>
               <a:rPr sz="1600" b="0" i="0">
@@ -12626,14 +14064,14 @@
                 </a:solidFill>
                 <a:latin typeface="Montserrat"/>
               </a:rPr>
-              <a:t>Casi cuadrada; nunca tapada</a:t>
-            </a:r>
-          </a:p>
-        </p:txBody>
-      </p:sp>
-      <p:sp>
-        <p:nvSpPr>
-          <p:cNvPr id="8" name="imgph" descr="IMGQ:ventilation grille at bottom of gas cabinet"/>
+              <a:t>Con válvula de seguridad, siempre vertical</a:t>
+            </a:r>
+          </a:p>
+        </p:txBody>
+      </p:sp>
+      <p:sp>
+        <p:nvSpPr>
+          <p:cNvPr id="9" name="imgph" descr="IMGQ:gas shut off valve on kitchen wall"/>
           <p:cNvSpPr/>
           <p:nvPr/>
         </p:nvSpPr>
@@ -12679,7 +14117,7 @@
       </p:sp>
       <p:sp>
         <p:nvSpPr>
-          <p:cNvPr id="9" name="TextBox 8"/>
+          <p:cNvPr id="10" name="TextBox 9"/>
           <p:cNvSpPr txBox="1"/>
           <p:nvPr/>
         </p:nvSpPr>
@@ -12719,7 +14157,7 @@
                 </a:solidFill>
                 <a:latin typeface="Montserrat"/>
               </a:rPr>
-              <a:t>ventilation grille at bottom of gas cabinet</a:t>
+              <a:t>gas shut off valve on kitchen wall</a:t>
             </a:r>
           </a:p>
         </p:txBody>
@@ -12816,7 +14254,7 @@
                 </a:solidFill>
                 <a:latin typeface="Montserrat"/>
               </a:rPr>
-              <a:t>009 / 021</a:t>
+              <a:t>009 / 022</a:t>
             </a:r>
           </a:p>
         </p:txBody>
@@ -12864,7 +14302,7 @@
         <p:spPr>
           <a:xfrm>
             <a:off x="822960" y="457200"/>
-            <a:ext cx="8229600" cy="365760"/>
+            <a:ext cx="10058400" cy="365760"/>
           </a:xfrm>
           <a:prstGeom prst="rect">
             <a:avLst/>
@@ -12878,13 +14316,13 @@
           <a:lstStyle/>
           <a:p>
             <a:r>
-              <a:rPr sz="1200" b="1" i="0">
-                <a:solidFill>
-                  <a:srgbClr val="64748B"/>
-                </a:solidFill>
-                <a:latin typeface="Montserrat"/>
-              </a:rPr>
-              <a:t>APARTADO 2.1 · REGULADOR</a:t>
+              <a:rPr sz="1300" b="1" i="0">
+                <a:solidFill>
+                  <a:srgbClr val="E8801A"/>
+                </a:solidFill>
+                <a:latin typeface="Montserrat"/>
+              </a:rPr>
+              <a:t>APARTADO 2.1 · VENTILACIÓN</a:t>
             </a:r>
           </a:p>
         </p:txBody>
@@ -12912,26 +14350,70 @@
           <a:lstStyle/>
           <a:p>
             <a:r>
-              <a:rPr sz="2700" b="1" i="0">
+              <a:rPr sz="2800" b="1" i="0">
                 <a:solidFill>
                   <a:srgbClr val="1E2761"/>
                 </a:solidFill>
                 <a:latin typeface="Montserrat"/>
               </a:rPr>
-              <a:t>Regulador siempre</a:t>
-            </a:r>
-          </a:p>
-        </p:txBody>
-      </p:sp>
-      <p:sp>
-        <p:nvSpPr>
-          <p:cNvPr id="7" name="TextBox 6"/>
+              <a:t>La rejilla va abajo</a:t>
+            </a:r>
+          </a:p>
+        </p:txBody>
+      </p:sp>
+      <p:sp>
+        <p:nvSpPr>
+          <p:cNvPr id="7" name="Rounded Rectangle 6"/>
+          <p:cNvSpPr/>
+          <p:nvPr/>
+        </p:nvSpPr>
+        <p:spPr>
+          <a:xfrm>
+            <a:off x="868680" y="1627632"/>
+            <a:ext cx="2011680" cy="73152"/>
+          </a:xfrm>
+          <a:prstGeom prst="roundRect">
+            <a:avLst/>
+          </a:prstGeom>
+          <a:solidFill>
+            <a:srgbClr val="E8801A"/>
+          </a:solidFill>
+          <a:ln>
+            <a:noFill/>
+          </a:ln>
+          <a:effectLst/>
+        </p:spPr>
+        <p:style>
+          <a:lnRef idx="1">
+            <a:schemeClr val="accent1"/>
+          </a:lnRef>
+          <a:fillRef idx="3">
+            <a:schemeClr val="accent1"/>
+          </a:fillRef>
+          <a:effectRef idx="2">
+            <a:schemeClr val="accent1"/>
+          </a:effectRef>
+          <a:fontRef idx="minor">
+            <a:schemeClr val="lt1"/>
+          </a:fontRef>
+        </p:style>
+        <p:txBody>
+          <a:bodyPr rtlCol="0" anchor="ctr"/>
+          <a:lstStyle/>
+          <a:p>
+            <a:pPr algn="ctr"/>
+          </a:p>
+        </p:txBody>
+      </p:sp>
+      <p:sp>
+        <p:nvSpPr>
+          <p:cNvPr id="8" name="TextBox 7"/>
           <p:cNvSpPr txBox="1"/>
           <p:nvPr/>
         </p:nvSpPr>
         <p:spPr>
           <a:xfrm>
-            <a:off x="822960" y="1920240"/>
+            <a:off x="822960" y="1965960"/>
             <a:ext cx="4983480" cy="4206240"/>
           </a:xfrm>
           <a:prstGeom prst="rect">
@@ -12947,17 +14429,17 @@
           <a:p>
             <a:pPr>
               <a:spcAft>
-                <a:spcPts val="1000"/>
+                <a:spcPts val="1100"/>
               </a:spcAft>
             </a:pPr>
             <a:r>
               <a:rPr sz="1600" b="1" i="0">
                 <a:solidFill>
-                  <a:srgbClr val="2E3A80"/>
-                </a:solidFill>
-                <a:latin typeface="Montserrat"/>
-              </a:rPr>
-              <a:t>•  </a:t>
+                  <a:srgbClr val="E8801A"/>
+                </a:solidFill>
+                <a:latin typeface="Montserrat"/>
+              </a:rPr>
+              <a:t>▸  </a:t>
             </a:r>
             <a:r>
               <a:rPr sz="1600" b="0" i="0">
@@ -12966,23 +14448,23 @@
                 </a:solidFill>
                 <a:latin typeface="Montserrat"/>
               </a:rPr>
-              <a:t>Entre envase y aparato, regulador</a:t>
+              <a:t>Ventilación permanente en la base</a:t>
             </a:r>
           </a:p>
           <a:p>
             <a:pPr>
               <a:spcAft>
-                <a:spcPts val="1000"/>
+                <a:spcPts val="1100"/>
               </a:spcAft>
             </a:pPr>
             <a:r>
               <a:rPr sz="1600" b="1" i="0">
                 <a:solidFill>
-                  <a:srgbClr val="2E3A80"/>
-                </a:solidFill>
-                <a:latin typeface="Montserrat"/>
-              </a:rPr>
-              <a:t>•  </a:t>
+                  <a:srgbClr val="E8801A"/>
+                </a:solidFill>
+                <a:latin typeface="Montserrat"/>
+              </a:rPr>
+              <a:t>▸  </a:t>
             </a:r>
             <a:r>
               <a:rPr sz="1600" b="0" i="0">
@@ -12991,23 +14473,23 @@
                 </a:solidFill>
                 <a:latin typeface="Montserrat"/>
               </a:rPr>
-              <a:t>Excepción: aparatos a presión directa</a:t>
+              <a:t>Superficie libre &gt; 1/100 del fondo</a:t>
             </a:r>
           </a:p>
           <a:p>
             <a:pPr>
               <a:spcAft>
-                <a:spcPts val="1000"/>
+                <a:spcPts val="1100"/>
               </a:spcAft>
             </a:pPr>
             <a:r>
               <a:rPr sz="1600" b="1" i="0">
                 <a:solidFill>
-                  <a:srgbClr val="2E3A80"/>
-                </a:solidFill>
-                <a:latin typeface="Montserrat"/>
-              </a:rPr>
-              <a:t>•  </a:t>
+                  <a:srgbClr val="E8801A"/>
+                </a:solidFill>
+                <a:latin typeface="Montserrat"/>
+              </a:rPr>
+              <a:t>▸  </a:t>
             </a:r>
             <a:r>
               <a:rPr sz="1600" b="0" i="0">
@@ -13016,14 +14498,14 @@
                 </a:solidFill>
                 <a:latin typeface="Montserrat"/>
               </a:rPr>
-              <a:t>Y entonces, con tubo rígido</a:t>
-            </a:r>
-          </a:p>
-        </p:txBody>
-      </p:sp>
-      <p:sp>
-        <p:nvSpPr>
-          <p:cNvPr id="8" name="imgph" descr="IMGQ:gas pressure regulator on cylinder valve"/>
+              <a:t>Casi cuadrada; nunca tapada</a:t>
+            </a:r>
+          </a:p>
+        </p:txBody>
+      </p:sp>
+      <p:sp>
+        <p:nvSpPr>
+          <p:cNvPr id="9" name="imgph" descr="IMGQ:ventilation grille at bottom of gas cabinet"/>
           <p:cNvSpPr/>
           <p:nvPr/>
         </p:nvSpPr>
@@ -13069,7 +14551,7 @@
       </p:sp>
       <p:sp>
         <p:nvSpPr>
-          <p:cNvPr id="9" name="TextBox 8"/>
+          <p:cNvPr id="10" name="TextBox 9"/>
           <p:cNvSpPr txBox="1"/>
           <p:nvPr/>
         </p:nvSpPr>
@@ -13109,7 +14591,7 @@
                 </a:solidFill>
                 <a:latin typeface="Montserrat"/>
               </a:rPr>
-              <a:t>gas pressure regulator on cylinder valve</a:t>
+              <a:t>ventilation grille at bottom of gas cabinet</a:t>
             </a:r>
           </a:p>
         </p:txBody>

--- a/Curso Gas B/03 - ITC-ICG 05-06 - Estaciones de servicio y envases GLP uso propio/03 - ITC-ICG 05-06 - Estaciones de servicio y envases GLP uso propio - Vídeo 2.pptx
+++ b/Curso Gas B/03 - ITC-ICG 05-06 - Estaciones de servicio y envases GLP uso propio/03 - ITC-ICG 05-06 - Estaciones de servicio y envases GLP uso propio - Vídeo 2.pptx
@@ -831,12 +831,12 @@
           <a:lstStyle/>
           <a:p>
             <a:r>
-              <a:t>N1: A ver el Cuadro 1 fresquito. El elemento más peligroso, un hogar o fuente de calor, ¿cuánto lo separas de la bombona?</a:t>
-            </a:r>
-          </a:p>
-          <a:p>
-            <a:r>
-              <a:t>N2: Pista: es la distancia mayor de la tabla, la de lo que da fuego de verdad.</a:t>
+              <a:t>N1: A ver el Cuadro uno fresquito, y tienes las cuatro opciones para jugar. Con envases de hasta quince kilos, ¿a qué distancia mínima va un hogar o fuente de calor? Opción A, treinta centímetros; opción B, medio metro; opción C, un metro y medio; opción D, tres metros. Elige antes de seguir.</a:t>
+            </a:r>
+          </a:p>
+          <a:p>
+            <a:r>
+              <a:t>N2: Pista: es el elemento más peligroso de la tabla, lo que da fuego de verdad, así que le toca la distancia mayor.</a:t>
             </a:r>
           </a:p>
         </p:txBody>
@@ -906,12 +906,12 @@
           <a:lstStyle/>
           <a:p>
             <a:r>
-              <a:t>N1: ¿Por qué metro y medio?</a:t>
-            </a:r>
-          </a:p>
-          <a:p>
-            <a:r>
-              <a:t>N2: Porque en envases de hasta quince kilos el hogar es lo que más lejos se pone, un metro y medio, y solo baja a medio metro si intercalas una protección antirradiación. Treinta centímetros son los hornillos, interruptores y conductores; medio metro las tomas de corriente; y tres metros ya es cosa del Cuadro 2 de los envases grandes. El truco: más peligro, más metros.</a:t>
+              <a:t>N2: La respuesta correcta es la opción C: un metro y medio. En envases de hasta quince kilos el hogar es lo que más lejos se pone, un metro y medio, y solo baja a medio metro si intercalas una protección antirradiación. La opción A, treinta centímetros, son los hornillos, los interruptores y los conductores; la opción B, medio metro, son las tomas de corriente; y la opción D, tres metros, ya es cosa del Cuadro dos, el de los envases grandes. El truco: más peligro, más metros.</a:t>
+            </a:r>
+          </a:p>
+          <a:p>
+            <a:r>
+              <a:t>N1: El fuego, lo más lejos: metro y medio.</a:t>
             </a:r>
           </a:p>
         </p:txBody>
@@ -1206,12 +1206,12 @@
           <a:lstStyle/>
           <a:p>
             <a:r>
-              <a:t>N1: Los envases grandes van fuera por defecto. Para colarlos dentro del local, ¿qué tope de gas no puedes superar?</a:t>
-            </a:r>
-          </a:p>
-          <a:p>
-            <a:r>
-              <a:t>N2: Pista: no lo confundas con los topes de almacenamiento de trescientos o mil, ni con el disparador de los extintores; es la frontera dentro o fuera.</a:t>
+              <a:t>N1: Escucha la pregunta y las cuatro opciones, que aquí es fácil confundirse. Con envases de más de quince kilos dentro del local, ¿cuál es el contenido total máximo de GLP? Opción A, trescientos kilos; opción B, setenta kilos; opción C, trescientos cincuenta kilos; opción D, mil kilos. Piensa cuál es la frontera de dentro o fuera.</a:t>
+            </a:r>
+          </a:p>
+          <a:p>
+            <a:r>
+              <a:t>N2: Pista: no lo confundas con los topes de almacenamiento ni con el disparador de los extintores; es la línea que decide si pueden estar dentro.</a:t>
             </a:r>
           </a:p>
         </p:txBody>
@@ -1281,12 +1281,12 @@
           <a:lstStyle/>
           <a:p>
             <a:r>
-              <a:t>N1: ¿Por qué setenta?</a:t>
-            </a:r>
-          </a:p>
-          <a:p>
-            <a:r>
-              <a:t>N2: Porque la única puerta para tener envases de más de quince kilos dentro del local es que el contenido total no pase de setenta kilos, y además el local sea grande, más de mil metros cúbicos y ciento cincuenta metros cuadrados, bien ventilado y con dos extintores. Trescientos y mil son topes de almacenamiento según el tamaño del envase; trescientos cincuenta es cuándo pones extintores en la caseta. La frontera dentro o fuera es setenta.</a:t>
+              <a:t>N2: La respuesta correcta es la opción B: setenta kilos. La única puerta para tener envases de más de quince kilos dentro del local es que el contenido total no pase de setenta kilos, y además el local sea grande, más de mil metros cúbicos y ciento cincuenta metros cuadrados, bien ventilado y con dos extintores. La opción A, trescientos, y la opción D, mil, son topes de almacenamiento según el tamaño del envase; la opción C, trescientos cincuenta, es cuándo pones extintores en la caseta. La frontera dentro o fuera es setenta.</a:t>
+            </a:r>
+          </a:p>
+          <a:p>
+            <a:r>
+              <a:t>N1: Setenta kilos: si te pasas, fuera sí o sí.</a:t>
             </a:r>
           </a:p>
         </p:txBody>
@@ -1956,7 +1956,7 @@
           <a:lstStyle/>
           <a:p>
             <a:r>
-              <a:t>N1: Números de la prueba de estanquidad. ¿Cuánta presión y cuánto tiempo?</a:t>
+              <a:t>N1: Números de la prueba de estanquidad, con las cuatro opciones para que juegues. La prueba de estanquidad de las canalizaciones se hace a... Opción A, dos veces la presión de operación durante treinta minutos; opción B, una vez y media la presión de operación durante diez minutos; opción C, una vez y media la presión de operación durante treinta minutos; opción D, dos veces la presión de operación durante diez minutos. Decídete antes de la respuesta.</a:t>
             </a:r>
           </a:p>
           <a:p>
@@ -2031,12 +2031,12 @@
           <a:lstStyle/>
           <a:p>
             <a:r>
-              <a:t>N1: ¿Por qué la segunda?</a:t>
-            </a:r>
-          </a:p>
-          <a:p>
-            <a:r>
-              <a:t>N2: Porque la prueba es a una vez y media la presión de operación durante diez minutos, con aire, gas inerte o GLP en fase gaseosa. Si te ofrecen dos veces la presión o media hora, es falso. El truco: vez y media y diez minutos, ni más presión ni más tiempo.</a:t>
+              <a:t>N2: La respuesta correcta es la opción B: una vez y media la presión de operación durante diez minutos, con aire, gas inerte o GLP en fase gaseosa. Fíjate en las trampas: la opción A y la opción D suben la presión al doble, que es falso; y la opción C acierta la presión pero alarga a media hora, que también es falso. Ni más presión ni más tiempo. El truco: vez y media y diez minutos, y se acabó.</a:t>
+            </a:r>
+          </a:p>
+          <a:p>
+            <a:r>
+              <a:t>N1: Vez y media y diez minutos, grábatelo.</a:t>
             </a:r>
           </a:p>
         </p:txBody>
